--- a/hqtcsdl-giuaky/quan_ly_rap_phim.pptx
+++ b/hqtcsdl-giuaky/quan_ly_rap_phim.pptx
@@ -111,19 +111,19 @@
   <p:extLst>
     <p:ext uri="{521415D9-36F7-43E2-AB2F-B90AF26B5E84}">
       <p14:sectionLst xmlns:p14="http://schemas.microsoft.com/office/powerpoint/2010/main">
-        <p14:section name="Mở đầu" id="{54fd1444-01a9-b123-9869-c660c24e7b6a}">
+        <p14:section name="Mở đầu" id="{3aeb8774-7bba-6b95-b253-9a1b377049b4}">
           <p14:sldIdLst>
             <p14:sldId id="256"/>
             <p14:sldId id="257"/>
           </p14:sldIdLst>
         </p14:section>
-        <p14:section name="Thiết kế cơ sở dữ liệu" id="{69461afd-3e79-a89a-90a7-f47577d6779e}">
+        <p14:section name="Thiết kế cơ sở dữ liệu" id="{521103c3-6c4f-00a3-7c7f-179e7b2fb6fa}">
           <p14:sldIdLst>
             <p14:sldId id="258"/>
             <p14:sldId id="259"/>
           </p14:sldIdLst>
         </p14:section>
-        <p14:section name="Kết thúc" id="{1aeff8f6-1150-a85a-b34b-3724b8d5c2af}">
+        <p14:section name="Kết thúc" id="{7108480f-b136-d509-07cb-7087ccadc9cc}">
           <p14:sldIdLst>
             <p14:sldId id="260"/>
           </p14:sldIdLst>
@@ -708,7 +708,7 @@
           <a:p>
             <a:r>
               <a:rPr lang="en-US" dirty="0"/>
-              <a:t>Slide 3 - Mô tả bài toán và ERD. Nêu 5 thực thể: PHIM, PHONGCHIEU, SUATCHIEU, KHACHHANG, VE. Quan hệ: PHIM 1-N SUATCHIEU, PHONGCHIEU 1-N SUATCHIEU, KHACHHANG 1-N VE, SUATCHIEU 1-N VE. Giữa KHACHHANG và SUATCHIEU là quan hệ nhiều-nhiều (một khách đặt nhiều suất, một suất có nhiều khách) nên tách bằng bảng VE. Tương tự PHIM và PHONGCHIEU là nhiều-nhiều qua SUATCHIEU.</a:t>
+              <a:t>Slide 3 - Mô tả bài toán và ERD. Có 5 thực thể: PHIM, PHONGCHIEU, SUATCHIEU, KHACHHANG, VE (khóa chính được gạch chân). Quan hệ: PHIM 1-N SUATCHIEU (chiếu), PHONGCHIEU 1-N SUATCHIEU (tại), SUATCHIEU 1-N VE (bán), KHACHHANG 1-N VE (đặt). Giữa KHACHHANG và SUATCHIEU là quan hệ nhiều-nhiều (một khách đặt nhiều suất, một suất có nhiều khách) nên cần thực thể kết hợp VE; tương tự PHIM và PHONGCHIEU là nhiều-nhiều qua SUATCHIEU. ERD không ghi khóa ngoại; khóa ngoại xuất hiện khi chuyển sang lược đồ quan hệ ở slide 4.</a:t>
             </a:r>
             <a:endParaRPr lang="en-US" dirty="0"/>
           </a:p>
@@ -796,7 +796,7 @@
           <a:p>
             <a:r>
               <a:rPr lang="en-US" dirty="0"/>
-              <a:t>Slide 4 - Lược đồ CSDL: khóa chính gạch chân, khóa ngoại in nghiêng. Dữ liệu mẫu được nhập bằng file quan_ly_rap_phim.sql trong MySQL; có thể thay các bảng bên phải bằng ảnh chụp màn hình kết quả SELECT trong MySQL Workbench. Ràng buộc: khóa chính, khóa ngoại, miền giá trị (CHECK), UNIQUE.</a:t>
+              <a:t>Slide 4 - Lược đồ CSDL được chuyển từ ERD: mỗi thực thể thành một bảng, quan hệ 1-N thành khóa ngoại ở phía N. Khóa chính gạch chân, khóa ngoại in nghiêng. Dữ liệu mẫu được nhập bằng file quan_ly_rap_phim.sql trong MySQL; có thể thay các bảng bên phải bằng ảnh chụp màn hình kết quả SELECT trong MySQL Workbench. Ràng buộc: khóa chính, khóa ngoại, miền giá trị (CHECK), UNIQUE.</a:t>
             </a:r>
             <a:endParaRPr lang="en-US" dirty="0"/>
           </a:p>
@@ -3298,7 +3298,7 @@
                   <a:schemeClr val="tx1"/>
                 </a:solidFill>
               </a:rPr>
-              <a:t>Phòng chiếu có tên, loại phòng, số ghế</a:t>
+              <a:t>Phòng chiếu có tên, loại phòng, sức chứa</a:t>
             </a:r>
             <a:endParaRPr lang="en-US" sz="1800" dirty="0"/>
           </a:p>
@@ -3410,7 +3410,7 @@
                   <a:schemeClr val="tx1"/>
                 </a:solidFill>
               </a:rPr>
-              <a:t>Mỗi vé thuộc một khách hàng và một suất chiếu</a:t>
+              <a:t>Mỗi vé có số ghế, ngày đặt; thuộc một khách hàng và một suất chiếu</a:t>
             </a:r>
             <a:endParaRPr lang="en-US" sz="1800" dirty="0"/>
           </a:p>
@@ -3418,14 +3418,562 @@
       </p:sp>
       <p:sp>
         <p:nvSpPr>
-          <p:cNvPr id="5" name="PHIM body"/>
+          <p:cNvPr id="5" name="Line PHIM-SUATCHIEU"/>
+          <p:cNvSpPr/>
+          <p:nvPr/>
+        </p:nvSpPr>
+        <p:spPr>
+          <a:xfrm>
+            <a:off x="5916168" y="2171700"/>
+            <a:ext cx="1380744" cy="0"/>
+          </a:xfrm>
+          <a:prstGeom prst="line">
+            <a:avLst/>
+          </a:prstGeom>
+          <a:noFill/>
+          <a:ln w="22225">
+            <a:solidFill>
+              <a:schemeClr val="tx1"/>
+            </a:solidFill>
+            <a:prstDash val="solid"/>
+          </a:ln>
+        </p:spPr>
+      </p:sp>
+      <p:sp>
+        <p:nvSpPr>
+          <p:cNvPr id="6" name="Relationship PHIM-SUATCHIEU"/>
+          <p:cNvSpPr/>
+          <p:nvPr/>
+        </p:nvSpPr>
+        <p:spPr>
+          <a:xfrm>
+            <a:off x="6149340" y="1888236"/>
+            <a:ext cx="914400" cy="566928"/>
+          </a:xfrm>
+          <a:prstGeom prst="diamond">
+            <a:avLst/>
+          </a:prstGeom>
+          <a:solidFill>
+            <a:schemeClr val="bg1"/>
+          </a:solidFill>
+          <a:ln w="15875">
+            <a:solidFill>
+              <a:schemeClr val="tx1"/>
+            </a:solidFill>
+          </a:ln>
+        </p:spPr>
+        <p:txBody>
+          <a:bodyPr wrap="square" lIns="0" tIns="0" rIns="0" bIns="0" rtlCol="0" anchor="ctr"/>
+          <a:lstStyle/>
+          <a:p>
+            <a:pPr algn="ctr" indent="0" marL="0">
+              <a:buNone/>
+            </a:pPr>
+            <a:r>
+              <a:rPr lang="en-US" sz="1050" b="1" dirty="0">
+                <a:solidFill>
+                  <a:schemeClr val="tx1"/>
+                </a:solidFill>
+              </a:rPr>
+              <a:t>chiếu</a:t>
+            </a:r>
+            <a:endParaRPr lang="en-US" sz="1050" dirty="0"/>
+          </a:p>
+        </p:txBody>
+      </p:sp>
+      <p:sp>
+        <p:nvSpPr>
+          <p:cNvPr id="7" name="Cardinality 1"/>
+          <p:cNvSpPr txBox="1"/>
+          <p:nvPr/>
+        </p:nvSpPr>
+        <p:spPr>
+          <a:xfrm>
+            <a:off x="5943600" y="1924812"/>
+            <a:ext cx="201168" cy="219456"/>
+          </a:xfrm>
+          <a:prstGeom prst="rect">
+            <a:avLst/>
+          </a:prstGeom>
+          <a:noFill/>
+          <a:ln/>
+        </p:spPr>
+        <p:txBody>
+          <a:bodyPr wrap="square" lIns="0" tIns="0" rIns="0" bIns="0" rtlCol="0" anchor="t"/>
+          <a:lstStyle/>
+          <a:p>
+            <a:pPr algn="l" indent="0" marL="0">
+              <a:buNone/>
+            </a:pPr>
+            <a:r>
+              <a:rPr lang="en-US" sz="1100" b="1" dirty="0">
+                <a:solidFill>
+                  <a:schemeClr val="tx1"/>
+                </a:solidFill>
+              </a:rPr>
+              <a:t>1</a:t>
+            </a:r>
+            <a:endParaRPr lang="en-US" sz="1100" dirty="0"/>
+          </a:p>
+        </p:txBody>
+      </p:sp>
+      <p:sp>
+        <p:nvSpPr>
+          <p:cNvPr id="8" name="Cardinality N"/>
+          <p:cNvSpPr txBox="1"/>
+          <p:nvPr/>
+        </p:nvSpPr>
+        <p:spPr>
+          <a:xfrm>
+            <a:off x="7068312" y="1924812"/>
+            <a:ext cx="201168" cy="219456"/>
+          </a:xfrm>
+          <a:prstGeom prst="rect">
+            <a:avLst/>
+          </a:prstGeom>
+          <a:noFill/>
+          <a:ln/>
+        </p:spPr>
+        <p:txBody>
+          <a:bodyPr wrap="square" lIns="0" tIns="0" rIns="0" bIns="0" rtlCol="0" anchor="t"/>
+          <a:lstStyle/>
+          <a:p>
+            <a:pPr algn="r" indent="0" marL="0">
+              <a:buNone/>
+            </a:pPr>
+            <a:r>
+              <a:rPr lang="en-US" sz="1100" b="1" dirty="0">
+                <a:solidFill>
+                  <a:schemeClr val="tx1"/>
+                </a:solidFill>
+              </a:rPr>
+              <a:t>N</a:t>
+            </a:r>
+            <a:endParaRPr lang="en-US" sz="1100" dirty="0"/>
+          </a:p>
+        </p:txBody>
+      </p:sp>
+      <p:sp>
+        <p:nvSpPr>
+          <p:cNvPr id="9" name="Line PHONGCHIEU-SUATCHIEU"/>
+          <p:cNvSpPr/>
+          <p:nvPr/>
+        </p:nvSpPr>
+        <p:spPr>
+          <a:xfrm>
+            <a:off x="8823960" y="2171700"/>
+            <a:ext cx="1380744" cy="0"/>
+          </a:xfrm>
+          <a:prstGeom prst="line">
+            <a:avLst/>
+          </a:prstGeom>
+          <a:noFill/>
+          <a:ln w="22225">
+            <a:solidFill>
+              <a:schemeClr val="tx1"/>
+            </a:solidFill>
+            <a:prstDash val="solid"/>
+          </a:ln>
+        </p:spPr>
+      </p:sp>
+      <p:sp>
+        <p:nvSpPr>
+          <p:cNvPr id="10" name="Relationship PHONGCHIEU-SUATCHIEU"/>
+          <p:cNvSpPr/>
+          <p:nvPr/>
+        </p:nvSpPr>
+        <p:spPr>
+          <a:xfrm>
+            <a:off x="9057132" y="1888236"/>
+            <a:ext cx="914400" cy="566928"/>
+          </a:xfrm>
+          <a:prstGeom prst="diamond">
+            <a:avLst/>
+          </a:prstGeom>
+          <a:solidFill>
+            <a:schemeClr val="bg1"/>
+          </a:solidFill>
+          <a:ln w="15875">
+            <a:solidFill>
+              <a:schemeClr val="tx1"/>
+            </a:solidFill>
+          </a:ln>
+        </p:spPr>
+        <p:txBody>
+          <a:bodyPr wrap="square" lIns="0" tIns="0" rIns="0" bIns="0" rtlCol="0" anchor="ctr"/>
+          <a:lstStyle/>
+          <a:p>
+            <a:pPr algn="ctr" indent="0" marL="0">
+              <a:buNone/>
+            </a:pPr>
+            <a:r>
+              <a:rPr lang="en-US" sz="1050" b="1" dirty="0">
+                <a:solidFill>
+                  <a:schemeClr val="tx1"/>
+                </a:solidFill>
+              </a:rPr>
+              <a:t>tại</a:t>
+            </a:r>
+            <a:endParaRPr lang="en-US" sz="1050" dirty="0"/>
+          </a:p>
+        </p:txBody>
+      </p:sp>
+      <p:sp>
+        <p:nvSpPr>
+          <p:cNvPr id="11" name="Cardinality N"/>
+          <p:cNvSpPr txBox="1"/>
+          <p:nvPr/>
+        </p:nvSpPr>
+        <p:spPr>
+          <a:xfrm>
+            <a:off x="8851392" y="1924812"/>
+            <a:ext cx="201168" cy="219456"/>
+          </a:xfrm>
+          <a:prstGeom prst="rect">
+            <a:avLst/>
+          </a:prstGeom>
+          <a:noFill/>
+          <a:ln/>
+        </p:spPr>
+        <p:txBody>
+          <a:bodyPr wrap="square" lIns="0" tIns="0" rIns="0" bIns="0" rtlCol="0" anchor="t"/>
+          <a:lstStyle/>
+          <a:p>
+            <a:pPr algn="l" indent="0" marL="0">
+              <a:buNone/>
+            </a:pPr>
+            <a:r>
+              <a:rPr lang="en-US" sz="1100" b="1" dirty="0">
+                <a:solidFill>
+                  <a:schemeClr val="tx1"/>
+                </a:solidFill>
+              </a:rPr>
+              <a:t>N</a:t>
+            </a:r>
+            <a:endParaRPr lang="en-US" sz="1100" dirty="0"/>
+          </a:p>
+        </p:txBody>
+      </p:sp>
+      <p:sp>
+        <p:nvSpPr>
+          <p:cNvPr id="12" name="Cardinality 1"/>
+          <p:cNvSpPr txBox="1"/>
+          <p:nvPr/>
+        </p:nvSpPr>
+        <p:spPr>
+          <a:xfrm>
+            <a:off x="9976104" y="1924812"/>
+            <a:ext cx="201168" cy="219456"/>
+          </a:xfrm>
+          <a:prstGeom prst="rect">
+            <a:avLst/>
+          </a:prstGeom>
+          <a:noFill/>
+          <a:ln/>
+        </p:spPr>
+        <p:txBody>
+          <a:bodyPr wrap="square" lIns="0" tIns="0" rIns="0" bIns="0" rtlCol="0" anchor="t"/>
+          <a:lstStyle/>
+          <a:p>
+            <a:pPr algn="r" indent="0" marL="0">
+              <a:buNone/>
+            </a:pPr>
+            <a:r>
+              <a:rPr lang="en-US" sz="1100" b="1" dirty="0">
+                <a:solidFill>
+                  <a:schemeClr val="tx1"/>
+                </a:solidFill>
+              </a:rPr>
+              <a:t>1</a:t>
+            </a:r>
+            <a:endParaRPr lang="en-US" sz="1100" dirty="0"/>
+          </a:p>
+        </p:txBody>
+      </p:sp>
+      <p:sp>
+        <p:nvSpPr>
+          <p:cNvPr id="13" name="Line SUATCHIEU-VE"/>
+          <p:cNvSpPr/>
+          <p:nvPr/>
+        </p:nvSpPr>
+        <p:spPr>
+          <a:xfrm>
+            <a:off x="8060436" y="2971800"/>
+            <a:ext cx="0" cy="1097280"/>
+          </a:xfrm>
+          <a:prstGeom prst="line">
+            <a:avLst/>
+          </a:prstGeom>
+          <a:noFill/>
+          <a:ln w="22225">
+            <a:solidFill>
+              <a:schemeClr val="tx1"/>
+            </a:solidFill>
+            <a:prstDash val="solid"/>
+          </a:ln>
+        </p:spPr>
+      </p:sp>
+      <p:sp>
+        <p:nvSpPr>
+          <p:cNvPr id="14" name="Relationship SUATCHIEU-VE"/>
+          <p:cNvSpPr/>
+          <p:nvPr/>
+        </p:nvSpPr>
+        <p:spPr>
+          <a:xfrm>
+            <a:off x="7603236" y="3236976"/>
+            <a:ext cx="914400" cy="566928"/>
+          </a:xfrm>
+          <a:prstGeom prst="diamond">
+            <a:avLst/>
+          </a:prstGeom>
+          <a:solidFill>
+            <a:schemeClr val="bg1"/>
+          </a:solidFill>
+          <a:ln w="15875">
+            <a:solidFill>
+              <a:schemeClr val="tx1"/>
+            </a:solidFill>
+          </a:ln>
+        </p:spPr>
+        <p:txBody>
+          <a:bodyPr wrap="square" lIns="0" tIns="0" rIns="0" bIns="0" rtlCol="0" anchor="ctr"/>
+          <a:lstStyle/>
+          <a:p>
+            <a:pPr algn="ctr" indent="0" marL="0">
+              <a:buNone/>
+            </a:pPr>
+            <a:r>
+              <a:rPr lang="en-US" sz="1050" b="1" dirty="0">
+                <a:solidFill>
+                  <a:schemeClr val="tx1"/>
+                </a:solidFill>
+              </a:rPr>
+              <a:t>bán</a:t>
+            </a:r>
+            <a:endParaRPr lang="en-US" sz="1050" dirty="0"/>
+          </a:p>
+        </p:txBody>
+      </p:sp>
+      <p:sp>
+        <p:nvSpPr>
+          <p:cNvPr id="15" name="Cardinality 1"/>
+          <p:cNvSpPr txBox="1"/>
+          <p:nvPr/>
+        </p:nvSpPr>
+        <p:spPr>
+          <a:xfrm>
+            <a:off x="7786116" y="2999232"/>
+            <a:ext cx="201168" cy="219456"/>
+          </a:xfrm>
+          <a:prstGeom prst="rect">
+            <a:avLst/>
+          </a:prstGeom>
+          <a:noFill/>
+          <a:ln/>
+        </p:spPr>
+        <p:txBody>
+          <a:bodyPr wrap="square" lIns="0" tIns="0" rIns="0" bIns="0" rtlCol="0" anchor="t"/>
+          <a:lstStyle/>
+          <a:p>
+            <a:pPr algn="r" indent="0" marL="0">
+              <a:buNone/>
+            </a:pPr>
+            <a:r>
+              <a:rPr lang="en-US" sz="1100" b="1" dirty="0">
+                <a:solidFill>
+                  <a:schemeClr val="tx1"/>
+                </a:solidFill>
+              </a:rPr>
+              <a:t>1</a:t>
+            </a:r>
+            <a:endParaRPr lang="en-US" sz="1100" dirty="0"/>
+          </a:p>
+        </p:txBody>
+      </p:sp>
+      <p:sp>
+        <p:nvSpPr>
+          <p:cNvPr id="16" name="Cardinality N"/>
+          <p:cNvSpPr txBox="1"/>
+          <p:nvPr/>
+        </p:nvSpPr>
+        <p:spPr>
+          <a:xfrm>
+            <a:off x="7786116" y="3822192"/>
+            <a:ext cx="201168" cy="219456"/>
+          </a:xfrm>
+          <a:prstGeom prst="rect">
+            <a:avLst/>
+          </a:prstGeom>
+          <a:noFill/>
+          <a:ln/>
+        </p:spPr>
+        <p:txBody>
+          <a:bodyPr wrap="square" lIns="0" tIns="0" rIns="0" bIns="0" rtlCol="0" anchor="t"/>
+          <a:lstStyle/>
+          <a:p>
+            <a:pPr algn="r" indent="0" marL="0">
+              <a:buNone/>
+            </a:pPr>
+            <a:r>
+              <a:rPr lang="en-US" sz="1100" b="1" dirty="0">
+                <a:solidFill>
+                  <a:schemeClr val="tx1"/>
+                </a:solidFill>
+              </a:rPr>
+              <a:t>N</a:t>
+            </a:r>
+            <a:endParaRPr lang="en-US" sz="1100" dirty="0"/>
+          </a:p>
+        </p:txBody>
+      </p:sp>
+      <p:sp>
+        <p:nvSpPr>
+          <p:cNvPr id="17" name="Line KHACHHANG-VE"/>
+          <p:cNvSpPr/>
+          <p:nvPr/>
+        </p:nvSpPr>
+        <p:spPr>
+          <a:xfrm>
+            <a:off x="5916168" y="4777740"/>
+            <a:ext cx="1380744" cy="0"/>
+          </a:xfrm>
+          <a:prstGeom prst="line">
+            <a:avLst/>
+          </a:prstGeom>
+          <a:noFill/>
+          <a:ln w="22225">
+            <a:solidFill>
+              <a:schemeClr val="tx1"/>
+            </a:solidFill>
+            <a:prstDash val="solid"/>
+          </a:ln>
+        </p:spPr>
+      </p:sp>
+      <p:sp>
+        <p:nvSpPr>
+          <p:cNvPr id="18" name="Relationship KHACHHANG-VE"/>
+          <p:cNvSpPr/>
+          <p:nvPr/>
+        </p:nvSpPr>
+        <p:spPr>
+          <a:xfrm>
+            <a:off x="6149340" y="4494276"/>
+            <a:ext cx="914400" cy="566928"/>
+          </a:xfrm>
+          <a:prstGeom prst="diamond">
+            <a:avLst/>
+          </a:prstGeom>
+          <a:solidFill>
+            <a:schemeClr val="bg1"/>
+          </a:solidFill>
+          <a:ln w="15875">
+            <a:solidFill>
+              <a:schemeClr val="tx1"/>
+            </a:solidFill>
+          </a:ln>
+        </p:spPr>
+        <p:txBody>
+          <a:bodyPr wrap="square" lIns="0" tIns="0" rIns="0" bIns="0" rtlCol="0" anchor="ctr"/>
+          <a:lstStyle/>
+          <a:p>
+            <a:pPr algn="ctr" indent="0" marL="0">
+              <a:buNone/>
+            </a:pPr>
+            <a:r>
+              <a:rPr lang="en-US" sz="1050" b="1" dirty="0">
+                <a:solidFill>
+                  <a:schemeClr val="tx1"/>
+                </a:solidFill>
+              </a:rPr>
+              <a:t>đặt</a:t>
+            </a:r>
+            <a:endParaRPr lang="en-US" sz="1050" dirty="0"/>
+          </a:p>
+        </p:txBody>
+      </p:sp>
+      <p:sp>
+        <p:nvSpPr>
+          <p:cNvPr id="19" name="Cardinality 1"/>
+          <p:cNvSpPr txBox="1"/>
+          <p:nvPr/>
+        </p:nvSpPr>
+        <p:spPr>
+          <a:xfrm>
+            <a:off x="5943600" y="4530852"/>
+            <a:ext cx="201168" cy="219456"/>
+          </a:xfrm>
+          <a:prstGeom prst="rect">
+            <a:avLst/>
+          </a:prstGeom>
+          <a:noFill/>
+          <a:ln/>
+        </p:spPr>
+        <p:txBody>
+          <a:bodyPr wrap="square" lIns="0" tIns="0" rIns="0" bIns="0" rtlCol="0" anchor="t"/>
+          <a:lstStyle/>
+          <a:p>
+            <a:pPr algn="l" indent="0" marL="0">
+              <a:buNone/>
+            </a:pPr>
+            <a:r>
+              <a:rPr lang="en-US" sz="1100" b="1" dirty="0">
+                <a:solidFill>
+                  <a:schemeClr val="tx1"/>
+                </a:solidFill>
+              </a:rPr>
+              <a:t>1</a:t>
+            </a:r>
+            <a:endParaRPr lang="en-US" sz="1100" dirty="0"/>
+          </a:p>
+        </p:txBody>
+      </p:sp>
+      <p:sp>
+        <p:nvSpPr>
+          <p:cNvPr id="20" name="Cardinality N"/>
+          <p:cNvSpPr txBox="1"/>
+          <p:nvPr/>
+        </p:nvSpPr>
+        <p:spPr>
+          <a:xfrm>
+            <a:off x="7068312" y="4530852"/>
+            <a:ext cx="201168" cy="219456"/>
+          </a:xfrm>
+          <a:prstGeom prst="rect">
+            <a:avLst/>
+          </a:prstGeom>
+          <a:noFill/>
+          <a:ln/>
+        </p:spPr>
+        <p:txBody>
+          <a:bodyPr wrap="square" lIns="0" tIns="0" rIns="0" bIns="0" rtlCol="0" anchor="t"/>
+          <a:lstStyle/>
+          <a:p>
+            <a:pPr algn="r" indent="0" marL="0">
+              <a:buNone/>
+            </a:pPr>
+            <a:r>
+              <a:rPr lang="en-US" sz="1100" b="1" dirty="0">
+                <a:solidFill>
+                  <a:schemeClr val="tx1"/>
+                </a:solidFill>
+              </a:rPr>
+              <a:t>N</a:t>
+            </a:r>
+            <a:endParaRPr lang="en-US" sz="1100" dirty="0"/>
+          </a:p>
+        </p:txBody>
+      </p:sp>
+      <p:sp>
+        <p:nvSpPr>
+          <p:cNvPr id="21" name="PHIM body"/>
           <p:cNvSpPr/>
           <p:nvPr/>
         </p:nvSpPr>
         <p:spPr>
           <a:xfrm>
             <a:off x="4389120" y="1682496"/>
-            <a:ext cx="1874520" cy="1563624"/>
+            <a:ext cx="1527048" cy="1289304"/>
           </a:xfrm>
           <a:prstGeom prst="rect">
             <a:avLst/>
@@ -3443,14 +3991,14 @@
       </p:sp>
       <p:sp>
         <p:nvSpPr>
-          <p:cNvPr id="6" name="PHIM header"/>
+          <p:cNvPr id="22" name="PHIM header"/>
           <p:cNvSpPr/>
           <p:nvPr/>
         </p:nvSpPr>
         <p:spPr>
           <a:xfrm>
             <a:off x="4389120" y="1371600"/>
-            <a:ext cx="1874520" cy="310896"/>
+            <a:ext cx="1527048" cy="310896"/>
           </a:xfrm>
           <a:prstGeom prst="rect">
             <a:avLst/>
@@ -3485,14 +4033,14 @@
       </p:sp>
       <p:sp>
         <p:nvSpPr>
-          <p:cNvPr id="7" name="PHIM attributes"/>
+          <p:cNvPr id="23" name="PHIM attributes"/>
           <p:cNvSpPr txBox="1"/>
           <p:nvPr/>
         </p:nvSpPr>
         <p:spPr>
           <a:xfrm>
             <a:off x="4498848" y="1746504"/>
-            <a:ext cx="1655064" cy="1472184"/>
+            <a:ext cx="1307592" cy="1197864"/>
           </a:xfrm>
           <a:prstGeom prst="rect">
             <a:avLst/>
@@ -3592,14 +4140,14 @@
       </p:sp>
       <p:sp>
         <p:nvSpPr>
-          <p:cNvPr id="8" name="SUATCHIEU body"/>
+          <p:cNvPr id="24" name="PHONGCHIEU body"/>
           <p:cNvSpPr/>
           <p:nvPr/>
         </p:nvSpPr>
         <p:spPr>
           <a:xfrm>
-            <a:off x="7114032" y="1682496"/>
-            <a:ext cx="1874520" cy="1563624"/>
+            <a:off x="10204704" y="1682496"/>
+            <a:ext cx="1527048" cy="1289304"/>
           </a:xfrm>
           <a:prstGeom prst="rect">
             <a:avLst/>
@@ -3617,20 +4165,20 @@
       </p:sp>
       <p:sp>
         <p:nvSpPr>
-          <p:cNvPr id="9" name="SUATCHIEU header"/>
+          <p:cNvPr id="25" name="PHONGCHIEU header"/>
           <p:cNvSpPr/>
           <p:nvPr/>
         </p:nvSpPr>
         <p:spPr>
           <a:xfrm>
-            <a:off x="7114032" y="1371600"/>
-            <a:ext cx="1874520" cy="310896"/>
+            <a:off x="10204704" y="1371600"/>
+            <a:ext cx="1527048" cy="310896"/>
           </a:xfrm>
           <a:prstGeom prst="rect">
             <a:avLst/>
           </a:prstGeom>
           <a:solidFill>
-            <a:schemeClr val="accent1"/>
+            <a:schemeClr val="tx1"/>
           </a:solidFill>
           <a:ln w="15875">
             <a:solidFill>
@@ -3648,10 +4196,10 @@
             <a:r>
               <a:rPr lang="en-US" sz="1200" b="1" dirty="0">
                 <a:solidFill>
-                  <a:schemeClr val="tx1"/>
-                </a:solidFill>
-              </a:rPr>
-              <a:t>SUATCHIEU</a:t>
+                  <a:schemeClr val="bg1"/>
+                </a:solidFill>
+              </a:rPr>
+              <a:t>PHONGCHIEU</a:t>
             </a:r>
             <a:endParaRPr lang="en-US" sz="1200" dirty="0"/>
           </a:p>
@@ -3659,14 +4207,14 @@
       </p:sp>
       <p:sp>
         <p:nvSpPr>
-          <p:cNvPr id="10" name="SUATCHIEU attributes"/>
+          <p:cNvPr id="26" name="PHONGCHIEU attributes"/>
           <p:cNvSpPr txBox="1"/>
           <p:nvPr/>
         </p:nvSpPr>
         <p:spPr>
           <a:xfrm>
-            <a:off x="7223760" y="1746504"/>
-            <a:ext cx="1655064" cy="1472184"/>
+            <a:off x="10314432" y="1746504"/>
+            <a:ext cx="1307592" cy="1197864"/>
           </a:xfrm>
           <a:prstGeom prst="rect">
             <a:avLst/>
@@ -3690,7 +4238,7 @@
                   <a:schemeClr val="tx1"/>
                 </a:solidFill>
               </a:rPr>
-              <a:t>MaSuat</a:t>
+              <a:t>MaPhong</a:t>
             </a:r>
             <a:endParaRPr lang="en-US" sz="1050" dirty="0"/>
           </a:p>
@@ -3702,12 +4250,12 @@
               <a:buNone/>
             </a:pPr>
             <a:r>
-              <a:rPr lang="en-US" sz="1050" i="1" dirty="0">
-                <a:solidFill>
-                  <a:schemeClr val="tx2"/>
-                </a:solidFill>
-              </a:rPr>
-              <a:t>MaPhim (FK)</a:t>
+              <a:rPr lang="en-US" sz="1050" dirty="0">
+                <a:solidFill>
+                  <a:schemeClr val="tx1"/>
+                </a:solidFill>
+              </a:rPr>
+              <a:t>TenPhong</a:t>
             </a:r>
             <a:endParaRPr lang="en-US" sz="1050" dirty="0"/>
           </a:p>
@@ -3719,12 +4267,12 @@
               <a:buNone/>
             </a:pPr>
             <a:r>
-              <a:rPr lang="en-US" sz="1050" i="1" dirty="0">
-                <a:solidFill>
-                  <a:schemeClr val="tx2"/>
-                </a:solidFill>
-              </a:rPr>
-              <a:t>MaPhong (FK)</a:t>
+              <a:rPr lang="en-US" sz="1050" dirty="0">
+                <a:solidFill>
+                  <a:schemeClr val="tx1"/>
+                </a:solidFill>
+              </a:rPr>
+              <a:t>LoaiPhong</a:t>
             </a:r>
             <a:endParaRPr lang="en-US" sz="1050" dirty="0"/>
           </a:p>
@@ -3741,41 +4289,7 @@
                   <a:schemeClr val="tx1"/>
                 </a:solidFill>
               </a:rPr>
-              <a:t>NgayChieu</a:t>
-            </a:r>
-            <a:endParaRPr lang="en-US" sz="1050" dirty="0"/>
-          </a:p>
-          <a:p>
-            <a:pPr indent="0" marL="0">
-              <a:lnSpc>
-                <a:spcPts val="1700"/>
-              </a:lnSpc>
-              <a:buNone/>
-            </a:pPr>
-            <a:r>
-              <a:rPr lang="en-US" sz="1050" dirty="0">
-                <a:solidFill>
-                  <a:schemeClr val="tx1"/>
-                </a:solidFill>
-              </a:rPr>
-              <a:t>GioBatDau</a:t>
-            </a:r>
-            <a:endParaRPr lang="en-US" sz="1050" dirty="0"/>
-          </a:p>
-          <a:p>
-            <a:pPr indent="0" marL="0">
-              <a:lnSpc>
-                <a:spcPts val="1700"/>
-              </a:lnSpc>
-              <a:buNone/>
-            </a:pPr>
-            <a:r>
-              <a:rPr lang="en-US" sz="1050" dirty="0">
-                <a:solidFill>
-                  <a:schemeClr val="tx1"/>
-                </a:solidFill>
-              </a:rPr>
-              <a:t>GiaVe</a:t>
+              <a:t>SucChua</a:t>
             </a:r>
             <a:endParaRPr lang="en-US" sz="1050" dirty="0"/>
           </a:p>
@@ -3783,14 +4297,14 @@
       </p:sp>
       <p:sp>
         <p:nvSpPr>
-          <p:cNvPr id="11" name="PHONGCHIEU body"/>
+          <p:cNvPr id="27" name="SUATCHIEU body"/>
           <p:cNvSpPr/>
           <p:nvPr/>
         </p:nvSpPr>
         <p:spPr>
           <a:xfrm>
-            <a:off x="9838944" y="1682496"/>
-            <a:ext cx="1874520" cy="1563624"/>
+            <a:off x="7296912" y="1682496"/>
+            <a:ext cx="1527048" cy="1289304"/>
           </a:xfrm>
           <a:prstGeom prst="rect">
             <a:avLst/>
@@ -3808,20 +4322,20 @@
       </p:sp>
       <p:sp>
         <p:nvSpPr>
-          <p:cNvPr id="12" name="PHONGCHIEU header"/>
+          <p:cNvPr id="28" name="SUATCHIEU header"/>
           <p:cNvSpPr/>
           <p:nvPr/>
         </p:nvSpPr>
         <p:spPr>
           <a:xfrm>
-            <a:off x="9838944" y="1371600"/>
-            <a:ext cx="1874520" cy="310896"/>
+            <a:off x="7296912" y="1371600"/>
+            <a:ext cx="1527048" cy="310896"/>
           </a:xfrm>
           <a:prstGeom prst="rect">
             <a:avLst/>
           </a:prstGeom>
           <a:solidFill>
-            <a:schemeClr val="tx1"/>
+            <a:schemeClr val="accent1"/>
           </a:solidFill>
           <a:ln w="15875">
             <a:solidFill>
@@ -3839,10 +4353,10 @@
             <a:r>
               <a:rPr lang="en-US" sz="1200" b="1" dirty="0">
                 <a:solidFill>
-                  <a:schemeClr val="bg1"/>
-                </a:solidFill>
-              </a:rPr>
-              <a:t>PHONGCHIEU</a:t>
+                  <a:schemeClr val="tx1"/>
+                </a:solidFill>
+              </a:rPr>
+              <a:t>SUATCHIEU</a:t>
             </a:r>
             <a:endParaRPr lang="en-US" sz="1200" dirty="0"/>
           </a:p>
@@ -3850,14 +4364,14 @@
       </p:sp>
       <p:sp>
         <p:nvSpPr>
-          <p:cNvPr id="13" name="PHONGCHIEU attributes"/>
+          <p:cNvPr id="29" name="SUATCHIEU attributes"/>
           <p:cNvSpPr txBox="1"/>
           <p:nvPr/>
         </p:nvSpPr>
         <p:spPr>
           <a:xfrm>
-            <a:off x="9948672" y="1746504"/>
-            <a:ext cx="1655064" cy="1472184"/>
+            <a:off x="7406640" y="1746504"/>
+            <a:ext cx="1307592" cy="1197864"/>
           </a:xfrm>
           <a:prstGeom prst="rect">
             <a:avLst/>
@@ -3881,7 +4395,7 @@
                   <a:schemeClr val="tx1"/>
                 </a:solidFill>
               </a:rPr>
-              <a:t>MaPhong</a:t>
+              <a:t>MaSuat</a:t>
             </a:r>
             <a:endParaRPr lang="en-US" sz="1050" dirty="0"/>
           </a:p>
@@ -3898,7 +4412,7 @@
                   <a:schemeClr val="tx1"/>
                 </a:solidFill>
               </a:rPr>
-              <a:t>TenPhong</a:t>
+              <a:t>NgayChieu</a:t>
             </a:r>
             <a:endParaRPr lang="en-US" sz="1050" dirty="0"/>
           </a:p>
@@ -3915,7 +4429,7 @@
                   <a:schemeClr val="tx1"/>
                 </a:solidFill>
               </a:rPr>
-              <a:t>LoaiPhong</a:t>
+              <a:t>GioBatDau</a:t>
             </a:r>
             <a:endParaRPr lang="en-US" sz="1050" dirty="0"/>
           </a:p>
@@ -3932,7 +4446,7 @@
                   <a:schemeClr val="tx1"/>
                 </a:solidFill>
               </a:rPr>
-              <a:t>SoGhe</a:t>
+              <a:t>GiaVe</a:t>
             </a:r>
             <a:endParaRPr lang="en-US" sz="1050" dirty="0"/>
           </a:p>
@@ -3940,14 +4454,14 @@
       </p:sp>
       <p:sp>
         <p:nvSpPr>
-          <p:cNvPr id="14" name="KHACHHANG body"/>
+          <p:cNvPr id="30" name="KHACHHANG body"/>
           <p:cNvSpPr/>
           <p:nvPr/>
         </p:nvSpPr>
         <p:spPr>
           <a:xfrm>
-            <a:off x="4389120" y="4334256"/>
-            <a:ext cx="1874520" cy="1289304"/>
+            <a:off x="4389120" y="4379976"/>
+            <a:ext cx="1527048" cy="1106424"/>
           </a:xfrm>
           <a:prstGeom prst="rect">
             <a:avLst/>
@@ -3965,14 +4479,14 @@
       </p:sp>
       <p:sp>
         <p:nvSpPr>
-          <p:cNvPr id="15" name="KHACHHANG header"/>
+          <p:cNvPr id="31" name="KHACHHANG header"/>
           <p:cNvSpPr/>
           <p:nvPr/>
         </p:nvSpPr>
         <p:spPr>
           <a:xfrm>
-            <a:off x="4389120" y="4023360"/>
-            <a:ext cx="1874520" cy="310896"/>
+            <a:off x="4389120" y="4069080"/>
+            <a:ext cx="1527048" cy="310896"/>
           </a:xfrm>
           <a:prstGeom prst="rect">
             <a:avLst/>
@@ -4007,14 +4521,14 @@
       </p:sp>
       <p:sp>
         <p:nvSpPr>
-          <p:cNvPr id="16" name="KHACHHANG attributes"/>
+          <p:cNvPr id="32" name="KHACHHANG attributes"/>
           <p:cNvSpPr txBox="1"/>
           <p:nvPr/>
         </p:nvSpPr>
         <p:spPr>
           <a:xfrm>
-            <a:off x="4498848" y="4398264"/>
-            <a:ext cx="1655064" cy="1197864"/>
+            <a:off x="4498848" y="4443984"/>
+            <a:ext cx="1307592" cy="1014984"/>
           </a:xfrm>
           <a:prstGeom prst="rect">
             <a:avLst/>
@@ -4097,14 +4611,14 @@
       </p:sp>
       <p:sp>
         <p:nvSpPr>
-          <p:cNvPr id="17" name="VE body"/>
+          <p:cNvPr id="33" name="VE body"/>
           <p:cNvSpPr/>
           <p:nvPr/>
         </p:nvSpPr>
         <p:spPr>
           <a:xfrm>
-            <a:off x="7114032" y="4334256"/>
-            <a:ext cx="1874520" cy="1289304"/>
+            <a:off x="7296912" y="4379976"/>
+            <a:ext cx="1527048" cy="1106424"/>
           </a:xfrm>
           <a:prstGeom prst="rect">
             <a:avLst/>
@@ -4122,14 +4636,14 @@
       </p:sp>
       <p:sp>
         <p:nvSpPr>
-          <p:cNvPr id="18" name="VE header"/>
+          <p:cNvPr id="34" name="VE header"/>
           <p:cNvSpPr/>
           <p:nvPr/>
         </p:nvSpPr>
         <p:spPr>
           <a:xfrm>
-            <a:off x="7114032" y="4023360"/>
-            <a:ext cx="1874520" cy="310896"/>
+            <a:off x="7296912" y="4069080"/>
+            <a:ext cx="1527048" cy="310896"/>
           </a:xfrm>
           <a:prstGeom prst="rect">
             <a:avLst/>
@@ -4164,14 +4678,14 @@
       </p:sp>
       <p:sp>
         <p:nvSpPr>
-          <p:cNvPr id="19" name="VE attributes"/>
+          <p:cNvPr id="35" name="VE attributes"/>
           <p:cNvSpPr txBox="1"/>
           <p:nvPr/>
         </p:nvSpPr>
         <p:spPr>
           <a:xfrm>
-            <a:off x="7223760" y="4398264"/>
-            <a:ext cx="1655064" cy="1197864"/>
+            <a:off x="7406640" y="4443984"/>
+            <a:ext cx="1307592" cy="1014984"/>
           </a:xfrm>
           <a:prstGeom prst="rect">
             <a:avLst/>
@@ -4207,12 +4721,12 @@
               <a:buNone/>
             </a:pPr>
             <a:r>
-              <a:rPr lang="en-US" sz="1050" i="1" dirty="0">
-                <a:solidFill>
-                  <a:schemeClr val="tx2"/>
-                </a:solidFill>
-              </a:rPr>
-              <a:t>MaSuat (FK)</a:t>
+              <a:rPr lang="en-US" sz="1050" dirty="0">
+                <a:solidFill>
+                  <a:schemeClr val="tx1"/>
+                </a:solidFill>
+              </a:rPr>
+              <a:t>SoGhe</a:t>
             </a:r>
             <a:endParaRPr lang="en-US" sz="1050" dirty="0"/>
           </a:p>
@@ -4224,570 +4738,12 @@
               <a:buNone/>
             </a:pPr>
             <a:r>
-              <a:rPr lang="en-US" sz="1050" i="1" dirty="0">
-                <a:solidFill>
-                  <a:schemeClr val="tx2"/>
-                </a:solidFill>
-              </a:rPr>
-              <a:t>MaKH (FK)</a:t>
-            </a:r>
-            <a:endParaRPr lang="en-US" sz="1050" dirty="0"/>
-          </a:p>
-          <a:p>
-            <a:pPr indent="0" marL="0">
-              <a:lnSpc>
-                <a:spcPts val="1700"/>
-              </a:lnSpc>
-              <a:buNone/>
-            </a:pPr>
-            <a:r>
               <a:rPr lang="en-US" sz="1050" dirty="0">
                 <a:solidFill>
                   <a:schemeClr val="tx1"/>
                 </a:solidFill>
               </a:rPr>
-              <a:t>SoGhe</a:t>
-            </a:r>
-            <a:endParaRPr lang="en-US" sz="1050" dirty="0"/>
-          </a:p>
-          <a:p>
-            <a:pPr indent="0" marL="0">
-              <a:lnSpc>
-                <a:spcPts val="1700"/>
-              </a:lnSpc>
-              <a:buNone/>
-            </a:pPr>
-            <a:r>
-              <a:rPr lang="en-US" sz="1050" dirty="0">
-                <a:solidFill>
-                  <a:schemeClr val="tx1"/>
-                </a:solidFill>
-              </a:rPr>
               <a:t>NgayDat</a:t>
-            </a:r>
-            <a:endParaRPr lang="en-US" sz="1050" dirty="0"/>
-          </a:p>
-        </p:txBody>
-      </p:sp>
-      <p:sp>
-        <p:nvSpPr>
-          <p:cNvPr id="20" name="Line PHIM-SUATCHIEU"/>
-          <p:cNvSpPr/>
-          <p:nvPr/>
-        </p:nvSpPr>
-        <p:spPr>
-          <a:xfrm>
-            <a:off x="6263640" y="2308860"/>
-            <a:ext cx="850392" cy="0"/>
-          </a:xfrm>
-          <a:prstGeom prst="line">
-            <a:avLst/>
-          </a:prstGeom>
-          <a:noFill/>
-          <a:ln w="22225">
-            <a:solidFill>
-              <a:schemeClr val="tx1"/>
-            </a:solidFill>
-            <a:prstDash val="solid"/>
-          </a:ln>
-        </p:spPr>
-      </p:sp>
-      <p:sp>
-        <p:nvSpPr>
-          <p:cNvPr id="21" name="Relationship được chiếu"/>
-          <p:cNvSpPr txBox="1"/>
-          <p:nvPr/>
-        </p:nvSpPr>
-        <p:spPr>
-          <a:xfrm>
-            <a:off x="6263640" y="2034540"/>
-            <a:ext cx="850392" cy="219456"/>
-          </a:xfrm>
-          <a:prstGeom prst="rect">
-            <a:avLst/>
-          </a:prstGeom>
-          <a:noFill/>
-          <a:ln/>
-        </p:spPr>
-        <p:txBody>
-          <a:bodyPr wrap="square" lIns="0" tIns="0" rIns="0" bIns="0" rtlCol="0" anchor="t"/>
-          <a:lstStyle/>
-          <a:p>
-            <a:pPr algn="ctr" indent="0" marL="0">
-              <a:buNone/>
-            </a:pPr>
-            <a:r>
-              <a:rPr lang="en-US" sz="1050" i="1" dirty="0">
-                <a:solidFill>
-                  <a:schemeClr val="tx2"/>
-                </a:solidFill>
-              </a:rPr>
-              <a:t>được chiếu</a:t>
-            </a:r>
-            <a:endParaRPr lang="en-US" sz="1050" dirty="0"/>
-          </a:p>
-        </p:txBody>
-      </p:sp>
-      <p:sp>
-        <p:nvSpPr>
-          <p:cNvPr id="22" name="Cardinality 1"/>
-          <p:cNvSpPr txBox="1"/>
-          <p:nvPr/>
-        </p:nvSpPr>
-        <p:spPr>
-          <a:xfrm>
-            <a:off x="6309360" y="2345436"/>
-            <a:ext cx="274320" cy="219456"/>
-          </a:xfrm>
-          <a:prstGeom prst="rect">
-            <a:avLst/>
-          </a:prstGeom>
-          <a:noFill/>
-          <a:ln/>
-        </p:spPr>
-        <p:txBody>
-          <a:bodyPr wrap="square" lIns="0" tIns="0" rIns="0" bIns="0" rtlCol="0" anchor="t"/>
-          <a:lstStyle/>
-          <a:p>
-            <a:pPr indent="0" marL="0">
-              <a:buNone/>
-            </a:pPr>
-            <a:r>
-              <a:rPr lang="en-US" sz="1050" b="1" dirty="0">
-                <a:solidFill>
-                  <a:schemeClr val="tx1"/>
-                </a:solidFill>
-              </a:rPr>
-              <a:t>1</a:t>
-            </a:r>
-            <a:endParaRPr lang="en-US" sz="1050" dirty="0"/>
-          </a:p>
-        </p:txBody>
-      </p:sp>
-      <p:sp>
-        <p:nvSpPr>
-          <p:cNvPr id="23" name="Cardinality N"/>
-          <p:cNvSpPr txBox="1"/>
-          <p:nvPr/>
-        </p:nvSpPr>
-        <p:spPr>
-          <a:xfrm>
-            <a:off x="6793992" y="2345436"/>
-            <a:ext cx="274320" cy="219456"/>
-          </a:xfrm>
-          <a:prstGeom prst="rect">
-            <a:avLst/>
-          </a:prstGeom>
-          <a:noFill/>
-          <a:ln/>
-        </p:spPr>
-        <p:txBody>
-          <a:bodyPr wrap="square" lIns="0" tIns="0" rIns="0" bIns="0" rtlCol="0" anchor="t"/>
-          <a:lstStyle/>
-          <a:p>
-            <a:pPr algn="r" indent="0" marL="0">
-              <a:buNone/>
-            </a:pPr>
-            <a:r>
-              <a:rPr lang="en-US" sz="1050" b="1" dirty="0">
-                <a:solidFill>
-                  <a:schemeClr val="tx1"/>
-                </a:solidFill>
-              </a:rPr>
-              <a:t>N</a:t>
-            </a:r>
-            <a:endParaRPr lang="en-US" sz="1050" dirty="0"/>
-          </a:p>
-        </p:txBody>
-      </p:sp>
-      <p:sp>
-        <p:nvSpPr>
-          <p:cNvPr id="24" name="Line SUATCHIEU-PHONGCHIEU"/>
-          <p:cNvSpPr/>
-          <p:nvPr/>
-        </p:nvSpPr>
-        <p:spPr>
-          <a:xfrm>
-            <a:off x="8988552" y="2308860"/>
-            <a:ext cx="850392" cy="0"/>
-          </a:xfrm>
-          <a:prstGeom prst="line">
-            <a:avLst/>
-          </a:prstGeom>
-          <a:noFill/>
-          <a:ln w="22225">
-            <a:solidFill>
-              <a:schemeClr val="tx1"/>
-            </a:solidFill>
-            <a:prstDash val="solid"/>
-          </a:ln>
-        </p:spPr>
-      </p:sp>
-      <p:sp>
-        <p:nvSpPr>
-          <p:cNvPr id="25" name="Relationship diễn ra tại"/>
-          <p:cNvSpPr txBox="1"/>
-          <p:nvPr/>
-        </p:nvSpPr>
-        <p:spPr>
-          <a:xfrm>
-            <a:off x="8988552" y="2034540"/>
-            <a:ext cx="850392" cy="219456"/>
-          </a:xfrm>
-          <a:prstGeom prst="rect">
-            <a:avLst/>
-          </a:prstGeom>
-          <a:noFill/>
-          <a:ln/>
-        </p:spPr>
-        <p:txBody>
-          <a:bodyPr wrap="square" lIns="0" tIns="0" rIns="0" bIns="0" rtlCol="0" anchor="t"/>
-          <a:lstStyle/>
-          <a:p>
-            <a:pPr algn="ctr" indent="0" marL="0">
-              <a:buNone/>
-            </a:pPr>
-            <a:r>
-              <a:rPr lang="en-US" sz="1050" i="1" dirty="0">
-                <a:solidFill>
-                  <a:schemeClr val="tx2"/>
-                </a:solidFill>
-              </a:rPr>
-              <a:t>diễn ra tại</a:t>
-            </a:r>
-            <a:endParaRPr lang="en-US" sz="1050" dirty="0"/>
-          </a:p>
-        </p:txBody>
-      </p:sp>
-      <p:sp>
-        <p:nvSpPr>
-          <p:cNvPr id="26" name="Cardinality N"/>
-          <p:cNvSpPr txBox="1"/>
-          <p:nvPr/>
-        </p:nvSpPr>
-        <p:spPr>
-          <a:xfrm>
-            <a:off x="9034272" y="2345436"/>
-            <a:ext cx="274320" cy="219456"/>
-          </a:xfrm>
-          <a:prstGeom prst="rect">
-            <a:avLst/>
-          </a:prstGeom>
-          <a:noFill/>
-          <a:ln/>
-        </p:spPr>
-        <p:txBody>
-          <a:bodyPr wrap="square" lIns="0" tIns="0" rIns="0" bIns="0" rtlCol="0" anchor="t"/>
-          <a:lstStyle/>
-          <a:p>
-            <a:pPr indent="0" marL="0">
-              <a:buNone/>
-            </a:pPr>
-            <a:r>
-              <a:rPr lang="en-US" sz="1050" b="1" dirty="0">
-                <a:solidFill>
-                  <a:schemeClr val="tx1"/>
-                </a:solidFill>
-              </a:rPr>
-              <a:t>N</a:t>
-            </a:r>
-            <a:endParaRPr lang="en-US" sz="1050" dirty="0"/>
-          </a:p>
-        </p:txBody>
-      </p:sp>
-      <p:sp>
-        <p:nvSpPr>
-          <p:cNvPr id="27" name="Cardinality 1"/>
-          <p:cNvSpPr txBox="1"/>
-          <p:nvPr/>
-        </p:nvSpPr>
-        <p:spPr>
-          <a:xfrm>
-            <a:off x="9518904" y="2345436"/>
-            <a:ext cx="274320" cy="219456"/>
-          </a:xfrm>
-          <a:prstGeom prst="rect">
-            <a:avLst/>
-          </a:prstGeom>
-          <a:noFill/>
-          <a:ln/>
-        </p:spPr>
-        <p:txBody>
-          <a:bodyPr wrap="square" lIns="0" tIns="0" rIns="0" bIns="0" rtlCol="0" anchor="t"/>
-          <a:lstStyle/>
-          <a:p>
-            <a:pPr algn="r" indent="0" marL="0">
-              <a:buNone/>
-            </a:pPr>
-            <a:r>
-              <a:rPr lang="en-US" sz="1050" b="1" dirty="0">
-                <a:solidFill>
-                  <a:schemeClr val="tx1"/>
-                </a:solidFill>
-              </a:rPr>
-              <a:t>1</a:t>
-            </a:r>
-            <a:endParaRPr lang="en-US" sz="1050" dirty="0"/>
-          </a:p>
-        </p:txBody>
-      </p:sp>
-      <p:sp>
-        <p:nvSpPr>
-          <p:cNvPr id="28" name="Line SUATCHIEU-VE"/>
-          <p:cNvSpPr/>
-          <p:nvPr/>
-        </p:nvSpPr>
-        <p:spPr>
-          <a:xfrm>
-            <a:off x="8051292" y="3246120"/>
-            <a:ext cx="0" cy="777240"/>
-          </a:xfrm>
-          <a:prstGeom prst="line">
-            <a:avLst/>
-          </a:prstGeom>
-          <a:noFill/>
-          <a:ln w="22225">
-            <a:solidFill>
-              <a:schemeClr val="tx1"/>
-            </a:solidFill>
-            <a:prstDash val="solid"/>
-          </a:ln>
-        </p:spPr>
-      </p:sp>
-      <p:sp>
-        <p:nvSpPr>
-          <p:cNvPr id="29" name="Cardinality 1"/>
-          <p:cNvSpPr txBox="1"/>
-          <p:nvPr/>
-        </p:nvSpPr>
-        <p:spPr>
-          <a:xfrm>
-            <a:off x="7731252" y="3273552"/>
-            <a:ext cx="274320" cy="219456"/>
-          </a:xfrm>
-          <a:prstGeom prst="rect">
-            <a:avLst/>
-          </a:prstGeom>
-          <a:noFill/>
-          <a:ln/>
-        </p:spPr>
-        <p:txBody>
-          <a:bodyPr wrap="square" lIns="0" tIns="0" rIns="0" bIns="0" rtlCol="0" anchor="t"/>
-          <a:lstStyle/>
-          <a:p>
-            <a:pPr algn="r" indent="0" marL="0">
-              <a:buNone/>
-            </a:pPr>
-            <a:r>
-              <a:rPr lang="en-US" sz="1050" b="1" dirty="0">
-                <a:solidFill>
-                  <a:schemeClr val="tx1"/>
-                </a:solidFill>
-              </a:rPr>
-              <a:t>1</a:t>
-            </a:r>
-            <a:endParaRPr lang="en-US" sz="1050" dirty="0"/>
-          </a:p>
-        </p:txBody>
-      </p:sp>
-      <p:sp>
-        <p:nvSpPr>
-          <p:cNvPr id="30" name="Cardinality N"/>
-          <p:cNvSpPr txBox="1"/>
-          <p:nvPr/>
-        </p:nvSpPr>
-        <p:spPr>
-          <a:xfrm>
-            <a:off x="7731252" y="3776472"/>
-            <a:ext cx="274320" cy="219456"/>
-          </a:xfrm>
-          <a:prstGeom prst="rect">
-            <a:avLst/>
-          </a:prstGeom>
-          <a:noFill/>
-          <a:ln/>
-        </p:spPr>
-        <p:txBody>
-          <a:bodyPr wrap="square" lIns="0" tIns="0" rIns="0" bIns="0" rtlCol="0" anchor="t"/>
-          <a:lstStyle/>
-          <a:p>
-            <a:pPr algn="r" indent="0" marL="0">
-              <a:buNone/>
-            </a:pPr>
-            <a:r>
-              <a:rPr lang="en-US" sz="1050" b="1" dirty="0">
-                <a:solidFill>
-                  <a:schemeClr val="tx1"/>
-                </a:solidFill>
-              </a:rPr>
-              <a:t>N</a:t>
-            </a:r>
-            <a:endParaRPr lang="en-US" sz="1050" dirty="0"/>
-          </a:p>
-        </p:txBody>
-      </p:sp>
-      <p:sp>
-        <p:nvSpPr>
-          <p:cNvPr id="31" name="Relationship có vé"/>
-          <p:cNvSpPr txBox="1"/>
-          <p:nvPr/>
-        </p:nvSpPr>
-        <p:spPr>
-          <a:xfrm>
-            <a:off x="8161020" y="3525012"/>
-            <a:ext cx="822960" cy="219456"/>
-          </a:xfrm>
-          <a:prstGeom prst="rect">
-            <a:avLst/>
-          </a:prstGeom>
-          <a:noFill/>
-          <a:ln/>
-        </p:spPr>
-        <p:txBody>
-          <a:bodyPr wrap="square" lIns="0" tIns="0" rIns="0" bIns="0" rtlCol="0" anchor="t"/>
-          <a:lstStyle/>
-          <a:p>
-            <a:pPr algn="l" indent="0" marL="0">
-              <a:buNone/>
-            </a:pPr>
-            <a:r>
-              <a:rPr lang="en-US" sz="1050" i="1" dirty="0">
-                <a:solidFill>
-                  <a:schemeClr val="tx2"/>
-                </a:solidFill>
-              </a:rPr>
-              <a:t>có vé</a:t>
-            </a:r>
-            <a:endParaRPr lang="en-US" sz="1050" dirty="0"/>
-          </a:p>
-        </p:txBody>
-      </p:sp>
-      <p:sp>
-        <p:nvSpPr>
-          <p:cNvPr id="32" name="Line KHACHHANG-VE"/>
-          <p:cNvSpPr/>
-          <p:nvPr/>
-        </p:nvSpPr>
-        <p:spPr>
-          <a:xfrm>
-            <a:off x="6263640" y="4823460"/>
-            <a:ext cx="850392" cy="0"/>
-          </a:xfrm>
-          <a:prstGeom prst="line">
-            <a:avLst/>
-          </a:prstGeom>
-          <a:noFill/>
-          <a:ln w="22225">
-            <a:solidFill>
-              <a:schemeClr val="tx1"/>
-            </a:solidFill>
-            <a:prstDash val="solid"/>
-          </a:ln>
-        </p:spPr>
-      </p:sp>
-      <p:sp>
-        <p:nvSpPr>
-          <p:cNvPr id="33" name="Relationship đặt"/>
-          <p:cNvSpPr txBox="1"/>
-          <p:nvPr/>
-        </p:nvSpPr>
-        <p:spPr>
-          <a:xfrm>
-            <a:off x="6263640" y="4549140"/>
-            <a:ext cx="850392" cy="219456"/>
-          </a:xfrm>
-          <a:prstGeom prst="rect">
-            <a:avLst/>
-          </a:prstGeom>
-          <a:noFill/>
-          <a:ln/>
-        </p:spPr>
-        <p:txBody>
-          <a:bodyPr wrap="square" lIns="0" tIns="0" rIns="0" bIns="0" rtlCol="0" anchor="t"/>
-          <a:lstStyle/>
-          <a:p>
-            <a:pPr algn="ctr" indent="0" marL="0">
-              <a:buNone/>
-            </a:pPr>
-            <a:r>
-              <a:rPr lang="en-US" sz="1050" i="1" dirty="0">
-                <a:solidFill>
-                  <a:schemeClr val="tx2"/>
-                </a:solidFill>
-              </a:rPr>
-              <a:t>đặt</a:t>
-            </a:r>
-            <a:endParaRPr lang="en-US" sz="1050" dirty="0"/>
-          </a:p>
-        </p:txBody>
-      </p:sp>
-      <p:sp>
-        <p:nvSpPr>
-          <p:cNvPr id="34" name="Cardinality 1"/>
-          <p:cNvSpPr txBox="1"/>
-          <p:nvPr/>
-        </p:nvSpPr>
-        <p:spPr>
-          <a:xfrm>
-            <a:off x="6309360" y="4860036"/>
-            <a:ext cx="274320" cy="219456"/>
-          </a:xfrm>
-          <a:prstGeom prst="rect">
-            <a:avLst/>
-          </a:prstGeom>
-          <a:noFill/>
-          <a:ln/>
-        </p:spPr>
-        <p:txBody>
-          <a:bodyPr wrap="square" lIns="0" tIns="0" rIns="0" bIns="0" rtlCol="0" anchor="t"/>
-          <a:lstStyle/>
-          <a:p>
-            <a:pPr indent="0" marL="0">
-              <a:buNone/>
-            </a:pPr>
-            <a:r>
-              <a:rPr lang="en-US" sz="1050" b="1" dirty="0">
-                <a:solidFill>
-                  <a:schemeClr val="tx1"/>
-                </a:solidFill>
-              </a:rPr>
-              <a:t>1</a:t>
-            </a:r>
-            <a:endParaRPr lang="en-US" sz="1050" dirty="0"/>
-          </a:p>
-        </p:txBody>
-      </p:sp>
-      <p:sp>
-        <p:nvSpPr>
-          <p:cNvPr id="35" name="Cardinality N"/>
-          <p:cNvSpPr txBox="1"/>
-          <p:nvPr/>
-        </p:nvSpPr>
-        <p:spPr>
-          <a:xfrm>
-            <a:off x="6793992" y="4860036"/>
-            <a:ext cx="274320" cy="219456"/>
-          </a:xfrm>
-          <a:prstGeom prst="rect">
-            <a:avLst/>
-          </a:prstGeom>
-          <a:noFill/>
-          <a:ln/>
-        </p:spPr>
-        <p:txBody>
-          <a:bodyPr wrap="square" lIns="0" tIns="0" rIns="0" bIns="0" rtlCol="0" anchor="t"/>
-          <a:lstStyle/>
-          <a:p>
-            <a:pPr algn="r" indent="0" marL="0">
-              <a:buNone/>
-            </a:pPr>
-            <a:r>
-              <a:rPr lang="en-US" sz="1050" b="1" dirty="0">
-                <a:solidFill>
-                  <a:schemeClr val="tx1"/>
-                </a:solidFill>
-              </a:rPr>
-              <a:t>N</a:t>
             </a:r>
             <a:endParaRPr lang="en-US" sz="1050" dirty="0"/>
           </a:p>
@@ -4801,12 +4757,12 @@
         </p:nvSpPr>
         <p:spPr>
           <a:xfrm>
-            <a:off x="9838944" y="4023360"/>
-            <a:ext cx="1874520" cy="1600200"/>
+            <a:off x="9144000" y="4069080"/>
+            <a:ext cx="2587752" cy="1417320"/>
           </a:xfrm>
           <a:prstGeom prst="roundRect">
             <a:avLst>
-              <a:gd name="adj" fmla="val 4571"/>
+              <a:gd name="adj" fmla="val 5161"/>
             </a:avLst>
           </a:prstGeom>
           <a:solidFill>
@@ -4828,7 +4784,7 @@
         </p:nvSpPr>
         <p:spPr>
           <a:xfrm>
-            <a:off x="9976104" y="4114800"/>
+            <a:off x="9281160" y="4160520"/>
             <a:ext cx="1645920" cy="237744"/>
           </a:xfrm>
           <a:prstGeom prst="rect">
@@ -4864,8 +4820,8 @@
         </p:nvSpPr>
         <p:spPr>
           <a:xfrm>
-            <a:off x="9976104" y="4434840"/>
-            <a:ext cx="731520" cy="219456"/>
+            <a:off x="9281160" y="4434840"/>
+            <a:ext cx="640080" cy="219456"/>
           </a:xfrm>
           <a:prstGeom prst="rect">
             <a:avLst/>
@@ -4900,8 +4856,8 @@
         </p:nvSpPr>
         <p:spPr>
           <a:xfrm>
-            <a:off x="10707624" y="4434840"/>
-            <a:ext cx="914400" cy="219456"/>
+            <a:off x="10012680" y="4434840"/>
+            <a:ext cx="1627632" cy="219456"/>
           </a:xfrm>
           <a:prstGeom prst="rect">
             <a:avLst/>
@@ -4930,14 +4886,39 @@
       </p:sp>
       <p:sp>
         <p:nvSpPr>
-          <p:cNvPr id="40" name="Legend FK sample"/>
+          <p:cNvPr id="40" name="Legend relationship swatch"/>
+          <p:cNvSpPr/>
+          <p:nvPr/>
+        </p:nvSpPr>
+        <p:spPr>
+          <a:xfrm>
+            <a:off x="9281160" y="4681728"/>
+            <a:ext cx="384048" cy="237744"/>
+          </a:xfrm>
+          <a:prstGeom prst="diamond">
+            <a:avLst/>
+          </a:prstGeom>
+          <a:solidFill>
+            <a:schemeClr val="bg1"/>
+          </a:solidFill>
+          <a:ln w="12700">
+            <a:solidFill>
+              <a:schemeClr val="tx1"/>
+            </a:solidFill>
+            <a:prstDash val="solid"/>
+          </a:ln>
+        </p:spPr>
+      </p:sp>
+      <p:sp>
+        <p:nvSpPr>
+          <p:cNvPr id="41" name="Legend relationship text"/>
           <p:cNvSpPr txBox="1"/>
           <p:nvPr/>
         </p:nvSpPr>
         <p:spPr>
           <a:xfrm>
-            <a:off x="9976104" y="4736592"/>
-            <a:ext cx="731520" cy="219456"/>
+            <a:off x="10012680" y="4690872"/>
+            <a:ext cx="1627632" cy="219456"/>
           </a:xfrm>
           <a:prstGeom prst="rect">
             <a:avLst/>
@@ -4953,12 +4934,12 @@
               <a:buNone/>
             </a:pPr>
             <a:r>
-              <a:rPr lang="en-US" sz="1050" i="1" dirty="0">
-                <a:solidFill>
-                  <a:schemeClr val="tx2"/>
-                </a:solidFill>
-              </a:rPr>
-              <a:t>MaXX</a:t>
+              <a:rPr lang="en-US" sz="1050" dirty="0">
+                <a:solidFill>
+                  <a:schemeClr val="tx1"/>
+                </a:solidFill>
+              </a:rPr>
+              <a:t>Quan hệ</a:t>
             </a:r>
             <a:endParaRPr lang="en-US" sz="1050" dirty="0"/>
           </a:p>
@@ -4966,50 +4947,14 @@
       </p:sp>
       <p:sp>
         <p:nvSpPr>
-          <p:cNvPr id="41" name="Legend FK text"/>
-          <p:cNvSpPr txBox="1"/>
-          <p:nvPr/>
-        </p:nvSpPr>
-        <p:spPr>
-          <a:xfrm>
-            <a:off x="10707624" y="4736592"/>
-            <a:ext cx="914400" cy="219456"/>
-          </a:xfrm>
-          <a:prstGeom prst="rect">
-            <a:avLst/>
-          </a:prstGeom>
-          <a:noFill/>
-          <a:ln/>
-        </p:spPr>
-        <p:txBody>
-          <a:bodyPr wrap="square" lIns="0" tIns="0" rIns="0" bIns="0" rtlCol="0" anchor="t"/>
-          <a:lstStyle/>
-          <a:p>
-            <a:pPr indent="0" marL="0">
-              <a:buNone/>
-            </a:pPr>
-            <a:r>
-              <a:rPr lang="en-US" sz="1050" dirty="0">
-                <a:solidFill>
-                  <a:schemeClr val="tx1"/>
-                </a:solidFill>
-              </a:rPr>
-              <a:t>Khóa ngoại</a:t>
-            </a:r>
-            <a:endParaRPr lang="en-US" sz="1050" dirty="0"/>
-          </a:p>
-        </p:txBody>
-      </p:sp>
-      <p:sp>
-        <p:nvSpPr>
-          <p:cNvPr id="42" name="Legend junction swatch"/>
+          <p:cNvPr id="42" name="Legend associative swatch"/>
           <p:cNvSpPr/>
           <p:nvPr/>
         </p:nvSpPr>
         <p:spPr>
           <a:xfrm>
-            <a:off x="9976104" y="5065776"/>
-            <a:ext cx="502920" cy="182880"/>
+            <a:off x="9281160" y="4965192"/>
+            <a:ext cx="384048" cy="182880"/>
           </a:xfrm>
           <a:prstGeom prst="rect">
             <a:avLst/>
@@ -5027,14 +4972,14 @@
       </p:sp>
       <p:sp>
         <p:nvSpPr>
-          <p:cNvPr id="43" name="Legend junction text"/>
+          <p:cNvPr id="43" name="Legend associative text"/>
           <p:cNvSpPr txBox="1"/>
           <p:nvPr/>
         </p:nvSpPr>
         <p:spPr>
           <a:xfrm>
-            <a:off x="10707624" y="5047488"/>
-            <a:ext cx="960120" cy="219456"/>
+            <a:off x="10012680" y="4946904"/>
+            <a:ext cx="1627632" cy="219456"/>
           </a:xfrm>
           <a:prstGeom prst="rect">
             <a:avLst/>
@@ -5055,7 +5000,7 @@
                   <a:schemeClr val="tx1"/>
                 </a:solidFill>
               </a:rPr>
-              <a:t>Bảng liên kết</a:t>
+              <a:t>Thực thể kết hợp</a:t>
             </a:r>
             <a:endParaRPr lang="en-US" sz="1050" dirty="0"/>
           </a:p>
@@ -5069,8 +5014,8 @@
         </p:nvSpPr>
         <p:spPr>
           <a:xfrm>
-            <a:off x="9976104" y="5321808"/>
-            <a:ext cx="731520" cy="219456"/>
+            <a:off x="9281160" y="5202936"/>
+            <a:ext cx="640080" cy="219456"/>
           </a:xfrm>
           <a:prstGeom prst="rect">
             <a:avLst/>
@@ -5105,8 +5050,8 @@
         </p:nvSpPr>
         <p:spPr>
           <a:xfrm>
-            <a:off x="10707624" y="5321808"/>
-            <a:ext cx="960120" cy="219456"/>
+            <a:off x="10012680" y="5202936"/>
+            <a:ext cx="1627632" cy="219456"/>
           </a:xfrm>
           <a:prstGeom prst="rect">
             <a:avLst/>
@@ -5141,12 +5086,12 @@
         </p:nvSpPr>
         <p:spPr>
           <a:xfrm>
-            <a:off x="4389120" y="5760720"/>
-            <a:ext cx="7324344" cy="548640"/>
+            <a:off x="4389120" y="5669280"/>
+            <a:ext cx="7342632" cy="640080"/>
           </a:xfrm>
           <a:prstGeom prst="roundRect">
             <a:avLst>
-              <a:gd name="adj" fmla="val 13333"/>
+              <a:gd name="adj" fmla="val 11429"/>
             </a:avLst>
           </a:prstGeom>
           <a:solidFill>
@@ -5168,8 +5113,8 @@
         </p:nvSpPr>
         <p:spPr>
           <a:xfrm>
-            <a:off x="4526280" y="5760720"/>
-            <a:ext cx="7050024" cy="548640"/>
+            <a:off x="4526280" y="5669280"/>
+            <a:ext cx="7068312" cy="640080"/>
           </a:xfrm>
           <a:prstGeom prst="rect">
             <a:avLst/>
@@ -5190,7 +5135,7 @@
                   <a:schemeClr val="tx1"/>
                 </a:solidFill>
               </a:rPr>
-              <a:t>Quan hệ N – N </a:t>
+              <a:t>Quan hệ N – N: </a:t>
             </a:r>
             <a:pPr indent="0" marL="0">
               <a:buNone/>
@@ -5201,7 +5146,7 @@
                   <a:schemeClr val="tx1"/>
                 </a:solidFill>
               </a:rPr>
-              <a:t>được tách thành hai quan hệ 1 – N qua bảng liên kết: KHACHHANG – SUATCHIEU qua bảng VE; PHIM – PHONGCHIEU qua bảng SUATCHIEU.</a:t>
+              <a:t>KHACHHANG – SUATCHIEU (qua thực thể kết hợp VE) và PHIM – PHONGCHIEU (qua SUATCHIEU). Khi chuyển sang lược đồ quan hệ, quan hệ 1 – N trở thành khóa ngoại ở phía N (slide 4).</a:t>
             </a:r>
             <a:endParaRPr lang="en-US" sz="1200" dirty="0"/>
           </a:p>
@@ -5730,7 +5675,7 @@
                   <a:schemeClr val="tx1"/>
                 </a:solidFill>
               </a:rPr>
-              <a:t>SoGhe</a:t>
+              <a:t>SucChua</a:t>
             </a:r>
             <a:pPr indent="0" marL="0">
               <a:lnSpc>
@@ -6443,7 +6388,7 @@
                   <a:schemeClr val="tx1"/>
                 </a:solidFill>
               </a:rPr>
-              <a:t>ThoiLuong &gt; 0;  SoGhe &gt; 0;  GiaVe ≥ 0</a:t>
+              <a:t>ThoiLuong &gt; 0;  SucChua &gt; 0;  GiaVe ≥ 0</a:t>
             </a:r>
             <a:endParaRPr lang="en-US" sz="1500" dirty="0"/>
           </a:p>
@@ -8173,7 +8118,7 @@
                             <a:schemeClr val="tx1"/>
                           </a:solidFill>
                         </a:rPr>
-                        <a:t>SoGhe</a:t>
+                        <a:t>SucChua</a:t>
                       </a:r>
                       <a:endParaRPr lang="en-US" sz="1000" dirty="0"/>
                     </a:p>

--- a/hqtcsdl-giuaky/quan_ly_rap_phim.pptx
+++ b/hqtcsdl-giuaky/quan_ly_rap_phim.pptx
@@ -114,26 +114,26 @@
   <p:extLst>
     <p:ext uri="{521415D9-36F7-43E2-AB2F-B90AF26B5E84}">
       <p14:sectionLst xmlns:p14="http://schemas.microsoft.com/office/powerpoint/2010/main">
-        <p14:section name="Mở đầu" id="{1fa5f9e7-70f5-5903-da9b-524824c1d9c0}">
+        <p14:section name="Mở đầu" id="{79094d74-55c0-d00c-0f3e-888290b579f2}">
           <p14:sldIdLst>
             <p14:sldId id="256"/>
             <p14:sldId id="257"/>
           </p14:sldIdLst>
         </p14:section>
-        <p14:section name="Phân tích và thiết kế" id="{cbfe3d85-7b22-c73c-59b4-f84f49f88dea}">
+        <p14:section name="Phân tích và thiết kế" id="{dac4d42e-a018-7637-5f77-154e238ee1d3}">
           <p14:sldIdLst>
             <p14:sldId id="258"/>
             <p14:sldId id="259"/>
             <p14:sldId id="260"/>
           </p14:sldIdLst>
         </p14:section>
-        <p14:section name="Cài đặt" id="{33f4b411-20e2-97a5-6f09-af499b437602}">
+        <p14:section name="Cài đặt" id="{414bcc83-f3d3-c12e-ecc8-5fb85ccb413a}">
           <p14:sldIdLst>
             <p14:sldId id="261"/>
             <p14:sldId id="262"/>
           </p14:sldIdLst>
         </p14:section>
-        <p14:section name="Kết thúc" id="{691fbfb6-e8b3-23cf-34a7-a4d11431b010}">
+        <p14:section name="Kết thúc" id="{35664195-e91a-9e2c-75a8-4767cb9fde64}">
           <p14:sldIdLst>
             <p14:sldId id="263"/>
           </p14:sldIdLst>
@@ -718,7 +718,7 @@
           <a:p>
             <a:r>
               <a:rPr lang="en-US" dirty="0"/>
-              <a:t>Slide 3 - Mô tả yêu cầu quản lý. Công ty Giải trí Ánh Sao (dữ liệu mô phỏng) kinh doanh cụm rạp chiếu phim. Năm đối tượng cần quản lý: phim, phòng chiếu, suất chiếu, khách hàng, vé; hoạt động chính là bán vé. Nêu quy tắc của từng đối tượng: một phim và một phòng có nhiều suất chiếu; một suất chiếu có nhiều vé; một khách hàng đặt nhiều vé; một ghế chỉ bán một lần cho mỗi suất.</a:t>
+              <a:t>Slide 3 - Mô tả yêu cầu quản lý. Công ty Giải trí Ánh Sao (dữ liệu mô phỏng) kinh doanh cụm rạp chiếu phim. Năm đối tượng cần quản lý: phim, phòng chiếu, suất chiếu, khách hàng, vé; hoạt động chính là bán vé. Nêu quy tắc của từng đối tượng: một phim và một phòng có nhiều suất chiếu; một suất chiếu có nhiều vé; một khách hàng đặt nhiều vé. Vé không có mã riêng: mỗi vé xác định bằng suất chiếu và số ghế, nên một ghế chỉ bán một lần cho mỗi suất.</a:t>
             </a:r>
             <a:endParaRPr lang="en-US" dirty="0"/>
           </a:p>
@@ -806,7 +806,7 @@
           <a:p>
             <a:r>
               <a:rPr lang="en-US" dirty="0"/>
-              <a:t>Slide 4 - Mô hình ER. Có 5 thực thể: PHIM, PHONGCHIEU, SUATCHIEU, KHACHHANG, VE (khóa chính được gạch chân). Quan hệ: PHIM 1-N SUATCHIEU (chiếu), PHONGCHIEU 1-N SUATCHIEU (tại), SUATCHIEU 1-N VE (bán), KHACHHANG 1-N VE (đặt). Giữa KHACHHANG và SUATCHIEU là quan hệ nhiều-nhiều (một khách đặt nhiều suất, một suất có nhiều khách) nên cần thực thể kết hợp VE; tương tự PHIM và PHONGCHIEU là nhiều-nhiều qua SUATCHIEU. Mô hình ER không ghi khóa ngoại; khóa ngoại xuất hiện khi chuyển sang lược đồ quan hệ ở slide 5.</a:t>
+              <a:t>Slide 4 - Mô hình ER theo ký hiệu Chen: hình chữ nhật là thực thể, hình elip là thuộc tính, hình thoi là quan hệ, 1 và N là bản số. Có 4 thực thể mạnh (PHIM, PHONGCHIEU, SUATCHIEU, KHACHHANG) và 1 thực thể yếu VE. VE không có mã riêng: mỗi vé được xác định bởi suất chiếu và số ghế. Thực thể chủ của VE là SUATCHIEU, quan hệ xác định là 'bán' (hình thoi viền đôi), SoGhe là khóa bộ phận (gạch chân đứt), VE tham gia toàn phần (đường đôi) vì vé nào cũng phải thuộc một suất chiếu. Các quan hệ: PHIM 1-N SUATCHIEU (chiếu), PHONGCHIEU 1-N SUATCHIEU (tại), SUATCHIEU 1-N VE (bán), KHACHHANG 1-N VE (đặt). KHACHHANG và SUATCHIEU có quan hệ N-N thể hiện qua VE; PHIM và PHONGCHIEU N-N qua thực thể kết hợp SUATCHIEU.</a:t>
             </a:r>
             <a:endParaRPr lang="en-US" dirty="0"/>
           </a:p>
@@ -894,7 +894,7 @@
           <a:p>
             <a:r>
               <a:rPr lang="en-US" dirty="0"/>
-              <a:t>Slide 5 - Lược đồ quan hệ, chuyển từ mô hình ER: mỗi thực thể thành một bảng, mỗi thuộc tính thành một cột, quan hệ 1-N thành khóa ngoại ở phía N. Khóa chính gạch chân, khóa ngoại in nghiêng. Có 5 bảng và 4 khóa ngoại: SUATCHIEU tham chiếu PHIM và PHONGCHIEU; VE tham chiếu SUATCHIEU và KHACHHANG.</a:t>
+              <a:t>Slide 5 - Lược đồ quan hệ, chuyển từ mô hình ER: mỗi thực thể thành một bảng, mỗi thuộc tính thành một cột, quan hệ 1-N thành khóa ngoại ở phía N. Khóa chính gạch chân, khóa ngoại in nghiêng. Có 5 bảng và 4 khóa ngoại: SUATCHIEU tham chiếu PHIM và PHONGCHIEU; VE tham chiếu SUATCHIEU và KHACHHANG. VE là thực thể yếu nên khóa chính gồm MaSuat (khóa của thực thể chủ, đồng thời là khóa ngoại) và SoGhe (khóa bộ phận).</a:t>
             </a:r>
             <a:endParaRPr lang="en-US" dirty="0"/>
           </a:p>
@@ -1070,7 +1070,7 @@
           <a:p>
             <a:r>
               <a:rPr lang="en-US" dirty="0"/>
-              <a:t>Slide 7 - Ràng buộc toàn vẹn gồm: miền giá trị (CHECK), khóa chính, khóa ngoại và ràng buộc khác (UNIQUE, NOT NULL). Có thể demo bằng 6 lệnh INSERT sai ở cuối file quan_ly_rap_phim.sql: mỗi lệnh đều bị MySQL từ chối. Lưu ý: CHECK chỉ có tác dụng trên MySQL 8.0.16 trở lên.</a:t>
+              <a:t>Slide 7 - Ràng buộc toàn vẹn gồm: miền giá trị (CHECK), khóa chính, khóa ngoại và ràng buộc khác (UNIQUE, NOT NULL). Có thể demo bằng 6 lệnh INSERT sai ở cuối file quan_ly_rap_phim.sql: mỗi lệnh đều bị MySQL từ chối. Khóa ngoại VE.MaSuat dùng ON DELETE CASCADE: xóa suất chiếu (thực thể chủ) thì các vé của suất đó bị xóa theo. Lưu ý: CHECK chỉ có tác dụng trên MySQL 8.0.16 trở lên.</a:t>
             </a:r>
             <a:endParaRPr lang="en-US" dirty="0"/>
           </a:p>
@@ -4660,7 +4660,7 @@
                   <a:schemeClr val="tx1"/>
                 </a:solidFill>
               </a:rPr>
-              <a:t>Mỗi vé có mã vé, số ghế và ngày đặt</a:t>
+              <a:t>Vé không có mã riêng, được xác định bằng suất chiếu và số ghế</a:t>
             </a:r>
             <a:endParaRPr lang="en-US" sz="1400" dirty="0"/>
           </a:p>
@@ -4678,7 +4678,7 @@
                   <a:schemeClr val="tx1"/>
                 </a:solidFill>
               </a:rPr>
-              <a:t>Mỗi vé thuộc một khách hàng và một suất chiếu; một ghế chỉ bán một lần cho mỗi suất</a:t>
+              <a:t>Mỗi vé có ngày đặt và thuộc một khách hàng</a:t>
             </a:r>
             <a:endParaRPr lang="en-US" sz="1400" dirty="0"/>
           </a:p>
@@ -4933,14 +4933,451 @@
       </p:sp>
       <p:sp>
         <p:nvSpPr>
-          <p:cNvPr id="3" name="Line PHIM-SUATCHIEU"/>
+          <p:cNvPr id="3" name="Shape 1"/>
           <p:cNvSpPr/>
           <p:nvPr/>
         </p:nvSpPr>
         <p:spPr>
           <a:xfrm>
-            <a:off x="2926080" y="2217420"/>
-            <a:ext cx="1933956" cy="0"/>
+            <a:off x="777240" y="1600200"/>
+            <a:ext cx="960120" cy="1143000"/>
+          </a:xfrm>
+          <a:prstGeom prst="line">
+            <a:avLst/>
+          </a:prstGeom>
+          <a:noFill/>
+          <a:ln w="12700">
+            <a:solidFill>
+              <a:schemeClr val="tx1"/>
+            </a:solidFill>
+            <a:prstDash val="solid"/>
+          </a:ln>
+        </p:spPr>
+      </p:sp>
+      <p:sp>
+        <p:nvSpPr>
+          <p:cNvPr id="4" name="Shape 2"/>
+          <p:cNvSpPr/>
+          <p:nvPr/>
+        </p:nvSpPr>
+        <p:spPr>
+          <a:xfrm flipV="1">
+            <a:off x="1737360" y="1463040"/>
+            <a:ext cx="411480" cy="1280160"/>
+          </a:xfrm>
+          <a:prstGeom prst="line">
+            <a:avLst/>
+          </a:prstGeom>
+          <a:noFill/>
+          <a:ln w="12700">
+            <a:solidFill>
+              <a:schemeClr val="tx1"/>
+            </a:solidFill>
+            <a:prstDash val="solid"/>
+          </a:ln>
+        </p:spPr>
+      </p:sp>
+      <p:sp>
+        <p:nvSpPr>
+          <p:cNvPr id="5" name="Shape 3"/>
+          <p:cNvSpPr/>
+          <p:nvPr/>
+        </p:nvSpPr>
+        <p:spPr>
+          <a:xfrm flipV="1">
+            <a:off x="1737360" y="1645920"/>
+            <a:ext cx="1691640" cy="1097280"/>
+          </a:xfrm>
+          <a:prstGeom prst="line">
+            <a:avLst/>
+          </a:prstGeom>
+          <a:noFill/>
+          <a:ln w="12700">
+            <a:solidFill>
+              <a:schemeClr val="tx1"/>
+            </a:solidFill>
+            <a:prstDash val="solid"/>
+          </a:ln>
+        </p:spPr>
+      </p:sp>
+      <p:sp>
+        <p:nvSpPr>
+          <p:cNvPr id="6" name="Shape 4"/>
+          <p:cNvSpPr/>
+          <p:nvPr/>
+        </p:nvSpPr>
+        <p:spPr>
+          <a:xfrm flipV="1">
+            <a:off x="960120" y="2743200"/>
+            <a:ext cx="777240" cy="1005840"/>
+          </a:xfrm>
+          <a:prstGeom prst="line">
+            <a:avLst/>
+          </a:prstGeom>
+          <a:noFill/>
+          <a:ln w="12700">
+            <a:solidFill>
+              <a:schemeClr val="tx1"/>
+            </a:solidFill>
+            <a:prstDash val="solid"/>
+          </a:ln>
+        </p:spPr>
+      </p:sp>
+      <p:sp>
+        <p:nvSpPr>
+          <p:cNvPr id="7" name="Shape 5"/>
+          <p:cNvSpPr/>
+          <p:nvPr/>
+        </p:nvSpPr>
+        <p:spPr>
+          <a:xfrm>
+            <a:off x="1737360" y="2743200"/>
+            <a:ext cx="731520" cy="1005840"/>
+          </a:xfrm>
+          <a:prstGeom prst="line">
+            <a:avLst/>
+          </a:prstGeom>
+          <a:noFill/>
+          <a:ln w="12700">
+            <a:solidFill>
+              <a:schemeClr val="tx1"/>
+            </a:solidFill>
+            <a:prstDash val="solid"/>
+          </a:ln>
+        </p:spPr>
+      </p:sp>
+      <p:sp>
+        <p:nvSpPr>
+          <p:cNvPr id="8" name="Shape 6"/>
+          <p:cNvSpPr/>
+          <p:nvPr/>
+        </p:nvSpPr>
+        <p:spPr>
+          <a:xfrm>
+            <a:off x="9692640" y="1554480"/>
+            <a:ext cx="731520" cy="1188720"/>
+          </a:xfrm>
+          <a:prstGeom prst="line">
+            <a:avLst/>
+          </a:prstGeom>
+          <a:noFill/>
+          <a:ln w="12700">
+            <a:solidFill>
+              <a:schemeClr val="tx1"/>
+            </a:solidFill>
+            <a:prstDash val="solid"/>
+          </a:ln>
+        </p:spPr>
+      </p:sp>
+      <p:sp>
+        <p:nvSpPr>
+          <p:cNvPr id="9" name="Shape 7"/>
+          <p:cNvSpPr/>
+          <p:nvPr/>
+        </p:nvSpPr>
+        <p:spPr>
+          <a:xfrm flipV="1">
+            <a:off x="10424160" y="1554480"/>
+            <a:ext cx="731520" cy="1188720"/>
+          </a:xfrm>
+          <a:prstGeom prst="line">
+            <a:avLst/>
+          </a:prstGeom>
+          <a:noFill/>
+          <a:ln w="12700">
+            <a:solidFill>
+              <a:schemeClr val="tx1"/>
+            </a:solidFill>
+            <a:prstDash val="solid"/>
+          </a:ln>
+        </p:spPr>
+      </p:sp>
+      <p:sp>
+        <p:nvSpPr>
+          <p:cNvPr id="10" name="Shape 8"/>
+          <p:cNvSpPr/>
+          <p:nvPr/>
+        </p:nvSpPr>
+        <p:spPr>
+          <a:xfrm flipV="1">
+            <a:off x="9692640" y="2743200"/>
+            <a:ext cx="731520" cy="1005840"/>
+          </a:xfrm>
+          <a:prstGeom prst="line">
+            <a:avLst/>
+          </a:prstGeom>
+          <a:noFill/>
+          <a:ln w="12700">
+            <a:solidFill>
+              <a:schemeClr val="tx1"/>
+            </a:solidFill>
+            <a:prstDash val="solid"/>
+          </a:ln>
+        </p:spPr>
+      </p:sp>
+      <p:sp>
+        <p:nvSpPr>
+          <p:cNvPr id="11" name="Shape 9"/>
+          <p:cNvSpPr/>
+          <p:nvPr/>
+        </p:nvSpPr>
+        <p:spPr>
+          <a:xfrm>
+            <a:off x="10424160" y="2743200"/>
+            <a:ext cx="731520" cy="1005840"/>
+          </a:xfrm>
+          <a:prstGeom prst="line">
+            <a:avLst/>
+          </a:prstGeom>
+          <a:noFill/>
+          <a:ln w="12700">
+            <a:solidFill>
+              <a:schemeClr val="tx1"/>
+            </a:solidFill>
+            <a:prstDash val="solid"/>
+          </a:ln>
+        </p:spPr>
+      </p:sp>
+      <p:sp>
+        <p:nvSpPr>
+          <p:cNvPr id="12" name="Shape 10"/>
+          <p:cNvSpPr/>
+          <p:nvPr/>
+        </p:nvSpPr>
+        <p:spPr>
+          <a:xfrm>
+            <a:off x="5349240" y="1554480"/>
+            <a:ext cx="749808" cy="1188720"/>
+          </a:xfrm>
+          <a:prstGeom prst="line">
+            <a:avLst/>
+          </a:prstGeom>
+          <a:noFill/>
+          <a:ln w="12700">
+            <a:solidFill>
+              <a:schemeClr val="tx1"/>
+            </a:solidFill>
+            <a:prstDash val="solid"/>
+          </a:ln>
+        </p:spPr>
+      </p:sp>
+      <p:sp>
+        <p:nvSpPr>
+          <p:cNvPr id="13" name="Shape 11"/>
+          <p:cNvSpPr/>
+          <p:nvPr/>
+        </p:nvSpPr>
+        <p:spPr>
+          <a:xfrm flipV="1">
+            <a:off x="6099048" y="1554480"/>
+            <a:ext cx="713232" cy="1188720"/>
+          </a:xfrm>
+          <a:prstGeom prst="line">
+            <a:avLst/>
+          </a:prstGeom>
+          <a:noFill/>
+          <a:ln w="12700">
+            <a:solidFill>
+              <a:schemeClr val="tx1"/>
+            </a:solidFill>
+            <a:prstDash val="solid"/>
+          </a:ln>
+        </p:spPr>
+      </p:sp>
+      <p:sp>
+        <p:nvSpPr>
+          <p:cNvPr id="14" name="Shape 12"/>
+          <p:cNvSpPr/>
+          <p:nvPr/>
+        </p:nvSpPr>
+        <p:spPr>
+          <a:xfrm flipV="1">
+            <a:off x="4709160" y="2743200"/>
+            <a:ext cx="1389888" cy="960120"/>
+          </a:xfrm>
+          <a:prstGeom prst="line">
+            <a:avLst/>
+          </a:prstGeom>
+          <a:noFill/>
+          <a:ln w="12700">
+            <a:solidFill>
+              <a:schemeClr val="tx1"/>
+            </a:solidFill>
+            <a:prstDash val="solid"/>
+          </a:ln>
+        </p:spPr>
+      </p:sp>
+      <p:sp>
+        <p:nvSpPr>
+          <p:cNvPr id="15" name="Shape 13"/>
+          <p:cNvSpPr/>
+          <p:nvPr/>
+        </p:nvSpPr>
+        <p:spPr>
+          <a:xfrm>
+            <a:off x="6099048" y="2743200"/>
+            <a:ext cx="1399032" cy="960120"/>
+          </a:xfrm>
+          <a:prstGeom prst="line">
+            <a:avLst/>
+          </a:prstGeom>
+          <a:noFill/>
+          <a:ln w="12700">
+            <a:solidFill>
+              <a:schemeClr val="tx1"/>
+            </a:solidFill>
+            <a:prstDash val="solid"/>
+          </a:ln>
+        </p:spPr>
+      </p:sp>
+      <p:sp>
+        <p:nvSpPr>
+          <p:cNvPr id="16" name="Shape 14"/>
+          <p:cNvSpPr/>
+          <p:nvPr/>
+        </p:nvSpPr>
+        <p:spPr>
+          <a:xfrm flipV="1">
+            <a:off x="777240" y="5212080"/>
+            <a:ext cx="960120" cy="914400"/>
+          </a:xfrm>
+          <a:prstGeom prst="line">
+            <a:avLst/>
+          </a:prstGeom>
+          <a:noFill/>
+          <a:ln w="12700">
+            <a:solidFill>
+              <a:schemeClr val="tx1"/>
+            </a:solidFill>
+            <a:prstDash val="solid"/>
+          </a:ln>
+        </p:spPr>
+      </p:sp>
+      <p:sp>
+        <p:nvSpPr>
+          <p:cNvPr id="17" name="Shape 15"/>
+          <p:cNvSpPr/>
+          <p:nvPr/>
+        </p:nvSpPr>
+        <p:spPr>
+          <a:xfrm>
+            <a:off x="1737360" y="5212080"/>
+            <a:ext cx="411480" cy="914400"/>
+          </a:xfrm>
+          <a:prstGeom prst="line">
+            <a:avLst/>
+          </a:prstGeom>
+          <a:noFill/>
+          <a:ln w="12700">
+            <a:solidFill>
+              <a:schemeClr val="tx1"/>
+            </a:solidFill>
+            <a:prstDash val="solid"/>
+          </a:ln>
+        </p:spPr>
+      </p:sp>
+      <p:sp>
+        <p:nvSpPr>
+          <p:cNvPr id="18" name="Shape 16"/>
+          <p:cNvSpPr/>
+          <p:nvPr/>
+        </p:nvSpPr>
+        <p:spPr>
+          <a:xfrm>
+            <a:off x="1737360" y="5212080"/>
+            <a:ext cx="1737360" cy="914400"/>
+          </a:xfrm>
+          <a:prstGeom prst="line">
+            <a:avLst/>
+          </a:prstGeom>
+          <a:noFill/>
+          <a:ln w="12700">
+            <a:solidFill>
+              <a:schemeClr val="tx1"/>
+            </a:solidFill>
+            <a:prstDash val="solid"/>
+          </a:ln>
+        </p:spPr>
+      </p:sp>
+      <p:sp>
+        <p:nvSpPr>
+          <p:cNvPr id="19" name="Shape 17"/>
+          <p:cNvSpPr/>
+          <p:nvPr/>
+        </p:nvSpPr>
+        <p:spPr>
+          <a:xfrm>
+            <a:off x="731520" y="4434840"/>
+            <a:ext cx="1005840" cy="777240"/>
+          </a:xfrm>
+          <a:prstGeom prst="line">
+            <a:avLst/>
+          </a:prstGeom>
+          <a:noFill/>
+          <a:ln w="12700">
+            <a:solidFill>
+              <a:schemeClr val="tx1"/>
+            </a:solidFill>
+            <a:prstDash val="solid"/>
+          </a:ln>
+        </p:spPr>
+      </p:sp>
+      <p:sp>
+        <p:nvSpPr>
+          <p:cNvPr id="20" name="Shape 18"/>
+          <p:cNvSpPr/>
+          <p:nvPr/>
+        </p:nvSpPr>
+        <p:spPr>
+          <a:xfrm flipV="1">
+            <a:off x="5486400" y="5212080"/>
+            <a:ext cx="612648" cy="914400"/>
+          </a:xfrm>
+          <a:prstGeom prst="line">
+            <a:avLst/>
+          </a:prstGeom>
+          <a:noFill/>
+          <a:ln w="12700">
+            <a:solidFill>
+              <a:schemeClr val="tx1"/>
+            </a:solidFill>
+            <a:prstDash val="solid"/>
+          </a:ln>
+        </p:spPr>
+      </p:sp>
+      <p:sp>
+        <p:nvSpPr>
+          <p:cNvPr id="21" name="Shape 19"/>
+          <p:cNvSpPr/>
+          <p:nvPr/>
+        </p:nvSpPr>
+        <p:spPr>
+          <a:xfrm>
+            <a:off x="6099048" y="5212080"/>
+            <a:ext cx="758952" cy="914400"/>
+          </a:xfrm>
+          <a:prstGeom prst="line">
+            <a:avLst/>
+          </a:prstGeom>
+          <a:noFill/>
+          <a:ln w="12700">
+            <a:solidFill>
+              <a:schemeClr val="tx1"/>
+            </a:solidFill>
+            <a:prstDash val="solid"/>
+          </a:ln>
+        </p:spPr>
+      </p:sp>
+      <p:sp>
+        <p:nvSpPr>
+          <p:cNvPr id="22" name="Shape 20"/>
+          <p:cNvSpPr/>
+          <p:nvPr/>
+        </p:nvSpPr>
+        <p:spPr>
+          <a:xfrm>
+            <a:off x="1737360" y="2743200"/>
+            <a:ext cx="2176272" cy="0"/>
           </a:xfrm>
           <a:prstGeom prst="line">
             <a:avLst/>
@@ -4956,128 +5393,14 @@
       </p:sp>
       <p:sp>
         <p:nvSpPr>
-          <p:cNvPr id="4" name="Relationship PHIM-SUATCHIEU"/>
+          <p:cNvPr id="23" name="Shape 21"/>
           <p:cNvSpPr/>
           <p:nvPr/>
         </p:nvSpPr>
         <p:spPr>
           <a:xfrm>
-            <a:off x="3298698" y="1879092"/>
-            <a:ext cx="1188720" cy="676656"/>
-          </a:xfrm>
-          <a:prstGeom prst="diamond">
-            <a:avLst/>
-          </a:prstGeom>
-          <a:solidFill>
-            <a:schemeClr val="bg1"/>
-          </a:solidFill>
-          <a:ln w="15875">
-            <a:solidFill>
-              <a:schemeClr val="tx1"/>
-            </a:solidFill>
-          </a:ln>
-        </p:spPr>
-        <p:txBody>
-          <a:bodyPr wrap="square" lIns="0" tIns="0" rIns="0" bIns="0" rtlCol="0" anchor="ctr"/>
-          <a:lstStyle/>
-          <a:p>
-            <a:pPr algn="ctr" indent="0" marL="0">
-              <a:buNone/>
-            </a:pPr>
-            <a:r>
-              <a:rPr lang="en-US" sz="1200" b="1" dirty="0">
-                <a:solidFill>
-                  <a:schemeClr val="tx1"/>
-                </a:solidFill>
-              </a:rPr>
-              <a:t>chiếu</a:t>
-            </a:r>
-            <a:endParaRPr lang="en-US" sz="1200" dirty="0"/>
-          </a:p>
-        </p:txBody>
-      </p:sp>
-      <p:sp>
-        <p:nvSpPr>
-          <p:cNvPr id="5" name="Cardinality 1"/>
-          <p:cNvSpPr txBox="1"/>
-          <p:nvPr/>
-        </p:nvSpPr>
-        <p:spPr>
-          <a:xfrm>
-            <a:off x="2971800" y="1924812"/>
-            <a:ext cx="237744" cy="237744"/>
-          </a:xfrm>
-          <a:prstGeom prst="rect">
-            <a:avLst/>
-          </a:prstGeom>
-          <a:noFill/>
-          <a:ln/>
-        </p:spPr>
-        <p:txBody>
-          <a:bodyPr wrap="square" lIns="0" tIns="0" rIns="0" bIns="0" rtlCol="0" anchor="t"/>
-          <a:lstStyle/>
-          <a:p>
-            <a:pPr algn="l" indent="0" marL="0">
-              <a:buNone/>
-            </a:pPr>
-            <a:r>
-              <a:rPr lang="en-US" sz="1300" b="1" dirty="0">
-                <a:solidFill>
-                  <a:schemeClr val="tx1"/>
-                </a:solidFill>
-              </a:rPr>
-              <a:t>1</a:t>
-            </a:r>
-            <a:endParaRPr lang="en-US" sz="1300" dirty="0"/>
-          </a:p>
-        </p:txBody>
-      </p:sp>
-      <p:sp>
-        <p:nvSpPr>
-          <p:cNvPr id="6" name="Cardinality N"/>
-          <p:cNvSpPr txBox="1"/>
-          <p:nvPr/>
-        </p:nvSpPr>
-        <p:spPr>
-          <a:xfrm>
-            <a:off x="4576572" y="1924812"/>
-            <a:ext cx="237744" cy="237744"/>
-          </a:xfrm>
-          <a:prstGeom prst="rect">
-            <a:avLst/>
-          </a:prstGeom>
-          <a:noFill/>
-          <a:ln/>
-        </p:spPr>
-        <p:txBody>
-          <a:bodyPr wrap="square" lIns="0" tIns="0" rIns="0" bIns="0" rtlCol="0" anchor="t"/>
-          <a:lstStyle/>
-          <a:p>
-            <a:pPr algn="r" indent="0" marL="0">
-              <a:buNone/>
-            </a:pPr>
-            <a:r>
-              <a:rPr lang="en-US" sz="1300" b="1" dirty="0">
-                <a:solidFill>
-                  <a:schemeClr val="tx1"/>
-                </a:solidFill>
-              </a:rPr>
-              <a:t>N</a:t>
-            </a:r>
-            <a:endParaRPr lang="en-US" sz="1300" dirty="0"/>
-          </a:p>
-        </p:txBody>
-      </p:sp>
-      <p:sp>
-        <p:nvSpPr>
-          <p:cNvPr id="7" name="Line PHONGCHIEU-SUATCHIEU"/>
-          <p:cNvSpPr/>
-          <p:nvPr/>
-        </p:nvSpPr>
-        <p:spPr>
-          <a:xfrm>
-            <a:off x="7328916" y="2217420"/>
-            <a:ext cx="1933956" cy="0"/>
+            <a:off x="3913632" y="2743200"/>
+            <a:ext cx="2185416" cy="0"/>
           </a:xfrm>
           <a:prstGeom prst="line">
             <a:avLst/>
@@ -5093,128 +5416,14 @@
       </p:sp>
       <p:sp>
         <p:nvSpPr>
-          <p:cNvPr id="8" name="Relationship PHONGCHIEU-SUATCHIEU"/>
+          <p:cNvPr id="24" name="Shape 22"/>
           <p:cNvSpPr/>
           <p:nvPr/>
         </p:nvSpPr>
         <p:spPr>
           <a:xfrm>
-            <a:off x="7701534" y="1879092"/>
-            <a:ext cx="1188720" cy="676656"/>
-          </a:xfrm>
-          <a:prstGeom prst="diamond">
-            <a:avLst/>
-          </a:prstGeom>
-          <a:solidFill>
-            <a:schemeClr val="bg1"/>
-          </a:solidFill>
-          <a:ln w="15875">
-            <a:solidFill>
-              <a:schemeClr val="tx1"/>
-            </a:solidFill>
-          </a:ln>
-        </p:spPr>
-        <p:txBody>
-          <a:bodyPr wrap="square" lIns="0" tIns="0" rIns="0" bIns="0" rtlCol="0" anchor="ctr"/>
-          <a:lstStyle/>
-          <a:p>
-            <a:pPr algn="ctr" indent="0" marL="0">
-              <a:buNone/>
-            </a:pPr>
-            <a:r>
-              <a:rPr lang="en-US" sz="1200" b="1" dirty="0">
-                <a:solidFill>
-                  <a:schemeClr val="tx1"/>
-                </a:solidFill>
-              </a:rPr>
-              <a:t>tại</a:t>
-            </a:r>
-            <a:endParaRPr lang="en-US" sz="1200" dirty="0"/>
-          </a:p>
-        </p:txBody>
-      </p:sp>
-      <p:sp>
-        <p:nvSpPr>
-          <p:cNvPr id="9" name="Cardinality N"/>
-          <p:cNvSpPr txBox="1"/>
-          <p:nvPr/>
-        </p:nvSpPr>
-        <p:spPr>
-          <a:xfrm>
-            <a:off x="7374636" y="1924812"/>
-            <a:ext cx="237744" cy="237744"/>
-          </a:xfrm>
-          <a:prstGeom prst="rect">
-            <a:avLst/>
-          </a:prstGeom>
-          <a:noFill/>
-          <a:ln/>
-        </p:spPr>
-        <p:txBody>
-          <a:bodyPr wrap="square" lIns="0" tIns="0" rIns="0" bIns="0" rtlCol="0" anchor="t"/>
-          <a:lstStyle/>
-          <a:p>
-            <a:pPr algn="l" indent="0" marL="0">
-              <a:buNone/>
-            </a:pPr>
-            <a:r>
-              <a:rPr lang="en-US" sz="1300" b="1" dirty="0">
-                <a:solidFill>
-                  <a:schemeClr val="tx1"/>
-                </a:solidFill>
-              </a:rPr>
-              <a:t>N</a:t>
-            </a:r>
-            <a:endParaRPr lang="en-US" sz="1300" dirty="0"/>
-          </a:p>
-        </p:txBody>
-      </p:sp>
-      <p:sp>
-        <p:nvSpPr>
-          <p:cNvPr id="10" name="Cardinality 1"/>
-          <p:cNvSpPr txBox="1"/>
-          <p:nvPr/>
-        </p:nvSpPr>
-        <p:spPr>
-          <a:xfrm>
-            <a:off x="8979408" y="1924812"/>
-            <a:ext cx="237744" cy="237744"/>
-          </a:xfrm>
-          <a:prstGeom prst="rect">
-            <a:avLst/>
-          </a:prstGeom>
-          <a:noFill/>
-          <a:ln/>
-        </p:spPr>
-        <p:txBody>
-          <a:bodyPr wrap="square" lIns="0" tIns="0" rIns="0" bIns="0" rtlCol="0" anchor="t"/>
-          <a:lstStyle/>
-          <a:p>
-            <a:pPr algn="r" indent="0" marL="0">
-              <a:buNone/>
-            </a:pPr>
-            <a:r>
-              <a:rPr lang="en-US" sz="1300" b="1" dirty="0">
-                <a:solidFill>
-                  <a:schemeClr val="tx1"/>
-                </a:solidFill>
-              </a:rPr>
-              <a:t>1</a:t>
-            </a:r>
-            <a:endParaRPr lang="en-US" sz="1300" dirty="0"/>
-          </a:p>
-        </p:txBody>
-      </p:sp>
-      <p:sp>
-        <p:nvSpPr>
-          <p:cNvPr id="11" name="Line SUATCHIEU-VE"/>
-          <p:cNvSpPr/>
-          <p:nvPr/>
-        </p:nvSpPr>
-        <p:spPr>
-          <a:xfrm>
-            <a:off x="6094476" y="3108960"/>
-            <a:ext cx="0" cy="1143000"/>
+            <a:off x="8275320" y="2743200"/>
+            <a:ext cx="2148840" cy="0"/>
           </a:xfrm>
           <a:prstGeom prst="line">
             <a:avLst/>
@@ -5230,128 +5439,14 @@
       </p:sp>
       <p:sp>
         <p:nvSpPr>
-          <p:cNvPr id="12" name="Relationship SUATCHIEU-VE"/>
+          <p:cNvPr id="25" name="Shape 23"/>
           <p:cNvSpPr/>
           <p:nvPr/>
         </p:nvSpPr>
         <p:spPr>
           <a:xfrm>
-            <a:off x="5500116" y="3342132"/>
-            <a:ext cx="1188720" cy="676656"/>
-          </a:xfrm>
-          <a:prstGeom prst="diamond">
-            <a:avLst/>
-          </a:prstGeom>
-          <a:solidFill>
-            <a:schemeClr val="bg1"/>
-          </a:solidFill>
-          <a:ln w="15875">
-            <a:solidFill>
-              <a:schemeClr val="tx1"/>
-            </a:solidFill>
-          </a:ln>
-        </p:spPr>
-        <p:txBody>
-          <a:bodyPr wrap="square" lIns="0" tIns="0" rIns="0" bIns="0" rtlCol="0" anchor="ctr"/>
-          <a:lstStyle/>
-          <a:p>
-            <a:pPr algn="ctr" indent="0" marL="0">
-              <a:buNone/>
-            </a:pPr>
-            <a:r>
-              <a:rPr lang="en-US" sz="1200" b="1" dirty="0">
-                <a:solidFill>
-                  <a:schemeClr val="tx1"/>
-                </a:solidFill>
-              </a:rPr>
-              <a:t>bán</a:t>
-            </a:r>
-            <a:endParaRPr lang="en-US" sz="1200" dirty="0"/>
-          </a:p>
-        </p:txBody>
-      </p:sp>
-      <p:sp>
-        <p:nvSpPr>
-          <p:cNvPr id="13" name="Cardinality 1"/>
-          <p:cNvSpPr txBox="1"/>
-          <p:nvPr/>
-        </p:nvSpPr>
-        <p:spPr>
-          <a:xfrm>
-            <a:off x="5765292" y="3108960"/>
-            <a:ext cx="237744" cy="237744"/>
-          </a:xfrm>
-          <a:prstGeom prst="rect">
-            <a:avLst/>
-          </a:prstGeom>
-          <a:noFill/>
-          <a:ln/>
-        </p:spPr>
-        <p:txBody>
-          <a:bodyPr wrap="square" lIns="0" tIns="0" rIns="0" bIns="0" rtlCol="0" anchor="t"/>
-          <a:lstStyle/>
-          <a:p>
-            <a:pPr algn="r" indent="0" marL="0">
-              <a:buNone/>
-            </a:pPr>
-            <a:r>
-              <a:rPr lang="en-US" sz="1300" b="1" dirty="0">
-                <a:solidFill>
-                  <a:schemeClr val="tx1"/>
-                </a:solidFill>
-              </a:rPr>
-              <a:t>1</a:t>
-            </a:r>
-            <a:endParaRPr lang="en-US" sz="1300" dirty="0"/>
-          </a:p>
-        </p:txBody>
-      </p:sp>
-      <p:sp>
-        <p:nvSpPr>
-          <p:cNvPr id="14" name="Cardinality N"/>
-          <p:cNvSpPr txBox="1"/>
-          <p:nvPr/>
-        </p:nvSpPr>
-        <p:spPr>
-          <a:xfrm>
-            <a:off x="5765292" y="4014216"/>
-            <a:ext cx="237744" cy="237744"/>
-          </a:xfrm>
-          <a:prstGeom prst="rect">
-            <a:avLst/>
-          </a:prstGeom>
-          <a:noFill/>
-          <a:ln/>
-        </p:spPr>
-        <p:txBody>
-          <a:bodyPr wrap="square" lIns="0" tIns="0" rIns="0" bIns="0" rtlCol="0" anchor="t"/>
-          <a:lstStyle/>
-          <a:p>
-            <a:pPr algn="r" indent="0" marL="0">
-              <a:buNone/>
-            </a:pPr>
-            <a:r>
-              <a:rPr lang="en-US" sz="1300" b="1" dirty="0">
-                <a:solidFill>
-                  <a:schemeClr val="tx1"/>
-                </a:solidFill>
-              </a:rPr>
-              <a:t>N</a:t>
-            </a:r>
-            <a:endParaRPr lang="en-US" sz="1300" dirty="0"/>
-          </a:p>
-        </p:txBody>
-      </p:sp>
-      <p:sp>
-        <p:nvSpPr>
-          <p:cNvPr id="15" name="Line KHACHHANG-VE"/>
-          <p:cNvSpPr/>
-          <p:nvPr/>
-        </p:nvSpPr>
-        <p:spPr>
-          <a:xfrm>
-            <a:off x="2926080" y="5006340"/>
-            <a:ext cx="1933956" cy="0"/>
+            <a:off x="6099048" y="2743200"/>
+            <a:ext cx="2176272" cy="0"/>
           </a:xfrm>
           <a:prstGeom prst="line">
             <a:avLst/>
@@ -5367,24 +5462,427 @@
       </p:sp>
       <p:sp>
         <p:nvSpPr>
-          <p:cNvPr id="16" name="Relationship KHACHHANG-VE"/>
+          <p:cNvPr id="26" name="Shape 24"/>
           <p:cNvSpPr/>
           <p:nvPr/>
         </p:nvSpPr>
         <p:spPr>
           <a:xfrm>
-            <a:off x="3298698" y="4668012"/>
-            <a:ext cx="1188720" cy="676656"/>
-          </a:xfrm>
-          <a:prstGeom prst="diamond">
+            <a:off x="6099048" y="2743200"/>
+            <a:ext cx="0" cy="1234440"/>
+          </a:xfrm>
+          <a:prstGeom prst="line">
+            <a:avLst/>
+          </a:prstGeom>
+          <a:noFill/>
+          <a:ln w="25400">
+            <a:solidFill>
+              <a:schemeClr val="tx1"/>
+            </a:solidFill>
+            <a:prstDash val="solid"/>
+          </a:ln>
+        </p:spPr>
+      </p:sp>
+      <p:sp>
+        <p:nvSpPr>
+          <p:cNvPr id="27" name="Shape 25"/>
+          <p:cNvSpPr/>
+          <p:nvPr/>
+        </p:nvSpPr>
+        <p:spPr>
+          <a:xfrm>
+            <a:off x="6053328" y="3977640"/>
+            <a:ext cx="0" cy="1234440"/>
+          </a:xfrm>
+          <a:prstGeom prst="line">
+            <a:avLst/>
+          </a:prstGeom>
+          <a:noFill/>
+          <a:ln w="19050">
+            <a:solidFill>
+              <a:schemeClr val="tx1"/>
+            </a:solidFill>
+            <a:prstDash val="solid"/>
+          </a:ln>
+        </p:spPr>
+      </p:sp>
+      <p:sp>
+        <p:nvSpPr>
+          <p:cNvPr id="28" name="Shape 26"/>
+          <p:cNvSpPr/>
+          <p:nvPr/>
+        </p:nvSpPr>
+        <p:spPr>
+          <a:xfrm>
+            <a:off x="6144768" y="3977640"/>
+            <a:ext cx="0" cy="1234440"/>
+          </a:xfrm>
+          <a:prstGeom prst="line">
+            <a:avLst/>
+          </a:prstGeom>
+          <a:noFill/>
+          <a:ln w="19050">
+            <a:solidFill>
+              <a:schemeClr val="tx1"/>
+            </a:solidFill>
+            <a:prstDash val="solid"/>
+          </a:ln>
+        </p:spPr>
+      </p:sp>
+      <p:sp>
+        <p:nvSpPr>
+          <p:cNvPr id="29" name="Shape 27"/>
+          <p:cNvSpPr/>
+          <p:nvPr/>
+        </p:nvSpPr>
+        <p:spPr>
+          <a:xfrm>
+            <a:off x="1737360" y="5212080"/>
+            <a:ext cx="2176272" cy="0"/>
+          </a:xfrm>
+          <a:prstGeom prst="line">
+            <a:avLst/>
+          </a:prstGeom>
+          <a:noFill/>
+          <a:ln w="25400">
+            <a:solidFill>
+              <a:schemeClr val="tx1"/>
+            </a:solidFill>
+            <a:prstDash val="solid"/>
+          </a:ln>
+        </p:spPr>
+      </p:sp>
+      <p:sp>
+        <p:nvSpPr>
+          <p:cNvPr id="30" name="Shape 28"/>
+          <p:cNvSpPr/>
+          <p:nvPr/>
+        </p:nvSpPr>
+        <p:spPr>
+          <a:xfrm>
+            <a:off x="3913632" y="5212080"/>
+            <a:ext cx="2185416" cy="0"/>
+          </a:xfrm>
+          <a:prstGeom prst="line">
+            <a:avLst/>
+          </a:prstGeom>
+          <a:noFill/>
+          <a:ln w="25400">
+            <a:solidFill>
+              <a:schemeClr val="tx1"/>
+            </a:solidFill>
+            <a:prstDash val="solid"/>
+          </a:ln>
+        </p:spPr>
+      </p:sp>
+      <p:sp>
+        <p:nvSpPr>
+          <p:cNvPr id="31" name="Cardinality 1 PHIM"/>
+          <p:cNvSpPr txBox="1"/>
+          <p:nvPr/>
+        </p:nvSpPr>
+        <p:spPr>
+          <a:xfrm>
+            <a:off x="2583180" y="2441448"/>
+            <a:ext cx="228600" cy="256032"/>
+          </a:xfrm>
+          <a:prstGeom prst="rect">
+            <a:avLst/>
+          </a:prstGeom>
+          <a:noFill/>
+          <a:ln/>
+        </p:spPr>
+        <p:txBody>
+          <a:bodyPr wrap="square" lIns="0" tIns="0" rIns="0" bIns="0" rtlCol="0" anchor="t"/>
+          <a:lstStyle/>
+          <a:p>
+            <a:pPr algn="ctr" indent="0" marL="0">
+              <a:buNone/>
+            </a:pPr>
+            <a:r>
+              <a:rPr lang="en-US" sz="1400" b="1" dirty="0">
+                <a:solidFill>
+                  <a:schemeClr val="tx1"/>
+                </a:solidFill>
+              </a:rPr>
+              <a:t>1</a:t>
+            </a:r>
+            <a:endParaRPr lang="en-US" sz="1400" dirty="0"/>
+          </a:p>
+        </p:txBody>
+      </p:sp>
+      <p:sp>
+        <p:nvSpPr>
+          <p:cNvPr id="32" name="Cardinality N SUATCHIEU"/>
+          <p:cNvSpPr txBox="1"/>
+          <p:nvPr/>
+        </p:nvSpPr>
+        <p:spPr>
+          <a:xfrm>
+            <a:off x="5024628" y="2441448"/>
+            <a:ext cx="228600" cy="256032"/>
+          </a:xfrm>
+          <a:prstGeom prst="rect">
+            <a:avLst/>
+          </a:prstGeom>
+          <a:noFill/>
+          <a:ln/>
+        </p:spPr>
+        <p:txBody>
+          <a:bodyPr wrap="square" lIns="0" tIns="0" rIns="0" bIns="0" rtlCol="0" anchor="t"/>
+          <a:lstStyle/>
+          <a:p>
+            <a:pPr algn="ctr" indent="0" marL="0">
+              <a:buNone/>
+            </a:pPr>
+            <a:r>
+              <a:rPr lang="en-US" sz="1400" b="1" dirty="0">
+                <a:solidFill>
+                  <a:schemeClr val="tx1"/>
+                </a:solidFill>
+              </a:rPr>
+              <a:t>N</a:t>
+            </a:r>
+            <a:endParaRPr lang="en-US" sz="1400" dirty="0"/>
+          </a:p>
+        </p:txBody>
+      </p:sp>
+      <p:sp>
+        <p:nvSpPr>
+          <p:cNvPr id="33" name="Cardinality 1 PHONGCHIEU"/>
+          <p:cNvSpPr txBox="1"/>
+          <p:nvPr/>
+        </p:nvSpPr>
+        <p:spPr>
+          <a:xfrm>
+            <a:off x="9349740" y="2441448"/>
+            <a:ext cx="228600" cy="256032"/>
+          </a:xfrm>
+          <a:prstGeom prst="rect">
+            <a:avLst/>
+          </a:prstGeom>
+          <a:noFill/>
+          <a:ln/>
+        </p:spPr>
+        <p:txBody>
+          <a:bodyPr wrap="square" lIns="0" tIns="0" rIns="0" bIns="0" rtlCol="0" anchor="t"/>
+          <a:lstStyle/>
+          <a:p>
+            <a:pPr algn="ctr" indent="0" marL="0">
+              <a:buNone/>
+            </a:pPr>
+            <a:r>
+              <a:rPr lang="en-US" sz="1400" b="1" dirty="0">
+                <a:solidFill>
+                  <a:schemeClr val="tx1"/>
+                </a:solidFill>
+              </a:rPr>
+              <a:t>1</a:t>
+            </a:r>
+            <a:endParaRPr lang="en-US" sz="1400" dirty="0"/>
+          </a:p>
+        </p:txBody>
+      </p:sp>
+      <p:sp>
+        <p:nvSpPr>
+          <p:cNvPr id="34" name="Cardinality N SUATCHIEU"/>
+          <p:cNvSpPr txBox="1"/>
+          <p:nvPr/>
+        </p:nvSpPr>
+        <p:spPr>
+          <a:xfrm>
+            <a:off x="6944868" y="2441448"/>
+            <a:ext cx="228600" cy="256032"/>
+          </a:xfrm>
+          <a:prstGeom prst="rect">
+            <a:avLst/>
+          </a:prstGeom>
+          <a:noFill/>
+          <a:ln/>
+        </p:spPr>
+        <p:txBody>
+          <a:bodyPr wrap="square" lIns="0" tIns="0" rIns="0" bIns="0" rtlCol="0" anchor="t"/>
+          <a:lstStyle/>
+          <a:p>
+            <a:pPr algn="ctr" indent="0" marL="0">
+              <a:buNone/>
+            </a:pPr>
+            <a:r>
+              <a:rPr lang="en-US" sz="1400" b="1" dirty="0">
+                <a:solidFill>
+                  <a:schemeClr val="tx1"/>
+                </a:solidFill>
+              </a:rPr>
+              <a:t>N</a:t>
+            </a:r>
+            <a:endParaRPr lang="en-US" sz="1400" dirty="0"/>
+          </a:p>
+        </p:txBody>
+      </p:sp>
+      <p:sp>
+        <p:nvSpPr>
+          <p:cNvPr id="35" name="Cardinality 1 SUATCHIEU"/>
+          <p:cNvSpPr txBox="1"/>
+          <p:nvPr/>
+        </p:nvSpPr>
+        <p:spPr>
+          <a:xfrm>
+            <a:off x="5769864" y="3012948"/>
+            <a:ext cx="228600" cy="256032"/>
+          </a:xfrm>
+          <a:prstGeom prst="rect">
+            <a:avLst/>
+          </a:prstGeom>
+          <a:noFill/>
+          <a:ln/>
+        </p:spPr>
+        <p:txBody>
+          <a:bodyPr wrap="square" lIns="0" tIns="0" rIns="0" bIns="0" rtlCol="0" anchor="t"/>
+          <a:lstStyle/>
+          <a:p>
+            <a:pPr algn="ctr" indent="0" marL="0">
+              <a:buNone/>
+            </a:pPr>
+            <a:r>
+              <a:rPr lang="en-US" sz="1400" b="1" dirty="0">
+                <a:solidFill>
+                  <a:schemeClr val="tx1"/>
+                </a:solidFill>
+              </a:rPr>
+              <a:t>1</a:t>
+            </a:r>
+            <a:endParaRPr lang="en-US" sz="1400" dirty="0"/>
+          </a:p>
+        </p:txBody>
+      </p:sp>
+      <p:sp>
+        <p:nvSpPr>
+          <p:cNvPr id="36" name="Cardinality N VE"/>
+          <p:cNvSpPr txBox="1"/>
+          <p:nvPr/>
+        </p:nvSpPr>
+        <p:spPr>
+          <a:xfrm>
+            <a:off x="5769864" y="4686300"/>
+            <a:ext cx="228600" cy="256032"/>
+          </a:xfrm>
+          <a:prstGeom prst="rect">
+            <a:avLst/>
+          </a:prstGeom>
+          <a:noFill/>
+          <a:ln/>
+        </p:spPr>
+        <p:txBody>
+          <a:bodyPr wrap="square" lIns="0" tIns="0" rIns="0" bIns="0" rtlCol="0" anchor="t"/>
+          <a:lstStyle/>
+          <a:p>
+            <a:pPr algn="ctr" indent="0" marL="0">
+              <a:buNone/>
+            </a:pPr>
+            <a:r>
+              <a:rPr lang="en-US" sz="1400" b="1" dirty="0">
+                <a:solidFill>
+                  <a:schemeClr val="tx1"/>
+                </a:solidFill>
+              </a:rPr>
+              <a:t>N</a:t>
+            </a:r>
+            <a:endParaRPr lang="en-US" sz="1400" dirty="0"/>
+          </a:p>
+        </p:txBody>
+      </p:sp>
+      <p:sp>
+        <p:nvSpPr>
+          <p:cNvPr id="37" name="Cardinality 1 KHACHHANG"/>
+          <p:cNvSpPr txBox="1"/>
+          <p:nvPr/>
+        </p:nvSpPr>
+        <p:spPr>
+          <a:xfrm>
+            <a:off x="2583180" y="4910328"/>
+            <a:ext cx="228600" cy="256032"/>
+          </a:xfrm>
+          <a:prstGeom prst="rect">
+            <a:avLst/>
+          </a:prstGeom>
+          <a:noFill/>
+          <a:ln/>
+        </p:spPr>
+        <p:txBody>
+          <a:bodyPr wrap="square" lIns="0" tIns="0" rIns="0" bIns="0" rtlCol="0" anchor="t"/>
+          <a:lstStyle/>
+          <a:p>
+            <a:pPr algn="ctr" indent="0" marL="0">
+              <a:buNone/>
+            </a:pPr>
+            <a:r>
+              <a:rPr lang="en-US" sz="1400" b="1" dirty="0">
+                <a:solidFill>
+                  <a:schemeClr val="tx1"/>
+                </a:solidFill>
+              </a:rPr>
+              <a:t>1</a:t>
+            </a:r>
+            <a:endParaRPr lang="en-US" sz="1400" dirty="0"/>
+          </a:p>
+        </p:txBody>
+      </p:sp>
+      <p:sp>
+        <p:nvSpPr>
+          <p:cNvPr id="38" name="Cardinality N VE"/>
+          <p:cNvSpPr txBox="1"/>
+          <p:nvPr/>
+        </p:nvSpPr>
+        <p:spPr>
+          <a:xfrm>
+            <a:off x="5024628" y="4910328"/>
+            <a:ext cx="228600" cy="256032"/>
+          </a:xfrm>
+          <a:prstGeom prst="rect">
+            <a:avLst/>
+          </a:prstGeom>
+          <a:noFill/>
+          <a:ln/>
+        </p:spPr>
+        <p:txBody>
+          <a:bodyPr wrap="square" lIns="0" tIns="0" rIns="0" bIns="0" rtlCol="0" anchor="t"/>
+          <a:lstStyle/>
+          <a:p>
+            <a:pPr algn="ctr" indent="0" marL="0">
+              <a:buNone/>
+            </a:pPr>
+            <a:r>
+              <a:rPr lang="en-US" sz="1400" b="1" dirty="0">
+                <a:solidFill>
+                  <a:schemeClr val="tx1"/>
+                </a:solidFill>
+              </a:rPr>
+              <a:t>N</a:t>
+            </a:r>
+            <a:endParaRPr lang="en-US" sz="1400" dirty="0"/>
+          </a:p>
+        </p:txBody>
+      </p:sp>
+      <p:sp>
+        <p:nvSpPr>
+          <p:cNvPr id="39" name="Attr PHIM MaPhim"/>
+          <p:cNvSpPr/>
+          <p:nvPr/>
+        </p:nvSpPr>
+        <p:spPr>
+          <a:xfrm>
+            <a:off x="114300" y="1408176"/>
+            <a:ext cx="1325880" cy="384048"/>
+          </a:xfrm>
+          <a:prstGeom prst="ellipse">
             <a:avLst/>
           </a:prstGeom>
           <a:solidFill>
             <a:schemeClr val="bg1"/>
           </a:solidFill>
-          <a:ln w="15875">
+          <a:ln w="12700">
             <a:solidFill>
-              <a:schemeClr val="tx1"/>
+              <a:schemeClr val="tx2"/>
             </a:solidFill>
           </a:ln>
         </p:spPr>
@@ -5396,134 +5894,37 @@
               <a:buNone/>
             </a:pPr>
             <a:r>
-              <a:rPr lang="en-US" sz="1200" b="1" dirty="0">
+              <a:rPr lang="en-US" sz="1100" b="1" u="sng" dirty="0">
                 <a:solidFill>
                   <a:schemeClr val="tx1"/>
                 </a:solidFill>
               </a:rPr>
-              <a:t>đặt</a:t>
-            </a:r>
-            <a:endParaRPr lang="en-US" sz="1200" dirty="0"/>
+              <a:t>MaPhim</a:t>
+            </a:r>
+            <a:endParaRPr lang="en-US" sz="1100" dirty="0"/>
           </a:p>
         </p:txBody>
       </p:sp>
       <p:sp>
         <p:nvSpPr>
-          <p:cNvPr id="17" name="Cardinality 1"/>
-          <p:cNvSpPr txBox="1"/>
-          <p:nvPr/>
-        </p:nvSpPr>
-        <p:spPr>
-          <a:xfrm>
-            <a:off x="2971800" y="4713732"/>
-            <a:ext cx="237744" cy="237744"/>
-          </a:xfrm>
-          <a:prstGeom prst="rect">
-            <a:avLst/>
-          </a:prstGeom>
-          <a:noFill/>
-          <a:ln/>
-        </p:spPr>
-        <p:txBody>
-          <a:bodyPr wrap="square" lIns="0" tIns="0" rIns="0" bIns="0" rtlCol="0" anchor="t"/>
-          <a:lstStyle/>
-          <a:p>
-            <a:pPr algn="l" indent="0" marL="0">
-              <a:buNone/>
-            </a:pPr>
-            <a:r>
-              <a:rPr lang="en-US" sz="1300" b="1" dirty="0">
-                <a:solidFill>
-                  <a:schemeClr val="tx1"/>
-                </a:solidFill>
-              </a:rPr>
-              <a:t>1</a:t>
-            </a:r>
-            <a:endParaRPr lang="en-US" sz="1300" dirty="0"/>
-          </a:p>
-        </p:txBody>
-      </p:sp>
-      <p:sp>
-        <p:nvSpPr>
-          <p:cNvPr id="18" name="Cardinality N"/>
-          <p:cNvSpPr txBox="1"/>
-          <p:nvPr/>
-        </p:nvSpPr>
-        <p:spPr>
-          <a:xfrm>
-            <a:off x="4576572" y="4713732"/>
-            <a:ext cx="237744" cy="237744"/>
-          </a:xfrm>
-          <a:prstGeom prst="rect">
-            <a:avLst/>
-          </a:prstGeom>
-          <a:noFill/>
-          <a:ln/>
-        </p:spPr>
-        <p:txBody>
-          <a:bodyPr wrap="square" lIns="0" tIns="0" rIns="0" bIns="0" rtlCol="0" anchor="t"/>
-          <a:lstStyle/>
-          <a:p>
-            <a:pPr algn="r" indent="0" marL="0">
-              <a:buNone/>
-            </a:pPr>
-            <a:r>
-              <a:rPr lang="en-US" sz="1300" b="1" dirty="0">
-                <a:solidFill>
-                  <a:schemeClr val="tx1"/>
-                </a:solidFill>
-              </a:rPr>
-              <a:t>N</a:t>
-            </a:r>
-            <a:endParaRPr lang="en-US" sz="1300" dirty="0"/>
-          </a:p>
-        </p:txBody>
-      </p:sp>
-      <p:sp>
-        <p:nvSpPr>
-          <p:cNvPr id="19" name="PHIM body"/>
+          <p:cNvPr id="40" name="Attr PHIM TenPhim"/>
           <p:cNvSpPr/>
           <p:nvPr/>
         </p:nvSpPr>
         <p:spPr>
           <a:xfrm>
-            <a:off x="457200" y="1691640"/>
-            <a:ext cx="2468880" cy="1417320"/>
-          </a:xfrm>
-          <a:prstGeom prst="rect">
+            <a:off x="1485900" y="1271016"/>
+            <a:ext cx="1325880" cy="384048"/>
+          </a:xfrm>
+          <a:prstGeom prst="ellipse">
             <a:avLst/>
           </a:prstGeom>
           <a:solidFill>
             <a:schemeClr val="bg1"/>
           </a:solidFill>
-          <a:ln w="15875">
+          <a:ln w="12700">
             <a:solidFill>
-              <a:schemeClr val="tx1"/>
-            </a:solidFill>
-            <a:prstDash val="solid"/>
-          </a:ln>
-        </p:spPr>
-      </p:sp>
-      <p:sp>
-        <p:nvSpPr>
-          <p:cNvPr id="20" name="PHIM header"/>
-          <p:cNvSpPr/>
-          <p:nvPr/>
-        </p:nvSpPr>
-        <p:spPr>
-          <a:xfrm>
-            <a:off x="457200" y="1325880"/>
-            <a:ext cx="2468880" cy="365760"/>
-          </a:xfrm>
-          <a:prstGeom prst="rect">
-            <a:avLst/>
-          </a:prstGeom>
-          <a:solidFill>
-            <a:schemeClr val="tx1"/>
-          </a:solidFill>
-          <a:ln w="15875">
-            <a:solidFill>
-              <a:schemeClr val="tx1"/>
+              <a:schemeClr val="tx2"/>
             </a:solidFill>
           </a:ln>
         </p:spPr>
@@ -5535,169 +5936,37 @@
               <a:buNone/>
             </a:pPr>
             <a:r>
-              <a:rPr lang="en-US" sz="1400" b="1" dirty="0">
-                <a:solidFill>
-                  <a:schemeClr val="bg1"/>
-                </a:solidFill>
-              </a:rPr>
-              <a:t>PHIM</a:t>
-            </a:r>
-            <a:endParaRPr lang="en-US" sz="1400" dirty="0"/>
+              <a:rPr lang="en-US" sz="1100" dirty="0">
+                <a:solidFill>
+                  <a:schemeClr val="tx1"/>
+                </a:solidFill>
+              </a:rPr>
+              <a:t>TenPhim</a:t>
+            </a:r>
+            <a:endParaRPr lang="en-US" sz="1100" dirty="0"/>
           </a:p>
         </p:txBody>
       </p:sp>
       <p:sp>
         <p:nvSpPr>
-          <p:cNvPr id="21" name="PHIM attributes"/>
-          <p:cNvSpPr txBox="1"/>
-          <p:nvPr/>
-        </p:nvSpPr>
-        <p:spPr>
-          <a:xfrm>
-            <a:off x="594360" y="1764792"/>
-            <a:ext cx="2194560" cy="1325880"/>
-          </a:xfrm>
-          <a:prstGeom prst="rect">
-            <a:avLst/>
-          </a:prstGeom>
-          <a:noFill/>
-          <a:ln/>
-        </p:spPr>
-        <p:txBody>
-          <a:bodyPr wrap="square" lIns="0" tIns="0" rIns="0" bIns="0" rtlCol="0" anchor="t"/>
-          <a:lstStyle/>
-          <a:p>
-            <a:pPr indent="0" marL="0">
-              <a:lnSpc>
-                <a:spcPts val="1900"/>
-              </a:lnSpc>
-              <a:buNone/>
-            </a:pPr>
-            <a:r>
-              <a:rPr lang="en-US" sz="1200" b="1" u="sng" dirty="0">
-                <a:solidFill>
-                  <a:schemeClr val="tx1"/>
-                </a:solidFill>
-              </a:rPr>
-              <a:t>MaPhim</a:t>
-            </a:r>
-            <a:endParaRPr lang="en-US" sz="1200" dirty="0"/>
-          </a:p>
-          <a:p>
-            <a:pPr indent="0" marL="0">
-              <a:lnSpc>
-                <a:spcPts val="1900"/>
-              </a:lnSpc>
-              <a:buNone/>
-            </a:pPr>
-            <a:r>
-              <a:rPr lang="en-US" sz="1200" dirty="0">
-                <a:solidFill>
-                  <a:schemeClr val="tx1"/>
-                </a:solidFill>
-              </a:rPr>
-              <a:t>TenPhim</a:t>
-            </a:r>
-            <a:endParaRPr lang="en-US" sz="1200" dirty="0"/>
-          </a:p>
-          <a:p>
-            <a:pPr indent="0" marL="0">
-              <a:lnSpc>
-                <a:spcPts val="1900"/>
-              </a:lnSpc>
-              <a:buNone/>
-            </a:pPr>
-            <a:r>
-              <a:rPr lang="en-US" sz="1200" dirty="0">
-                <a:solidFill>
-                  <a:schemeClr val="tx1"/>
-                </a:solidFill>
-              </a:rPr>
-              <a:t>TheLoai</a:t>
-            </a:r>
-            <a:endParaRPr lang="en-US" sz="1200" dirty="0"/>
-          </a:p>
-          <a:p>
-            <a:pPr indent="0" marL="0">
-              <a:lnSpc>
-                <a:spcPts val="1900"/>
-              </a:lnSpc>
-              <a:buNone/>
-            </a:pPr>
-            <a:r>
-              <a:rPr lang="en-US" sz="1200" dirty="0">
-                <a:solidFill>
-                  <a:schemeClr val="tx1"/>
-                </a:solidFill>
-              </a:rPr>
-              <a:t>ThoiLuong</a:t>
-            </a:r>
-            <a:endParaRPr lang="en-US" sz="1200" dirty="0"/>
-          </a:p>
-          <a:p>
-            <a:pPr indent="0" marL="0">
-              <a:lnSpc>
-                <a:spcPts val="1900"/>
-              </a:lnSpc>
-              <a:buNone/>
-            </a:pPr>
-            <a:r>
-              <a:rPr lang="en-US" sz="1200" dirty="0">
-                <a:solidFill>
-                  <a:schemeClr val="tx1"/>
-                </a:solidFill>
-              </a:rPr>
-              <a:t>NgayKhoiChieu</a:t>
-            </a:r>
-            <a:endParaRPr lang="en-US" sz="1200" dirty="0"/>
-          </a:p>
-        </p:txBody>
-      </p:sp>
-      <p:sp>
-        <p:nvSpPr>
-          <p:cNvPr id="22" name="PHONGCHIEU body"/>
+          <p:cNvPr id="41" name="Attr PHIM TheLoai"/>
           <p:cNvSpPr/>
           <p:nvPr/>
         </p:nvSpPr>
         <p:spPr>
           <a:xfrm>
-            <a:off x="9262872" y="1691640"/>
-            <a:ext cx="2468880" cy="1417320"/>
-          </a:xfrm>
-          <a:prstGeom prst="rect">
+            <a:off x="2766060" y="1453896"/>
+            <a:ext cx="1325880" cy="384048"/>
+          </a:xfrm>
+          <a:prstGeom prst="ellipse">
             <a:avLst/>
           </a:prstGeom>
           <a:solidFill>
             <a:schemeClr val="bg1"/>
           </a:solidFill>
-          <a:ln w="15875">
+          <a:ln w="12700">
             <a:solidFill>
-              <a:schemeClr val="tx1"/>
-            </a:solidFill>
-            <a:prstDash val="solid"/>
-          </a:ln>
-        </p:spPr>
-      </p:sp>
-      <p:sp>
-        <p:nvSpPr>
-          <p:cNvPr id="23" name="PHONGCHIEU header"/>
-          <p:cNvSpPr/>
-          <p:nvPr/>
-        </p:nvSpPr>
-        <p:spPr>
-          <a:xfrm>
-            <a:off x="9262872" y="1325880"/>
-            <a:ext cx="2468880" cy="365760"/>
-          </a:xfrm>
-          <a:prstGeom prst="rect">
-            <a:avLst/>
-          </a:prstGeom>
-          <a:solidFill>
-            <a:schemeClr val="tx1"/>
-          </a:solidFill>
-          <a:ln w="15875">
-            <a:solidFill>
-              <a:schemeClr val="tx1"/>
+              <a:schemeClr val="tx2"/>
             </a:solidFill>
           </a:ln>
         </p:spPr>
@@ -5709,152 +5978,37 @@
               <a:buNone/>
             </a:pPr>
             <a:r>
-              <a:rPr lang="en-US" sz="1400" b="1" dirty="0">
-                <a:solidFill>
-                  <a:schemeClr val="bg1"/>
-                </a:solidFill>
-              </a:rPr>
-              <a:t>PHONGCHIEU</a:t>
-            </a:r>
-            <a:endParaRPr lang="en-US" sz="1400" dirty="0"/>
+              <a:rPr lang="en-US" sz="1100" dirty="0">
+                <a:solidFill>
+                  <a:schemeClr val="tx1"/>
+                </a:solidFill>
+              </a:rPr>
+              <a:t>TheLoai</a:t>
+            </a:r>
+            <a:endParaRPr lang="en-US" sz="1100" dirty="0"/>
           </a:p>
         </p:txBody>
       </p:sp>
       <p:sp>
         <p:nvSpPr>
-          <p:cNvPr id="24" name="PHONGCHIEU attributes"/>
-          <p:cNvSpPr txBox="1"/>
-          <p:nvPr/>
-        </p:nvSpPr>
-        <p:spPr>
-          <a:xfrm>
-            <a:off x="9400032" y="1764792"/>
-            <a:ext cx="2194560" cy="1325880"/>
-          </a:xfrm>
-          <a:prstGeom prst="rect">
-            <a:avLst/>
-          </a:prstGeom>
-          <a:noFill/>
-          <a:ln/>
-        </p:spPr>
-        <p:txBody>
-          <a:bodyPr wrap="square" lIns="0" tIns="0" rIns="0" bIns="0" rtlCol="0" anchor="t"/>
-          <a:lstStyle/>
-          <a:p>
-            <a:pPr indent="0" marL="0">
-              <a:lnSpc>
-                <a:spcPts val="1900"/>
-              </a:lnSpc>
-              <a:buNone/>
-            </a:pPr>
-            <a:r>
-              <a:rPr lang="en-US" sz="1200" b="1" u="sng" dirty="0">
-                <a:solidFill>
-                  <a:schemeClr val="tx1"/>
-                </a:solidFill>
-              </a:rPr>
-              <a:t>MaPhong</a:t>
-            </a:r>
-            <a:endParaRPr lang="en-US" sz="1200" dirty="0"/>
-          </a:p>
-          <a:p>
-            <a:pPr indent="0" marL="0">
-              <a:lnSpc>
-                <a:spcPts val="1900"/>
-              </a:lnSpc>
-              <a:buNone/>
-            </a:pPr>
-            <a:r>
-              <a:rPr lang="en-US" sz="1200" dirty="0">
-                <a:solidFill>
-                  <a:schemeClr val="tx1"/>
-                </a:solidFill>
-              </a:rPr>
-              <a:t>TenPhong</a:t>
-            </a:r>
-            <a:endParaRPr lang="en-US" sz="1200" dirty="0"/>
-          </a:p>
-          <a:p>
-            <a:pPr indent="0" marL="0">
-              <a:lnSpc>
-                <a:spcPts val="1900"/>
-              </a:lnSpc>
-              <a:buNone/>
-            </a:pPr>
-            <a:r>
-              <a:rPr lang="en-US" sz="1200" dirty="0">
-                <a:solidFill>
-                  <a:schemeClr val="tx1"/>
-                </a:solidFill>
-              </a:rPr>
-              <a:t>LoaiPhong</a:t>
-            </a:r>
-            <a:endParaRPr lang="en-US" sz="1200" dirty="0"/>
-          </a:p>
-          <a:p>
-            <a:pPr indent="0" marL="0">
-              <a:lnSpc>
-                <a:spcPts val="1900"/>
-              </a:lnSpc>
-              <a:buNone/>
-            </a:pPr>
-            <a:r>
-              <a:rPr lang="en-US" sz="1200" dirty="0">
-                <a:solidFill>
-                  <a:schemeClr val="tx1"/>
-                </a:solidFill>
-              </a:rPr>
-              <a:t>SucChua</a:t>
-            </a:r>
-            <a:endParaRPr lang="en-US" sz="1200" dirty="0"/>
-          </a:p>
-        </p:txBody>
-      </p:sp>
-      <p:sp>
-        <p:nvSpPr>
-          <p:cNvPr id="25" name="SUATCHIEU body"/>
+          <p:cNvPr id="42" name="Attr PHIM ThoiLuong"/>
           <p:cNvSpPr/>
           <p:nvPr/>
         </p:nvSpPr>
         <p:spPr>
           <a:xfrm>
-            <a:off x="4860036" y="1691640"/>
-            <a:ext cx="2468880" cy="1417320"/>
-          </a:xfrm>
-          <a:prstGeom prst="rect">
+            <a:off x="297180" y="3557016"/>
+            <a:ext cx="1325880" cy="384048"/>
+          </a:xfrm>
+          <a:prstGeom prst="ellipse">
             <a:avLst/>
           </a:prstGeom>
           <a:solidFill>
             <a:schemeClr val="bg1"/>
           </a:solidFill>
-          <a:ln w="15875">
+          <a:ln w="12700">
             <a:solidFill>
-              <a:schemeClr val="tx1"/>
-            </a:solidFill>
-            <a:prstDash val="solid"/>
-          </a:ln>
-        </p:spPr>
-      </p:sp>
-      <p:sp>
-        <p:nvSpPr>
-          <p:cNvPr id="26" name="SUATCHIEU header"/>
-          <p:cNvSpPr/>
-          <p:nvPr/>
-        </p:nvSpPr>
-        <p:spPr>
-          <a:xfrm>
-            <a:off x="4860036" y="1325880"/>
-            <a:ext cx="2468880" cy="365760"/>
-          </a:xfrm>
-          <a:prstGeom prst="rect">
-            <a:avLst/>
-          </a:prstGeom>
-          <a:solidFill>
-            <a:schemeClr val="accent1"/>
-          </a:solidFill>
-          <a:ln w="15875">
-            <a:solidFill>
-              <a:schemeClr val="tx1"/>
+              <a:schemeClr val="tx2"/>
             </a:solidFill>
           </a:ln>
         </p:spPr>
@@ -5866,152 +6020,37 @@
               <a:buNone/>
             </a:pPr>
             <a:r>
-              <a:rPr lang="en-US" sz="1400" b="1" dirty="0">
+              <a:rPr lang="en-US" sz="1100" dirty="0">
                 <a:solidFill>
                   <a:schemeClr val="tx1"/>
                 </a:solidFill>
               </a:rPr>
-              <a:t>SUATCHIEU</a:t>
-            </a:r>
-            <a:endParaRPr lang="en-US" sz="1400" dirty="0"/>
+              <a:t>ThoiLuong</a:t>
+            </a:r>
+            <a:endParaRPr lang="en-US" sz="1100" dirty="0"/>
           </a:p>
         </p:txBody>
       </p:sp>
       <p:sp>
         <p:nvSpPr>
-          <p:cNvPr id="27" name="SUATCHIEU attributes"/>
-          <p:cNvSpPr txBox="1"/>
-          <p:nvPr/>
-        </p:nvSpPr>
-        <p:spPr>
-          <a:xfrm>
-            <a:off x="4997196" y="1764792"/>
-            <a:ext cx="2194560" cy="1325880"/>
-          </a:xfrm>
-          <a:prstGeom prst="rect">
-            <a:avLst/>
-          </a:prstGeom>
-          <a:noFill/>
-          <a:ln/>
-        </p:spPr>
-        <p:txBody>
-          <a:bodyPr wrap="square" lIns="0" tIns="0" rIns="0" bIns="0" rtlCol="0" anchor="t"/>
-          <a:lstStyle/>
-          <a:p>
-            <a:pPr indent="0" marL="0">
-              <a:lnSpc>
-                <a:spcPts val="1900"/>
-              </a:lnSpc>
-              <a:buNone/>
-            </a:pPr>
-            <a:r>
-              <a:rPr lang="en-US" sz="1200" b="1" u="sng" dirty="0">
-                <a:solidFill>
-                  <a:schemeClr val="tx1"/>
-                </a:solidFill>
-              </a:rPr>
-              <a:t>MaSuat</a:t>
-            </a:r>
-            <a:endParaRPr lang="en-US" sz="1200" dirty="0"/>
-          </a:p>
-          <a:p>
-            <a:pPr indent="0" marL="0">
-              <a:lnSpc>
-                <a:spcPts val="1900"/>
-              </a:lnSpc>
-              <a:buNone/>
-            </a:pPr>
-            <a:r>
-              <a:rPr lang="en-US" sz="1200" dirty="0">
-                <a:solidFill>
-                  <a:schemeClr val="tx1"/>
-                </a:solidFill>
-              </a:rPr>
-              <a:t>NgayChieu</a:t>
-            </a:r>
-            <a:endParaRPr lang="en-US" sz="1200" dirty="0"/>
-          </a:p>
-          <a:p>
-            <a:pPr indent="0" marL="0">
-              <a:lnSpc>
-                <a:spcPts val="1900"/>
-              </a:lnSpc>
-              <a:buNone/>
-            </a:pPr>
-            <a:r>
-              <a:rPr lang="en-US" sz="1200" dirty="0">
-                <a:solidFill>
-                  <a:schemeClr val="tx1"/>
-                </a:solidFill>
-              </a:rPr>
-              <a:t>GioBatDau</a:t>
-            </a:r>
-            <a:endParaRPr lang="en-US" sz="1200" dirty="0"/>
-          </a:p>
-          <a:p>
-            <a:pPr indent="0" marL="0">
-              <a:lnSpc>
-                <a:spcPts val="1900"/>
-              </a:lnSpc>
-              <a:buNone/>
-            </a:pPr>
-            <a:r>
-              <a:rPr lang="en-US" sz="1200" dirty="0">
-                <a:solidFill>
-                  <a:schemeClr val="tx1"/>
-                </a:solidFill>
-              </a:rPr>
-              <a:t>GiaVe</a:t>
-            </a:r>
-            <a:endParaRPr lang="en-US" sz="1200" dirty="0"/>
-          </a:p>
-        </p:txBody>
-      </p:sp>
-      <p:sp>
-        <p:nvSpPr>
-          <p:cNvPr id="28" name="KHACHHANG body"/>
+          <p:cNvPr id="43" name="Attr PHIM NgayKhoiChieu"/>
           <p:cNvSpPr/>
           <p:nvPr/>
         </p:nvSpPr>
         <p:spPr>
           <a:xfrm>
-            <a:off x="457200" y="4617720"/>
-            <a:ext cx="2468880" cy="1143000"/>
-          </a:xfrm>
-          <a:prstGeom prst="rect">
+            <a:off x="1805940" y="3557016"/>
+            <a:ext cx="1325880" cy="384048"/>
+          </a:xfrm>
+          <a:prstGeom prst="ellipse">
             <a:avLst/>
           </a:prstGeom>
           <a:solidFill>
             <a:schemeClr val="bg1"/>
           </a:solidFill>
-          <a:ln w="15875">
+          <a:ln w="12700">
             <a:solidFill>
-              <a:schemeClr val="tx1"/>
-            </a:solidFill>
-            <a:prstDash val="solid"/>
-          </a:ln>
-        </p:spPr>
-      </p:sp>
-      <p:sp>
-        <p:nvSpPr>
-          <p:cNvPr id="29" name="KHACHHANG header"/>
-          <p:cNvSpPr/>
-          <p:nvPr/>
-        </p:nvSpPr>
-        <p:spPr>
-          <a:xfrm>
-            <a:off x="457200" y="4251960"/>
-            <a:ext cx="2468880" cy="365760"/>
-          </a:xfrm>
-          <a:prstGeom prst="rect">
-            <a:avLst/>
-          </a:prstGeom>
-          <a:solidFill>
-            <a:schemeClr val="tx1"/>
-          </a:solidFill>
-          <a:ln w="15875">
-            <a:solidFill>
-              <a:schemeClr val="tx1"/>
+              <a:schemeClr val="tx2"/>
             </a:solidFill>
           </a:ln>
         </p:spPr>
@@ -6023,152 +6062,37 @@
               <a:buNone/>
             </a:pPr>
             <a:r>
-              <a:rPr lang="en-US" sz="1400" b="1" dirty="0">
-                <a:solidFill>
-                  <a:schemeClr val="bg1"/>
-                </a:solidFill>
-              </a:rPr>
-              <a:t>KHACHHANG</a:t>
-            </a:r>
-            <a:endParaRPr lang="en-US" sz="1400" dirty="0"/>
+              <a:rPr lang="en-US" sz="1100" dirty="0">
+                <a:solidFill>
+                  <a:schemeClr val="tx1"/>
+                </a:solidFill>
+              </a:rPr>
+              <a:t>NgayKhoiChieu</a:t>
+            </a:r>
+            <a:endParaRPr lang="en-US" sz="1100" dirty="0"/>
           </a:p>
         </p:txBody>
       </p:sp>
       <p:sp>
         <p:nvSpPr>
-          <p:cNvPr id="30" name="KHACHHANG attributes"/>
-          <p:cNvSpPr txBox="1"/>
-          <p:nvPr/>
-        </p:nvSpPr>
-        <p:spPr>
-          <a:xfrm>
-            <a:off x="594360" y="4690872"/>
-            <a:ext cx="2194560" cy="1051560"/>
-          </a:xfrm>
-          <a:prstGeom prst="rect">
-            <a:avLst/>
-          </a:prstGeom>
-          <a:noFill/>
-          <a:ln/>
-        </p:spPr>
-        <p:txBody>
-          <a:bodyPr wrap="square" lIns="0" tIns="0" rIns="0" bIns="0" rtlCol="0" anchor="t"/>
-          <a:lstStyle/>
-          <a:p>
-            <a:pPr indent="0" marL="0">
-              <a:lnSpc>
-                <a:spcPts val="1900"/>
-              </a:lnSpc>
-              <a:buNone/>
-            </a:pPr>
-            <a:r>
-              <a:rPr lang="en-US" sz="1200" b="1" u="sng" dirty="0">
-                <a:solidFill>
-                  <a:schemeClr val="tx1"/>
-                </a:solidFill>
-              </a:rPr>
-              <a:t>MaKH</a:t>
-            </a:r>
-            <a:endParaRPr lang="en-US" sz="1200" dirty="0"/>
-          </a:p>
-          <a:p>
-            <a:pPr indent="0" marL="0">
-              <a:lnSpc>
-                <a:spcPts val="1900"/>
-              </a:lnSpc>
-              <a:buNone/>
-            </a:pPr>
-            <a:r>
-              <a:rPr lang="en-US" sz="1200" dirty="0">
-                <a:solidFill>
-                  <a:schemeClr val="tx1"/>
-                </a:solidFill>
-              </a:rPr>
-              <a:t>HoTen</a:t>
-            </a:r>
-            <a:endParaRPr lang="en-US" sz="1200" dirty="0"/>
-          </a:p>
-          <a:p>
-            <a:pPr indent="0" marL="0">
-              <a:lnSpc>
-                <a:spcPts val="1900"/>
-              </a:lnSpc>
-              <a:buNone/>
-            </a:pPr>
-            <a:r>
-              <a:rPr lang="en-US" sz="1200" dirty="0">
-                <a:solidFill>
-                  <a:schemeClr val="tx1"/>
-                </a:solidFill>
-              </a:rPr>
-              <a:t>SDT</a:t>
-            </a:r>
-            <a:endParaRPr lang="en-US" sz="1200" dirty="0"/>
-          </a:p>
-          <a:p>
-            <a:pPr indent="0" marL="0">
-              <a:lnSpc>
-                <a:spcPts val="1900"/>
-              </a:lnSpc>
-              <a:buNone/>
-            </a:pPr>
-            <a:r>
-              <a:rPr lang="en-US" sz="1200" dirty="0">
-                <a:solidFill>
-                  <a:schemeClr val="tx1"/>
-                </a:solidFill>
-              </a:rPr>
-              <a:t>Email</a:t>
-            </a:r>
-            <a:endParaRPr lang="en-US" sz="1200" dirty="0"/>
-          </a:p>
-        </p:txBody>
-      </p:sp>
-      <p:sp>
-        <p:nvSpPr>
-          <p:cNvPr id="31" name="VE body"/>
+          <p:cNvPr id="44" name="Attr PHONGCHIEU MaPhong"/>
           <p:cNvSpPr/>
           <p:nvPr/>
         </p:nvSpPr>
         <p:spPr>
           <a:xfrm>
-            <a:off x="4860036" y="4617720"/>
-            <a:ext cx="2468880" cy="1143000"/>
-          </a:xfrm>
-          <a:prstGeom prst="rect">
+            <a:off x="9029700" y="1362456"/>
+            <a:ext cx="1325880" cy="384048"/>
+          </a:xfrm>
+          <a:prstGeom prst="ellipse">
             <a:avLst/>
           </a:prstGeom>
           <a:solidFill>
             <a:schemeClr val="bg1"/>
           </a:solidFill>
-          <a:ln w="15875">
+          <a:ln w="12700">
             <a:solidFill>
-              <a:schemeClr val="tx1"/>
-            </a:solidFill>
-            <a:prstDash val="solid"/>
-          </a:ln>
-        </p:spPr>
-      </p:sp>
-      <p:sp>
-        <p:nvSpPr>
-          <p:cNvPr id="32" name="VE header"/>
-          <p:cNvSpPr/>
-          <p:nvPr/>
-        </p:nvSpPr>
-        <p:spPr>
-          <a:xfrm>
-            <a:off x="4860036" y="4251960"/>
-            <a:ext cx="2468880" cy="365760"/>
-          </a:xfrm>
-          <a:prstGeom prst="rect">
-            <a:avLst/>
-          </a:prstGeom>
-          <a:solidFill>
-            <a:schemeClr val="accent1"/>
-          </a:solidFill>
-          <a:ln w="15875">
-            <a:solidFill>
-              <a:schemeClr val="tx1"/>
+              <a:schemeClr val="tx2"/>
             </a:solidFill>
           </a:ln>
         </p:spPr>
@@ -6180,104 +6104,1005 @@
               <a:buNone/>
             </a:pPr>
             <a:r>
-              <a:rPr lang="en-US" sz="1400" b="1" dirty="0">
+              <a:rPr lang="en-US" sz="1100" b="1" u="sng" dirty="0">
                 <a:solidFill>
                   <a:schemeClr val="tx1"/>
                 </a:solidFill>
               </a:rPr>
-              <a:t>VE</a:t>
-            </a:r>
-            <a:endParaRPr lang="en-US" sz="1400" dirty="0"/>
+              <a:t>MaPhong</a:t>
+            </a:r>
+            <a:endParaRPr lang="en-US" sz="1100" dirty="0"/>
           </a:p>
         </p:txBody>
       </p:sp>
       <p:sp>
         <p:nvSpPr>
-          <p:cNvPr id="33" name="VE attributes"/>
-          <p:cNvSpPr txBox="1"/>
-          <p:nvPr/>
-        </p:nvSpPr>
-        <p:spPr>
-          <a:xfrm>
-            <a:off x="4997196" y="4690872"/>
-            <a:ext cx="2194560" cy="1051560"/>
-          </a:xfrm>
-          <a:prstGeom prst="rect">
-            <a:avLst/>
-          </a:prstGeom>
-          <a:noFill/>
-          <a:ln/>
+          <p:cNvPr id="45" name="Attr PHONGCHIEU TenPhong"/>
+          <p:cNvSpPr/>
+          <p:nvPr/>
+        </p:nvSpPr>
+        <p:spPr>
+          <a:xfrm>
+            <a:off x="10492740" y="1362456"/>
+            <a:ext cx="1325880" cy="384048"/>
+          </a:xfrm>
+          <a:prstGeom prst="ellipse">
+            <a:avLst/>
+          </a:prstGeom>
+          <a:solidFill>
+            <a:schemeClr val="bg1"/>
+          </a:solidFill>
+          <a:ln w="12700">
+            <a:solidFill>
+              <a:schemeClr val="tx2"/>
+            </a:solidFill>
+          </a:ln>
         </p:spPr>
         <p:txBody>
-          <a:bodyPr wrap="square" lIns="0" tIns="0" rIns="0" bIns="0" rtlCol="0" anchor="t"/>
+          <a:bodyPr wrap="square" lIns="0" tIns="0" rIns="0" bIns="0" rtlCol="0" anchor="ctr"/>
           <a:lstStyle/>
           <a:p>
-            <a:pPr indent="0" marL="0">
-              <a:lnSpc>
-                <a:spcPts val="1900"/>
-              </a:lnSpc>
+            <a:pPr algn="ctr" indent="0" marL="0">
               <a:buNone/>
             </a:pPr>
             <a:r>
-              <a:rPr lang="en-US" sz="1200" b="1" u="sng" dirty="0">
+              <a:rPr lang="en-US" sz="1100" dirty="0">
                 <a:solidFill>
                   <a:schemeClr val="tx1"/>
                 </a:solidFill>
               </a:rPr>
-              <a:t>MaVe</a:t>
-            </a:r>
-            <a:endParaRPr lang="en-US" sz="1200" dirty="0"/>
-          </a:p>
-          <a:p>
-            <a:pPr indent="0" marL="0">
-              <a:lnSpc>
-                <a:spcPts val="1900"/>
-              </a:lnSpc>
-              <a:buNone/>
-            </a:pPr>
-            <a:r>
-              <a:rPr lang="en-US" sz="1200" dirty="0">
-                <a:solidFill>
-                  <a:schemeClr val="tx1"/>
-                </a:solidFill>
-              </a:rPr>
-              <a:t>SoGhe</a:t>
-            </a:r>
-            <a:endParaRPr lang="en-US" sz="1200" dirty="0"/>
-          </a:p>
-          <a:p>
-            <a:pPr indent="0" marL="0">
-              <a:lnSpc>
-                <a:spcPts val="1900"/>
-              </a:lnSpc>
-              <a:buNone/>
-            </a:pPr>
-            <a:r>
-              <a:rPr lang="en-US" sz="1200" dirty="0">
-                <a:solidFill>
-                  <a:schemeClr val="tx1"/>
-                </a:solidFill>
-              </a:rPr>
-              <a:t>NgayDat</a:t>
-            </a:r>
-            <a:endParaRPr lang="en-US" sz="1200" dirty="0"/>
+              <a:t>TenPhong</a:t>
+            </a:r>
+            <a:endParaRPr lang="en-US" sz="1100" dirty="0"/>
           </a:p>
         </p:txBody>
       </p:sp>
       <p:sp>
         <p:nvSpPr>
-          <p:cNvPr id="34" name="Legend card"/>
+          <p:cNvPr id="46" name="Attr PHONGCHIEU LoaiPhong"/>
           <p:cNvSpPr/>
           <p:nvPr/>
         </p:nvSpPr>
         <p:spPr>
           <a:xfrm>
-            <a:off x="7694676" y="4251960"/>
-            <a:ext cx="4037076" cy="1508760"/>
+            <a:off x="9029700" y="3557016"/>
+            <a:ext cx="1325880" cy="384048"/>
+          </a:xfrm>
+          <a:prstGeom prst="ellipse">
+            <a:avLst/>
+          </a:prstGeom>
+          <a:solidFill>
+            <a:schemeClr val="bg1"/>
+          </a:solidFill>
+          <a:ln w="12700">
+            <a:solidFill>
+              <a:schemeClr val="tx2"/>
+            </a:solidFill>
+          </a:ln>
+        </p:spPr>
+        <p:txBody>
+          <a:bodyPr wrap="square" lIns="0" tIns="0" rIns="0" bIns="0" rtlCol="0" anchor="ctr"/>
+          <a:lstStyle/>
+          <a:p>
+            <a:pPr algn="ctr" indent="0" marL="0">
+              <a:buNone/>
+            </a:pPr>
+            <a:r>
+              <a:rPr lang="en-US" sz="1100" dirty="0">
+                <a:solidFill>
+                  <a:schemeClr val="tx1"/>
+                </a:solidFill>
+              </a:rPr>
+              <a:t>LoaiPhong</a:t>
+            </a:r>
+            <a:endParaRPr lang="en-US" sz="1100" dirty="0"/>
+          </a:p>
+        </p:txBody>
+      </p:sp>
+      <p:sp>
+        <p:nvSpPr>
+          <p:cNvPr id="47" name="Attr PHONGCHIEU SucChua"/>
+          <p:cNvSpPr/>
+          <p:nvPr/>
+        </p:nvSpPr>
+        <p:spPr>
+          <a:xfrm>
+            <a:off x="10492740" y="3557016"/>
+            <a:ext cx="1325880" cy="384048"/>
+          </a:xfrm>
+          <a:prstGeom prst="ellipse">
+            <a:avLst/>
+          </a:prstGeom>
+          <a:solidFill>
+            <a:schemeClr val="bg1"/>
+          </a:solidFill>
+          <a:ln w="12700">
+            <a:solidFill>
+              <a:schemeClr val="tx2"/>
+            </a:solidFill>
+          </a:ln>
+        </p:spPr>
+        <p:txBody>
+          <a:bodyPr wrap="square" lIns="0" tIns="0" rIns="0" bIns="0" rtlCol="0" anchor="ctr"/>
+          <a:lstStyle/>
+          <a:p>
+            <a:pPr algn="ctr" indent="0" marL="0">
+              <a:buNone/>
+            </a:pPr>
+            <a:r>
+              <a:rPr lang="en-US" sz="1100" dirty="0">
+                <a:solidFill>
+                  <a:schemeClr val="tx1"/>
+                </a:solidFill>
+              </a:rPr>
+              <a:t>SucChua</a:t>
+            </a:r>
+            <a:endParaRPr lang="en-US" sz="1100" dirty="0"/>
+          </a:p>
+        </p:txBody>
+      </p:sp>
+      <p:sp>
+        <p:nvSpPr>
+          <p:cNvPr id="48" name="Attr SUATCHIEU MaSuat"/>
+          <p:cNvSpPr/>
+          <p:nvPr/>
+        </p:nvSpPr>
+        <p:spPr>
+          <a:xfrm>
+            <a:off x="4686300" y="1362456"/>
+            <a:ext cx="1325880" cy="384048"/>
+          </a:xfrm>
+          <a:prstGeom prst="ellipse">
+            <a:avLst/>
+          </a:prstGeom>
+          <a:solidFill>
+            <a:schemeClr val="bg1"/>
+          </a:solidFill>
+          <a:ln w="12700">
+            <a:solidFill>
+              <a:schemeClr val="tx2"/>
+            </a:solidFill>
+          </a:ln>
+        </p:spPr>
+        <p:txBody>
+          <a:bodyPr wrap="square" lIns="0" tIns="0" rIns="0" bIns="0" rtlCol="0" anchor="ctr"/>
+          <a:lstStyle/>
+          <a:p>
+            <a:pPr algn="ctr" indent="0" marL="0">
+              <a:buNone/>
+            </a:pPr>
+            <a:r>
+              <a:rPr lang="en-US" sz="1100" b="1" u="sng" dirty="0">
+                <a:solidFill>
+                  <a:schemeClr val="tx1"/>
+                </a:solidFill>
+              </a:rPr>
+              <a:t>MaSuat</a:t>
+            </a:r>
+            <a:endParaRPr lang="en-US" sz="1100" dirty="0"/>
+          </a:p>
+        </p:txBody>
+      </p:sp>
+      <p:sp>
+        <p:nvSpPr>
+          <p:cNvPr id="49" name="Attr SUATCHIEU NgayChieu"/>
+          <p:cNvSpPr/>
+          <p:nvPr/>
+        </p:nvSpPr>
+        <p:spPr>
+          <a:xfrm>
+            <a:off x="6149340" y="1362456"/>
+            <a:ext cx="1325880" cy="384048"/>
+          </a:xfrm>
+          <a:prstGeom prst="ellipse">
+            <a:avLst/>
+          </a:prstGeom>
+          <a:solidFill>
+            <a:schemeClr val="bg1"/>
+          </a:solidFill>
+          <a:ln w="12700">
+            <a:solidFill>
+              <a:schemeClr val="tx2"/>
+            </a:solidFill>
+          </a:ln>
+        </p:spPr>
+        <p:txBody>
+          <a:bodyPr wrap="square" lIns="0" tIns="0" rIns="0" bIns="0" rtlCol="0" anchor="ctr"/>
+          <a:lstStyle/>
+          <a:p>
+            <a:pPr algn="ctr" indent="0" marL="0">
+              <a:buNone/>
+            </a:pPr>
+            <a:r>
+              <a:rPr lang="en-US" sz="1100" dirty="0">
+                <a:solidFill>
+                  <a:schemeClr val="tx1"/>
+                </a:solidFill>
+              </a:rPr>
+              <a:t>NgayChieu</a:t>
+            </a:r>
+            <a:endParaRPr lang="en-US" sz="1100" dirty="0"/>
+          </a:p>
+        </p:txBody>
+      </p:sp>
+      <p:sp>
+        <p:nvSpPr>
+          <p:cNvPr id="50" name="Attr SUATCHIEU GioBatDau"/>
+          <p:cNvSpPr/>
+          <p:nvPr/>
+        </p:nvSpPr>
+        <p:spPr>
+          <a:xfrm>
+            <a:off x="4046220" y="3511296"/>
+            <a:ext cx="1325880" cy="384048"/>
+          </a:xfrm>
+          <a:prstGeom prst="ellipse">
+            <a:avLst/>
+          </a:prstGeom>
+          <a:solidFill>
+            <a:schemeClr val="bg1"/>
+          </a:solidFill>
+          <a:ln w="12700">
+            <a:solidFill>
+              <a:schemeClr val="tx2"/>
+            </a:solidFill>
+          </a:ln>
+        </p:spPr>
+        <p:txBody>
+          <a:bodyPr wrap="square" lIns="0" tIns="0" rIns="0" bIns="0" rtlCol="0" anchor="ctr"/>
+          <a:lstStyle/>
+          <a:p>
+            <a:pPr algn="ctr" indent="0" marL="0">
+              <a:buNone/>
+            </a:pPr>
+            <a:r>
+              <a:rPr lang="en-US" sz="1100" dirty="0">
+                <a:solidFill>
+                  <a:schemeClr val="tx1"/>
+                </a:solidFill>
+              </a:rPr>
+              <a:t>GioBatDau</a:t>
+            </a:r>
+            <a:endParaRPr lang="en-US" sz="1100" dirty="0"/>
+          </a:p>
+        </p:txBody>
+      </p:sp>
+      <p:sp>
+        <p:nvSpPr>
+          <p:cNvPr id="51" name="Attr SUATCHIEU GiaVe"/>
+          <p:cNvSpPr/>
+          <p:nvPr/>
+        </p:nvSpPr>
+        <p:spPr>
+          <a:xfrm>
+            <a:off x="6835140" y="3511296"/>
+            <a:ext cx="1325880" cy="384048"/>
+          </a:xfrm>
+          <a:prstGeom prst="ellipse">
+            <a:avLst/>
+          </a:prstGeom>
+          <a:solidFill>
+            <a:schemeClr val="bg1"/>
+          </a:solidFill>
+          <a:ln w="12700">
+            <a:solidFill>
+              <a:schemeClr val="tx2"/>
+            </a:solidFill>
+          </a:ln>
+        </p:spPr>
+        <p:txBody>
+          <a:bodyPr wrap="square" lIns="0" tIns="0" rIns="0" bIns="0" rtlCol="0" anchor="ctr"/>
+          <a:lstStyle/>
+          <a:p>
+            <a:pPr algn="ctr" indent="0" marL="0">
+              <a:buNone/>
+            </a:pPr>
+            <a:r>
+              <a:rPr lang="en-US" sz="1100" dirty="0">
+                <a:solidFill>
+                  <a:schemeClr val="tx1"/>
+                </a:solidFill>
+              </a:rPr>
+              <a:t>GiaVe</a:t>
+            </a:r>
+            <a:endParaRPr lang="en-US" sz="1100" dirty="0"/>
+          </a:p>
+        </p:txBody>
+      </p:sp>
+      <p:sp>
+        <p:nvSpPr>
+          <p:cNvPr id="52" name="Attr KHACHHANG MaKH"/>
+          <p:cNvSpPr/>
+          <p:nvPr/>
+        </p:nvSpPr>
+        <p:spPr>
+          <a:xfrm>
+            <a:off x="114300" y="5934456"/>
+            <a:ext cx="1325880" cy="384048"/>
+          </a:xfrm>
+          <a:prstGeom prst="ellipse">
+            <a:avLst/>
+          </a:prstGeom>
+          <a:solidFill>
+            <a:schemeClr val="bg1"/>
+          </a:solidFill>
+          <a:ln w="12700">
+            <a:solidFill>
+              <a:schemeClr val="tx2"/>
+            </a:solidFill>
+          </a:ln>
+        </p:spPr>
+        <p:txBody>
+          <a:bodyPr wrap="square" lIns="0" tIns="0" rIns="0" bIns="0" rtlCol="0" anchor="ctr"/>
+          <a:lstStyle/>
+          <a:p>
+            <a:pPr algn="ctr" indent="0" marL="0">
+              <a:buNone/>
+            </a:pPr>
+            <a:r>
+              <a:rPr lang="en-US" sz="1100" b="1" u="sng" dirty="0">
+                <a:solidFill>
+                  <a:schemeClr val="tx1"/>
+                </a:solidFill>
+              </a:rPr>
+              <a:t>MaKH</a:t>
+            </a:r>
+            <a:endParaRPr lang="en-US" sz="1100" dirty="0"/>
+          </a:p>
+        </p:txBody>
+      </p:sp>
+      <p:sp>
+        <p:nvSpPr>
+          <p:cNvPr id="53" name="Attr KHACHHANG HoTen"/>
+          <p:cNvSpPr/>
+          <p:nvPr/>
+        </p:nvSpPr>
+        <p:spPr>
+          <a:xfrm>
+            <a:off x="1485900" y="5934456"/>
+            <a:ext cx="1325880" cy="384048"/>
+          </a:xfrm>
+          <a:prstGeom prst="ellipse">
+            <a:avLst/>
+          </a:prstGeom>
+          <a:solidFill>
+            <a:schemeClr val="bg1"/>
+          </a:solidFill>
+          <a:ln w="12700">
+            <a:solidFill>
+              <a:schemeClr val="tx2"/>
+            </a:solidFill>
+          </a:ln>
+        </p:spPr>
+        <p:txBody>
+          <a:bodyPr wrap="square" lIns="0" tIns="0" rIns="0" bIns="0" rtlCol="0" anchor="ctr"/>
+          <a:lstStyle/>
+          <a:p>
+            <a:pPr algn="ctr" indent="0" marL="0">
+              <a:buNone/>
+            </a:pPr>
+            <a:r>
+              <a:rPr lang="en-US" sz="1100" dirty="0">
+                <a:solidFill>
+                  <a:schemeClr val="tx1"/>
+                </a:solidFill>
+              </a:rPr>
+              <a:t>HoTen</a:t>
+            </a:r>
+            <a:endParaRPr lang="en-US" sz="1100" dirty="0"/>
+          </a:p>
+        </p:txBody>
+      </p:sp>
+      <p:sp>
+        <p:nvSpPr>
+          <p:cNvPr id="54" name="Attr KHACHHANG SDT"/>
+          <p:cNvSpPr/>
+          <p:nvPr/>
+        </p:nvSpPr>
+        <p:spPr>
+          <a:xfrm>
+            <a:off x="2811780" y="5934456"/>
+            <a:ext cx="1325880" cy="384048"/>
+          </a:xfrm>
+          <a:prstGeom prst="ellipse">
+            <a:avLst/>
+          </a:prstGeom>
+          <a:solidFill>
+            <a:schemeClr val="bg1"/>
+          </a:solidFill>
+          <a:ln w="12700">
+            <a:solidFill>
+              <a:schemeClr val="tx2"/>
+            </a:solidFill>
+          </a:ln>
+        </p:spPr>
+        <p:txBody>
+          <a:bodyPr wrap="square" lIns="0" tIns="0" rIns="0" bIns="0" rtlCol="0" anchor="ctr"/>
+          <a:lstStyle/>
+          <a:p>
+            <a:pPr algn="ctr" indent="0" marL="0">
+              <a:buNone/>
+            </a:pPr>
+            <a:r>
+              <a:rPr lang="en-US" sz="1100" dirty="0">
+                <a:solidFill>
+                  <a:schemeClr val="tx1"/>
+                </a:solidFill>
+              </a:rPr>
+              <a:t>SDT</a:t>
+            </a:r>
+            <a:endParaRPr lang="en-US" sz="1100" dirty="0"/>
+          </a:p>
+        </p:txBody>
+      </p:sp>
+      <p:sp>
+        <p:nvSpPr>
+          <p:cNvPr id="55" name="Attr KHACHHANG Email"/>
+          <p:cNvSpPr/>
+          <p:nvPr/>
+        </p:nvSpPr>
+        <p:spPr>
+          <a:xfrm>
+            <a:off x="68580" y="4242816"/>
+            <a:ext cx="1325880" cy="384048"/>
+          </a:xfrm>
+          <a:prstGeom prst="ellipse">
+            <a:avLst/>
+          </a:prstGeom>
+          <a:solidFill>
+            <a:schemeClr val="bg1"/>
+          </a:solidFill>
+          <a:ln w="12700">
+            <a:solidFill>
+              <a:schemeClr val="tx2"/>
+            </a:solidFill>
+          </a:ln>
+        </p:spPr>
+        <p:txBody>
+          <a:bodyPr wrap="square" lIns="0" tIns="0" rIns="0" bIns="0" rtlCol="0" anchor="ctr"/>
+          <a:lstStyle/>
+          <a:p>
+            <a:pPr algn="ctr" indent="0" marL="0">
+              <a:buNone/>
+            </a:pPr>
+            <a:r>
+              <a:rPr lang="en-US" sz="1100" dirty="0">
+                <a:solidFill>
+                  <a:schemeClr val="tx1"/>
+                </a:solidFill>
+              </a:rPr>
+              <a:t>Email</a:t>
+            </a:r>
+            <a:endParaRPr lang="en-US" sz="1100" dirty="0"/>
+          </a:p>
+        </p:txBody>
+      </p:sp>
+      <p:sp>
+        <p:nvSpPr>
+          <p:cNvPr id="56" name="Attr VE SoGhe"/>
+          <p:cNvSpPr/>
+          <p:nvPr/>
+        </p:nvSpPr>
+        <p:spPr>
+          <a:xfrm>
+            <a:off x="4823460" y="5934456"/>
+            <a:ext cx="1325880" cy="384048"/>
+          </a:xfrm>
+          <a:prstGeom prst="ellipse">
+            <a:avLst/>
+          </a:prstGeom>
+          <a:solidFill>
+            <a:schemeClr val="bg1"/>
+          </a:solidFill>
+          <a:ln w="12700">
+            <a:solidFill>
+              <a:schemeClr val="tx2"/>
+            </a:solidFill>
+          </a:ln>
+        </p:spPr>
+        <p:txBody>
+          <a:bodyPr wrap="square" lIns="0" tIns="0" rIns="0" bIns="0" rtlCol="0" anchor="ctr"/>
+          <a:lstStyle/>
+          <a:p>
+            <a:pPr algn="ctr" indent="0" marL="0">
+              <a:buNone/>
+            </a:pPr>
+            <a:r>
+              <a:rPr lang="en-US" sz="1100" b="1" u="dash" dirty="0">
+                <a:solidFill>
+                  <a:schemeClr val="tx1"/>
+                </a:solidFill>
+              </a:rPr>
+              <a:t>SoGhe</a:t>
+            </a:r>
+            <a:endParaRPr lang="en-US" sz="1100" dirty="0"/>
+          </a:p>
+        </p:txBody>
+      </p:sp>
+      <p:sp>
+        <p:nvSpPr>
+          <p:cNvPr id="57" name="Attr VE NgayDat"/>
+          <p:cNvSpPr/>
+          <p:nvPr/>
+        </p:nvSpPr>
+        <p:spPr>
+          <a:xfrm>
+            <a:off x="6195060" y="5934456"/>
+            <a:ext cx="1325880" cy="384048"/>
+          </a:xfrm>
+          <a:prstGeom prst="ellipse">
+            <a:avLst/>
+          </a:prstGeom>
+          <a:solidFill>
+            <a:schemeClr val="bg1"/>
+          </a:solidFill>
+          <a:ln w="12700">
+            <a:solidFill>
+              <a:schemeClr val="tx2"/>
+            </a:solidFill>
+          </a:ln>
+        </p:spPr>
+        <p:txBody>
+          <a:bodyPr wrap="square" lIns="0" tIns="0" rIns="0" bIns="0" rtlCol="0" anchor="ctr"/>
+          <a:lstStyle/>
+          <a:p>
+            <a:pPr algn="ctr" indent="0" marL="0">
+              <a:buNone/>
+            </a:pPr>
+            <a:r>
+              <a:rPr lang="en-US" sz="1100" dirty="0">
+                <a:solidFill>
+                  <a:schemeClr val="tx1"/>
+                </a:solidFill>
+              </a:rPr>
+              <a:t>NgayDat</a:t>
+            </a:r>
+            <a:endParaRPr lang="en-US" sz="1100" dirty="0"/>
+          </a:p>
+        </p:txBody>
+      </p:sp>
+      <p:sp>
+        <p:nvSpPr>
+          <p:cNvPr id="58" name="Relationship PHIM-SUATCHIEU"/>
+          <p:cNvSpPr/>
+          <p:nvPr/>
+        </p:nvSpPr>
+        <p:spPr>
+          <a:xfrm>
+            <a:off x="3364992" y="2423160"/>
+            <a:ext cx="1097280" cy="640080"/>
+          </a:xfrm>
+          <a:prstGeom prst="diamond">
+            <a:avLst/>
+          </a:prstGeom>
+          <a:solidFill>
+            <a:schemeClr val="bg2"/>
+          </a:solidFill>
+          <a:ln w="19050">
+            <a:solidFill>
+              <a:schemeClr val="tx1"/>
+            </a:solidFill>
+          </a:ln>
+        </p:spPr>
+        <p:txBody>
+          <a:bodyPr wrap="square" lIns="0" tIns="0" rIns="0" bIns="0" rtlCol="0" anchor="ctr"/>
+          <a:lstStyle/>
+          <a:p>
+            <a:pPr algn="ctr" indent="0" marL="0">
+              <a:buNone/>
+            </a:pPr>
+            <a:r>
+              <a:rPr lang="en-US" sz="1300" b="1" dirty="0">
+                <a:solidFill>
+                  <a:schemeClr val="tx1"/>
+                </a:solidFill>
+              </a:rPr>
+              <a:t>chiếu</a:t>
+            </a:r>
+            <a:endParaRPr lang="en-US" sz="1300" dirty="0"/>
+          </a:p>
+        </p:txBody>
+      </p:sp>
+      <p:sp>
+        <p:nvSpPr>
+          <p:cNvPr id="59" name="Relationship PHONGCHIEU-SUATCHIEU"/>
+          <p:cNvSpPr/>
+          <p:nvPr/>
+        </p:nvSpPr>
+        <p:spPr>
+          <a:xfrm>
+            <a:off x="7726680" y="2423160"/>
+            <a:ext cx="1097280" cy="640080"/>
+          </a:xfrm>
+          <a:prstGeom prst="diamond">
+            <a:avLst/>
+          </a:prstGeom>
+          <a:solidFill>
+            <a:schemeClr val="bg2"/>
+          </a:solidFill>
+          <a:ln w="19050">
+            <a:solidFill>
+              <a:schemeClr val="tx1"/>
+            </a:solidFill>
+          </a:ln>
+        </p:spPr>
+        <p:txBody>
+          <a:bodyPr wrap="square" lIns="0" tIns="0" rIns="0" bIns="0" rtlCol="0" anchor="ctr"/>
+          <a:lstStyle/>
+          <a:p>
+            <a:pPr algn="ctr" indent="0" marL="0">
+              <a:buNone/>
+            </a:pPr>
+            <a:r>
+              <a:rPr lang="en-US" sz="1300" b="1" dirty="0">
+                <a:solidFill>
+                  <a:schemeClr val="tx1"/>
+                </a:solidFill>
+              </a:rPr>
+              <a:t>tại</a:t>
+            </a:r>
+            <a:endParaRPr lang="en-US" sz="1300" dirty="0"/>
+          </a:p>
+        </p:txBody>
+      </p:sp>
+      <p:sp>
+        <p:nvSpPr>
+          <p:cNvPr id="60" name="Relationship outer SUATCHIEU-VE"/>
+          <p:cNvSpPr/>
+          <p:nvPr/>
+        </p:nvSpPr>
+        <p:spPr>
+          <a:xfrm>
+            <a:off x="5550408" y="3657600"/>
+            <a:ext cx="1097280" cy="640080"/>
+          </a:xfrm>
+          <a:prstGeom prst="diamond">
+            <a:avLst/>
+          </a:prstGeom>
+          <a:solidFill>
+            <a:schemeClr val="bg2"/>
+          </a:solidFill>
+          <a:ln w="19050">
+            <a:solidFill>
+              <a:schemeClr val="tx1"/>
+            </a:solidFill>
+            <a:prstDash val="solid"/>
+          </a:ln>
+        </p:spPr>
+      </p:sp>
+      <p:sp>
+        <p:nvSpPr>
+          <p:cNvPr id="61" name="Relationship SUATCHIEU-VE"/>
+          <p:cNvSpPr/>
+          <p:nvPr/>
+        </p:nvSpPr>
+        <p:spPr>
+          <a:xfrm>
+            <a:off x="5682082" y="3734410"/>
+            <a:ext cx="833933" cy="486461"/>
+          </a:xfrm>
+          <a:prstGeom prst="diamond">
+            <a:avLst/>
+          </a:prstGeom>
+          <a:solidFill>
+            <a:schemeClr val="bg2"/>
+          </a:solidFill>
+          <a:ln w="19050">
+            <a:solidFill>
+              <a:schemeClr val="tx1"/>
+            </a:solidFill>
+          </a:ln>
+        </p:spPr>
+        <p:txBody>
+          <a:bodyPr wrap="square" lIns="0" tIns="0" rIns="0" bIns="0" rtlCol="0" anchor="ctr"/>
+          <a:lstStyle/>
+          <a:p>
+            <a:pPr algn="ctr" indent="0" marL="0">
+              <a:buNone/>
+            </a:pPr>
+            <a:r>
+              <a:rPr lang="en-US" sz="1300" b="1" dirty="0">
+                <a:solidFill>
+                  <a:schemeClr val="tx1"/>
+                </a:solidFill>
+              </a:rPr>
+              <a:t>bán</a:t>
+            </a:r>
+            <a:endParaRPr lang="en-US" sz="1300" dirty="0"/>
+          </a:p>
+        </p:txBody>
+      </p:sp>
+      <p:sp>
+        <p:nvSpPr>
+          <p:cNvPr id="62" name="Relationship KHACHHANG-VE"/>
+          <p:cNvSpPr/>
+          <p:nvPr/>
+        </p:nvSpPr>
+        <p:spPr>
+          <a:xfrm>
+            <a:off x="3364992" y="4892040"/>
+            <a:ext cx="1097280" cy="640080"/>
+          </a:xfrm>
+          <a:prstGeom prst="diamond">
+            <a:avLst/>
+          </a:prstGeom>
+          <a:solidFill>
+            <a:schemeClr val="bg2"/>
+          </a:solidFill>
+          <a:ln w="19050">
+            <a:solidFill>
+              <a:schemeClr val="tx1"/>
+            </a:solidFill>
+          </a:ln>
+        </p:spPr>
+        <p:txBody>
+          <a:bodyPr wrap="square" lIns="0" tIns="0" rIns="0" bIns="0" rtlCol="0" anchor="ctr"/>
+          <a:lstStyle/>
+          <a:p>
+            <a:pPr algn="ctr" indent="0" marL="0">
+              <a:buNone/>
+            </a:pPr>
+            <a:r>
+              <a:rPr lang="en-US" sz="1300" b="1" dirty="0">
+                <a:solidFill>
+                  <a:schemeClr val="tx1"/>
+                </a:solidFill>
+              </a:rPr>
+              <a:t>đặt</a:t>
+            </a:r>
+            <a:endParaRPr lang="en-US" sz="1300" dirty="0"/>
+          </a:p>
+        </p:txBody>
+      </p:sp>
+      <p:sp>
+        <p:nvSpPr>
+          <p:cNvPr id="63" name="Entity PHIM"/>
+          <p:cNvSpPr/>
+          <p:nvPr/>
+        </p:nvSpPr>
+        <p:spPr>
+          <a:xfrm>
+            <a:off x="937260" y="2491740"/>
+            <a:ext cx="1600200" cy="502920"/>
+          </a:xfrm>
+          <a:prstGeom prst="rect">
+            <a:avLst/>
+          </a:prstGeom>
+          <a:solidFill>
+            <a:schemeClr val="tx1"/>
+          </a:solidFill>
+          <a:ln w="19050">
+            <a:solidFill>
+              <a:schemeClr val="tx1"/>
+            </a:solidFill>
+          </a:ln>
+        </p:spPr>
+        <p:txBody>
+          <a:bodyPr wrap="square" lIns="0" tIns="0" rIns="0" bIns="0" rtlCol="0" anchor="ctr"/>
+          <a:lstStyle/>
+          <a:p>
+            <a:pPr algn="ctr" indent="0" marL="0">
+              <a:buNone/>
+            </a:pPr>
+            <a:r>
+              <a:rPr lang="en-US" sz="1300" b="1" dirty="0">
+                <a:solidFill>
+                  <a:schemeClr val="bg1"/>
+                </a:solidFill>
+              </a:rPr>
+              <a:t>PHIM</a:t>
+            </a:r>
+            <a:endParaRPr lang="en-US" sz="1300" dirty="0"/>
+          </a:p>
+        </p:txBody>
+      </p:sp>
+      <p:sp>
+        <p:nvSpPr>
+          <p:cNvPr id="64" name="Entity PHONGCHIEU"/>
+          <p:cNvSpPr/>
+          <p:nvPr/>
+        </p:nvSpPr>
+        <p:spPr>
+          <a:xfrm>
+            <a:off x="9624060" y="2491740"/>
+            <a:ext cx="1600200" cy="502920"/>
+          </a:xfrm>
+          <a:prstGeom prst="rect">
+            <a:avLst/>
+          </a:prstGeom>
+          <a:solidFill>
+            <a:schemeClr val="tx1"/>
+          </a:solidFill>
+          <a:ln w="19050">
+            <a:solidFill>
+              <a:schemeClr val="tx1"/>
+            </a:solidFill>
+          </a:ln>
+        </p:spPr>
+        <p:txBody>
+          <a:bodyPr wrap="square" lIns="0" tIns="0" rIns="0" bIns="0" rtlCol="0" anchor="ctr"/>
+          <a:lstStyle/>
+          <a:p>
+            <a:pPr algn="ctr" indent="0" marL="0">
+              <a:buNone/>
+            </a:pPr>
+            <a:r>
+              <a:rPr lang="en-US" sz="1300" b="1" dirty="0">
+                <a:solidFill>
+                  <a:schemeClr val="bg1"/>
+                </a:solidFill>
+              </a:rPr>
+              <a:t>PHONGCHIEU</a:t>
+            </a:r>
+            <a:endParaRPr lang="en-US" sz="1300" dirty="0"/>
+          </a:p>
+        </p:txBody>
+      </p:sp>
+      <p:sp>
+        <p:nvSpPr>
+          <p:cNvPr id="65" name="Entity SUATCHIEU"/>
+          <p:cNvSpPr/>
+          <p:nvPr/>
+        </p:nvSpPr>
+        <p:spPr>
+          <a:xfrm>
+            <a:off x="5298948" y="2491740"/>
+            <a:ext cx="1600200" cy="502920"/>
+          </a:xfrm>
+          <a:prstGeom prst="rect">
+            <a:avLst/>
+          </a:prstGeom>
+          <a:solidFill>
+            <a:schemeClr val="accent1"/>
+          </a:solidFill>
+          <a:ln w="19050">
+            <a:solidFill>
+              <a:schemeClr val="tx1"/>
+            </a:solidFill>
+          </a:ln>
+        </p:spPr>
+        <p:txBody>
+          <a:bodyPr wrap="square" lIns="0" tIns="0" rIns="0" bIns="0" rtlCol="0" anchor="ctr"/>
+          <a:lstStyle/>
+          <a:p>
+            <a:pPr algn="ctr" indent="0" marL="0">
+              <a:buNone/>
+            </a:pPr>
+            <a:r>
+              <a:rPr lang="en-US" sz="1300" b="1" dirty="0">
+                <a:solidFill>
+                  <a:schemeClr val="tx1"/>
+                </a:solidFill>
+              </a:rPr>
+              <a:t>SUATCHIEU</a:t>
+            </a:r>
+            <a:endParaRPr lang="en-US" sz="1300" dirty="0"/>
+          </a:p>
+        </p:txBody>
+      </p:sp>
+      <p:sp>
+        <p:nvSpPr>
+          <p:cNvPr id="66" name="Entity KHACHHANG"/>
+          <p:cNvSpPr/>
+          <p:nvPr/>
+        </p:nvSpPr>
+        <p:spPr>
+          <a:xfrm>
+            <a:off x="937260" y="4960620"/>
+            <a:ext cx="1600200" cy="502920"/>
+          </a:xfrm>
+          <a:prstGeom prst="rect">
+            <a:avLst/>
+          </a:prstGeom>
+          <a:solidFill>
+            <a:schemeClr val="tx1"/>
+          </a:solidFill>
+          <a:ln w="19050">
+            <a:solidFill>
+              <a:schemeClr val="tx1"/>
+            </a:solidFill>
+          </a:ln>
+        </p:spPr>
+        <p:txBody>
+          <a:bodyPr wrap="square" lIns="0" tIns="0" rIns="0" bIns="0" rtlCol="0" anchor="ctr"/>
+          <a:lstStyle/>
+          <a:p>
+            <a:pPr algn="ctr" indent="0" marL="0">
+              <a:buNone/>
+            </a:pPr>
+            <a:r>
+              <a:rPr lang="en-US" sz="1300" b="1" dirty="0">
+                <a:solidFill>
+                  <a:schemeClr val="bg1"/>
+                </a:solidFill>
+              </a:rPr>
+              <a:t>KHACHHANG</a:t>
+            </a:r>
+            <a:endParaRPr lang="en-US" sz="1300" dirty="0"/>
+          </a:p>
+        </p:txBody>
+      </p:sp>
+      <p:sp>
+        <p:nvSpPr>
+          <p:cNvPr id="67" name="Entity outer VE"/>
+          <p:cNvSpPr/>
+          <p:nvPr/>
+        </p:nvSpPr>
+        <p:spPr>
+          <a:xfrm>
+            <a:off x="5298948" y="4960620"/>
+            <a:ext cx="1600200" cy="502920"/>
+          </a:xfrm>
+          <a:prstGeom prst="rect">
+            <a:avLst/>
+          </a:prstGeom>
+          <a:solidFill>
+            <a:schemeClr val="bg1"/>
+          </a:solidFill>
+          <a:ln w="19050">
+            <a:solidFill>
+              <a:schemeClr val="tx1"/>
+            </a:solidFill>
+            <a:prstDash val="solid"/>
+          </a:ln>
+        </p:spPr>
+      </p:sp>
+      <p:sp>
+        <p:nvSpPr>
+          <p:cNvPr id="68" name="Entity VE"/>
+          <p:cNvSpPr/>
+          <p:nvPr/>
+        </p:nvSpPr>
+        <p:spPr>
+          <a:xfrm>
+            <a:off x="5362956" y="5024628"/>
+            <a:ext cx="1472184" cy="374904"/>
+          </a:xfrm>
+          <a:prstGeom prst="rect">
+            <a:avLst/>
+          </a:prstGeom>
+          <a:solidFill>
+            <a:schemeClr val="bg2"/>
+          </a:solidFill>
+          <a:ln w="19050">
+            <a:solidFill>
+              <a:schemeClr val="tx1"/>
+            </a:solidFill>
+          </a:ln>
+        </p:spPr>
+        <p:txBody>
+          <a:bodyPr wrap="square" lIns="0" tIns="0" rIns="0" bIns="0" rtlCol="0" anchor="ctr"/>
+          <a:lstStyle/>
+          <a:p>
+            <a:pPr algn="ctr" indent="0" marL="0">
+              <a:buNone/>
+            </a:pPr>
+            <a:r>
+              <a:rPr lang="en-US" sz="1300" b="1" dirty="0">
+                <a:solidFill>
+                  <a:schemeClr val="tx1"/>
+                </a:solidFill>
+              </a:rPr>
+              <a:t>VE</a:t>
+            </a:r>
+            <a:endParaRPr lang="en-US" sz="1300" dirty="0"/>
+          </a:p>
+        </p:txBody>
+      </p:sp>
+      <p:sp>
+        <p:nvSpPr>
+          <p:cNvPr id="69" name="Legend card"/>
+          <p:cNvSpPr/>
+          <p:nvPr/>
+        </p:nvSpPr>
+        <p:spPr>
+          <a:xfrm>
+            <a:off x="8549640" y="4343400"/>
+            <a:ext cx="3182112" cy="2011680"/>
           </a:xfrm>
           <a:prstGeom prst="roundRect">
             <a:avLst>
-              <a:gd name="adj" fmla="val 6061"/>
+              <a:gd name="adj" fmla="val 4545"/>
             </a:avLst>
           </a:prstGeom>
           <a:solidFill>
@@ -6293,14 +7118,14 @@
       </p:sp>
       <p:sp>
         <p:nvSpPr>
-          <p:cNvPr id="35" name="Legend title"/>
+          <p:cNvPr id="70" name="Legend title"/>
           <p:cNvSpPr txBox="1"/>
           <p:nvPr/>
         </p:nvSpPr>
         <p:spPr>
           <a:xfrm>
-            <a:off x="7877556" y="4343400"/>
-            <a:ext cx="2194560" cy="274320"/>
+            <a:off x="8732520" y="4416552"/>
+            <a:ext cx="1828800" cy="256032"/>
           </a:xfrm>
           <a:prstGeom prst="rect">
             <a:avLst/>
@@ -6316,48 +7141,12 @@
               <a:buNone/>
             </a:pPr>
             <a:r>
-              <a:rPr lang="en-US" sz="1300" b="1" dirty="0">
+              <a:rPr lang="en-US" sz="1200" b="1" dirty="0">
                 <a:solidFill>
                   <a:schemeClr val="tx1"/>
                 </a:solidFill>
               </a:rPr>
               <a:t>Chú thích</a:t>
-            </a:r>
-            <a:endParaRPr lang="en-US" sz="1300" dirty="0"/>
-          </a:p>
-        </p:txBody>
-      </p:sp>
-      <p:sp>
-        <p:nvSpPr>
-          <p:cNvPr id="36" name="Legend PK sample"/>
-          <p:cNvSpPr txBox="1"/>
-          <p:nvPr/>
-        </p:nvSpPr>
-        <p:spPr>
-          <a:xfrm>
-            <a:off x="7877556" y="4700016"/>
-            <a:ext cx="822960" cy="237744"/>
-          </a:xfrm>
-          <a:prstGeom prst="rect">
-            <a:avLst/>
-          </a:prstGeom>
-          <a:noFill/>
-          <a:ln/>
-        </p:spPr>
-        <p:txBody>
-          <a:bodyPr wrap="square" lIns="0" tIns="0" rIns="0" bIns="0" rtlCol="0" anchor="t"/>
-          <a:lstStyle/>
-          <a:p>
-            <a:pPr indent="0" marL="0">
-              <a:buNone/>
-            </a:pPr>
-            <a:r>
-              <a:rPr lang="en-US" sz="1200" b="1" u="sng" dirty="0">
-                <a:solidFill>
-                  <a:schemeClr val="tx1"/>
-                </a:solidFill>
-              </a:rPr>
-              <a:t>MaXX</a:t>
             </a:r>
             <a:endParaRPr lang="en-US" sz="1200" dirty="0"/>
           </a:p>
@@ -6365,56 +7154,20 @@
       </p:sp>
       <p:sp>
         <p:nvSpPr>
-          <p:cNvPr id="37" name="Legend PK text"/>
-          <p:cNvSpPr txBox="1"/>
-          <p:nvPr/>
-        </p:nvSpPr>
-        <p:spPr>
-          <a:xfrm>
-            <a:off x="8883396" y="4700016"/>
-            <a:ext cx="2665476" cy="237744"/>
+          <p:cNvPr id="71" name="Shape 69"/>
+          <p:cNvSpPr/>
+          <p:nvPr/>
+        </p:nvSpPr>
+        <p:spPr>
+          <a:xfrm>
+            <a:off x="8732520" y="4663440"/>
+            <a:ext cx="457200" cy="182880"/>
           </a:xfrm>
           <a:prstGeom prst="rect">
             <a:avLst/>
           </a:prstGeom>
-          <a:noFill/>
-          <a:ln/>
-        </p:spPr>
-        <p:txBody>
-          <a:bodyPr wrap="square" lIns="0" tIns="0" rIns="0" bIns="0" rtlCol="0" anchor="t"/>
-          <a:lstStyle/>
-          <a:p>
-            <a:pPr indent="0" marL="0">
-              <a:buNone/>
-            </a:pPr>
-            <a:r>
-              <a:rPr lang="en-US" sz="1200" dirty="0">
-                <a:solidFill>
-                  <a:schemeClr val="tx1"/>
-                </a:solidFill>
-              </a:rPr>
-              <a:t>Khóa chính</a:t>
-            </a:r>
-            <a:endParaRPr lang="en-US" sz="1200" dirty="0"/>
-          </a:p>
-        </p:txBody>
-      </p:sp>
-      <p:sp>
-        <p:nvSpPr>
-          <p:cNvPr id="38" name="Legend relationship swatch"/>
-          <p:cNvSpPr/>
-          <p:nvPr/>
-        </p:nvSpPr>
-        <p:spPr>
-          <a:xfrm>
-            <a:off x="7877556" y="4965192"/>
-            <a:ext cx="457200" cy="256032"/>
-          </a:xfrm>
-          <a:prstGeom prst="diamond">
-            <a:avLst/>
-          </a:prstGeom>
           <a:solidFill>
-            <a:schemeClr val="bg1"/>
+            <a:schemeClr val="tx1"/>
           </a:solidFill>
           <a:ln w="12700">
             <a:solidFill>
@@ -6426,14 +7179,14 @@
       </p:sp>
       <p:sp>
         <p:nvSpPr>
-          <p:cNvPr id="39" name="Legend relationship text"/>
+          <p:cNvPr id="72" name="Legend 0"/>
           <p:cNvSpPr txBox="1"/>
           <p:nvPr/>
         </p:nvSpPr>
         <p:spPr>
           <a:xfrm>
-            <a:off x="8883396" y="4974336"/>
-            <a:ext cx="2665476" cy="237744"/>
+            <a:off x="9326880" y="4645152"/>
+            <a:ext cx="2313432" cy="219456"/>
           </a:xfrm>
           <a:prstGeom prst="rect">
             <a:avLst/>
@@ -6442,34 +7195,120 @@
           <a:ln/>
         </p:spPr>
         <p:txBody>
-          <a:bodyPr wrap="square" lIns="0" tIns="0" rIns="0" bIns="0" rtlCol="0" anchor="t"/>
+          <a:bodyPr wrap="square" lIns="0" tIns="0" rIns="0" bIns="0" rtlCol="0" anchor="ctr"/>
           <a:lstStyle/>
           <a:p>
             <a:pPr indent="0" marL="0">
               <a:buNone/>
             </a:pPr>
             <a:r>
-              <a:rPr lang="en-US" sz="1200" dirty="0">
+              <a:rPr lang="en-US" sz="1050" dirty="0">
                 <a:solidFill>
                   <a:schemeClr val="tx1"/>
                 </a:solidFill>
               </a:rPr>
-              <a:t>Quan hệ giữa hai thực thể</a:t>
-            </a:r>
-            <a:endParaRPr lang="en-US" sz="1200" dirty="0"/>
+              <a:t>Thực thể</a:t>
+            </a:r>
+            <a:endParaRPr lang="en-US" sz="1050" dirty="0"/>
           </a:p>
         </p:txBody>
       </p:sp>
       <p:sp>
         <p:nvSpPr>
-          <p:cNvPr id="40" name="Legend associative swatch"/>
+          <p:cNvPr id="73" name="Shape 71"/>
           <p:cNvSpPr/>
           <p:nvPr/>
         </p:nvSpPr>
         <p:spPr>
           <a:xfrm>
-            <a:off x="7877556" y="5266944"/>
-            <a:ext cx="457200" cy="201168"/>
+            <a:off x="8732520" y="4892040"/>
+            <a:ext cx="457200" cy="182880"/>
+          </a:xfrm>
+          <a:prstGeom prst="rect">
+            <a:avLst/>
+          </a:prstGeom>
+          <a:solidFill>
+            <a:schemeClr val="bg2"/>
+          </a:solidFill>
+          <a:ln w="12700">
+            <a:solidFill>
+              <a:schemeClr val="tx1"/>
+            </a:solidFill>
+            <a:prstDash val="solid"/>
+          </a:ln>
+        </p:spPr>
+      </p:sp>
+      <p:sp>
+        <p:nvSpPr>
+          <p:cNvPr id="74" name="Shape 72"/>
+          <p:cNvSpPr/>
+          <p:nvPr/>
+        </p:nvSpPr>
+        <p:spPr>
+          <a:xfrm>
+            <a:off x="8787384" y="4928616"/>
+            <a:ext cx="347472" cy="109728"/>
+          </a:xfrm>
+          <a:prstGeom prst="rect">
+            <a:avLst/>
+          </a:prstGeom>
+          <a:solidFill>
+            <a:schemeClr val="bg2"/>
+          </a:solidFill>
+          <a:ln w="12700">
+            <a:solidFill>
+              <a:schemeClr val="tx1"/>
+            </a:solidFill>
+            <a:prstDash val="solid"/>
+          </a:ln>
+        </p:spPr>
+      </p:sp>
+      <p:sp>
+        <p:nvSpPr>
+          <p:cNvPr id="75" name="Legend 1"/>
+          <p:cNvSpPr txBox="1"/>
+          <p:nvPr/>
+        </p:nvSpPr>
+        <p:spPr>
+          <a:xfrm>
+            <a:off x="9326880" y="4873752"/>
+            <a:ext cx="2313432" cy="219456"/>
+          </a:xfrm>
+          <a:prstGeom prst="rect">
+            <a:avLst/>
+          </a:prstGeom>
+          <a:noFill/>
+          <a:ln/>
+        </p:spPr>
+        <p:txBody>
+          <a:bodyPr wrap="square" lIns="0" tIns="0" rIns="0" bIns="0" rtlCol="0" anchor="ctr"/>
+          <a:lstStyle/>
+          <a:p>
+            <a:pPr indent="0" marL="0">
+              <a:buNone/>
+            </a:pPr>
+            <a:r>
+              <a:rPr lang="en-US" sz="1050" dirty="0">
+                <a:solidFill>
+                  <a:schemeClr val="tx1"/>
+                </a:solidFill>
+              </a:rPr>
+              <a:t>Thực thể yếu (VE)</a:t>
+            </a:r>
+            <a:endParaRPr lang="en-US" sz="1050" dirty="0"/>
+          </a:p>
+        </p:txBody>
+      </p:sp>
+      <p:sp>
+        <p:nvSpPr>
+          <p:cNvPr id="76" name="Shape 74"/>
+          <p:cNvSpPr/>
+          <p:nvPr/>
+        </p:nvSpPr>
+        <p:spPr>
+          <a:xfrm>
+            <a:off x="8732520" y="5120640"/>
+            <a:ext cx="457200" cy="182880"/>
           </a:xfrm>
           <a:prstGeom prst="rect">
             <a:avLst/>
@@ -6487,14 +7326,197 @@
       </p:sp>
       <p:sp>
         <p:nvSpPr>
-          <p:cNvPr id="41" name="Legend associative text"/>
+          <p:cNvPr id="77" name="Legend 2"/>
           <p:cNvSpPr txBox="1"/>
           <p:nvPr/>
         </p:nvSpPr>
         <p:spPr>
           <a:xfrm>
-            <a:off x="8883396" y="5248656"/>
-            <a:ext cx="2665476" cy="237744"/>
+            <a:off x="9326880" y="5102352"/>
+            <a:ext cx="2313432" cy="219456"/>
+          </a:xfrm>
+          <a:prstGeom prst="rect">
+            <a:avLst/>
+          </a:prstGeom>
+          <a:noFill/>
+          <a:ln/>
+        </p:spPr>
+        <p:txBody>
+          <a:bodyPr wrap="square" lIns="0" tIns="0" rIns="0" bIns="0" rtlCol="0" anchor="ctr"/>
+          <a:lstStyle/>
+          <a:p>
+            <a:pPr indent="0" marL="0">
+              <a:buNone/>
+            </a:pPr>
+            <a:r>
+              <a:rPr lang="en-US" sz="1050" dirty="0">
+                <a:solidFill>
+                  <a:schemeClr val="tx1"/>
+                </a:solidFill>
+              </a:rPr>
+              <a:t>Thực thể kết hợp (quan hệ N – N)</a:t>
+            </a:r>
+            <a:endParaRPr lang="en-US" sz="1050" dirty="0"/>
+          </a:p>
+        </p:txBody>
+      </p:sp>
+      <p:sp>
+        <p:nvSpPr>
+          <p:cNvPr id="78" name="Shape 76"/>
+          <p:cNvSpPr/>
+          <p:nvPr/>
+        </p:nvSpPr>
+        <p:spPr>
+          <a:xfrm>
+            <a:off x="8732520" y="5349240"/>
+            <a:ext cx="457200" cy="182880"/>
+          </a:xfrm>
+          <a:prstGeom prst="diamond">
+            <a:avLst/>
+          </a:prstGeom>
+          <a:solidFill>
+            <a:schemeClr val="bg2"/>
+          </a:solidFill>
+          <a:ln w="12700">
+            <a:solidFill>
+              <a:schemeClr val="tx1"/>
+            </a:solidFill>
+            <a:prstDash val="solid"/>
+          </a:ln>
+        </p:spPr>
+      </p:sp>
+      <p:sp>
+        <p:nvSpPr>
+          <p:cNvPr id="79" name="Legend 3"/>
+          <p:cNvSpPr txBox="1"/>
+          <p:nvPr/>
+        </p:nvSpPr>
+        <p:spPr>
+          <a:xfrm>
+            <a:off x="9326880" y="5330952"/>
+            <a:ext cx="2313432" cy="219456"/>
+          </a:xfrm>
+          <a:prstGeom prst="rect">
+            <a:avLst/>
+          </a:prstGeom>
+          <a:noFill/>
+          <a:ln/>
+        </p:spPr>
+        <p:txBody>
+          <a:bodyPr wrap="square" lIns="0" tIns="0" rIns="0" bIns="0" rtlCol="0" anchor="ctr"/>
+          <a:lstStyle/>
+          <a:p>
+            <a:pPr indent="0" marL="0">
+              <a:buNone/>
+            </a:pPr>
+            <a:r>
+              <a:rPr lang="en-US" sz="1050" dirty="0">
+                <a:solidFill>
+                  <a:schemeClr val="tx1"/>
+                </a:solidFill>
+              </a:rPr>
+              <a:t>Quan hệ</a:t>
+            </a:r>
+            <a:endParaRPr lang="en-US" sz="1050" dirty="0"/>
+          </a:p>
+        </p:txBody>
+      </p:sp>
+      <p:sp>
+        <p:nvSpPr>
+          <p:cNvPr id="80" name="Shape 78"/>
+          <p:cNvSpPr/>
+          <p:nvPr/>
+        </p:nvSpPr>
+        <p:spPr>
+          <a:xfrm>
+            <a:off x="8732520" y="5577840"/>
+            <a:ext cx="457200" cy="182880"/>
+          </a:xfrm>
+          <a:prstGeom prst="diamond">
+            <a:avLst/>
+          </a:prstGeom>
+          <a:solidFill>
+            <a:schemeClr val="bg2"/>
+          </a:solidFill>
+          <a:ln w="12700">
+            <a:solidFill>
+              <a:schemeClr val="tx1"/>
+            </a:solidFill>
+            <a:prstDash val="solid"/>
+          </a:ln>
+        </p:spPr>
+      </p:sp>
+      <p:sp>
+        <p:nvSpPr>
+          <p:cNvPr id="81" name="Shape 79"/>
+          <p:cNvSpPr/>
+          <p:nvPr/>
+        </p:nvSpPr>
+        <p:spPr>
+          <a:xfrm>
+            <a:off x="8787384" y="5614416"/>
+            <a:ext cx="347472" cy="109728"/>
+          </a:xfrm>
+          <a:prstGeom prst="diamond">
+            <a:avLst/>
+          </a:prstGeom>
+          <a:solidFill>
+            <a:schemeClr val="bg2"/>
+          </a:solidFill>
+          <a:ln w="12700">
+            <a:solidFill>
+              <a:schemeClr val="tx1"/>
+            </a:solidFill>
+            <a:prstDash val="solid"/>
+          </a:ln>
+        </p:spPr>
+      </p:sp>
+      <p:sp>
+        <p:nvSpPr>
+          <p:cNvPr id="82" name="Legend 4"/>
+          <p:cNvSpPr txBox="1"/>
+          <p:nvPr/>
+        </p:nvSpPr>
+        <p:spPr>
+          <a:xfrm>
+            <a:off x="9326880" y="5559552"/>
+            <a:ext cx="2313432" cy="219456"/>
+          </a:xfrm>
+          <a:prstGeom prst="rect">
+            <a:avLst/>
+          </a:prstGeom>
+          <a:noFill/>
+          <a:ln/>
+        </p:spPr>
+        <p:txBody>
+          <a:bodyPr wrap="square" lIns="0" tIns="0" rIns="0" bIns="0" rtlCol="0" anchor="ctr"/>
+          <a:lstStyle/>
+          <a:p>
+            <a:pPr indent="0" marL="0">
+              <a:buNone/>
+            </a:pPr>
+            <a:r>
+              <a:rPr lang="en-US" sz="1050" dirty="0">
+                <a:solidFill>
+                  <a:schemeClr val="tx1"/>
+                </a:solidFill>
+              </a:rPr>
+              <a:t>Quan hệ xác định của thực thể yếu</a:t>
+            </a:r>
+            <a:endParaRPr lang="en-US" sz="1050" dirty="0"/>
+          </a:p>
+        </p:txBody>
+      </p:sp>
+      <p:sp>
+        <p:nvSpPr>
+          <p:cNvPr id="83" name="Legend PK sample"/>
+          <p:cNvSpPr txBox="1"/>
+          <p:nvPr/>
+        </p:nvSpPr>
+        <p:spPr>
+          <a:xfrm>
+            <a:off x="8732520" y="5788152"/>
+            <a:ext cx="548640" cy="219456"/>
           </a:xfrm>
           <a:prstGeom prst="rect">
             <a:avLst/>
@@ -6510,27 +7532,63 @@
               <a:buNone/>
             </a:pPr>
             <a:r>
-              <a:rPr lang="en-US" sz="1200" dirty="0">
+              <a:rPr lang="en-US" sz="1050" b="1" u="sng" dirty="0">
                 <a:solidFill>
                   <a:schemeClr val="tx1"/>
                 </a:solidFill>
               </a:rPr>
-              <a:t>Thực thể kết hợp (quan hệ N – N)</a:t>
-            </a:r>
-            <a:endParaRPr lang="en-US" sz="1200" dirty="0"/>
+              <a:t>MaXX</a:t>
+            </a:r>
+            <a:endParaRPr lang="en-US" sz="1050" dirty="0"/>
           </a:p>
         </p:txBody>
       </p:sp>
       <p:sp>
         <p:nvSpPr>
-          <p:cNvPr id="42" name="Legend cardinality sample"/>
+          <p:cNvPr id="84" name="Legend 5"/>
           <p:cNvSpPr txBox="1"/>
           <p:nvPr/>
         </p:nvSpPr>
         <p:spPr>
           <a:xfrm>
-            <a:off x="7877556" y="5522976"/>
-            <a:ext cx="822960" cy="237744"/>
+            <a:off x="9326880" y="5788152"/>
+            <a:ext cx="2313432" cy="219456"/>
+          </a:xfrm>
+          <a:prstGeom prst="rect">
+            <a:avLst/>
+          </a:prstGeom>
+          <a:noFill/>
+          <a:ln/>
+        </p:spPr>
+        <p:txBody>
+          <a:bodyPr wrap="square" lIns="0" tIns="0" rIns="0" bIns="0" rtlCol="0" anchor="ctr"/>
+          <a:lstStyle/>
+          <a:p>
+            <a:pPr indent="0" marL="0">
+              <a:buNone/>
+            </a:pPr>
+            <a:r>
+              <a:rPr lang="en-US" sz="1050" dirty="0">
+                <a:solidFill>
+                  <a:schemeClr val="tx1"/>
+                </a:solidFill>
+              </a:rPr>
+              <a:t>Khóa chính (gạch chân liền)</a:t>
+            </a:r>
+            <a:endParaRPr lang="en-US" sz="1050" dirty="0"/>
+          </a:p>
+        </p:txBody>
+      </p:sp>
+      <p:sp>
+        <p:nvSpPr>
+          <p:cNvPr id="85" name="Legend partial sample"/>
+          <p:cNvSpPr txBox="1"/>
+          <p:nvPr/>
+        </p:nvSpPr>
+        <p:spPr>
+          <a:xfrm>
+            <a:off x="8732520" y="6016752"/>
+            <a:ext cx="548640" cy="219456"/>
           </a:xfrm>
           <a:prstGeom prst="rect">
             <a:avLst/>
@@ -6546,90 +7604,27 @@
               <a:buNone/>
             </a:pPr>
             <a:r>
-              <a:rPr lang="en-US" sz="1200" b="1" dirty="0">
+              <a:rPr lang="en-US" sz="1050" b="1" u="dash" dirty="0">
                 <a:solidFill>
                   <a:schemeClr val="tx1"/>
                 </a:solidFill>
               </a:rPr>
-              <a:t>1 – N</a:t>
-            </a:r>
-            <a:endParaRPr lang="en-US" sz="1200" dirty="0"/>
+              <a:t>SoGhe</a:t>
+            </a:r>
+            <a:endParaRPr lang="en-US" sz="1050" dirty="0"/>
           </a:p>
         </p:txBody>
       </p:sp>
       <p:sp>
         <p:nvSpPr>
-          <p:cNvPr id="43" name="Legend cardinality text"/>
+          <p:cNvPr id="86" name="Legend 6"/>
           <p:cNvSpPr txBox="1"/>
           <p:nvPr/>
         </p:nvSpPr>
         <p:spPr>
           <a:xfrm>
-            <a:off x="8883396" y="5522976"/>
-            <a:ext cx="2665476" cy="237744"/>
-          </a:xfrm>
-          <a:prstGeom prst="rect">
-            <a:avLst/>
-          </a:prstGeom>
-          <a:noFill/>
-          <a:ln/>
-        </p:spPr>
-        <p:txBody>
-          <a:bodyPr wrap="square" lIns="0" tIns="0" rIns="0" bIns="0" rtlCol="0" anchor="t"/>
-          <a:lstStyle/>
-          <a:p>
-            <a:pPr indent="0" marL="0">
-              <a:buNone/>
-            </a:pPr>
-            <a:r>
-              <a:rPr lang="en-US" sz="1200" dirty="0">
-                <a:solidFill>
-                  <a:schemeClr val="tx1"/>
-                </a:solidFill>
-              </a:rPr>
-              <a:t>Một – nhiều</a:t>
-            </a:r>
-            <a:endParaRPr lang="en-US" sz="1200" dirty="0"/>
-          </a:p>
-        </p:txBody>
-      </p:sp>
-      <p:sp>
-        <p:nvSpPr>
-          <p:cNvPr id="44" name="N-N note card"/>
-          <p:cNvSpPr/>
-          <p:nvPr/>
-        </p:nvSpPr>
-        <p:spPr>
-          <a:xfrm>
-            <a:off x="457200" y="5852160"/>
-            <a:ext cx="11274552" cy="502920"/>
-          </a:xfrm>
-          <a:prstGeom prst="roundRect">
-            <a:avLst>
-              <a:gd name="adj" fmla="val 18182"/>
-            </a:avLst>
-          </a:prstGeom>
-          <a:solidFill>
-            <a:schemeClr val="bg2"/>
-          </a:solidFill>
-          <a:ln w="12700">
-            <a:solidFill>
-              <a:schemeClr val="bg2"/>
-            </a:solidFill>
-            <a:prstDash val="solid"/>
-          </a:ln>
-        </p:spPr>
-      </p:sp>
-      <p:sp>
-        <p:nvSpPr>
-          <p:cNvPr id="45" name="N-N note"/>
-          <p:cNvSpPr txBox="1"/>
-          <p:nvPr/>
-        </p:nvSpPr>
-        <p:spPr>
-          <a:xfrm>
-            <a:off x="640080" y="5852160"/>
-            <a:ext cx="10908792" cy="502920"/>
+            <a:off x="9326880" y="6016752"/>
+            <a:ext cx="2313432" cy="219456"/>
           </a:xfrm>
           <a:prstGeom prst="rect">
             <a:avLst/>
@@ -6645,25 +7640,14 @@
               <a:buNone/>
             </a:pPr>
             <a:r>
-              <a:rPr lang="en-US" sz="1250" b="1" dirty="0">
+              <a:rPr lang="en-US" sz="1050" dirty="0">
                 <a:solidFill>
                   <a:schemeClr val="tx1"/>
                 </a:solidFill>
               </a:rPr>
-              <a:t>Quan hệ N – N: </a:t>
-            </a:r>
-            <a:pPr indent="0" marL="0">
-              <a:buNone/>
-            </a:pPr>
-            <a:r>
-              <a:rPr lang="en-US" sz="1250" dirty="0">
-                <a:solidFill>
-                  <a:schemeClr val="tx1"/>
-                </a:solidFill>
-              </a:rPr>
-              <a:t>KHACHHANG – SUATCHIEU (qua thực thể kết hợp VE) và PHIM – PHONGCHIEU (qua SUATCHIEU). Khi chuyển sang lược đồ quan hệ, quan hệ 1 – N trở thành khóa ngoại ở phía N.</a:t>
-            </a:r>
-            <a:endParaRPr lang="en-US" sz="1250" dirty="0"/>
+              <a:t>Khóa bộ phận (gạch chân đứt)</a:t>
+            </a:r>
+            <a:endParaRPr lang="en-US" sz="1050" dirty="0"/>
           </a:p>
         </p:txBody>
       </p:sp>
@@ -7718,12 +8702,12 @@
               <a:buNone/>
             </a:pPr>
             <a:r>
-              <a:rPr lang="en-US" sz="1600" b="1" u="sng" dirty="0">
-                <a:solidFill>
-                  <a:schemeClr val="tx1"/>
-                </a:solidFill>
-              </a:rPr>
-              <a:t>MaVe</a:t>
+              <a:rPr lang="en-US" sz="1600" b="1" i="1" u="sng" dirty="0">
+                <a:solidFill>
+                  <a:schemeClr val="tx2"/>
+                </a:solidFill>
+              </a:rPr>
+              <a:t>MaSuat</a:t>
             </a:r>
             <a:pPr indent="0" marL="0">
               <a:buNone/>
@@ -7740,12 +8724,12 @@
               <a:buNone/>
             </a:pPr>
             <a:r>
-              <a:rPr lang="en-US" sz="1600" i="1" dirty="0">
-                <a:solidFill>
-                  <a:schemeClr val="tx2"/>
-                </a:solidFill>
-              </a:rPr>
-              <a:t>MaSuat</a:t>
+              <a:rPr lang="en-US" sz="1600" b="1" u="sng" dirty="0">
+                <a:solidFill>
+                  <a:schemeClr val="tx1"/>
+                </a:solidFill>
+              </a:rPr>
+              <a:t>SoGhe</a:t>
             </a:r>
             <a:pPr indent="0" marL="0">
               <a:buNone/>
@@ -7768,28 +8752,6 @@
                 </a:solidFill>
               </a:rPr>
               <a:t>MaKH</a:t>
-            </a:r>
-            <a:pPr indent="0" marL="0">
-              <a:buNone/>
-            </a:pPr>
-            <a:r>
-              <a:rPr lang="en-US" sz="1600" dirty="0">
-                <a:solidFill>
-                  <a:schemeClr val="tx1"/>
-                </a:solidFill>
-              </a:rPr>
-              <a:t>, </a:t>
-            </a:r>
-            <a:pPr indent="0" marL="0">
-              <a:buNone/>
-            </a:pPr>
-            <a:r>
-              <a:rPr lang="en-US" sz="1600" dirty="0">
-                <a:solidFill>
-                  <a:schemeClr val="tx1"/>
-                </a:solidFill>
-              </a:rPr>
-              <a:t>SoGhe</a:t>
             </a:r>
             <a:pPr indent="0" marL="0">
               <a:buNone/>
@@ -7913,7 +8875,7 @@
         </p:nvSpPr>
         <p:spPr>
           <a:xfrm>
-            <a:off x="8366760" y="2103120"/>
+            <a:off x="8366760" y="2011680"/>
             <a:ext cx="457200" cy="457200"/>
           </a:xfrm>
           <a:prstGeom prst="ellipse">
@@ -7938,7 +8900,7 @@
         </p:nvSpPr>
         <p:spPr>
           <a:xfrm>
-            <a:off x="8366760" y="2103120"/>
+            <a:off x="8366760" y="2011680"/>
             <a:ext cx="457200" cy="457200"/>
           </a:xfrm>
           <a:prstGeom prst="rect">
@@ -7977,7 +8939,7 @@
         </p:nvSpPr>
         <p:spPr>
           <a:xfrm>
-            <a:off x="9006840" y="1920240"/>
+            <a:off x="9006840" y="1828800"/>
             <a:ext cx="2450592" cy="822960"/>
           </a:xfrm>
           <a:prstGeom prst="rect">
@@ -8013,7 +8975,7 @@
         </p:nvSpPr>
         <p:spPr>
           <a:xfrm>
-            <a:off x="8366760" y="3127248"/>
+            <a:off x="8366760" y="2834640"/>
             <a:ext cx="457200" cy="457200"/>
           </a:xfrm>
           <a:prstGeom prst="ellipse">
@@ -8038,7 +9000,7 @@
         </p:nvSpPr>
         <p:spPr>
           <a:xfrm>
-            <a:off x="8366760" y="3127248"/>
+            <a:off x="8366760" y="2834640"/>
             <a:ext cx="457200" cy="457200"/>
           </a:xfrm>
           <a:prstGeom prst="rect">
@@ -8077,7 +9039,7 @@
         </p:nvSpPr>
         <p:spPr>
           <a:xfrm>
-            <a:off x="9006840" y="2944368"/>
+            <a:off x="9006840" y="2651760"/>
             <a:ext cx="2450592" cy="822960"/>
           </a:xfrm>
           <a:prstGeom prst="rect">
@@ -8113,7 +9075,7 @@
         </p:nvSpPr>
         <p:spPr>
           <a:xfrm>
-            <a:off x="8366760" y="4151376"/>
+            <a:off x="8366760" y="3657600"/>
             <a:ext cx="457200" cy="457200"/>
           </a:xfrm>
           <a:prstGeom prst="ellipse">
@@ -8138,7 +9100,7 @@
         </p:nvSpPr>
         <p:spPr>
           <a:xfrm>
-            <a:off x="8366760" y="4151376"/>
+            <a:off x="8366760" y="3657600"/>
             <a:ext cx="457200" cy="457200"/>
           </a:xfrm>
           <a:prstGeom prst="rect">
@@ -8177,7 +9139,7 @@
         </p:nvSpPr>
         <p:spPr>
           <a:xfrm>
-            <a:off x="9006840" y="3968496"/>
+            <a:off x="9006840" y="3474720"/>
             <a:ext cx="2450592" cy="822960"/>
           </a:xfrm>
           <a:prstGeom prst="rect">
@@ -8207,14 +9169,78 @@
       </p:sp>
       <p:sp>
         <p:nvSpPr>
-          <p:cNvPr id="27" name="Stat number bảng"/>
+          <p:cNvPr id="27" name="Rule 4 circle"/>
+          <p:cNvSpPr/>
+          <p:nvPr/>
+        </p:nvSpPr>
+        <p:spPr>
+          <a:xfrm>
+            <a:off x="8366760" y="4480560"/>
+            <a:ext cx="457200" cy="457200"/>
+          </a:xfrm>
+          <a:prstGeom prst="ellipse">
+            <a:avLst/>
+          </a:prstGeom>
+          <a:solidFill>
+            <a:schemeClr val="accent1"/>
+          </a:solidFill>
+          <a:ln w="12700">
+            <a:solidFill>
+              <a:schemeClr val="accent1"/>
+            </a:solidFill>
+            <a:prstDash val="solid"/>
+          </a:ln>
+        </p:spPr>
+      </p:sp>
+      <p:sp>
+        <p:nvSpPr>
+          <p:cNvPr id="28" name="Rule 4"/>
           <p:cNvSpPr txBox="1"/>
           <p:nvPr/>
         </p:nvSpPr>
         <p:spPr>
           <a:xfrm>
-            <a:off x="8366760" y="5120640"/>
-            <a:ext cx="1463040" cy="685800"/>
+            <a:off x="8366760" y="4480560"/>
+            <a:ext cx="457200" cy="457200"/>
+          </a:xfrm>
+          <a:prstGeom prst="rect">
+            <a:avLst/>
+          </a:prstGeom>
+          <a:noFill/>
+          <a:ln/>
+        </p:spPr>
+        <p:txBody>
+          <a:bodyPr wrap="square" lIns="0" tIns="0" rIns="0" bIns="0" rtlCol="0" anchor="ctr"/>
+          <a:lstStyle/>
+          <a:p>
+            <a:pPr algn="ctr" indent="0" marL="0">
+              <a:buNone/>
+            </a:pPr>
+            <a:r>
+              <a:rPr lang="en-US" sz="2000" b="1" dirty="0">
+                <a:solidFill>
+                  <a:schemeClr val="tx1"/>
+                </a:solidFill>
+                <a:latin typeface="Cambria" pitchFamily="34" charset="0"/>
+                <a:ea typeface="Cambria" pitchFamily="34" charset="-122"/>
+                <a:cs typeface="Cambria" pitchFamily="34" charset="-120"/>
+              </a:rPr>
+              <a:t>4</a:t>
+            </a:r>
+            <a:endParaRPr lang="en-US" sz="2000" dirty="0"/>
+          </a:p>
+        </p:txBody>
+      </p:sp>
+      <p:sp>
+        <p:nvSpPr>
+          <p:cNvPr id="29" name="Rule text 4"/>
+          <p:cNvSpPr txBox="1"/>
+          <p:nvPr/>
+        </p:nvSpPr>
+        <p:spPr>
+          <a:xfrm>
+            <a:off x="9006840" y="4297680"/>
+            <a:ext cx="2450592" cy="822960"/>
           </a:xfrm>
           <a:prstGeom prst="rect">
             <a:avLst/>
@@ -8230,7 +9256,43 @@
               <a:buNone/>
             </a:pPr>
             <a:r>
-              <a:rPr lang="en-US" sz="4400" b="1" dirty="0">
+              <a:rPr lang="en-US" sz="1400" dirty="0">
+                <a:solidFill>
+                  <a:schemeClr val="bg1"/>
+                </a:solidFill>
+              </a:rPr>
+              <a:t>Thực thể yếu VE: khóa chính = MaSuat (chủ) + SoGhe</a:t>
+            </a:r>
+            <a:endParaRPr lang="en-US" sz="1400" dirty="0"/>
+          </a:p>
+        </p:txBody>
+      </p:sp>
+      <p:sp>
+        <p:nvSpPr>
+          <p:cNvPr id="30" name="Stat number bảng"/>
+          <p:cNvSpPr txBox="1"/>
+          <p:nvPr/>
+        </p:nvSpPr>
+        <p:spPr>
+          <a:xfrm>
+            <a:off x="8366760" y="5257800"/>
+            <a:ext cx="1463040" cy="640080"/>
+          </a:xfrm>
+          <a:prstGeom prst="rect">
+            <a:avLst/>
+          </a:prstGeom>
+          <a:noFill/>
+          <a:ln/>
+        </p:spPr>
+        <p:txBody>
+          <a:bodyPr wrap="square" lIns="0" tIns="0" rIns="0" bIns="0" rtlCol="0" anchor="ctr"/>
+          <a:lstStyle/>
+          <a:p>
+            <a:pPr indent="0" marL="0">
+              <a:buNone/>
+            </a:pPr>
+            <a:r>
+              <a:rPr lang="en-US" sz="4000" b="1" dirty="0">
                 <a:solidFill>
                   <a:schemeClr val="accent1"/>
                 </a:solidFill>
@@ -8240,19 +9302,19 @@
               </a:rPr>
               <a:t>5</a:t>
             </a:r>
-            <a:endParaRPr lang="en-US" sz="4400" dirty="0"/>
+            <a:endParaRPr lang="en-US" sz="4000" dirty="0"/>
           </a:p>
         </p:txBody>
       </p:sp>
       <p:sp>
         <p:nvSpPr>
-          <p:cNvPr id="28" name="Stat label bảng"/>
+          <p:cNvPr id="31" name="Stat label bảng"/>
           <p:cNvSpPr txBox="1"/>
           <p:nvPr/>
         </p:nvSpPr>
         <p:spPr>
           <a:xfrm>
-            <a:off x="8366760" y="5760720"/>
+            <a:off x="8366760" y="5870448"/>
             <a:ext cx="1463040" cy="320040"/>
           </a:xfrm>
           <a:prstGeom prst="rect">
@@ -8282,14 +9344,14 @@
       </p:sp>
       <p:sp>
         <p:nvSpPr>
-          <p:cNvPr id="29" name="Stat number khóa ngoại"/>
+          <p:cNvPr id="32" name="Stat number khóa ngoại"/>
           <p:cNvSpPr txBox="1"/>
           <p:nvPr/>
         </p:nvSpPr>
         <p:spPr>
           <a:xfrm>
-            <a:off x="9966960" y="5120640"/>
-            <a:ext cx="1463040" cy="685800"/>
+            <a:off x="9966960" y="5257800"/>
+            <a:ext cx="1463040" cy="640080"/>
           </a:xfrm>
           <a:prstGeom prst="rect">
             <a:avLst/>
@@ -8305,7 +9367,7 @@
               <a:buNone/>
             </a:pPr>
             <a:r>
-              <a:rPr lang="en-US" sz="4400" b="1" dirty="0">
+              <a:rPr lang="en-US" sz="4000" b="1" dirty="0">
                 <a:solidFill>
                   <a:schemeClr val="accent1"/>
                 </a:solidFill>
@@ -8315,19 +9377,19 @@
               </a:rPr>
               <a:t>4</a:t>
             </a:r>
-            <a:endParaRPr lang="en-US" sz="4400" dirty="0"/>
+            <a:endParaRPr lang="en-US" sz="4000" dirty="0"/>
           </a:p>
         </p:txBody>
       </p:sp>
       <p:sp>
         <p:nvSpPr>
-          <p:cNvPr id="30" name="Stat label khóa ngoại"/>
+          <p:cNvPr id="33" name="Stat label khóa ngoại"/>
           <p:cNvSpPr txBox="1"/>
           <p:nvPr/>
         </p:nvSpPr>
         <p:spPr>
           <a:xfrm>
-            <a:off x="9966960" y="5760720"/>
+            <a:off x="9966960" y="5870448"/>
             <a:ext cx="1463040" cy="320040"/>
           </a:xfrm>
           <a:prstGeom prst="rect">
@@ -15820,14 +16882,13 @@
             <a:tbl>
               <a:tblPr/>
               <a:tblGrid>
-                <a:gridCol w="777240"/>
-                <a:gridCol w="1005840"/>
-                <a:gridCol w="1005840"/>
-                <a:gridCol w="1005840"/>
-                <a:gridCol w="1737360"/>
+                <a:gridCol w="1188720"/>
+                <a:gridCol w="1097280"/>
+                <a:gridCol w="1280160"/>
+                <a:gridCol w="1965960"/>
               </a:tblGrid>
               <a:tr h="219456">
-                <a:tc gridSpan="5">
+                <a:tc gridSpan="4">
                   <a:txBody>
                     <a:bodyPr/>
                     <a:lstStyle/>
@@ -15904,9 +16965,6 @@
                 <a:tc hMerge="1">
                   <a:tcPr/>
                 </a:tc>
-                <a:tc hMerge="1">
-                  <a:tcPr/>
-                </a:tc>
               </a:tr>
               <a:tr h="219456">
                 <a:tc>
@@ -15918,12 +16976,12 @@
                         <a:buNone/>
                       </a:pPr>
                       <a:r>
-                        <a:rPr lang="en-US" sz="1100" b="1" u="sng" dirty="0">
+                        <a:rPr lang="en-US" sz="1100" b="1" i="1" u="sng" dirty="0">
                           <a:solidFill>
                             <a:schemeClr val="tx1"/>
                           </a:solidFill>
                         </a:rPr>
-                        <a:t>MaVe</a:t>
+                        <a:t>MaSuat</a:t>
                       </a:r>
                       <a:endParaRPr lang="en-US" sz="1100" dirty="0"/>
                     </a:p>
@@ -15979,12 +17037,12 @@
                         <a:buNone/>
                       </a:pPr>
                       <a:r>
-                        <a:rPr lang="en-US" sz="1100" b="1" i="1" dirty="0">
+                        <a:rPr lang="en-US" sz="1100" b="1" u="sng" dirty="0">
                           <a:solidFill>
                             <a:schemeClr val="tx1"/>
                           </a:solidFill>
                         </a:rPr>
-                        <a:t>MaSuat</a:t>
+                        <a:t>SoGhe</a:t>
                       </a:r>
                       <a:endParaRPr lang="en-US" sz="1100" dirty="0"/>
                     </a:p>
@@ -16106,67 +17164,6 @@
                             <a:schemeClr val="tx1"/>
                           </a:solidFill>
                         </a:rPr>
-                        <a:t>SoGhe</a:t>
-                      </a:r>
-                      <a:endParaRPr lang="en-US" sz="1100" dirty="0"/>
-                    </a:p>
-                  </a:txBody>
-                  <a:tcPr marL="64008" marR="64008" marT="13716" marB="13716" anchor="ctr">
-                    <a:lnL w="6350" cap="flat" cmpd="sng" algn="ctr">
-                      <a:solidFill>
-                        <a:schemeClr val="tx2"/>
-                      </a:solidFill>
-                      <a:prstDash val="solid"/>
-                      <a:round/>
-                      <a:headEnd type="none" w="med" len="med"/>
-                      <a:tailEnd type="none" w="med" len="med"/>
-                    </a:lnL>
-                    <a:lnR w="6350" cap="flat" cmpd="sng" algn="ctr">
-                      <a:solidFill>
-                        <a:schemeClr val="tx2"/>
-                      </a:solidFill>
-                      <a:prstDash val="solid"/>
-                      <a:round/>
-                      <a:headEnd type="none" w="med" len="med"/>
-                      <a:tailEnd type="none" w="med" len="med"/>
-                    </a:lnR>
-                    <a:lnT w="6350" cap="flat" cmpd="sng" algn="ctr">
-                      <a:solidFill>
-                        <a:schemeClr val="tx2"/>
-                      </a:solidFill>
-                      <a:prstDash val="solid"/>
-                      <a:round/>
-                      <a:headEnd type="none" w="med" len="med"/>
-                      <a:tailEnd type="none" w="med" len="med"/>
-                    </a:lnT>
-                    <a:lnB w="6350" cap="flat" cmpd="sng" algn="ctr">
-                      <a:solidFill>
-                        <a:schemeClr val="tx2"/>
-                      </a:solidFill>
-                      <a:prstDash val="solid"/>
-                      <a:round/>
-                      <a:headEnd type="none" w="med" len="med"/>
-                      <a:tailEnd type="none" w="med" len="med"/>
-                    </a:lnB>
-                    <a:solidFill>
-                      <a:schemeClr val="accent1"/>
-                    </a:solidFill>
-                  </a:tcPr>
-                </a:tc>
-                <a:tc>
-                  <a:txBody>
-                    <a:bodyPr/>
-                    <a:lstStyle/>
-                    <a:p>
-                      <a:pPr algn="l" indent="0" marL="0">
-                        <a:buNone/>
-                      </a:pPr>
-                      <a:r>
-                        <a:rPr lang="en-US" sz="1100" b="1" dirty="0">
-                          <a:solidFill>
-                            <a:schemeClr val="tx1"/>
-                          </a:solidFill>
-                        </a:rPr>
                         <a:t>NgayDat</a:t>
                       </a:r>
                       <a:endParaRPr lang="en-US" sz="1100" dirty="0"/>
@@ -16230,7 +17227,7 @@
                             <a:schemeClr val="tx1"/>
                           </a:solidFill>
                         </a:rPr>
-                        <a:t>V01</a:t>
+                        <a:t>S01</a:t>
                       </a:r>
                       <a:endParaRPr lang="en-US" sz="1100" dirty="0"/>
                     </a:p>
@@ -16291,7 +17288,7 @@
                             <a:schemeClr val="tx1"/>
                           </a:solidFill>
                         </a:rPr>
-                        <a:t>S01</a:t>
+                        <a:t>A5</a:t>
                       </a:r>
                       <a:endParaRPr lang="en-US" sz="1100" dirty="0"/>
                     </a:p>
@@ -16413,67 +17410,6 @@
                             <a:schemeClr val="tx1"/>
                           </a:solidFill>
                         </a:rPr>
-                        <a:t>A5</a:t>
-                      </a:r>
-                      <a:endParaRPr lang="en-US" sz="1100" dirty="0"/>
-                    </a:p>
-                  </a:txBody>
-                  <a:tcPr marL="64008" marR="64008" marT="13716" marB="13716" anchor="ctr">
-                    <a:lnL w="6350" cap="flat" cmpd="sng" algn="ctr">
-                      <a:solidFill>
-                        <a:schemeClr val="tx2"/>
-                      </a:solidFill>
-                      <a:prstDash val="solid"/>
-                      <a:round/>
-                      <a:headEnd type="none" w="med" len="med"/>
-                      <a:tailEnd type="none" w="med" len="med"/>
-                    </a:lnL>
-                    <a:lnR w="6350" cap="flat" cmpd="sng" algn="ctr">
-                      <a:solidFill>
-                        <a:schemeClr val="tx2"/>
-                      </a:solidFill>
-                      <a:prstDash val="solid"/>
-                      <a:round/>
-                      <a:headEnd type="none" w="med" len="med"/>
-                      <a:tailEnd type="none" w="med" len="med"/>
-                    </a:lnR>
-                    <a:lnT w="6350" cap="flat" cmpd="sng" algn="ctr">
-                      <a:solidFill>
-                        <a:schemeClr val="tx2"/>
-                      </a:solidFill>
-                      <a:prstDash val="solid"/>
-                      <a:round/>
-                      <a:headEnd type="none" w="med" len="med"/>
-                      <a:tailEnd type="none" w="med" len="med"/>
-                    </a:lnT>
-                    <a:lnB w="6350" cap="flat" cmpd="sng" algn="ctr">
-                      <a:solidFill>
-                        <a:schemeClr val="tx2"/>
-                      </a:solidFill>
-                      <a:prstDash val="solid"/>
-                      <a:round/>
-                      <a:headEnd type="none" w="med" len="med"/>
-                      <a:tailEnd type="none" w="med" len="med"/>
-                    </a:lnB>
-                    <a:solidFill>
-                      <a:schemeClr val="bg1"/>
-                    </a:solidFill>
-                  </a:tcPr>
-                </a:tc>
-                <a:tc>
-                  <a:txBody>
-                    <a:bodyPr/>
-                    <a:lstStyle/>
-                    <a:p>
-                      <a:pPr algn="l" indent="0" marL="0">
-                        <a:buNone/>
-                      </a:pPr>
-                      <a:r>
-                        <a:rPr lang="en-US" sz="1100" dirty="0">
-                          <a:solidFill>
-                            <a:schemeClr val="tx1"/>
-                          </a:solidFill>
-                        </a:rPr>
                         <a:t>2025-03-18</a:t>
                       </a:r>
                       <a:endParaRPr lang="en-US" sz="1100" dirty="0"/>
@@ -16537,7 +17473,7 @@
                             <a:schemeClr val="tx1"/>
                           </a:solidFill>
                         </a:rPr>
-                        <a:t>V02</a:t>
+                        <a:t>S01</a:t>
                       </a:r>
                       <a:endParaRPr lang="en-US" sz="1100" dirty="0"/>
                     </a:p>
@@ -16598,7 +17534,7 @@
                             <a:schemeClr val="tx1"/>
                           </a:solidFill>
                         </a:rPr>
-                        <a:t>S01</a:t>
+                        <a:t>A6</a:t>
                       </a:r>
                       <a:endParaRPr lang="en-US" sz="1100" dirty="0"/>
                     </a:p>
@@ -16720,67 +17656,6 @@
                             <a:schemeClr val="tx1"/>
                           </a:solidFill>
                         </a:rPr>
-                        <a:t>A6</a:t>
-                      </a:r>
-                      <a:endParaRPr lang="en-US" sz="1100" dirty="0"/>
-                    </a:p>
-                  </a:txBody>
-                  <a:tcPr marL="64008" marR="64008" marT="13716" marB="13716" anchor="ctr">
-                    <a:lnL w="6350" cap="flat" cmpd="sng" algn="ctr">
-                      <a:solidFill>
-                        <a:schemeClr val="tx2"/>
-                      </a:solidFill>
-                      <a:prstDash val="solid"/>
-                      <a:round/>
-                      <a:headEnd type="none" w="med" len="med"/>
-                      <a:tailEnd type="none" w="med" len="med"/>
-                    </a:lnL>
-                    <a:lnR w="6350" cap="flat" cmpd="sng" algn="ctr">
-                      <a:solidFill>
-                        <a:schemeClr val="tx2"/>
-                      </a:solidFill>
-                      <a:prstDash val="solid"/>
-                      <a:round/>
-                      <a:headEnd type="none" w="med" len="med"/>
-                      <a:tailEnd type="none" w="med" len="med"/>
-                    </a:lnR>
-                    <a:lnT w="6350" cap="flat" cmpd="sng" algn="ctr">
-                      <a:solidFill>
-                        <a:schemeClr val="tx2"/>
-                      </a:solidFill>
-                      <a:prstDash val="solid"/>
-                      <a:round/>
-                      <a:headEnd type="none" w="med" len="med"/>
-                      <a:tailEnd type="none" w="med" len="med"/>
-                    </a:lnT>
-                    <a:lnB w="6350" cap="flat" cmpd="sng" algn="ctr">
-                      <a:solidFill>
-                        <a:schemeClr val="tx2"/>
-                      </a:solidFill>
-                      <a:prstDash val="solid"/>
-                      <a:round/>
-                      <a:headEnd type="none" w="med" len="med"/>
-                      <a:tailEnd type="none" w="med" len="med"/>
-                    </a:lnB>
-                    <a:solidFill>
-                      <a:schemeClr val="bg2"/>
-                    </a:solidFill>
-                  </a:tcPr>
-                </a:tc>
-                <a:tc>
-                  <a:txBody>
-                    <a:bodyPr/>
-                    <a:lstStyle/>
-                    <a:p>
-                      <a:pPr algn="l" indent="0" marL="0">
-                        <a:buNone/>
-                      </a:pPr>
-                      <a:r>
-                        <a:rPr lang="en-US" sz="1100" dirty="0">
-                          <a:solidFill>
-                            <a:schemeClr val="tx1"/>
-                          </a:solidFill>
-                        </a:rPr>
                         <a:t>2025-03-18</a:t>
                       </a:r>
                       <a:endParaRPr lang="en-US" sz="1100" dirty="0"/>
@@ -16844,7 +17719,7 @@
                             <a:schemeClr val="tx1"/>
                           </a:solidFill>
                         </a:rPr>
-                        <a:t>V03</a:t>
+                        <a:t>S02</a:t>
                       </a:r>
                       <a:endParaRPr lang="en-US" sz="1100" dirty="0"/>
                     </a:p>
@@ -16905,7 +17780,7 @@
                             <a:schemeClr val="tx1"/>
                           </a:solidFill>
                         </a:rPr>
-                        <a:t>S02</a:t>
+                        <a:t>B3</a:t>
                       </a:r>
                       <a:endParaRPr lang="en-US" sz="1100" dirty="0"/>
                     </a:p>
@@ -17027,7 +17902,438 @@
                             <a:schemeClr val="tx1"/>
                           </a:solidFill>
                         </a:rPr>
-                        <a:t>B3</a:t>
+                        <a:t>2025-03-19</a:t>
+                      </a:r>
+                      <a:endParaRPr lang="en-US" sz="1100" dirty="0"/>
+                    </a:p>
+                  </a:txBody>
+                  <a:tcPr marL="64008" marR="64008" marT="13716" marB="13716" anchor="ctr">
+                    <a:lnL w="6350" cap="flat" cmpd="sng" algn="ctr">
+                      <a:solidFill>
+                        <a:schemeClr val="tx2"/>
+                      </a:solidFill>
+                      <a:prstDash val="solid"/>
+                      <a:round/>
+                      <a:headEnd type="none" w="med" len="med"/>
+                      <a:tailEnd type="none" w="med" len="med"/>
+                    </a:lnL>
+                    <a:lnR w="6350" cap="flat" cmpd="sng" algn="ctr">
+                      <a:solidFill>
+                        <a:schemeClr val="tx2"/>
+                      </a:solidFill>
+                      <a:prstDash val="solid"/>
+                      <a:round/>
+                      <a:headEnd type="none" w="med" len="med"/>
+                      <a:tailEnd type="none" w="med" len="med"/>
+                    </a:lnR>
+                    <a:lnT w="6350" cap="flat" cmpd="sng" algn="ctr">
+                      <a:solidFill>
+                        <a:schemeClr val="tx2"/>
+                      </a:solidFill>
+                      <a:prstDash val="solid"/>
+                      <a:round/>
+                      <a:headEnd type="none" w="med" len="med"/>
+                      <a:tailEnd type="none" w="med" len="med"/>
+                    </a:lnT>
+                    <a:lnB w="6350" cap="flat" cmpd="sng" algn="ctr">
+                      <a:solidFill>
+                        <a:schemeClr val="tx2"/>
+                      </a:solidFill>
+                      <a:prstDash val="solid"/>
+                      <a:round/>
+                      <a:headEnd type="none" w="med" len="med"/>
+                      <a:tailEnd type="none" w="med" len="med"/>
+                    </a:lnB>
+                    <a:solidFill>
+                      <a:schemeClr val="bg1"/>
+                    </a:solidFill>
+                  </a:tcPr>
+                </a:tc>
+              </a:tr>
+              <a:tr h="219456">
+                <a:tc>
+                  <a:txBody>
+                    <a:bodyPr/>
+                    <a:lstStyle/>
+                    <a:p>
+                      <a:pPr algn="l" indent="0" marL="0">
+                        <a:buNone/>
+                      </a:pPr>
+                      <a:r>
+                        <a:rPr lang="en-US" sz="1100" b="1" dirty="0">
+                          <a:solidFill>
+                            <a:schemeClr val="tx1"/>
+                          </a:solidFill>
+                        </a:rPr>
+                        <a:t>S03</a:t>
+                      </a:r>
+                      <a:endParaRPr lang="en-US" sz="1100" dirty="0"/>
+                    </a:p>
+                  </a:txBody>
+                  <a:tcPr marL="64008" marR="64008" marT="13716" marB="13716" anchor="ctr">
+                    <a:lnL w="6350" cap="flat" cmpd="sng" algn="ctr">
+                      <a:solidFill>
+                        <a:schemeClr val="tx2"/>
+                      </a:solidFill>
+                      <a:prstDash val="solid"/>
+                      <a:round/>
+                      <a:headEnd type="none" w="med" len="med"/>
+                      <a:tailEnd type="none" w="med" len="med"/>
+                    </a:lnL>
+                    <a:lnR w="6350" cap="flat" cmpd="sng" algn="ctr">
+                      <a:solidFill>
+                        <a:schemeClr val="tx2"/>
+                      </a:solidFill>
+                      <a:prstDash val="solid"/>
+                      <a:round/>
+                      <a:headEnd type="none" w="med" len="med"/>
+                      <a:tailEnd type="none" w="med" len="med"/>
+                    </a:lnR>
+                    <a:lnT w="6350" cap="flat" cmpd="sng" algn="ctr">
+                      <a:solidFill>
+                        <a:schemeClr val="tx2"/>
+                      </a:solidFill>
+                      <a:prstDash val="solid"/>
+                      <a:round/>
+                      <a:headEnd type="none" w="med" len="med"/>
+                      <a:tailEnd type="none" w="med" len="med"/>
+                    </a:lnT>
+                    <a:lnB w="6350" cap="flat" cmpd="sng" algn="ctr">
+                      <a:solidFill>
+                        <a:schemeClr val="tx2"/>
+                      </a:solidFill>
+                      <a:prstDash val="solid"/>
+                      <a:round/>
+                      <a:headEnd type="none" w="med" len="med"/>
+                      <a:tailEnd type="none" w="med" len="med"/>
+                    </a:lnB>
+                    <a:solidFill>
+                      <a:schemeClr val="bg2"/>
+                    </a:solidFill>
+                  </a:tcPr>
+                </a:tc>
+                <a:tc>
+                  <a:txBody>
+                    <a:bodyPr/>
+                    <a:lstStyle/>
+                    <a:p>
+                      <a:pPr algn="l" indent="0" marL="0">
+                        <a:buNone/>
+                      </a:pPr>
+                      <a:r>
+                        <a:rPr lang="en-US" sz="1100" dirty="0">
+                          <a:solidFill>
+                            <a:schemeClr val="tx1"/>
+                          </a:solidFill>
+                        </a:rPr>
+                        <a:t>C7</a:t>
+                      </a:r>
+                      <a:endParaRPr lang="en-US" sz="1100" dirty="0"/>
+                    </a:p>
+                  </a:txBody>
+                  <a:tcPr marL="64008" marR="64008" marT="13716" marB="13716" anchor="ctr">
+                    <a:lnL w="6350" cap="flat" cmpd="sng" algn="ctr">
+                      <a:solidFill>
+                        <a:schemeClr val="tx2"/>
+                      </a:solidFill>
+                      <a:prstDash val="solid"/>
+                      <a:round/>
+                      <a:headEnd type="none" w="med" len="med"/>
+                      <a:tailEnd type="none" w="med" len="med"/>
+                    </a:lnL>
+                    <a:lnR w="6350" cap="flat" cmpd="sng" algn="ctr">
+                      <a:solidFill>
+                        <a:schemeClr val="tx2"/>
+                      </a:solidFill>
+                      <a:prstDash val="solid"/>
+                      <a:round/>
+                      <a:headEnd type="none" w="med" len="med"/>
+                      <a:tailEnd type="none" w="med" len="med"/>
+                    </a:lnR>
+                    <a:lnT w="6350" cap="flat" cmpd="sng" algn="ctr">
+                      <a:solidFill>
+                        <a:schemeClr val="tx2"/>
+                      </a:solidFill>
+                      <a:prstDash val="solid"/>
+                      <a:round/>
+                      <a:headEnd type="none" w="med" len="med"/>
+                      <a:tailEnd type="none" w="med" len="med"/>
+                    </a:lnT>
+                    <a:lnB w="6350" cap="flat" cmpd="sng" algn="ctr">
+                      <a:solidFill>
+                        <a:schemeClr val="tx2"/>
+                      </a:solidFill>
+                      <a:prstDash val="solid"/>
+                      <a:round/>
+                      <a:headEnd type="none" w="med" len="med"/>
+                      <a:tailEnd type="none" w="med" len="med"/>
+                    </a:lnB>
+                    <a:solidFill>
+                      <a:schemeClr val="bg2"/>
+                    </a:solidFill>
+                  </a:tcPr>
+                </a:tc>
+                <a:tc>
+                  <a:txBody>
+                    <a:bodyPr/>
+                    <a:lstStyle/>
+                    <a:p>
+                      <a:pPr algn="l" indent="0" marL="0">
+                        <a:buNone/>
+                      </a:pPr>
+                      <a:r>
+                        <a:rPr lang="en-US" sz="1100" dirty="0">
+                          <a:solidFill>
+                            <a:schemeClr val="tx1"/>
+                          </a:solidFill>
+                        </a:rPr>
+                        <a:t>KH03</a:t>
+                      </a:r>
+                      <a:endParaRPr lang="en-US" sz="1100" dirty="0"/>
+                    </a:p>
+                  </a:txBody>
+                  <a:tcPr marL="64008" marR="64008" marT="13716" marB="13716" anchor="ctr">
+                    <a:lnL w="6350" cap="flat" cmpd="sng" algn="ctr">
+                      <a:solidFill>
+                        <a:schemeClr val="tx2"/>
+                      </a:solidFill>
+                      <a:prstDash val="solid"/>
+                      <a:round/>
+                      <a:headEnd type="none" w="med" len="med"/>
+                      <a:tailEnd type="none" w="med" len="med"/>
+                    </a:lnL>
+                    <a:lnR w="6350" cap="flat" cmpd="sng" algn="ctr">
+                      <a:solidFill>
+                        <a:schemeClr val="tx2"/>
+                      </a:solidFill>
+                      <a:prstDash val="solid"/>
+                      <a:round/>
+                      <a:headEnd type="none" w="med" len="med"/>
+                      <a:tailEnd type="none" w="med" len="med"/>
+                    </a:lnR>
+                    <a:lnT w="6350" cap="flat" cmpd="sng" algn="ctr">
+                      <a:solidFill>
+                        <a:schemeClr val="tx2"/>
+                      </a:solidFill>
+                      <a:prstDash val="solid"/>
+                      <a:round/>
+                      <a:headEnd type="none" w="med" len="med"/>
+                      <a:tailEnd type="none" w="med" len="med"/>
+                    </a:lnT>
+                    <a:lnB w="6350" cap="flat" cmpd="sng" algn="ctr">
+                      <a:solidFill>
+                        <a:schemeClr val="tx2"/>
+                      </a:solidFill>
+                      <a:prstDash val="solid"/>
+                      <a:round/>
+                      <a:headEnd type="none" w="med" len="med"/>
+                      <a:tailEnd type="none" w="med" len="med"/>
+                    </a:lnB>
+                    <a:solidFill>
+                      <a:schemeClr val="bg2"/>
+                    </a:solidFill>
+                  </a:tcPr>
+                </a:tc>
+                <a:tc>
+                  <a:txBody>
+                    <a:bodyPr/>
+                    <a:lstStyle/>
+                    <a:p>
+                      <a:pPr algn="l" indent="0" marL="0">
+                        <a:buNone/>
+                      </a:pPr>
+                      <a:r>
+                        <a:rPr lang="en-US" sz="1100" dirty="0">
+                          <a:solidFill>
+                            <a:schemeClr val="tx1"/>
+                          </a:solidFill>
+                        </a:rPr>
+                        <a:t>2025-03-19</a:t>
+                      </a:r>
+                      <a:endParaRPr lang="en-US" sz="1100" dirty="0"/>
+                    </a:p>
+                  </a:txBody>
+                  <a:tcPr marL="64008" marR="64008" marT="13716" marB="13716" anchor="ctr">
+                    <a:lnL w="6350" cap="flat" cmpd="sng" algn="ctr">
+                      <a:solidFill>
+                        <a:schemeClr val="tx2"/>
+                      </a:solidFill>
+                      <a:prstDash val="solid"/>
+                      <a:round/>
+                      <a:headEnd type="none" w="med" len="med"/>
+                      <a:tailEnd type="none" w="med" len="med"/>
+                    </a:lnL>
+                    <a:lnR w="6350" cap="flat" cmpd="sng" algn="ctr">
+                      <a:solidFill>
+                        <a:schemeClr val="tx2"/>
+                      </a:solidFill>
+                      <a:prstDash val="solid"/>
+                      <a:round/>
+                      <a:headEnd type="none" w="med" len="med"/>
+                      <a:tailEnd type="none" w="med" len="med"/>
+                    </a:lnR>
+                    <a:lnT w="6350" cap="flat" cmpd="sng" algn="ctr">
+                      <a:solidFill>
+                        <a:schemeClr val="tx2"/>
+                      </a:solidFill>
+                      <a:prstDash val="solid"/>
+                      <a:round/>
+                      <a:headEnd type="none" w="med" len="med"/>
+                      <a:tailEnd type="none" w="med" len="med"/>
+                    </a:lnT>
+                    <a:lnB w="6350" cap="flat" cmpd="sng" algn="ctr">
+                      <a:solidFill>
+                        <a:schemeClr val="tx2"/>
+                      </a:solidFill>
+                      <a:prstDash val="solid"/>
+                      <a:round/>
+                      <a:headEnd type="none" w="med" len="med"/>
+                      <a:tailEnd type="none" w="med" len="med"/>
+                    </a:lnB>
+                    <a:solidFill>
+                      <a:schemeClr val="bg2"/>
+                    </a:solidFill>
+                  </a:tcPr>
+                </a:tc>
+              </a:tr>
+              <a:tr h="219456">
+                <a:tc>
+                  <a:txBody>
+                    <a:bodyPr/>
+                    <a:lstStyle/>
+                    <a:p>
+                      <a:pPr algn="l" indent="0" marL="0">
+                        <a:buNone/>
+                      </a:pPr>
+                      <a:r>
+                        <a:rPr lang="en-US" sz="1100" b="1" dirty="0">
+                          <a:solidFill>
+                            <a:schemeClr val="tx1"/>
+                          </a:solidFill>
+                        </a:rPr>
+                        <a:t>S03</a:t>
+                      </a:r>
+                      <a:endParaRPr lang="en-US" sz="1100" dirty="0"/>
+                    </a:p>
+                  </a:txBody>
+                  <a:tcPr marL="64008" marR="64008" marT="13716" marB="13716" anchor="ctr">
+                    <a:lnL w="6350" cap="flat" cmpd="sng" algn="ctr">
+                      <a:solidFill>
+                        <a:schemeClr val="tx2"/>
+                      </a:solidFill>
+                      <a:prstDash val="solid"/>
+                      <a:round/>
+                      <a:headEnd type="none" w="med" len="med"/>
+                      <a:tailEnd type="none" w="med" len="med"/>
+                    </a:lnL>
+                    <a:lnR w="6350" cap="flat" cmpd="sng" algn="ctr">
+                      <a:solidFill>
+                        <a:schemeClr val="tx2"/>
+                      </a:solidFill>
+                      <a:prstDash val="solid"/>
+                      <a:round/>
+                      <a:headEnd type="none" w="med" len="med"/>
+                      <a:tailEnd type="none" w="med" len="med"/>
+                    </a:lnR>
+                    <a:lnT w="6350" cap="flat" cmpd="sng" algn="ctr">
+                      <a:solidFill>
+                        <a:schemeClr val="tx2"/>
+                      </a:solidFill>
+                      <a:prstDash val="solid"/>
+                      <a:round/>
+                      <a:headEnd type="none" w="med" len="med"/>
+                      <a:tailEnd type="none" w="med" len="med"/>
+                    </a:lnT>
+                    <a:lnB w="6350" cap="flat" cmpd="sng" algn="ctr">
+                      <a:solidFill>
+                        <a:schemeClr val="tx2"/>
+                      </a:solidFill>
+                      <a:prstDash val="solid"/>
+                      <a:round/>
+                      <a:headEnd type="none" w="med" len="med"/>
+                      <a:tailEnd type="none" w="med" len="med"/>
+                    </a:lnB>
+                    <a:solidFill>
+                      <a:schemeClr val="bg1"/>
+                    </a:solidFill>
+                  </a:tcPr>
+                </a:tc>
+                <a:tc>
+                  <a:txBody>
+                    <a:bodyPr/>
+                    <a:lstStyle/>
+                    <a:p>
+                      <a:pPr algn="l" indent="0" marL="0">
+                        <a:buNone/>
+                      </a:pPr>
+                      <a:r>
+                        <a:rPr lang="en-US" sz="1100" dirty="0">
+                          <a:solidFill>
+                            <a:schemeClr val="tx1"/>
+                          </a:solidFill>
+                        </a:rPr>
+                        <a:t>C8</a:t>
+                      </a:r>
+                      <a:endParaRPr lang="en-US" sz="1100" dirty="0"/>
+                    </a:p>
+                  </a:txBody>
+                  <a:tcPr marL="64008" marR="64008" marT="13716" marB="13716" anchor="ctr">
+                    <a:lnL w="6350" cap="flat" cmpd="sng" algn="ctr">
+                      <a:solidFill>
+                        <a:schemeClr val="tx2"/>
+                      </a:solidFill>
+                      <a:prstDash val="solid"/>
+                      <a:round/>
+                      <a:headEnd type="none" w="med" len="med"/>
+                      <a:tailEnd type="none" w="med" len="med"/>
+                    </a:lnL>
+                    <a:lnR w="6350" cap="flat" cmpd="sng" algn="ctr">
+                      <a:solidFill>
+                        <a:schemeClr val="tx2"/>
+                      </a:solidFill>
+                      <a:prstDash val="solid"/>
+                      <a:round/>
+                      <a:headEnd type="none" w="med" len="med"/>
+                      <a:tailEnd type="none" w="med" len="med"/>
+                    </a:lnR>
+                    <a:lnT w="6350" cap="flat" cmpd="sng" algn="ctr">
+                      <a:solidFill>
+                        <a:schemeClr val="tx2"/>
+                      </a:solidFill>
+                      <a:prstDash val="solid"/>
+                      <a:round/>
+                      <a:headEnd type="none" w="med" len="med"/>
+                      <a:tailEnd type="none" w="med" len="med"/>
+                    </a:lnT>
+                    <a:lnB w="6350" cap="flat" cmpd="sng" algn="ctr">
+                      <a:solidFill>
+                        <a:schemeClr val="tx2"/>
+                      </a:solidFill>
+                      <a:prstDash val="solid"/>
+                      <a:round/>
+                      <a:headEnd type="none" w="med" len="med"/>
+                      <a:tailEnd type="none" w="med" len="med"/>
+                    </a:lnB>
+                    <a:solidFill>
+                      <a:schemeClr val="bg1"/>
+                    </a:solidFill>
+                  </a:tcPr>
+                </a:tc>
+                <a:tc>
+                  <a:txBody>
+                    <a:bodyPr/>
+                    <a:lstStyle/>
+                    <a:p>
+                      <a:pPr algn="l" indent="0" marL="0">
+                        <a:buNone/>
+                      </a:pPr>
+                      <a:r>
+                        <a:rPr lang="en-US" sz="1100" dirty="0">
+                          <a:solidFill>
+                            <a:schemeClr val="tx1"/>
+                          </a:solidFill>
+                        </a:rPr>
+                        <a:t>KH03</a:t>
                       </a:r>
                       <a:endParaRPr lang="en-US" sz="1100" dirty="0"/>
                     </a:p>
@@ -17151,7 +18457,7 @@
                             <a:schemeClr val="tx1"/>
                           </a:solidFill>
                         </a:rPr>
-                        <a:t>V04</a:t>
+                        <a:t>S04</a:t>
                       </a:r>
                       <a:endParaRPr lang="en-US" sz="1100" dirty="0"/>
                     </a:p>
@@ -17212,621 +18518,7 @@
                             <a:schemeClr val="tx1"/>
                           </a:solidFill>
                         </a:rPr>
-                        <a:t>S03</a:t>
-                      </a:r>
-                      <a:endParaRPr lang="en-US" sz="1100" dirty="0"/>
-                    </a:p>
-                  </a:txBody>
-                  <a:tcPr marL="64008" marR="64008" marT="13716" marB="13716" anchor="ctr">
-                    <a:lnL w="6350" cap="flat" cmpd="sng" algn="ctr">
-                      <a:solidFill>
-                        <a:schemeClr val="tx2"/>
-                      </a:solidFill>
-                      <a:prstDash val="solid"/>
-                      <a:round/>
-                      <a:headEnd type="none" w="med" len="med"/>
-                      <a:tailEnd type="none" w="med" len="med"/>
-                    </a:lnL>
-                    <a:lnR w="6350" cap="flat" cmpd="sng" algn="ctr">
-                      <a:solidFill>
-                        <a:schemeClr val="tx2"/>
-                      </a:solidFill>
-                      <a:prstDash val="solid"/>
-                      <a:round/>
-                      <a:headEnd type="none" w="med" len="med"/>
-                      <a:tailEnd type="none" w="med" len="med"/>
-                    </a:lnR>
-                    <a:lnT w="6350" cap="flat" cmpd="sng" algn="ctr">
-                      <a:solidFill>
-                        <a:schemeClr val="tx2"/>
-                      </a:solidFill>
-                      <a:prstDash val="solid"/>
-                      <a:round/>
-                      <a:headEnd type="none" w="med" len="med"/>
-                      <a:tailEnd type="none" w="med" len="med"/>
-                    </a:lnT>
-                    <a:lnB w="6350" cap="flat" cmpd="sng" algn="ctr">
-                      <a:solidFill>
-                        <a:schemeClr val="tx2"/>
-                      </a:solidFill>
-                      <a:prstDash val="solid"/>
-                      <a:round/>
-                      <a:headEnd type="none" w="med" len="med"/>
-                      <a:tailEnd type="none" w="med" len="med"/>
-                    </a:lnB>
-                    <a:solidFill>
-                      <a:schemeClr val="bg2"/>
-                    </a:solidFill>
-                  </a:tcPr>
-                </a:tc>
-                <a:tc>
-                  <a:txBody>
-                    <a:bodyPr/>
-                    <a:lstStyle/>
-                    <a:p>
-                      <a:pPr algn="l" indent="0" marL="0">
-                        <a:buNone/>
-                      </a:pPr>
-                      <a:r>
-                        <a:rPr lang="en-US" sz="1100" dirty="0">
-                          <a:solidFill>
-                            <a:schemeClr val="tx1"/>
-                          </a:solidFill>
-                        </a:rPr>
-                        <a:t>KH03</a:t>
-                      </a:r>
-                      <a:endParaRPr lang="en-US" sz="1100" dirty="0"/>
-                    </a:p>
-                  </a:txBody>
-                  <a:tcPr marL="64008" marR="64008" marT="13716" marB="13716" anchor="ctr">
-                    <a:lnL w="6350" cap="flat" cmpd="sng" algn="ctr">
-                      <a:solidFill>
-                        <a:schemeClr val="tx2"/>
-                      </a:solidFill>
-                      <a:prstDash val="solid"/>
-                      <a:round/>
-                      <a:headEnd type="none" w="med" len="med"/>
-                      <a:tailEnd type="none" w="med" len="med"/>
-                    </a:lnL>
-                    <a:lnR w="6350" cap="flat" cmpd="sng" algn="ctr">
-                      <a:solidFill>
-                        <a:schemeClr val="tx2"/>
-                      </a:solidFill>
-                      <a:prstDash val="solid"/>
-                      <a:round/>
-                      <a:headEnd type="none" w="med" len="med"/>
-                      <a:tailEnd type="none" w="med" len="med"/>
-                    </a:lnR>
-                    <a:lnT w="6350" cap="flat" cmpd="sng" algn="ctr">
-                      <a:solidFill>
-                        <a:schemeClr val="tx2"/>
-                      </a:solidFill>
-                      <a:prstDash val="solid"/>
-                      <a:round/>
-                      <a:headEnd type="none" w="med" len="med"/>
-                      <a:tailEnd type="none" w="med" len="med"/>
-                    </a:lnT>
-                    <a:lnB w="6350" cap="flat" cmpd="sng" algn="ctr">
-                      <a:solidFill>
-                        <a:schemeClr val="tx2"/>
-                      </a:solidFill>
-                      <a:prstDash val="solid"/>
-                      <a:round/>
-                      <a:headEnd type="none" w="med" len="med"/>
-                      <a:tailEnd type="none" w="med" len="med"/>
-                    </a:lnB>
-                    <a:solidFill>
-                      <a:schemeClr val="bg2"/>
-                    </a:solidFill>
-                  </a:tcPr>
-                </a:tc>
-                <a:tc>
-                  <a:txBody>
-                    <a:bodyPr/>
-                    <a:lstStyle/>
-                    <a:p>
-                      <a:pPr algn="l" indent="0" marL="0">
-                        <a:buNone/>
-                      </a:pPr>
-                      <a:r>
-                        <a:rPr lang="en-US" sz="1100" dirty="0">
-                          <a:solidFill>
-                            <a:schemeClr val="tx1"/>
-                          </a:solidFill>
-                        </a:rPr>
-                        <a:t>C7</a:t>
-                      </a:r>
-                      <a:endParaRPr lang="en-US" sz="1100" dirty="0"/>
-                    </a:p>
-                  </a:txBody>
-                  <a:tcPr marL="64008" marR="64008" marT="13716" marB="13716" anchor="ctr">
-                    <a:lnL w="6350" cap="flat" cmpd="sng" algn="ctr">
-                      <a:solidFill>
-                        <a:schemeClr val="tx2"/>
-                      </a:solidFill>
-                      <a:prstDash val="solid"/>
-                      <a:round/>
-                      <a:headEnd type="none" w="med" len="med"/>
-                      <a:tailEnd type="none" w="med" len="med"/>
-                    </a:lnL>
-                    <a:lnR w="6350" cap="flat" cmpd="sng" algn="ctr">
-                      <a:solidFill>
-                        <a:schemeClr val="tx2"/>
-                      </a:solidFill>
-                      <a:prstDash val="solid"/>
-                      <a:round/>
-                      <a:headEnd type="none" w="med" len="med"/>
-                      <a:tailEnd type="none" w="med" len="med"/>
-                    </a:lnR>
-                    <a:lnT w="6350" cap="flat" cmpd="sng" algn="ctr">
-                      <a:solidFill>
-                        <a:schemeClr val="tx2"/>
-                      </a:solidFill>
-                      <a:prstDash val="solid"/>
-                      <a:round/>
-                      <a:headEnd type="none" w="med" len="med"/>
-                      <a:tailEnd type="none" w="med" len="med"/>
-                    </a:lnT>
-                    <a:lnB w="6350" cap="flat" cmpd="sng" algn="ctr">
-                      <a:solidFill>
-                        <a:schemeClr val="tx2"/>
-                      </a:solidFill>
-                      <a:prstDash val="solid"/>
-                      <a:round/>
-                      <a:headEnd type="none" w="med" len="med"/>
-                      <a:tailEnd type="none" w="med" len="med"/>
-                    </a:lnB>
-                    <a:solidFill>
-                      <a:schemeClr val="bg2"/>
-                    </a:solidFill>
-                  </a:tcPr>
-                </a:tc>
-                <a:tc>
-                  <a:txBody>
-                    <a:bodyPr/>
-                    <a:lstStyle/>
-                    <a:p>
-                      <a:pPr algn="l" indent="0" marL="0">
-                        <a:buNone/>
-                      </a:pPr>
-                      <a:r>
-                        <a:rPr lang="en-US" sz="1100" dirty="0">
-                          <a:solidFill>
-                            <a:schemeClr val="tx1"/>
-                          </a:solidFill>
-                        </a:rPr>
-                        <a:t>2025-03-19</a:t>
-                      </a:r>
-                      <a:endParaRPr lang="en-US" sz="1100" dirty="0"/>
-                    </a:p>
-                  </a:txBody>
-                  <a:tcPr marL="64008" marR="64008" marT="13716" marB="13716" anchor="ctr">
-                    <a:lnL w="6350" cap="flat" cmpd="sng" algn="ctr">
-                      <a:solidFill>
-                        <a:schemeClr val="tx2"/>
-                      </a:solidFill>
-                      <a:prstDash val="solid"/>
-                      <a:round/>
-                      <a:headEnd type="none" w="med" len="med"/>
-                      <a:tailEnd type="none" w="med" len="med"/>
-                    </a:lnL>
-                    <a:lnR w="6350" cap="flat" cmpd="sng" algn="ctr">
-                      <a:solidFill>
-                        <a:schemeClr val="tx2"/>
-                      </a:solidFill>
-                      <a:prstDash val="solid"/>
-                      <a:round/>
-                      <a:headEnd type="none" w="med" len="med"/>
-                      <a:tailEnd type="none" w="med" len="med"/>
-                    </a:lnR>
-                    <a:lnT w="6350" cap="flat" cmpd="sng" algn="ctr">
-                      <a:solidFill>
-                        <a:schemeClr val="tx2"/>
-                      </a:solidFill>
-                      <a:prstDash val="solid"/>
-                      <a:round/>
-                      <a:headEnd type="none" w="med" len="med"/>
-                      <a:tailEnd type="none" w="med" len="med"/>
-                    </a:lnT>
-                    <a:lnB w="6350" cap="flat" cmpd="sng" algn="ctr">
-                      <a:solidFill>
-                        <a:schemeClr val="tx2"/>
-                      </a:solidFill>
-                      <a:prstDash val="solid"/>
-                      <a:round/>
-                      <a:headEnd type="none" w="med" len="med"/>
-                      <a:tailEnd type="none" w="med" len="med"/>
-                    </a:lnB>
-                    <a:solidFill>
-                      <a:schemeClr val="bg2"/>
-                    </a:solidFill>
-                  </a:tcPr>
-                </a:tc>
-              </a:tr>
-              <a:tr h="219456">
-                <a:tc>
-                  <a:txBody>
-                    <a:bodyPr/>
-                    <a:lstStyle/>
-                    <a:p>
-                      <a:pPr algn="l" indent="0" marL="0">
-                        <a:buNone/>
-                      </a:pPr>
-                      <a:r>
-                        <a:rPr lang="en-US" sz="1100" b="1" dirty="0">
-                          <a:solidFill>
-                            <a:schemeClr val="tx1"/>
-                          </a:solidFill>
-                        </a:rPr>
-                        <a:t>V05</a:t>
-                      </a:r>
-                      <a:endParaRPr lang="en-US" sz="1100" dirty="0"/>
-                    </a:p>
-                  </a:txBody>
-                  <a:tcPr marL="64008" marR="64008" marT="13716" marB="13716" anchor="ctr">
-                    <a:lnL w="6350" cap="flat" cmpd="sng" algn="ctr">
-                      <a:solidFill>
-                        <a:schemeClr val="tx2"/>
-                      </a:solidFill>
-                      <a:prstDash val="solid"/>
-                      <a:round/>
-                      <a:headEnd type="none" w="med" len="med"/>
-                      <a:tailEnd type="none" w="med" len="med"/>
-                    </a:lnL>
-                    <a:lnR w="6350" cap="flat" cmpd="sng" algn="ctr">
-                      <a:solidFill>
-                        <a:schemeClr val="tx2"/>
-                      </a:solidFill>
-                      <a:prstDash val="solid"/>
-                      <a:round/>
-                      <a:headEnd type="none" w="med" len="med"/>
-                      <a:tailEnd type="none" w="med" len="med"/>
-                    </a:lnR>
-                    <a:lnT w="6350" cap="flat" cmpd="sng" algn="ctr">
-                      <a:solidFill>
-                        <a:schemeClr val="tx2"/>
-                      </a:solidFill>
-                      <a:prstDash val="solid"/>
-                      <a:round/>
-                      <a:headEnd type="none" w="med" len="med"/>
-                      <a:tailEnd type="none" w="med" len="med"/>
-                    </a:lnT>
-                    <a:lnB w="6350" cap="flat" cmpd="sng" algn="ctr">
-                      <a:solidFill>
-                        <a:schemeClr val="tx2"/>
-                      </a:solidFill>
-                      <a:prstDash val="solid"/>
-                      <a:round/>
-                      <a:headEnd type="none" w="med" len="med"/>
-                      <a:tailEnd type="none" w="med" len="med"/>
-                    </a:lnB>
-                    <a:solidFill>
-                      <a:schemeClr val="bg1"/>
-                    </a:solidFill>
-                  </a:tcPr>
-                </a:tc>
-                <a:tc>
-                  <a:txBody>
-                    <a:bodyPr/>
-                    <a:lstStyle/>
-                    <a:p>
-                      <a:pPr algn="l" indent="0" marL="0">
-                        <a:buNone/>
-                      </a:pPr>
-                      <a:r>
-                        <a:rPr lang="en-US" sz="1100" dirty="0">
-                          <a:solidFill>
-                            <a:schemeClr val="tx1"/>
-                          </a:solidFill>
-                        </a:rPr>
-                        <a:t>S03</a:t>
-                      </a:r>
-                      <a:endParaRPr lang="en-US" sz="1100" dirty="0"/>
-                    </a:p>
-                  </a:txBody>
-                  <a:tcPr marL="64008" marR="64008" marT="13716" marB="13716" anchor="ctr">
-                    <a:lnL w="6350" cap="flat" cmpd="sng" algn="ctr">
-                      <a:solidFill>
-                        <a:schemeClr val="tx2"/>
-                      </a:solidFill>
-                      <a:prstDash val="solid"/>
-                      <a:round/>
-                      <a:headEnd type="none" w="med" len="med"/>
-                      <a:tailEnd type="none" w="med" len="med"/>
-                    </a:lnL>
-                    <a:lnR w="6350" cap="flat" cmpd="sng" algn="ctr">
-                      <a:solidFill>
-                        <a:schemeClr val="tx2"/>
-                      </a:solidFill>
-                      <a:prstDash val="solid"/>
-                      <a:round/>
-                      <a:headEnd type="none" w="med" len="med"/>
-                      <a:tailEnd type="none" w="med" len="med"/>
-                    </a:lnR>
-                    <a:lnT w="6350" cap="flat" cmpd="sng" algn="ctr">
-                      <a:solidFill>
-                        <a:schemeClr val="tx2"/>
-                      </a:solidFill>
-                      <a:prstDash val="solid"/>
-                      <a:round/>
-                      <a:headEnd type="none" w="med" len="med"/>
-                      <a:tailEnd type="none" w="med" len="med"/>
-                    </a:lnT>
-                    <a:lnB w="6350" cap="flat" cmpd="sng" algn="ctr">
-                      <a:solidFill>
-                        <a:schemeClr val="tx2"/>
-                      </a:solidFill>
-                      <a:prstDash val="solid"/>
-                      <a:round/>
-                      <a:headEnd type="none" w="med" len="med"/>
-                      <a:tailEnd type="none" w="med" len="med"/>
-                    </a:lnB>
-                    <a:solidFill>
-                      <a:schemeClr val="bg1"/>
-                    </a:solidFill>
-                  </a:tcPr>
-                </a:tc>
-                <a:tc>
-                  <a:txBody>
-                    <a:bodyPr/>
-                    <a:lstStyle/>
-                    <a:p>
-                      <a:pPr algn="l" indent="0" marL="0">
-                        <a:buNone/>
-                      </a:pPr>
-                      <a:r>
-                        <a:rPr lang="en-US" sz="1100" dirty="0">
-                          <a:solidFill>
-                            <a:schemeClr val="tx1"/>
-                          </a:solidFill>
-                        </a:rPr>
-                        <a:t>KH03</a:t>
-                      </a:r>
-                      <a:endParaRPr lang="en-US" sz="1100" dirty="0"/>
-                    </a:p>
-                  </a:txBody>
-                  <a:tcPr marL="64008" marR="64008" marT="13716" marB="13716" anchor="ctr">
-                    <a:lnL w="6350" cap="flat" cmpd="sng" algn="ctr">
-                      <a:solidFill>
-                        <a:schemeClr val="tx2"/>
-                      </a:solidFill>
-                      <a:prstDash val="solid"/>
-                      <a:round/>
-                      <a:headEnd type="none" w="med" len="med"/>
-                      <a:tailEnd type="none" w="med" len="med"/>
-                    </a:lnL>
-                    <a:lnR w="6350" cap="flat" cmpd="sng" algn="ctr">
-                      <a:solidFill>
-                        <a:schemeClr val="tx2"/>
-                      </a:solidFill>
-                      <a:prstDash val="solid"/>
-                      <a:round/>
-                      <a:headEnd type="none" w="med" len="med"/>
-                      <a:tailEnd type="none" w="med" len="med"/>
-                    </a:lnR>
-                    <a:lnT w="6350" cap="flat" cmpd="sng" algn="ctr">
-                      <a:solidFill>
-                        <a:schemeClr val="tx2"/>
-                      </a:solidFill>
-                      <a:prstDash val="solid"/>
-                      <a:round/>
-                      <a:headEnd type="none" w="med" len="med"/>
-                      <a:tailEnd type="none" w="med" len="med"/>
-                    </a:lnT>
-                    <a:lnB w="6350" cap="flat" cmpd="sng" algn="ctr">
-                      <a:solidFill>
-                        <a:schemeClr val="tx2"/>
-                      </a:solidFill>
-                      <a:prstDash val="solid"/>
-                      <a:round/>
-                      <a:headEnd type="none" w="med" len="med"/>
-                      <a:tailEnd type="none" w="med" len="med"/>
-                    </a:lnB>
-                    <a:solidFill>
-                      <a:schemeClr val="bg1"/>
-                    </a:solidFill>
-                  </a:tcPr>
-                </a:tc>
-                <a:tc>
-                  <a:txBody>
-                    <a:bodyPr/>
-                    <a:lstStyle/>
-                    <a:p>
-                      <a:pPr algn="l" indent="0" marL="0">
-                        <a:buNone/>
-                      </a:pPr>
-                      <a:r>
-                        <a:rPr lang="en-US" sz="1100" dirty="0">
-                          <a:solidFill>
-                            <a:schemeClr val="tx1"/>
-                          </a:solidFill>
-                        </a:rPr>
-                        <a:t>C8</a:t>
-                      </a:r>
-                      <a:endParaRPr lang="en-US" sz="1100" dirty="0"/>
-                    </a:p>
-                  </a:txBody>
-                  <a:tcPr marL="64008" marR="64008" marT="13716" marB="13716" anchor="ctr">
-                    <a:lnL w="6350" cap="flat" cmpd="sng" algn="ctr">
-                      <a:solidFill>
-                        <a:schemeClr val="tx2"/>
-                      </a:solidFill>
-                      <a:prstDash val="solid"/>
-                      <a:round/>
-                      <a:headEnd type="none" w="med" len="med"/>
-                      <a:tailEnd type="none" w="med" len="med"/>
-                    </a:lnL>
-                    <a:lnR w="6350" cap="flat" cmpd="sng" algn="ctr">
-                      <a:solidFill>
-                        <a:schemeClr val="tx2"/>
-                      </a:solidFill>
-                      <a:prstDash val="solid"/>
-                      <a:round/>
-                      <a:headEnd type="none" w="med" len="med"/>
-                      <a:tailEnd type="none" w="med" len="med"/>
-                    </a:lnR>
-                    <a:lnT w="6350" cap="flat" cmpd="sng" algn="ctr">
-                      <a:solidFill>
-                        <a:schemeClr val="tx2"/>
-                      </a:solidFill>
-                      <a:prstDash val="solid"/>
-                      <a:round/>
-                      <a:headEnd type="none" w="med" len="med"/>
-                      <a:tailEnd type="none" w="med" len="med"/>
-                    </a:lnT>
-                    <a:lnB w="6350" cap="flat" cmpd="sng" algn="ctr">
-                      <a:solidFill>
-                        <a:schemeClr val="tx2"/>
-                      </a:solidFill>
-                      <a:prstDash val="solid"/>
-                      <a:round/>
-                      <a:headEnd type="none" w="med" len="med"/>
-                      <a:tailEnd type="none" w="med" len="med"/>
-                    </a:lnB>
-                    <a:solidFill>
-                      <a:schemeClr val="bg1"/>
-                    </a:solidFill>
-                  </a:tcPr>
-                </a:tc>
-                <a:tc>
-                  <a:txBody>
-                    <a:bodyPr/>
-                    <a:lstStyle/>
-                    <a:p>
-                      <a:pPr algn="l" indent="0" marL="0">
-                        <a:buNone/>
-                      </a:pPr>
-                      <a:r>
-                        <a:rPr lang="en-US" sz="1100" dirty="0">
-                          <a:solidFill>
-                            <a:schemeClr val="tx1"/>
-                          </a:solidFill>
-                        </a:rPr>
-                        <a:t>2025-03-19</a:t>
-                      </a:r>
-                      <a:endParaRPr lang="en-US" sz="1100" dirty="0"/>
-                    </a:p>
-                  </a:txBody>
-                  <a:tcPr marL="64008" marR="64008" marT="13716" marB="13716" anchor="ctr">
-                    <a:lnL w="6350" cap="flat" cmpd="sng" algn="ctr">
-                      <a:solidFill>
-                        <a:schemeClr val="tx2"/>
-                      </a:solidFill>
-                      <a:prstDash val="solid"/>
-                      <a:round/>
-                      <a:headEnd type="none" w="med" len="med"/>
-                      <a:tailEnd type="none" w="med" len="med"/>
-                    </a:lnL>
-                    <a:lnR w="6350" cap="flat" cmpd="sng" algn="ctr">
-                      <a:solidFill>
-                        <a:schemeClr val="tx2"/>
-                      </a:solidFill>
-                      <a:prstDash val="solid"/>
-                      <a:round/>
-                      <a:headEnd type="none" w="med" len="med"/>
-                      <a:tailEnd type="none" w="med" len="med"/>
-                    </a:lnR>
-                    <a:lnT w="6350" cap="flat" cmpd="sng" algn="ctr">
-                      <a:solidFill>
-                        <a:schemeClr val="tx2"/>
-                      </a:solidFill>
-                      <a:prstDash val="solid"/>
-                      <a:round/>
-                      <a:headEnd type="none" w="med" len="med"/>
-                      <a:tailEnd type="none" w="med" len="med"/>
-                    </a:lnT>
-                    <a:lnB w="6350" cap="flat" cmpd="sng" algn="ctr">
-                      <a:solidFill>
-                        <a:schemeClr val="tx2"/>
-                      </a:solidFill>
-                      <a:prstDash val="solid"/>
-                      <a:round/>
-                      <a:headEnd type="none" w="med" len="med"/>
-                      <a:tailEnd type="none" w="med" len="med"/>
-                    </a:lnB>
-                    <a:solidFill>
-                      <a:schemeClr val="bg1"/>
-                    </a:solidFill>
-                  </a:tcPr>
-                </a:tc>
-              </a:tr>
-              <a:tr h="219456">
-                <a:tc>
-                  <a:txBody>
-                    <a:bodyPr/>
-                    <a:lstStyle/>
-                    <a:p>
-                      <a:pPr algn="l" indent="0" marL="0">
-                        <a:buNone/>
-                      </a:pPr>
-                      <a:r>
-                        <a:rPr lang="en-US" sz="1100" b="1" dirty="0">
-                          <a:solidFill>
-                            <a:schemeClr val="tx1"/>
-                          </a:solidFill>
-                        </a:rPr>
-                        <a:t>V06</a:t>
-                      </a:r>
-                      <a:endParaRPr lang="en-US" sz="1100" dirty="0"/>
-                    </a:p>
-                  </a:txBody>
-                  <a:tcPr marL="64008" marR="64008" marT="13716" marB="13716" anchor="ctr">
-                    <a:lnL w="6350" cap="flat" cmpd="sng" algn="ctr">
-                      <a:solidFill>
-                        <a:schemeClr val="tx2"/>
-                      </a:solidFill>
-                      <a:prstDash val="solid"/>
-                      <a:round/>
-                      <a:headEnd type="none" w="med" len="med"/>
-                      <a:tailEnd type="none" w="med" len="med"/>
-                    </a:lnL>
-                    <a:lnR w="6350" cap="flat" cmpd="sng" algn="ctr">
-                      <a:solidFill>
-                        <a:schemeClr val="tx2"/>
-                      </a:solidFill>
-                      <a:prstDash val="solid"/>
-                      <a:round/>
-                      <a:headEnd type="none" w="med" len="med"/>
-                      <a:tailEnd type="none" w="med" len="med"/>
-                    </a:lnR>
-                    <a:lnT w="6350" cap="flat" cmpd="sng" algn="ctr">
-                      <a:solidFill>
-                        <a:schemeClr val="tx2"/>
-                      </a:solidFill>
-                      <a:prstDash val="solid"/>
-                      <a:round/>
-                      <a:headEnd type="none" w="med" len="med"/>
-                      <a:tailEnd type="none" w="med" len="med"/>
-                    </a:lnT>
-                    <a:lnB w="6350" cap="flat" cmpd="sng" algn="ctr">
-                      <a:solidFill>
-                        <a:schemeClr val="tx2"/>
-                      </a:solidFill>
-                      <a:prstDash val="solid"/>
-                      <a:round/>
-                      <a:headEnd type="none" w="med" len="med"/>
-                      <a:tailEnd type="none" w="med" len="med"/>
-                    </a:lnB>
-                    <a:solidFill>
-                      <a:schemeClr val="bg2"/>
-                    </a:solidFill>
-                  </a:tcPr>
-                </a:tc>
-                <a:tc>
-                  <a:txBody>
-                    <a:bodyPr/>
-                    <a:lstStyle/>
-                    <a:p>
-                      <a:pPr algn="l" indent="0" marL="0">
-                        <a:buNone/>
-                      </a:pPr>
-                      <a:r>
-                        <a:rPr lang="en-US" sz="1100" dirty="0">
-                          <a:solidFill>
-                            <a:schemeClr val="tx1"/>
-                          </a:solidFill>
-                        </a:rPr>
-                        <a:t>S04</a:t>
+                        <a:t>D2</a:t>
                       </a:r>
                       <a:endParaRPr lang="en-US" sz="1100" dirty="0"/>
                     </a:p>
@@ -17948,67 +18640,6 @@
                             <a:schemeClr val="tx1"/>
                           </a:solidFill>
                         </a:rPr>
-                        <a:t>D2</a:t>
-                      </a:r>
-                      <a:endParaRPr lang="en-US" sz="1100" dirty="0"/>
-                    </a:p>
-                  </a:txBody>
-                  <a:tcPr marL="64008" marR="64008" marT="13716" marB="13716" anchor="ctr">
-                    <a:lnL w="6350" cap="flat" cmpd="sng" algn="ctr">
-                      <a:solidFill>
-                        <a:schemeClr val="tx2"/>
-                      </a:solidFill>
-                      <a:prstDash val="solid"/>
-                      <a:round/>
-                      <a:headEnd type="none" w="med" len="med"/>
-                      <a:tailEnd type="none" w="med" len="med"/>
-                    </a:lnL>
-                    <a:lnR w="6350" cap="flat" cmpd="sng" algn="ctr">
-                      <a:solidFill>
-                        <a:schemeClr val="tx2"/>
-                      </a:solidFill>
-                      <a:prstDash val="solid"/>
-                      <a:round/>
-                      <a:headEnd type="none" w="med" len="med"/>
-                      <a:tailEnd type="none" w="med" len="med"/>
-                    </a:lnR>
-                    <a:lnT w="6350" cap="flat" cmpd="sng" algn="ctr">
-                      <a:solidFill>
-                        <a:schemeClr val="tx2"/>
-                      </a:solidFill>
-                      <a:prstDash val="solid"/>
-                      <a:round/>
-                      <a:headEnd type="none" w="med" len="med"/>
-                      <a:tailEnd type="none" w="med" len="med"/>
-                    </a:lnT>
-                    <a:lnB w="6350" cap="flat" cmpd="sng" algn="ctr">
-                      <a:solidFill>
-                        <a:schemeClr val="tx2"/>
-                      </a:solidFill>
-                      <a:prstDash val="solid"/>
-                      <a:round/>
-                      <a:headEnd type="none" w="med" len="med"/>
-                      <a:tailEnd type="none" w="med" len="med"/>
-                    </a:lnB>
-                    <a:solidFill>
-                      <a:schemeClr val="bg2"/>
-                    </a:solidFill>
-                  </a:tcPr>
-                </a:tc>
-                <a:tc>
-                  <a:txBody>
-                    <a:bodyPr/>
-                    <a:lstStyle/>
-                    <a:p>
-                      <a:pPr algn="l" indent="0" marL="0">
-                        <a:buNone/>
-                      </a:pPr>
-                      <a:r>
-                        <a:rPr lang="en-US" sz="1100" dirty="0">
-                          <a:solidFill>
-                            <a:schemeClr val="tx1"/>
-                          </a:solidFill>
-                        </a:rPr>
                         <a:t>2025-03-20</a:t>
                       </a:r>
                       <a:endParaRPr lang="en-US" sz="1100" dirty="0"/>
@@ -18072,7 +18703,7 @@
                             <a:schemeClr val="tx1"/>
                           </a:solidFill>
                         </a:rPr>
-                        <a:t>V07</a:t>
+                        <a:t>S05</a:t>
                       </a:r>
                       <a:endParaRPr lang="en-US" sz="1100" dirty="0"/>
                     </a:p>
@@ -18133,7 +18764,7 @@
                             <a:schemeClr val="tx1"/>
                           </a:solidFill>
                         </a:rPr>
-                        <a:t>S05</a:t>
+                        <a:t>E4</a:t>
                       </a:r>
                       <a:endParaRPr lang="en-US" sz="1100" dirty="0"/>
                     </a:p>
@@ -18255,67 +18886,6 @@
                             <a:schemeClr val="tx1"/>
                           </a:solidFill>
                         </a:rPr>
-                        <a:t>E4</a:t>
-                      </a:r>
-                      <a:endParaRPr lang="en-US" sz="1100" dirty="0"/>
-                    </a:p>
-                  </a:txBody>
-                  <a:tcPr marL="64008" marR="64008" marT="13716" marB="13716" anchor="ctr">
-                    <a:lnL w="6350" cap="flat" cmpd="sng" algn="ctr">
-                      <a:solidFill>
-                        <a:schemeClr val="tx2"/>
-                      </a:solidFill>
-                      <a:prstDash val="solid"/>
-                      <a:round/>
-                      <a:headEnd type="none" w="med" len="med"/>
-                      <a:tailEnd type="none" w="med" len="med"/>
-                    </a:lnL>
-                    <a:lnR w="6350" cap="flat" cmpd="sng" algn="ctr">
-                      <a:solidFill>
-                        <a:schemeClr val="tx2"/>
-                      </a:solidFill>
-                      <a:prstDash val="solid"/>
-                      <a:round/>
-                      <a:headEnd type="none" w="med" len="med"/>
-                      <a:tailEnd type="none" w="med" len="med"/>
-                    </a:lnR>
-                    <a:lnT w="6350" cap="flat" cmpd="sng" algn="ctr">
-                      <a:solidFill>
-                        <a:schemeClr val="tx2"/>
-                      </a:solidFill>
-                      <a:prstDash val="solid"/>
-                      <a:round/>
-                      <a:headEnd type="none" w="med" len="med"/>
-                      <a:tailEnd type="none" w="med" len="med"/>
-                    </a:lnT>
-                    <a:lnB w="6350" cap="flat" cmpd="sng" algn="ctr">
-                      <a:solidFill>
-                        <a:schemeClr val="tx2"/>
-                      </a:solidFill>
-                      <a:prstDash val="solid"/>
-                      <a:round/>
-                      <a:headEnd type="none" w="med" len="med"/>
-                      <a:tailEnd type="none" w="med" len="med"/>
-                    </a:lnB>
-                    <a:solidFill>
-                      <a:schemeClr val="bg1"/>
-                    </a:solidFill>
-                  </a:tcPr>
-                </a:tc>
-                <a:tc>
-                  <a:txBody>
-                    <a:bodyPr/>
-                    <a:lstStyle/>
-                    <a:p>
-                      <a:pPr algn="l" indent="0" marL="0">
-                        <a:buNone/>
-                      </a:pPr>
-                      <a:r>
-                        <a:rPr lang="en-US" sz="1100" dirty="0">
-                          <a:solidFill>
-                            <a:schemeClr val="tx1"/>
-                          </a:solidFill>
-                        </a:rPr>
                         <a:t>2025-03-21</a:t>
                       </a:r>
                       <a:endParaRPr lang="en-US" sz="1100" dirty="0"/>
@@ -18379,7 +18949,7 @@
                             <a:schemeClr val="tx1"/>
                           </a:solidFill>
                         </a:rPr>
-                        <a:t>V08</a:t>
+                        <a:t>S06</a:t>
                       </a:r>
                       <a:endParaRPr lang="en-US" sz="1100" dirty="0"/>
                     </a:p>
@@ -18440,7 +19010,7 @@
                             <a:schemeClr val="tx1"/>
                           </a:solidFill>
                         </a:rPr>
-                        <a:t>S06</a:t>
+                        <a:t>A6</a:t>
                       </a:r>
                       <a:endParaRPr lang="en-US" sz="1100" dirty="0"/>
                     </a:p>
@@ -18562,67 +19132,6 @@
                             <a:schemeClr val="tx1"/>
                           </a:solidFill>
                         </a:rPr>
-                        <a:t>A6</a:t>
-                      </a:r>
-                      <a:endParaRPr lang="en-US" sz="1100" dirty="0"/>
-                    </a:p>
-                  </a:txBody>
-                  <a:tcPr marL="64008" marR="64008" marT="13716" marB="13716" anchor="ctr">
-                    <a:lnL w="6350" cap="flat" cmpd="sng" algn="ctr">
-                      <a:solidFill>
-                        <a:schemeClr val="tx2"/>
-                      </a:solidFill>
-                      <a:prstDash val="solid"/>
-                      <a:round/>
-                      <a:headEnd type="none" w="med" len="med"/>
-                      <a:tailEnd type="none" w="med" len="med"/>
-                    </a:lnL>
-                    <a:lnR w="6350" cap="flat" cmpd="sng" algn="ctr">
-                      <a:solidFill>
-                        <a:schemeClr val="tx2"/>
-                      </a:solidFill>
-                      <a:prstDash val="solid"/>
-                      <a:round/>
-                      <a:headEnd type="none" w="med" len="med"/>
-                      <a:tailEnd type="none" w="med" len="med"/>
-                    </a:lnR>
-                    <a:lnT w="6350" cap="flat" cmpd="sng" algn="ctr">
-                      <a:solidFill>
-                        <a:schemeClr val="tx2"/>
-                      </a:solidFill>
-                      <a:prstDash val="solid"/>
-                      <a:round/>
-                      <a:headEnd type="none" w="med" len="med"/>
-                      <a:tailEnd type="none" w="med" len="med"/>
-                    </a:lnT>
-                    <a:lnB w="6350" cap="flat" cmpd="sng" algn="ctr">
-                      <a:solidFill>
-                        <a:schemeClr val="tx2"/>
-                      </a:solidFill>
-                      <a:prstDash val="solid"/>
-                      <a:round/>
-                      <a:headEnd type="none" w="med" len="med"/>
-                      <a:tailEnd type="none" w="med" len="med"/>
-                    </a:lnB>
-                    <a:solidFill>
-                      <a:schemeClr val="bg2"/>
-                    </a:solidFill>
-                  </a:tcPr>
-                </a:tc>
-                <a:tc>
-                  <a:txBody>
-                    <a:bodyPr/>
-                    <a:lstStyle/>
-                    <a:p>
-                      <a:pPr algn="l" indent="0" marL="0">
-                        <a:buNone/>
-                      </a:pPr>
-                      <a:r>
-                        <a:rPr lang="en-US" sz="1100" dirty="0">
-                          <a:solidFill>
-                            <a:schemeClr val="tx1"/>
-                          </a:solidFill>
-                        </a:rPr>
                         <a:t>2025-03-21</a:t>
                       </a:r>
                       <a:endParaRPr lang="en-US" sz="1100" dirty="0"/>
@@ -19381,7 +19890,7 @@
                   <a:schemeClr val="tx1"/>
                 </a:solidFill>
               </a:rPr>
-              <a:t>VE (MaVe)</a:t>
+              <a:t>VE (MaSuat, SoGhe): khóa của thực thể yếu</a:t>
             </a:r>
             <a:endParaRPr lang="en-US" sz="1400" dirty="0"/>
           </a:p>
@@ -19646,7 +20155,7 @@
                   <a:schemeClr val="tx1"/>
                 </a:solidFill>
               </a:rPr>
-              <a:t>VE.MaSuat → SUATCHIEU.MaSuat</a:t>
+              <a:t>VE.MaSuat → SUATCHIEU.MaSuat (xóa suất thì xóa vé)</a:t>
             </a:r>
             <a:endParaRPr lang="en-US" sz="1400" dirty="0"/>
           </a:p>
@@ -19911,7 +20420,7 @@
                   <a:schemeClr val="tx1"/>
                 </a:solidFill>
               </a:rPr>
-              <a:t>VE: không trùng (MaSuat, SoGhe), một ghế chỉ bán một lần cho mỗi suất</a:t>
+              <a:t>Một ghế chỉ bán một lần cho mỗi suất nhờ khóa chính (MaSuat, SoGhe) của VE</a:t>
             </a:r>
             <a:endParaRPr lang="en-US" sz="1400" dirty="0"/>
           </a:p>

--- a/hqtcsdl-giuaky/quan_ly_rap_phim.pptx
+++ b/hqtcsdl-giuaky/quan_ly_rap_phim.pptx
@@ -114,26 +114,26 @@
   <p:extLst>
     <p:ext uri="{521415D9-36F7-43E2-AB2F-B90AF26B5E84}">
       <p14:sectionLst xmlns:p14="http://schemas.microsoft.com/office/powerpoint/2010/main">
-        <p14:section name="Mở đầu" id="{79094d74-55c0-d00c-0f3e-888290b579f2}">
+        <p14:section name="Mở đầu" id="{d009a2b2-ff51-004a-a875-ce4fe05414dc}">
           <p14:sldIdLst>
             <p14:sldId id="256"/>
             <p14:sldId id="257"/>
           </p14:sldIdLst>
         </p14:section>
-        <p14:section name="Phân tích và thiết kế" id="{dac4d42e-a018-7637-5f77-154e238ee1d3}">
+        <p14:section name="Phân tích và thiết kế" id="{05cdb93d-f563-93b8-aea9-80de5d22f3f0}">
           <p14:sldIdLst>
             <p14:sldId id="258"/>
             <p14:sldId id="259"/>
             <p14:sldId id="260"/>
           </p14:sldIdLst>
         </p14:section>
-        <p14:section name="Cài đặt" id="{414bcc83-f3d3-c12e-ecc8-5fb85ccb413a}">
+        <p14:section name="Cài đặt" id="{53cc9ad9-e562-2af1-baea-08d112efde0a}">
           <p14:sldIdLst>
             <p14:sldId id="261"/>
             <p14:sldId id="262"/>
           </p14:sldIdLst>
         </p14:section>
-        <p14:section name="Kết thúc" id="{35664195-e91a-9e2c-75a8-4767cb9fde64}">
+        <p14:section name="Kết thúc" id="{015d0677-7837-df97-7e53-7c914259c4bc}">
           <p14:sldIdLst>
             <p14:sldId id="263"/>
           </p14:sldIdLst>
@@ -4931,2726 +4931,30 @@
           </a:p>
         </p:txBody>
       </p:sp>
-      <p:sp>
-        <p:nvSpPr>
-          <p:cNvPr id="3" name="Shape 1"/>
-          <p:cNvSpPr/>
+      <p:pic>
+        <p:nvPicPr>
+          <p:cNvPr id="3" name="ER diagram hand-drawn" descr="Mô hình ER vẽ tay theo ký hiệu Chen: 4 thực thể mạnh, thực thể yếu VE, 4 quan hệ 1-N">    </p:cNvPr>
+          <p:cNvPicPr>
+            <a:picLocks noChangeAspect="1"/>
+          </p:cNvPicPr>
           <p:nvPr/>
-        </p:nvSpPr>
+        </p:nvPicPr>
+        <p:blipFill>
+          <a:blip r:embed="rId1"/>
+          <a:stretch>
+            <a:fillRect/>
+          </a:stretch>
+        </p:blipFill>
         <p:spPr>
           <a:xfrm>
-            <a:off x="777240" y="1600200"/>
-            <a:ext cx="960120" cy="1143000"/>
-          </a:xfrm>
-          <a:prstGeom prst="line">
-            <a:avLst/>
-          </a:prstGeom>
-          <a:noFill/>
-          <a:ln w="12700">
-            <a:solidFill>
-              <a:schemeClr val="tx1"/>
-            </a:solidFill>
-            <a:prstDash val="solid"/>
-          </a:ln>
-        </p:spPr>
-      </p:sp>
-      <p:sp>
-        <p:nvSpPr>
-          <p:cNvPr id="4" name="Shape 2"/>
-          <p:cNvSpPr/>
-          <p:nvPr/>
-        </p:nvSpPr>
-        <p:spPr>
-          <a:xfrm flipV="1">
-            <a:off x="1737360" y="1463040"/>
-            <a:ext cx="411480" cy="1280160"/>
-          </a:xfrm>
-          <a:prstGeom prst="line">
-            <a:avLst/>
-          </a:prstGeom>
-          <a:noFill/>
-          <a:ln w="12700">
-            <a:solidFill>
-              <a:schemeClr val="tx1"/>
-            </a:solidFill>
-            <a:prstDash val="solid"/>
-          </a:ln>
-        </p:spPr>
-      </p:sp>
-      <p:sp>
-        <p:nvSpPr>
-          <p:cNvPr id="5" name="Shape 3"/>
-          <p:cNvSpPr/>
-          <p:nvPr/>
-        </p:nvSpPr>
-        <p:spPr>
-          <a:xfrm flipV="1">
-            <a:off x="1737360" y="1645920"/>
-            <a:ext cx="1691640" cy="1097280"/>
-          </a:xfrm>
-          <a:prstGeom prst="line">
-            <a:avLst/>
-          </a:prstGeom>
-          <a:noFill/>
-          <a:ln w="12700">
-            <a:solidFill>
-              <a:schemeClr val="tx1"/>
-            </a:solidFill>
-            <a:prstDash val="solid"/>
-          </a:ln>
-        </p:spPr>
-      </p:sp>
-      <p:sp>
-        <p:nvSpPr>
-          <p:cNvPr id="6" name="Shape 4"/>
-          <p:cNvSpPr/>
-          <p:nvPr/>
-        </p:nvSpPr>
-        <p:spPr>
-          <a:xfrm flipV="1">
-            <a:off x="960120" y="2743200"/>
-            <a:ext cx="777240" cy="1005840"/>
-          </a:xfrm>
-          <a:prstGeom prst="line">
-            <a:avLst/>
-          </a:prstGeom>
-          <a:noFill/>
-          <a:ln w="12700">
-            <a:solidFill>
-              <a:schemeClr val="tx1"/>
-            </a:solidFill>
-            <a:prstDash val="solid"/>
-          </a:ln>
-        </p:spPr>
-      </p:sp>
-      <p:sp>
-        <p:nvSpPr>
-          <p:cNvPr id="7" name="Shape 5"/>
-          <p:cNvSpPr/>
-          <p:nvPr/>
-        </p:nvSpPr>
-        <p:spPr>
-          <a:xfrm>
-            <a:off x="1737360" y="2743200"/>
-            <a:ext cx="731520" cy="1005840"/>
-          </a:xfrm>
-          <a:prstGeom prst="line">
-            <a:avLst/>
-          </a:prstGeom>
-          <a:noFill/>
-          <a:ln w="12700">
-            <a:solidFill>
-              <a:schemeClr val="tx1"/>
-            </a:solidFill>
-            <a:prstDash val="solid"/>
-          </a:ln>
-        </p:spPr>
-      </p:sp>
-      <p:sp>
-        <p:nvSpPr>
-          <p:cNvPr id="8" name="Shape 6"/>
-          <p:cNvSpPr/>
-          <p:nvPr/>
-        </p:nvSpPr>
-        <p:spPr>
-          <a:xfrm>
-            <a:off x="9692640" y="1554480"/>
-            <a:ext cx="731520" cy="1188720"/>
-          </a:xfrm>
-          <a:prstGeom prst="line">
-            <a:avLst/>
-          </a:prstGeom>
-          <a:noFill/>
-          <a:ln w="12700">
-            <a:solidFill>
-              <a:schemeClr val="tx1"/>
-            </a:solidFill>
-            <a:prstDash val="solid"/>
-          </a:ln>
-        </p:spPr>
-      </p:sp>
-      <p:sp>
-        <p:nvSpPr>
-          <p:cNvPr id="9" name="Shape 7"/>
-          <p:cNvSpPr/>
-          <p:nvPr/>
-        </p:nvSpPr>
-        <p:spPr>
-          <a:xfrm flipV="1">
-            <a:off x="10424160" y="1554480"/>
-            <a:ext cx="731520" cy="1188720"/>
-          </a:xfrm>
-          <a:prstGeom prst="line">
-            <a:avLst/>
-          </a:prstGeom>
-          <a:noFill/>
-          <a:ln w="12700">
-            <a:solidFill>
-              <a:schemeClr val="tx1"/>
-            </a:solidFill>
-            <a:prstDash val="solid"/>
-          </a:ln>
-        </p:spPr>
-      </p:sp>
-      <p:sp>
-        <p:nvSpPr>
-          <p:cNvPr id="10" name="Shape 8"/>
-          <p:cNvSpPr/>
-          <p:nvPr/>
-        </p:nvSpPr>
-        <p:spPr>
-          <a:xfrm flipV="1">
-            <a:off x="9692640" y="2743200"/>
-            <a:ext cx="731520" cy="1005840"/>
-          </a:xfrm>
-          <a:prstGeom prst="line">
-            <a:avLst/>
-          </a:prstGeom>
-          <a:noFill/>
-          <a:ln w="12700">
-            <a:solidFill>
-              <a:schemeClr val="tx1"/>
-            </a:solidFill>
-            <a:prstDash val="solid"/>
-          </a:ln>
-        </p:spPr>
-      </p:sp>
-      <p:sp>
-        <p:nvSpPr>
-          <p:cNvPr id="11" name="Shape 9"/>
-          <p:cNvSpPr/>
-          <p:nvPr/>
-        </p:nvSpPr>
-        <p:spPr>
-          <a:xfrm>
-            <a:off x="10424160" y="2743200"/>
-            <a:ext cx="731520" cy="1005840"/>
-          </a:xfrm>
-          <a:prstGeom prst="line">
-            <a:avLst/>
-          </a:prstGeom>
-          <a:noFill/>
-          <a:ln w="12700">
-            <a:solidFill>
-              <a:schemeClr val="tx1"/>
-            </a:solidFill>
-            <a:prstDash val="solid"/>
-          </a:ln>
-        </p:spPr>
-      </p:sp>
-      <p:sp>
-        <p:nvSpPr>
-          <p:cNvPr id="12" name="Shape 10"/>
-          <p:cNvSpPr/>
-          <p:nvPr/>
-        </p:nvSpPr>
-        <p:spPr>
-          <a:xfrm>
-            <a:off x="5349240" y="1554480"/>
-            <a:ext cx="749808" cy="1188720"/>
-          </a:xfrm>
-          <a:prstGeom prst="line">
-            <a:avLst/>
-          </a:prstGeom>
-          <a:noFill/>
-          <a:ln w="12700">
-            <a:solidFill>
-              <a:schemeClr val="tx1"/>
-            </a:solidFill>
-            <a:prstDash val="solid"/>
-          </a:ln>
-        </p:spPr>
-      </p:sp>
-      <p:sp>
-        <p:nvSpPr>
-          <p:cNvPr id="13" name="Shape 11"/>
-          <p:cNvSpPr/>
-          <p:nvPr/>
-        </p:nvSpPr>
-        <p:spPr>
-          <a:xfrm flipV="1">
-            <a:off x="6099048" y="1554480"/>
-            <a:ext cx="713232" cy="1188720"/>
-          </a:xfrm>
-          <a:prstGeom prst="line">
-            <a:avLst/>
-          </a:prstGeom>
-          <a:noFill/>
-          <a:ln w="12700">
-            <a:solidFill>
-              <a:schemeClr val="tx1"/>
-            </a:solidFill>
-            <a:prstDash val="solid"/>
-          </a:ln>
-        </p:spPr>
-      </p:sp>
-      <p:sp>
-        <p:nvSpPr>
-          <p:cNvPr id="14" name="Shape 12"/>
-          <p:cNvSpPr/>
-          <p:nvPr/>
-        </p:nvSpPr>
-        <p:spPr>
-          <a:xfrm flipV="1">
-            <a:off x="4709160" y="2743200"/>
-            <a:ext cx="1389888" cy="960120"/>
-          </a:xfrm>
-          <a:prstGeom prst="line">
-            <a:avLst/>
-          </a:prstGeom>
-          <a:noFill/>
-          <a:ln w="12700">
-            <a:solidFill>
-              <a:schemeClr val="tx1"/>
-            </a:solidFill>
-            <a:prstDash val="solid"/>
-          </a:ln>
-        </p:spPr>
-      </p:sp>
-      <p:sp>
-        <p:nvSpPr>
-          <p:cNvPr id="15" name="Shape 13"/>
-          <p:cNvSpPr/>
-          <p:nvPr/>
-        </p:nvSpPr>
-        <p:spPr>
-          <a:xfrm>
-            <a:off x="6099048" y="2743200"/>
-            <a:ext cx="1399032" cy="960120"/>
-          </a:xfrm>
-          <a:prstGeom prst="line">
-            <a:avLst/>
-          </a:prstGeom>
-          <a:noFill/>
-          <a:ln w="12700">
-            <a:solidFill>
-              <a:schemeClr val="tx1"/>
-            </a:solidFill>
-            <a:prstDash val="solid"/>
-          </a:ln>
-        </p:spPr>
-      </p:sp>
-      <p:sp>
-        <p:nvSpPr>
-          <p:cNvPr id="16" name="Shape 14"/>
-          <p:cNvSpPr/>
-          <p:nvPr/>
-        </p:nvSpPr>
-        <p:spPr>
-          <a:xfrm flipV="1">
-            <a:off x="777240" y="5212080"/>
-            <a:ext cx="960120" cy="914400"/>
-          </a:xfrm>
-          <a:prstGeom prst="line">
-            <a:avLst/>
-          </a:prstGeom>
-          <a:noFill/>
-          <a:ln w="12700">
-            <a:solidFill>
-              <a:schemeClr val="tx1"/>
-            </a:solidFill>
-            <a:prstDash val="solid"/>
-          </a:ln>
-        </p:spPr>
-      </p:sp>
-      <p:sp>
-        <p:nvSpPr>
-          <p:cNvPr id="17" name="Shape 15"/>
-          <p:cNvSpPr/>
-          <p:nvPr/>
-        </p:nvSpPr>
-        <p:spPr>
-          <a:xfrm>
-            <a:off x="1737360" y="5212080"/>
-            <a:ext cx="411480" cy="914400"/>
-          </a:xfrm>
-          <a:prstGeom prst="line">
-            <a:avLst/>
-          </a:prstGeom>
-          <a:noFill/>
-          <a:ln w="12700">
-            <a:solidFill>
-              <a:schemeClr val="tx1"/>
-            </a:solidFill>
-            <a:prstDash val="solid"/>
-          </a:ln>
-        </p:spPr>
-      </p:sp>
-      <p:sp>
-        <p:nvSpPr>
-          <p:cNvPr id="18" name="Shape 16"/>
-          <p:cNvSpPr/>
-          <p:nvPr/>
-        </p:nvSpPr>
-        <p:spPr>
-          <a:xfrm>
-            <a:off x="1737360" y="5212080"/>
-            <a:ext cx="1737360" cy="914400"/>
-          </a:xfrm>
-          <a:prstGeom prst="line">
-            <a:avLst/>
-          </a:prstGeom>
-          <a:noFill/>
-          <a:ln w="12700">
-            <a:solidFill>
-              <a:schemeClr val="tx1"/>
-            </a:solidFill>
-            <a:prstDash val="solid"/>
-          </a:ln>
-        </p:spPr>
-      </p:sp>
-      <p:sp>
-        <p:nvSpPr>
-          <p:cNvPr id="19" name="Shape 17"/>
-          <p:cNvSpPr/>
-          <p:nvPr/>
-        </p:nvSpPr>
-        <p:spPr>
-          <a:xfrm>
-            <a:off x="731520" y="4434840"/>
-            <a:ext cx="1005840" cy="777240"/>
-          </a:xfrm>
-          <a:prstGeom prst="line">
-            <a:avLst/>
-          </a:prstGeom>
-          <a:noFill/>
-          <a:ln w="12700">
-            <a:solidFill>
-              <a:schemeClr val="tx1"/>
-            </a:solidFill>
-            <a:prstDash val="solid"/>
-          </a:ln>
-        </p:spPr>
-      </p:sp>
-      <p:sp>
-        <p:nvSpPr>
-          <p:cNvPr id="20" name="Shape 18"/>
-          <p:cNvSpPr/>
-          <p:nvPr/>
-        </p:nvSpPr>
-        <p:spPr>
-          <a:xfrm flipV="1">
-            <a:off x="5486400" y="5212080"/>
-            <a:ext cx="612648" cy="914400"/>
-          </a:xfrm>
-          <a:prstGeom prst="line">
-            <a:avLst/>
-          </a:prstGeom>
-          <a:noFill/>
-          <a:ln w="12700">
-            <a:solidFill>
-              <a:schemeClr val="tx1"/>
-            </a:solidFill>
-            <a:prstDash val="solid"/>
-          </a:ln>
-        </p:spPr>
-      </p:sp>
-      <p:sp>
-        <p:nvSpPr>
-          <p:cNvPr id="21" name="Shape 19"/>
-          <p:cNvSpPr/>
-          <p:nvPr/>
-        </p:nvSpPr>
-        <p:spPr>
-          <a:xfrm>
-            <a:off x="6099048" y="5212080"/>
-            <a:ext cx="758952" cy="914400"/>
-          </a:xfrm>
-          <a:prstGeom prst="line">
-            <a:avLst/>
-          </a:prstGeom>
-          <a:noFill/>
-          <a:ln w="12700">
-            <a:solidFill>
-              <a:schemeClr val="tx1"/>
-            </a:solidFill>
-            <a:prstDash val="solid"/>
-          </a:ln>
-        </p:spPr>
-      </p:sp>
-      <p:sp>
-        <p:nvSpPr>
-          <p:cNvPr id="22" name="Shape 20"/>
-          <p:cNvSpPr/>
-          <p:nvPr/>
-        </p:nvSpPr>
-        <p:spPr>
-          <a:xfrm>
-            <a:off x="1737360" y="2743200"/>
-            <a:ext cx="2176272" cy="0"/>
-          </a:xfrm>
-          <a:prstGeom prst="line">
-            <a:avLst/>
-          </a:prstGeom>
-          <a:noFill/>
-          <a:ln w="25400">
-            <a:solidFill>
-              <a:schemeClr val="tx1"/>
-            </a:solidFill>
-            <a:prstDash val="solid"/>
-          </a:ln>
-        </p:spPr>
-      </p:sp>
-      <p:sp>
-        <p:nvSpPr>
-          <p:cNvPr id="23" name="Shape 21"/>
-          <p:cNvSpPr/>
-          <p:nvPr/>
-        </p:nvSpPr>
-        <p:spPr>
-          <a:xfrm>
-            <a:off x="3913632" y="2743200"/>
-            <a:ext cx="2185416" cy="0"/>
-          </a:xfrm>
-          <a:prstGeom prst="line">
-            <a:avLst/>
-          </a:prstGeom>
-          <a:noFill/>
-          <a:ln w="25400">
-            <a:solidFill>
-              <a:schemeClr val="tx1"/>
-            </a:solidFill>
-            <a:prstDash val="solid"/>
-          </a:ln>
-        </p:spPr>
-      </p:sp>
-      <p:sp>
-        <p:nvSpPr>
-          <p:cNvPr id="24" name="Shape 22"/>
-          <p:cNvSpPr/>
-          <p:nvPr/>
-        </p:nvSpPr>
-        <p:spPr>
-          <a:xfrm>
-            <a:off x="8275320" y="2743200"/>
-            <a:ext cx="2148840" cy="0"/>
-          </a:xfrm>
-          <a:prstGeom prst="line">
-            <a:avLst/>
-          </a:prstGeom>
-          <a:noFill/>
-          <a:ln w="25400">
-            <a:solidFill>
-              <a:schemeClr val="tx1"/>
-            </a:solidFill>
-            <a:prstDash val="solid"/>
-          </a:ln>
-        </p:spPr>
-      </p:sp>
-      <p:sp>
-        <p:nvSpPr>
-          <p:cNvPr id="25" name="Shape 23"/>
-          <p:cNvSpPr/>
-          <p:nvPr/>
-        </p:nvSpPr>
-        <p:spPr>
-          <a:xfrm>
-            <a:off x="6099048" y="2743200"/>
-            <a:ext cx="2176272" cy="0"/>
-          </a:xfrm>
-          <a:prstGeom prst="line">
-            <a:avLst/>
-          </a:prstGeom>
-          <a:noFill/>
-          <a:ln w="25400">
-            <a:solidFill>
-              <a:schemeClr val="tx1"/>
-            </a:solidFill>
-            <a:prstDash val="solid"/>
-          </a:ln>
-        </p:spPr>
-      </p:sp>
-      <p:sp>
-        <p:nvSpPr>
-          <p:cNvPr id="26" name="Shape 24"/>
-          <p:cNvSpPr/>
-          <p:nvPr/>
-        </p:nvSpPr>
-        <p:spPr>
-          <a:xfrm>
-            <a:off x="6099048" y="2743200"/>
-            <a:ext cx="0" cy="1234440"/>
-          </a:xfrm>
-          <a:prstGeom prst="line">
-            <a:avLst/>
-          </a:prstGeom>
-          <a:noFill/>
-          <a:ln w="25400">
-            <a:solidFill>
-              <a:schemeClr val="tx1"/>
-            </a:solidFill>
-            <a:prstDash val="solid"/>
-          </a:ln>
-        </p:spPr>
-      </p:sp>
-      <p:sp>
-        <p:nvSpPr>
-          <p:cNvPr id="27" name="Shape 25"/>
-          <p:cNvSpPr/>
-          <p:nvPr/>
-        </p:nvSpPr>
-        <p:spPr>
-          <a:xfrm>
-            <a:off x="6053328" y="3977640"/>
-            <a:ext cx="0" cy="1234440"/>
-          </a:xfrm>
-          <a:prstGeom prst="line">
-            <a:avLst/>
-          </a:prstGeom>
-          <a:noFill/>
-          <a:ln w="19050">
-            <a:solidFill>
-              <a:schemeClr val="tx1"/>
-            </a:solidFill>
-            <a:prstDash val="solid"/>
-          </a:ln>
-        </p:spPr>
-      </p:sp>
-      <p:sp>
-        <p:nvSpPr>
-          <p:cNvPr id="28" name="Shape 26"/>
-          <p:cNvSpPr/>
-          <p:nvPr/>
-        </p:nvSpPr>
-        <p:spPr>
-          <a:xfrm>
-            <a:off x="6144768" y="3977640"/>
-            <a:ext cx="0" cy="1234440"/>
-          </a:xfrm>
-          <a:prstGeom prst="line">
-            <a:avLst/>
-          </a:prstGeom>
-          <a:noFill/>
-          <a:ln w="19050">
-            <a:solidFill>
-              <a:schemeClr val="tx1"/>
-            </a:solidFill>
-            <a:prstDash val="solid"/>
-          </a:ln>
-        </p:spPr>
-      </p:sp>
-      <p:sp>
-        <p:nvSpPr>
-          <p:cNvPr id="29" name="Shape 27"/>
-          <p:cNvSpPr/>
-          <p:nvPr/>
-        </p:nvSpPr>
-        <p:spPr>
-          <a:xfrm>
-            <a:off x="1737360" y="5212080"/>
-            <a:ext cx="2176272" cy="0"/>
-          </a:xfrm>
-          <a:prstGeom prst="line">
-            <a:avLst/>
-          </a:prstGeom>
-          <a:noFill/>
-          <a:ln w="25400">
-            <a:solidFill>
-              <a:schemeClr val="tx1"/>
-            </a:solidFill>
-            <a:prstDash val="solid"/>
-          </a:ln>
-        </p:spPr>
-      </p:sp>
-      <p:sp>
-        <p:nvSpPr>
-          <p:cNvPr id="30" name="Shape 28"/>
-          <p:cNvSpPr/>
-          <p:nvPr/>
-        </p:nvSpPr>
-        <p:spPr>
-          <a:xfrm>
-            <a:off x="3913632" y="5212080"/>
-            <a:ext cx="2185416" cy="0"/>
-          </a:xfrm>
-          <a:prstGeom prst="line">
-            <a:avLst/>
-          </a:prstGeom>
-          <a:noFill/>
-          <a:ln w="25400">
-            <a:solidFill>
-              <a:schemeClr val="tx1"/>
-            </a:solidFill>
-            <a:prstDash val="solid"/>
-          </a:ln>
-        </p:spPr>
-      </p:sp>
-      <p:sp>
-        <p:nvSpPr>
-          <p:cNvPr id="31" name="Cardinality 1 PHIM"/>
-          <p:cNvSpPr txBox="1"/>
-          <p:nvPr/>
-        </p:nvSpPr>
-        <p:spPr>
-          <a:xfrm>
-            <a:off x="2583180" y="2441448"/>
-            <a:ext cx="228600" cy="256032"/>
+            <a:off x="0" y="1143000"/>
+            <a:ext cx="12191695" cy="5257800"/>
           </a:xfrm>
           <a:prstGeom prst="rect">
             <a:avLst/>
           </a:prstGeom>
-          <a:noFill/>
-          <a:ln/>
         </p:spPr>
-        <p:txBody>
-          <a:bodyPr wrap="square" lIns="0" tIns="0" rIns="0" bIns="0" rtlCol="0" anchor="t"/>
-          <a:lstStyle/>
-          <a:p>
-            <a:pPr algn="ctr" indent="0" marL="0">
-              <a:buNone/>
-            </a:pPr>
-            <a:r>
-              <a:rPr lang="en-US" sz="1400" b="1" dirty="0">
-                <a:solidFill>
-                  <a:schemeClr val="tx1"/>
-                </a:solidFill>
-              </a:rPr>
-              <a:t>1</a:t>
-            </a:r>
-            <a:endParaRPr lang="en-US" sz="1400" dirty="0"/>
-          </a:p>
-        </p:txBody>
-      </p:sp>
-      <p:sp>
-        <p:nvSpPr>
-          <p:cNvPr id="32" name="Cardinality N SUATCHIEU"/>
-          <p:cNvSpPr txBox="1"/>
-          <p:nvPr/>
-        </p:nvSpPr>
-        <p:spPr>
-          <a:xfrm>
-            <a:off x="5024628" y="2441448"/>
-            <a:ext cx="228600" cy="256032"/>
-          </a:xfrm>
-          <a:prstGeom prst="rect">
-            <a:avLst/>
-          </a:prstGeom>
-          <a:noFill/>
-          <a:ln/>
-        </p:spPr>
-        <p:txBody>
-          <a:bodyPr wrap="square" lIns="0" tIns="0" rIns="0" bIns="0" rtlCol="0" anchor="t"/>
-          <a:lstStyle/>
-          <a:p>
-            <a:pPr algn="ctr" indent="0" marL="0">
-              <a:buNone/>
-            </a:pPr>
-            <a:r>
-              <a:rPr lang="en-US" sz="1400" b="1" dirty="0">
-                <a:solidFill>
-                  <a:schemeClr val="tx1"/>
-                </a:solidFill>
-              </a:rPr>
-              <a:t>N</a:t>
-            </a:r>
-            <a:endParaRPr lang="en-US" sz="1400" dirty="0"/>
-          </a:p>
-        </p:txBody>
-      </p:sp>
-      <p:sp>
-        <p:nvSpPr>
-          <p:cNvPr id="33" name="Cardinality 1 PHONGCHIEU"/>
-          <p:cNvSpPr txBox="1"/>
-          <p:nvPr/>
-        </p:nvSpPr>
-        <p:spPr>
-          <a:xfrm>
-            <a:off x="9349740" y="2441448"/>
-            <a:ext cx="228600" cy="256032"/>
-          </a:xfrm>
-          <a:prstGeom prst="rect">
-            <a:avLst/>
-          </a:prstGeom>
-          <a:noFill/>
-          <a:ln/>
-        </p:spPr>
-        <p:txBody>
-          <a:bodyPr wrap="square" lIns="0" tIns="0" rIns="0" bIns="0" rtlCol="0" anchor="t"/>
-          <a:lstStyle/>
-          <a:p>
-            <a:pPr algn="ctr" indent="0" marL="0">
-              <a:buNone/>
-            </a:pPr>
-            <a:r>
-              <a:rPr lang="en-US" sz="1400" b="1" dirty="0">
-                <a:solidFill>
-                  <a:schemeClr val="tx1"/>
-                </a:solidFill>
-              </a:rPr>
-              <a:t>1</a:t>
-            </a:r>
-            <a:endParaRPr lang="en-US" sz="1400" dirty="0"/>
-          </a:p>
-        </p:txBody>
-      </p:sp>
-      <p:sp>
-        <p:nvSpPr>
-          <p:cNvPr id="34" name="Cardinality N SUATCHIEU"/>
-          <p:cNvSpPr txBox="1"/>
-          <p:nvPr/>
-        </p:nvSpPr>
-        <p:spPr>
-          <a:xfrm>
-            <a:off x="6944868" y="2441448"/>
-            <a:ext cx="228600" cy="256032"/>
-          </a:xfrm>
-          <a:prstGeom prst="rect">
-            <a:avLst/>
-          </a:prstGeom>
-          <a:noFill/>
-          <a:ln/>
-        </p:spPr>
-        <p:txBody>
-          <a:bodyPr wrap="square" lIns="0" tIns="0" rIns="0" bIns="0" rtlCol="0" anchor="t"/>
-          <a:lstStyle/>
-          <a:p>
-            <a:pPr algn="ctr" indent="0" marL="0">
-              <a:buNone/>
-            </a:pPr>
-            <a:r>
-              <a:rPr lang="en-US" sz="1400" b="1" dirty="0">
-                <a:solidFill>
-                  <a:schemeClr val="tx1"/>
-                </a:solidFill>
-              </a:rPr>
-              <a:t>N</a:t>
-            </a:r>
-            <a:endParaRPr lang="en-US" sz="1400" dirty="0"/>
-          </a:p>
-        </p:txBody>
-      </p:sp>
-      <p:sp>
-        <p:nvSpPr>
-          <p:cNvPr id="35" name="Cardinality 1 SUATCHIEU"/>
-          <p:cNvSpPr txBox="1"/>
-          <p:nvPr/>
-        </p:nvSpPr>
-        <p:spPr>
-          <a:xfrm>
-            <a:off x="5769864" y="3012948"/>
-            <a:ext cx="228600" cy="256032"/>
-          </a:xfrm>
-          <a:prstGeom prst="rect">
-            <a:avLst/>
-          </a:prstGeom>
-          <a:noFill/>
-          <a:ln/>
-        </p:spPr>
-        <p:txBody>
-          <a:bodyPr wrap="square" lIns="0" tIns="0" rIns="0" bIns="0" rtlCol="0" anchor="t"/>
-          <a:lstStyle/>
-          <a:p>
-            <a:pPr algn="ctr" indent="0" marL="0">
-              <a:buNone/>
-            </a:pPr>
-            <a:r>
-              <a:rPr lang="en-US" sz="1400" b="1" dirty="0">
-                <a:solidFill>
-                  <a:schemeClr val="tx1"/>
-                </a:solidFill>
-              </a:rPr>
-              <a:t>1</a:t>
-            </a:r>
-            <a:endParaRPr lang="en-US" sz="1400" dirty="0"/>
-          </a:p>
-        </p:txBody>
-      </p:sp>
-      <p:sp>
-        <p:nvSpPr>
-          <p:cNvPr id="36" name="Cardinality N VE"/>
-          <p:cNvSpPr txBox="1"/>
-          <p:nvPr/>
-        </p:nvSpPr>
-        <p:spPr>
-          <a:xfrm>
-            <a:off x="5769864" y="4686300"/>
-            <a:ext cx="228600" cy="256032"/>
-          </a:xfrm>
-          <a:prstGeom prst="rect">
-            <a:avLst/>
-          </a:prstGeom>
-          <a:noFill/>
-          <a:ln/>
-        </p:spPr>
-        <p:txBody>
-          <a:bodyPr wrap="square" lIns="0" tIns="0" rIns="0" bIns="0" rtlCol="0" anchor="t"/>
-          <a:lstStyle/>
-          <a:p>
-            <a:pPr algn="ctr" indent="0" marL="0">
-              <a:buNone/>
-            </a:pPr>
-            <a:r>
-              <a:rPr lang="en-US" sz="1400" b="1" dirty="0">
-                <a:solidFill>
-                  <a:schemeClr val="tx1"/>
-                </a:solidFill>
-              </a:rPr>
-              <a:t>N</a:t>
-            </a:r>
-            <a:endParaRPr lang="en-US" sz="1400" dirty="0"/>
-          </a:p>
-        </p:txBody>
-      </p:sp>
-      <p:sp>
-        <p:nvSpPr>
-          <p:cNvPr id="37" name="Cardinality 1 KHACHHANG"/>
-          <p:cNvSpPr txBox="1"/>
-          <p:nvPr/>
-        </p:nvSpPr>
-        <p:spPr>
-          <a:xfrm>
-            <a:off x="2583180" y="4910328"/>
-            <a:ext cx="228600" cy="256032"/>
-          </a:xfrm>
-          <a:prstGeom prst="rect">
-            <a:avLst/>
-          </a:prstGeom>
-          <a:noFill/>
-          <a:ln/>
-        </p:spPr>
-        <p:txBody>
-          <a:bodyPr wrap="square" lIns="0" tIns="0" rIns="0" bIns="0" rtlCol="0" anchor="t"/>
-          <a:lstStyle/>
-          <a:p>
-            <a:pPr algn="ctr" indent="0" marL="0">
-              <a:buNone/>
-            </a:pPr>
-            <a:r>
-              <a:rPr lang="en-US" sz="1400" b="1" dirty="0">
-                <a:solidFill>
-                  <a:schemeClr val="tx1"/>
-                </a:solidFill>
-              </a:rPr>
-              <a:t>1</a:t>
-            </a:r>
-            <a:endParaRPr lang="en-US" sz="1400" dirty="0"/>
-          </a:p>
-        </p:txBody>
-      </p:sp>
-      <p:sp>
-        <p:nvSpPr>
-          <p:cNvPr id="38" name="Cardinality N VE"/>
-          <p:cNvSpPr txBox="1"/>
-          <p:nvPr/>
-        </p:nvSpPr>
-        <p:spPr>
-          <a:xfrm>
-            <a:off x="5024628" y="4910328"/>
-            <a:ext cx="228600" cy="256032"/>
-          </a:xfrm>
-          <a:prstGeom prst="rect">
-            <a:avLst/>
-          </a:prstGeom>
-          <a:noFill/>
-          <a:ln/>
-        </p:spPr>
-        <p:txBody>
-          <a:bodyPr wrap="square" lIns="0" tIns="0" rIns="0" bIns="0" rtlCol="0" anchor="t"/>
-          <a:lstStyle/>
-          <a:p>
-            <a:pPr algn="ctr" indent="0" marL="0">
-              <a:buNone/>
-            </a:pPr>
-            <a:r>
-              <a:rPr lang="en-US" sz="1400" b="1" dirty="0">
-                <a:solidFill>
-                  <a:schemeClr val="tx1"/>
-                </a:solidFill>
-              </a:rPr>
-              <a:t>N</a:t>
-            </a:r>
-            <a:endParaRPr lang="en-US" sz="1400" dirty="0"/>
-          </a:p>
-        </p:txBody>
-      </p:sp>
-      <p:sp>
-        <p:nvSpPr>
-          <p:cNvPr id="39" name="Attr PHIM MaPhim"/>
-          <p:cNvSpPr/>
-          <p:nvPr/>
-        </p:nvSpPr>
-        <p:spPr>
-          <a:xfrm>
-            <a:off x="114300" y="1408176"/>
-            <a:ext cx="1325880" cy="384048"/>
-          </a:xfrm>
-          <a:prstGeom prst="ellipse">
-            <a:avLst/>
-          </a:prstGeom>
-          <a:solidFill>
-            <a:schemeClr val="bg1"/>
-          </a:solidFill>
-          <a:ln w="12700">
-            <a:solidFill>
-              <a:schemeClr val="tx2"/>
-            </a:solidFill>
-          </a:ln>
-        </p:spPr>
-        <p:txBody>
-          <a:bodyPr wrap="square" lIns="0" tIns="0" rIns="0" bIns="0" rtlCol="0" anchor="ctr"/>
-          <a:lstStyle/>
-          <a:p>
-            <a:pPr algn="ctr" indent="0" marL="0">
-              <a:buNone/>
-            </a:pPr>
-            <a:r>
-              <a:rPr lang="en-US" sz="1100" b="1" u="sng" dirty="0">
-                <a:solidFill>
-                  <a:schemeClr val="tx1"/>
-                </a:solidFill>
-              </a:rPr>
-              <a:t>MaPhim</a:t>
-            </a:r>
-            <a:endParaRPr lang="en-US" sz="1100" dirty="0"/>
-          </a:p>
-        </p:txBody>
-      </p:sp>
-      <p:sp>
-        <p:nvSpPr>
-          <p:cNvPr id="40" name="Attr PHIM TenPhim"/>
-          <p:cNvSpPr/>
-          <p:nvPr/>
-        </p:nvSpPr>
-        <p:spPr>
-          <a:xfrm>
-            <a:off x="1485900" y="1271016"/>
-            <a:ext cx="1325880" cy="384048"/>
-          </a:xfrm>
-          <a:prstGeom prst="ellipse">
-            <a:avLst/>
-          </a:prstGeom>
-          <a:solidFill>
-            <a:schemeClr val="bg1"/>
-          </a:solidFill>
-          <a:ln w="12700">
-            <a:solidFill>
-              <a:schemeClr val="tx2"/>
-            </a:solidFill>
-          </a:ln>
-        </p:spPr>
-        <p:txBody>
-          <a:bodyPr wrap="square" lIns="0" tIns="0" rIns="0" bIns="0" rtlCol="0" anchor="ctr"/>
-          <a:lstStyle/>
-          <a:p>
-            <a:pPr algn="ctr" indent="0" marL="0">
-              <a:buNone/>
-            </a:pPr>
-            <a:r>
-              <a:rPr lang="en-US" sz="1100" dirty="0">
-                <a:solidFill>
-                  <a:schemeClr val="tx1"/>
-                </a:solidFill>
-              </a:rPr>
-              <a:t>TenPhim</a:t>
-            </a:r>
-            <a:endParaRPr lang="en-US" sz="1100" dirty="0"/>
-          </a:p>
-        </p:txBody>
-      </p:sp>
-      <p:sp>
-        <p:nvSpPr>
-          <p:cNvPr id="41" name="Attr PHIM TheLoai"/>
-          <p:cNvSpPr/>
-          <p:nvPr/>
-        </p:nvSpPr>
-        <p:spPr>
-          <a:xfrm>
-            <a:off x="2766060" y="1453896"/>
-            <a:ext cx="1325880" cy="384048"/>
-          </a:xfrm>
-          <a:prstGeom prst="ellipse">
-            <a:avLst/>
-          </a:prstGeom>
-          <a:solidFill>
-            <a:schemeClr val="bg1"/>
-          </a:solidFill>
-          <a:ln w="12700">
-            <a:solidFill>
-              <a:schemeClr val="tx2"/>
-            </a:solidFill>
-          </a:ln>
-        </p:spPr>
-        <p:txBody>
-          <a:bodyPr wrap="square" lIns="0" tIns="0" rIns="0" bIns="0" rtlCol="0" anchor="ctr"/>
-          <a:lstStyle/>
-          <a:p>
-            <a:pPr algn="ctr" indent="0" marL="0">
-              <a:buNone/>
-            </a:pPr>
-            <a:r>
-              <a:rPr lang="en-US" sz="1100" dirty="0">
-                <a:solidFill>
-                  <a:schemeClr val="tx1"/>
-                </a:solidFill>
-              </a:rPr>
-              <a:t>TheLoai</a:t>
-            </a:r>
-            <a:endParaRPr lang="en-US" sz="1100" dirty="0"/>
-          </a:p>
-        </p:txBody>
-      </p:sp>
-      <p:sp>
-        <p:nvSpPr>
-          <p:cNvPr id="42" name="Attr PHIM ThoiLuong"/>
-          <p:cNvSpPr/>
-          <p:nvPr/>
-        </p:nvSpPr>
-        <p:spPr>
-          <a:xfrm>
-            <a:off x="297180" y="3557016"/>
-            <a:ext cx="1325880" cy="384048"/>
-          </a:xfrm>
-          <a:prstGeom prst="ellipse">
-            <a:avLst/>
-          </a:prstGeom>
-          <a:solidFill>
-            <a:schemeClr val="bg1"/>
-          </a:solidFill>
-          <a:ln w="12700">
-            <a:solidFill>
-              <a:schemeClr val="tx2"/>
-            </a:solidFill>
-          </a:ln>
-        </p:spPr>
-        <p:txBody>
-          <a:bodyPr wrap="square" lIns="0" tIns="0" rIns="0" bIns="0" rtlCol="0" anchor="ctr"/>
-          <a:lstStyle/>
-          <a:p>
-            <a:pPr algn="ctr" indent="0" marL="0">
-              <a:buNone/>
-            </a:pPr>
-            <a:r>
-              <a:rPr lang="en-US" sz="1100" dirty="0">
-                <a:solidFill>
-                  <a:schemeClr val="tx1"/>
-                </a:solidFill>
-              </a:rPr>
-              <a:t>ThoiLuong</a:t>
-            </a:r>
-            <a:endParaRPr lang="en-US" sz="1100" dirty="0"/>
-          </a:p>
-        </p:txBody>
-      </p:sp>
-      <p:sp>
-        <p:nvSpPr>
-          <p:cNvPr id="43" name="Attr PHIM NgayKhoiChieu"/>
-          <p:cNvSpPr/>
-          <p:nvPr/>
-        </p:nvSpPr>
-        <p:spPr>
-          <a:xfrm>
-            <a:off x="1805940" y="3557016"/>
-            <a:ext cx="1325880" cy="384048"/>
-          </a:xfrm>
-          <a:prstGeom prst="ellipse">
-            <a:avLst/>
-          </a:prstGeom>
-          <a:solidFill>
-            <a:schemeClr val="bg1"/>
-          </a:solidFill>
-          <a:ln w="12700">
-            <a:solidFill>
-              <a:schemeClr val="tx2"/>
-            </a:solidFill>
-          </a:ln>
-        </p:spPr>
-        <p:txBody>
-          <a:bodyPr wrap="square" lIns="0" tIns="0" rIns="0" bIns="0" rtlCol="0" anchor="ctr"/>
-          <a:lstStyle/>
-          <a:p>
-            <a:pPr algn="ctr" indent="0" marL="0">
-              <a:buNone/>
-            </a:pPr>
-            <a:r>
-              <a:rPr lang="en-US" sz="1100" dirty="0">
-                <a:solidFill>
-                  <a:schemeClr val="tx1"/>
-                </a:solidFill>
-              </a:rPr>
-              <a:t>NgayKhoiChieu</a:t>
-            </a:r>
-            <a:endParaRPr lang="en-US" sz="1100" dirty="0"/>
-          </a:p>
-        </p:txBody>
-      </p:sp>
-      <p:sp>
-        <p:nvSpPr>
-          <p:cNvPr id="44" name="Attr PHONGCHIEU MaPhong"/>
-          <p:cNvSpPr/>
-          <p:nvPr/>
-        </p:nvSpPr>
-        <p:spPr>
-          <a:xfrm>
-            <a:off x="9029700" y="1362456"/>
-            <a:ext cx="1325880" cy="384048"/>
-          </a:xfrm>
-          <a:prstGeom prst="ellipse">
-            <a:avLst/>
-          </a:prstGeom>
-          <a:solidFill>
-            <a:schemeClr val="bg1"/>
-          </a:solidFill>
-          <a:ln w="12700">
-            <a:solidFill>
-              <a:schemeClr val="tx2"/>
-            </a:solidFill>
-          </a:ln>
-        </p:spPr>
-        <p:txBody>
-          <a:bodyPr wrap="square" lIns="0" tIns="0" rIns="0" bIns="0" rtlCol="0" anchor="ctr"/>
-          <a:lstStyle/>
-          <a:p>
-            <a:pPr algn="ctr" indent="0" marL="0">
-              <a:buNone/>
-            </a:pPr>
-            <a:r>
-              <a:rPr lang="en-US" sz="1100" b="1" u="sng" dirty="0">
-                <a:solidFill>
-                  <a:schemeClr val="tx1"/>
-                </a:solidFill>
-              </a:rPr>
-              <a:t>MaPhong</a:t>
-            </a:r>
-            <a:endParaRPr lang="en-US" sz="1100" dirty="0"/>
-          </a:p>
-        </p:txBody>
-      </p:sp>
-      <p:sp>
-        <p:nvSpPr>
-          <p:cNvPr id="45" name="Attr PHONGCHIEU TenPhong"/>
-          <p:cNvSpPr/>
-          <p:nvPr/>
-        </p:nvSpPr>
-        <p:spPr>
-          <a:xfrm>
-            <a:off x="10492740" y="1362456"/>
-            <a:ext cx="1325880" cy="384048"/>
-          </a:xfrm>
-          <a:prstGeom prst="ellipse">
-            <a:avLst/>
-          </a:prstGeom>
-          <a:solidFill>
-            <a:schemeClr val="bg1"/>
-          </a:solidFill>
-          <a:ln w="12700">
-            <a:solidFill>
-              <a:schemeClr val="tx2"/>
-            </a:solidFill>
-          </a:ln>
-        </p:spPr>
-        <p:txBody>
-          <a:bodyPr wrap="square" lIns="0" tIns="0" rIns="0" bIns="0" rtlCol="0" anchor="ctr"/>
-          <a:lstStyle/>
-          <a:p>
-            <a:pPr algn="ctr" indent="0" marL="0">
-              <a:buNone/>
-            </a:pPr>
-            <a:r>
-              <a:rPr lang="en-US" sz="1100" dirty="0">
-                <a:solidFill>
-                  <a:schemeClr val="tx1"/>
-                </a:solidFill>
-              </a:rPr>
-              <a:t>TenPhong</a:t>
-            </a:r>
-            <a:endParaRPr lang="en-US" sz="1100" dirty="0"/>
-          </a:p>
-        </p:txBody>
-      </p:sp>
-      <p:sp>
-        <p:nvSpPr>
-          <p:cNvPr id="46" name="Attr PHONGCHIEU LoaiPhong"/>
-          <p:cNvSpPr/>
-          <p:nvPr/>
-        </p:nvSpPr>
-        <p:spPr>
-          <a:xfrm>
-            <a:off x="9029700" y="3557016"/>
-            <a:ext cx="1325880" cy="384048"/>
-          </a:xfrm>
-          <a:prstGeom prst="ellipse">
-            <a:avLst/>
-          </a:prstGeom>
-          <a:solidFill>
-            <a:schemeClr val="bg1"/>
-          </a:solidFill>
-          <a:ln w="12700">
-            <a:solidFill>
-              <a:schemeClr val="tx2"/>
-            </a:solidFill>
-          </a:ln>
-        </p:spPr>
-        <p:txBody>
-          <a:bodyPr wrap="square" lIns="0" tIns="0" rIns="0" bIns="0" rtlCol="0" anchor="ctr"/>
-          <a:lstStyle/>
-          <a:p>
-            <a:pPr algn="ctr" indent="0" marL="0">
-              <a:buNone/>
-            </a:pPr>
-            <a:r>
-              <a:rPr lang="en-US" sz="1100" dirty="0">
-                <a:solidFill>
-                  <a:schemeClr val="tx1"/>
-                </a:solidFill>
-              </a:rPr>
-              <a:t>LoaiPhong</a:t>
-            </a:r>
-            <a:endParaRPr lang="en-US" sz="1100" dirty="0"/>
-          </a:p>
-        </p:txBody>
-      </p:sp>
-      <p:sp>
-        <p:nvSpPr>
-          <p:cNvPr id="47" name="Attr PHONGCHIEU SucChua"/>
-          <p:cNvSpPr/>
-          <p:nvPr/>
-        </p:nvSpPr>
-        <p:spPr>
-          <a:xfrm>
-            <a:off x="10492740" y="3557016"/>
-            <a:ext cx="1325880" cy="384048"/>
-          </a:xfrm>
-          <a:prstGeom prst="ellipse">
-            <a:avLst/>
-          </a:prstGeom>
-          <a:solidFill>
-            <a:schemeClr val="bg1"/>
-          </a:solidFill>
-          <a:ln w="12700">
-            <a:solidFill>
-              <a:schemeClr val="tx2"/>
-            </a:solidFill>
-          </a:ln>
-        </p:spPr>
-        <p:txBody>
-          <a:bodyPr wrap="square" lIns="0" tIns="0" rIns="0" bIns="0" rtlCol="0" anchor="ctr"/>
-          <a:lstStyle/>
-          <a:p>
-            <a:pPr algn="ctr" indent="0" marL="0">
-              <a:buNone/>
-            </a:pPr>
-            <a:r>
-              <a:rPr lang="en-US" sz="1100" dirty="0">
-                <a:solidFill>
-                  <a:schemeClr val="tx1"/>
-                </a:solidFill>
-              </a:rPr>
-              <a:t>SucChua</a:t>
-            </a:r>
-            <a:endParaRPr lang="en-US" sz="1100" dirty="0"/>
-          </a:p>
-        </p:txBody>
-      </p:sp>
-      <p:sp>
-        <p:nvSpPr>
-          <p:cNvPr id="48" name="Attr SUATCHIEU MaSuat"/>
-          <p:cNvSpPr/>
-          <p:nvPr/>
-        </p:nvSpPr>
-        <p:spPr>
-          <a:xfrm>
-            <a:off x="4686300" y="1362456"/>
-            <a:ext cx="1325880" cy="384048"/>
-          </a:xfrm>
-          <a:prstGeom prst="ellipse">
-            <a:avLst/>
-          </a:prstGeom>
-          <a:solidFill>
-            <a:schemeClr val="bg1"/>
-          </a:solidFill>
-          <a:ln w="12700">
-            <a:solidFill>
-              <a:schemeClr val="tx2"/>
-            </a:solidFill>
-          </a:ln>
-        </p:spPr>
-        <p:txBody>
-          <a:bodyPr wrap="square" lIns="0" tIns="0" rIns="0" bIns="0" rtlCol="0" anchor="ctr"/>
-          <a:lstStyle/>
-          <a:p>
-            <a:pPr algn="ctr" indent="0" marL="0">
-              <a:buNone/>
-            </a:pPr>
-            <a:r>
-              <a:rPr lang="en-US" sz="1100" b="1" u="sng" dirty="0">
-                <a:solidFill>
-                  <a:schemeClr val="tx1"/>
-                </a:solidFill>
-              </a:rPr>
-              <a:t>MaSuat</a:t>
-            </a:r>
-            <a:endParaRPr lang="en-US" sz="1100" dirty="0"/>
-          </a:p>
-        </p:txBody>
-      </p:sp>
-      <p:sp>
-        <p:nvSpPr>
-          <p:cNvPr id="49" name="Attr SUATCHIEU NgayChieu"/>
-          <p:cNvSpPr/>
-          <p:nvPr/>
-        </p:nvSpPr>
-        <p:spPr>
-          <a:xfrm>
-            <a:off x="6149340" y="1362456"/>
-            <a:ext cx="1325880" cy="384048"/>
-          </a:xfrm>
-          <a:prstGeom prst="ellipse">
-            <a:avLst/>
-          </a:prstGeom>
-          <a:solidFill>
-            <a:schemeClr val="bg1"/>
-          </a:solidFill>
-          <a:ln w="12700">
-            <a:solidFill>
-              <a:schemeClr val="tx2"/>
-            </a:solidFill>
-          </a:ln>
-        </p:spPr>
-        <p:txBody>
-          <a:bodyPr wrap="square" lIns="0" tIns="0" rIns="0" bIns="0" rtlCol="0" anchor="ctr"/>
-          <a:lstStyle/>
-          <a:p>
-            <a:pPr algn="ctr" indent="0" marL="0">
-              <a:buNone/>
-            </a:pPr>
-            <a:r>
-              <a:rPr lang="en-US" sz="1100" dirty="0">
-                <a:solidFill>
-                  <a:schemeClr val="tx1"/>
-                </a:solidFill>
-              </a:rPr>
-              <a:t>NgayChieu</a:t>
-            </a:r>
-            <a:endParaRPr lang="en-US" sz="1100" dirty="0"/>
-          </a:p>
-        </p:txBody>
-      </p:sp>
-      <p:sp>
-        <p:nvSpPr>
-          <p:cNvPr id="50" name="Attr SUATCHIEU GioBatDau"/>
-          <p:cNvSpPr/>
-          <p:nvPr/>
-        </p:nvSpPr>
-        <p:spPr>
-          <a:xfrm>
-            <a:off x="4046220" y="3511296"/>
-            <a:ext cx="1325880" cy="384048"/>
-          </a:xfrm>
-          <a:prstGeom prst="ellipse">
-            <a:avLst/>
-          </a:prstGeom>
-          <a:solidFill>
-            <a:schemeClr val="bg1"/>
-          </a:solidFill>
-          <a:ln w="12700">
-            <a:solidFill>
-              <a:schemeClr val="tx2"/>
-            </a:solidFill>
-          </a:ln>
-        </p:spPr>
-        <p:txBody>
-          <a:bodyPr wrap="square" lIns="0" tIns="0" rIns="0" bIns="0" rtlCol="0" anchor="ctr"/>
-          <a:lstStyle/>
-          <a:p>
-            <a:pPr algn="ctr" indent="0" marL="0">
-              <a:buNone/>
-            </a:pPr>
-            <a:r>
-              <a:rPr lang="en-US" sz="1100" dirty="0">
-                <a:solidFill>
-                  <a:schemeClr val="tx1"/>
-                </a:solidFill>
-              </a:rPr>
-              <a:t>GioBatDau</a:t>
-            </a:r>
-            <a:endParaRPr lang="en-US" sz="1100" dirty="0"/>
-          </a:p>
-        </p:txBody>
-      </p:sp>
-      <p:sp>
-        <p:nvSpPr>
-          <p:cNvPr id="51" name="Attr SUATCHIEU GiaVe"/>
-          <p:cNvSpPr/>
-          <p:nvPr/>
-        </p:nvSpPr>
-        <p:spPr>
-          <a:xfrm>
-            <a:off x="6835140" y="3511296"/>
-            <a:ext cx="1325880" cy="384048"/>
-          </a:xfrm>
-          <a:prstGeom prst="ellipse">
-            <a:avLst/>
-          </a:prstGeom>
-          <a:solidFill>
-            <a:schemeClr val="bg1"/>
-          </a:solidFill>
-          <a:ln w="12700">
-            <a:solidFill>
-              <a:schemeClr val="tx2"/>
-            </a:solidFill>
-          </a:ln>
-        </p:spPr>
-        <p:txBody>
-          <a:bodyPr wrap="square" lIns="0" tIns="0" rIns="0" bIns="0" rtlCol="0" anchor="ctr"/>
-          <a:lstStyle/>
-          <a:p>
-            <a:pPr algn="ctr" indent="0" marL="0">
-              <a:buNone/>
-            </a:pPr>
-            <a:r>
-              <a:rPr lang="en-US" sz="1100" dirty="0">
-                <a:solidFill>
-                  <a:schemeClr val="tx1"/>
-                </a:solidFill>
-              </a:rPr>
-              <a:t>GiaVe</a:t>
-            </a:r>
-            <a:endParaRPr lang="en-US" sz="1100" dirty="0"/>
-          </a:p>
-        </p:txBody>
-      </p:sp>
-      <p:sp>
-        <p:nvSpPr>
-          <p:cNvPr id="52" name="Attr KHACHHANG MaKH"/>
-          <p:cNvSpPr/>
-          <p:nvPr/>
-        </p:nvSpPr>
-        <p:spPr>
-          <a:xfrm>
-            <a:off x="114300" y="5934456"/>
-            <a:ext cx="1325880" cy="384048"/>
-          </a:xfrm>
-          <a:prstGeom prst="ellipse">
-            <a:avLst/>
-          </a:prstGeom>
-          <a:solidFill>
-            <a:schemeClr val="bg1"/>
-          </a:solidFill>
-          <a:ln w="12700">
-            <a:solidFill>
-              <a:schemeClr val="tx2"/>
-            </a:solidFill>
-          </a:ln>
-        </p:spPr>
-        <p:txBody>
-          <a:bodyPr wrap="square" lIns="0" tIns="0" rIns="0" bIns="0" rtlCol="0" anchor="ctr"/>
-          <a:lstStyle/>
-          <a:p>
-            <a:pPr algn="ctr" indent="0" marL="0">
-              <a:buNone/>
-            </a:pPr>
-            <a:r>
-              <a:rPr lang="en-US" sz="1100" b="1" u="sng" dirty="0">
-                <a:solidFill>
-                  <a:schemeClr val="tx1"/>
-                </a:solidFill>
-              </a:rPr>
-              <a:t>MaKH</a:t>
-            </a:r>
-            <a:endParaRPr lang="en-US" sz="1100" dirty="0"/>
-          </a:p>
-        </p:txBody>
-      </p:sp>
-      <p:sp>
-        <p:nvSpPr>
-          <p:cNvPr id="53" name="Attr KHACHHANG HoTen"/>
-          <p:cNvSpPr/>
-          <p:nvPr/>
-        </p:nvSpPr>
-        <p:spPr>
-          <a:xfrm>
-            <a:off x="1485900" y="5934456"/>
-            <a:ext cx="1325880" cy="384048"/>
-          </a:xfrm>
-          <a:prstGeom prst="ellipse">
-            <a:avLst/>
-          </a:prstGeom>
-          <a:solidFill>
-            <a:schemeClr val="bg1"/>
-          </a:solidFill>
-          <a:ln w="12700">
-            <a:solidFill>
-              <a:schemeClr val="tx2"/>
-            </a:solidFill>
-          </a:ln>
-        </p:spPr>
-        <p:txBody>
-          <a:bodyPr wrap="square" lIns="0" tIns="0" rIns="0" bIns="0" rtlCol="0" anchor="ctr"/>
-          <a:lstStyle/>
-          <a:p>
-            <a:pPr algn="ctr" indent="0" marL="0">
-              <a:buNone/>
-            </a:pPr>
-            <a:r>
-              <a:rPr lang="en-US" sz="1100" dirty="0">
-                <a:solidFill>
-                  <a:schemeClr val="tx1"/>
-                </a:solidFill>
-              </a:rPr>
-              <a:t>HoTen</a:t>
-            </a:r>
-            <a:endParaRPr lang="en-US" sz="1100" dirty="0"/>
-          </a:p>
-        </p:txBody>
-      </p:sp>
-      <p:sp>
-        <p:nvSpPr>
-          <p:cNvPr id="54" name="Attr KHACHHANG SDT"/>
-          <p:cNvSpPr/>
-          <p:nvPr/>
-        </p:nvSpPr>
-        <p:spPr>
-          <a:xfrm>
-            <a:off x="2811780" y="5934456"/>
-            <a:ext cx="1325880" cy="384048"/>
-          </a:xfrm>
-          <a:prstGeom prst="ellipse">
-            <a:avLst/>
-          </a:prstGeom>
-          <a:solidFill>
-            <a:schemeClr val="bg1"/>
-          </a:solidFill>
-          <a:ln w="12700">
-            <a:solidFill>
-              <a:schemeClr val="tx2"/>
-            </a:solidFill>
-          </a:ln>
-        </p:spPr>
-        <p:txBody>
-          <a:bodyPr wrap="square" lIns="0" tIns="0" rIns="0" bIns="0" rtlCol="0" anchor="ctr"/>
-          <a:lstStyle/>
-          <a:p>
-            <a:pPr algn="ctr" indent="0" marL="0">
-              <a:buNone/>
-            </a:pPr>
-            <a:r>
-              <a:rPr lang="en-US" sz="1100" dirty="0">
-                <a:solidFill>
-                  <a:schemeClr val="tx1"/>
-                </a:solidFill>
-              </a:rPr>
-              <a:t>SDT</a:t>
-            </a:r>
-            <a:endParaRPr lang="en-US" sz="1100" dirty="0"/>
-          </a:p>
-        </p:txBody>
-      </p:sp>
-      <p:sp>
-        <p:nvSpPr>
-          <p:cNvPr id="55" name="Attr KHACHHANG Email"/>
-          <p:cNvSpPr/>
-          <p:nvPr/>
-        </p:nvSpPr>
-        <p:spPr>
-          <a:xfrm>
-            <a:off x="68580" y="4242816"/>
-            <a:ext cx="1325880" cy="384048"/>
-          </a:xfrm>
-          <a:prstGeom prst="ellipse">
-            <a:avLst/>
-          </a:prstGeom>
-          <a:solidFill>
-            <a:schemeClr val="bg1"/>
-          </a:solidFill>
-          <a:ln w="12700">
-            <a:solidFill>
-              <a:schemeClr val="tx2"/>
-            </a:solidFill>
-          </a:ln>
-        </p:spPr>
-        <p:txBody>
-          <a:bodyPr wrap="square" lIns="0" tIns="0" rIns="0" bIns="0" rtlCol="0" anchor="ctr"/>
-          <a:lstStyle/>
-          <a:p>
-            <a:pPr algn="ctr" indent="0" marL="0">
-              <a:buNone/>
-            </a:pPr>
-            <a:r>
-              <a:rPr lang="en-US" sz="1100" dirty="0">
-                <a:solidFill>
-                  <a:schemeClr val="tx1"/>
-                </a:solidFill>
-              </a:rPr>
-              <a:t>Email</a:t>
-            </a:r>
-            <a:endParaRPr lang="en-US" sz="1100" dirty="0"/>
-          </a:p>
-        </p:txBody>
-      </p:sp>
-      <p:sp>
-        <p:nvSpPr>
-          <p:cNvPr id="56" name="Attr VE SoGhe"/>
-          <p:cNvSpPr/>
-          <p:nvPr/>
-        </p:nvSpPr>
-        <p:spPr>
-          <a:xfrm>
-            <a:off x="4823460" y="5934456"/>
-            <a:ext cx="1325880" cy="384048"/>
-          </a:xfrm>
-          <a:prstGeom prst="ellipse">
-            <a:avLst/>
-          </a:prstGeom>
-          <a:solidFill>
-            <a:schemeClr val="bg1"/>
-          </a:solidFill>
-          <a:ln w="12700">
-            <a:solidFill>
-              <a:schemeClr val="tx2"/>
-            </a:solidFill>
-          </a:ln>
-        </p:spPr>
-        <p:txBody>
-          <a:bodyPr wrap="square" lIns="0" tIns="0" rIns="0" bIns="0" rtlCol="0" anchor="ctr"/>
-          <a:lstStyle/>
-          <a:p>
-            <a:pPr algn="ctr" indent="0" marL="0">
-              <a:buNone/>
-            </a:pPr>
-            <a:r>
-              <a:rPr lang="en-US" sz="1100" b="1" u="dash" dirty="0">
-                <a:solidFill>
-                  <a:schemeClr val="tx1"/>
-                </a:solidFill>
-              </a:rPr>
-              <a:t>SoGhe</a:t>
-            </a:r>
-            <a:endParaRPr lang="en-US" sz="1100" dirty="0"/>
-          </a:p>
-        </p:txBody>
-      </p:sp>
-      <p:sp>
-        <p:nvSpPr>
-          <p:cNvPr id="57" name="Attr VE NgayDat"/>
-          <p:cNvSpPr/>
-          <p:nvPr/>
-        </p:nvSpPr>
-        <p:spPr>
-          <a:xfrm>
-            <a:off x="6195060" y="5934456"/>
-            <a:ext cx="1325880" cy="384048"/>
-          </a:xfrm>
-          <a:prstGeom prst="ellipse">
-            <a:avLst/>
-          </a:prstGeom>
-          <a:solidFill>
-            <a:schemeClr val="bg1"/>
-          </a:solidFill>
-          <a:ln w="12700">
-            <a:solidFill>
-              <a:schemeClr val="tx2"/>
-            </a:solidFill>
-          </a:ln>
-        </p:spPr>
-        <p:txBody>
-          <a:bodyPr wrap="square" lIns="0" tIns="0" rIns="0" bIns="0" rtlCol="0" anchor="ctr"/>
-          <a:lstStyle/>
-          <a:p>
-            <a:pPr algn="ctr" indent="0" marL="0">
-              <a:buNone/>
-            </a:pPr>
-            <a:r>
-              <a:rPr lang="en-US" sz="1100" dirty="0">
-                <a:solidFill>
-                  <a:schemeClr val="tx1"/>
-                </a:solidFill>
-              </a:rPr>
-              <a:t>NgayDat</a:t>
-            </a:r>
-            <a:endParaRPr lang="en-US" sz="1100" dirty="0"/>
-          </a:p>
-        </p:txBody>
-      </p:sp>
-      <p:sp>
-        <p:nvSpPr>
-          <p:cNvPr id="58" name="Relationship PHIM-SUATCHIEU"/>
-          <p:cNvSpPr/>
-          <p:nvPr/>
-        </p:nvSpPr>
-        <p:spPr>
-          <a:xfrm>
-            <a:off x="3364992" y="2423160"/>
-            <a:ext cx="1097280" cy="640080"/>
-          </a:xfrm>
-          <a:prstGeom prst="diamond">
-            <a:avLst/>
-          </a:prstGeom>
-          <a:solidFill>
-            <a:schemeClr val="bg2"/>
-          </a:solidFill>
-          <a:ln w="19050">
-            <a:solidFill>
-              <a:schemeClr val="tx1"/>
-            </a:solidFill>
-          </a:ln>
-        </p:spPr>
-        <p:txBody>
-          <a:bodyPr wrap="square" lIns="0" tIns="0" rIns="0" bIns="0" rtlCol="0" anchor="ctr"/>
-          <a:lstStyle/>
-          <a:p>
-            <a:pPr algn="ctr" indent="0" marL="0">
-              <a:buNone/>
-            </a:pPr>
-            <a:r>
-              <a:rPr lang="en-US" sz="1300" b="1" dirty="0">
-                <a:solidFill>
-                  <a:schemeClr val="tx1"/>
-                </a:solidFill>
-              </a:rPr>
-              <a:t>chiếu</a:t>
-            </a:r>
-            <a:endParaRPr lang="en-US" sz="1300" dirty="0"/>
-          </a:p>
-        </p:txBody>
-      </p:sp>
-      <p:sp>
-        <p:nvSpPr>
-          <p:cNvPr id="59" name="Relationship PHONGCHIEU-SUATCHIEU"/>
-          <p:cNvSpPr/>
-          <p:nvPr/>
-        </p:nvSpPr>
-        <p:spPr>
-          <a:xfrm>
-            <a:off x="7726680" y="2423160"/>
-            <a:ext cx="1097280" cy="640080"/>
-          </a:xfrm>
-          <a:prstGeom prst="diamond">
-            <a:avLst/>
-          </a:prstGeom>
-          <a:solidFill>
-            <a:schemeClr val="bg2"/>
-          </a:solidFill>
-          <a:ln w="19050">
-            <a:solidFill>
-              <a:schemeClr val="tx1"/>
-            </a:solidFill>
-          </a:ln>
-        </p:spPr>
-        <p:txBody>
-          <a:bodyPr wrap="square" lIns="0" tIns="0" rIns="0" bIns="0" rtlCol="0" anchor="ctr"/>
-          <a:lstStyle/>
-          <a:p>
-            <a:pPr algn="ctr" indent="0" marL="0">
-              <a:buNone/>
-            </a:pPr>
-            <a:r>
-              <a:rPr lang="en-US" sz="1300" b="1" dirty="0">
-                <a:solidFill>
-                  <a:schemeClr val="tx1"/>
-                </a:solidFill>
-              </a:rPr>
-              <a:t>tại</a:t>
-            </a:r>
-            <a:endParaRPr lang="en-US" sz="1300" dirty="0"/>
-          </a:p>
-        </p:txBody>
-      </p:sp>
-      <p:sp>
-        <p:nvSpPr>
-          <p:cNvPr id="60" name="Relationship outer SUATCHIEU-VE"/>
-          <p:cNvSpPr/>
-          <p:nvPr/>
-        </p:nvSpPr>
-        <p:spPr>
-          <a:xfrm>
-            <a:off x="5550408" y="3657600"/>
-            <a:ext cx="1097280" cy="640080"/>
-          </a:xfrm>
-          <a:prstGeom prst="diamond">
-            <a:avLst/>
-          </a:prstGeom>
-          <a:solidFill>
-            <a:schemeClr val="bg2"/>
-          </a:solidFill>
-          <a:ln w="19050">
-            <a:solidFill>
-              <a:schemeClr val="tx1"/>
-            </a:solidFill>
-            <a:prstDash val="solid"/>
-          </a:ln>
-        </p:spPr>
-      </p:sp>
-      <p:sp>
-        <p:nvSpPr>
-          <p:cNvPr id="61" name="Relationship SUATCHIEU-VE"/>
-          <p:cNvSpPr/>
-          <p:nvPr/>
-        </p:nvSpPr>
-        <p:spPr>
-          <a:xfrm>
-            <a:off x="5682082" y="3734410"/>
-            <a:ext cx="833933" cy="486461"/>
-          </a:xfrm>
-          <a:prstGeom prst="diamond">
-            <a:avLst/>
-          </a:prstGeom>
-          <a:solidFill>
-            <a:schemeClr val="bg2"/>
-          </a:solidFill>
-          <a:ln w="19050">
-            <a:solidFill>
-              <a:schemeClr val="tx1"/>
-            </a:solidFill>
-          </a:ln>
-        </p:spPr>
-        <p:txBody>
-          <a:bodyPr wrap="square" lIns="0" tIns="0" rIns="0" bIns="0" rtlCol="0" anchor="ctr"/>
-          <a:lstStyle/>
-          <a:p>
-            <a:pPr algn="ctr" indent="0" marL="0">
-              <a:buNone/>
-            </a:pPr>
-            <a:r>
-              <a:rPr lang="en-US" sz="1300" b="1" dirty="0">
-                <a:solidFill>
-                  <a:schemeClr val="tx1"/>
-                </a:solidFill>
-              </a:rPr>
-              <a:t>bán</a:t>
-            </a:r>
-            <a:endParaRPr lang="en-US" sz="1300" dirty="0"/>
-          </a:p>
-        </p:txBody>
-      </p:sp>
-      <p:sp>
-        <p:nvSpPr>
-          <p:cNvPr id="62" name="Relationship KHACHHANG-VE"/>
-          <p:cNvSpPr/>
-          <p:nvPr/>
-        </p:nvSpPr>
-        <p:spPr>
-          <a:xfrm>
-            <a:off x="3364992" y="4892040"/>
-            <a:ext cx="1097280" cy="640080"/>
-          </a:xfrm>
-          <a:prstGeom prst="diamond">
-            <a:avLst/>
-          </a:prstGeom>
-          <a:solidFill>
-            <a:schemeClr val="bg2"/>
-          </a:solidFill>
-          <a:ln w="19050">
-            <a:solidFill>
-              <a:schemeClr val="tx1"/>
-            </a:solidFill>
-          </a:ln>
-        </p:spPr>
-        <p:txBody>
-          <a:bodyPr wrap="square" lIns="0" tIns="0" rIns="0" bIns="0" rtlCol="0" anchor="ctr"/>
-          <a:lstStyle/>
-          <a:p>
-            <a:pPr algn="ctr" indent="0" marL="0">
-              <a:buNone/>
-            </a:pPr>
-            <a:r>
-              <a:rPr lang="en-US" sz="1300" b="1" dirty="0">
-                <a:solidFill>
-                  <a:schemeClr val="tx1"/>
-                </a:solidFill>
-              </a:rPr>
-              <a:t>đặt</a:t>
-            </a:r>
-            <a:endParaRPr lang="en-US" sz="1300" dirty="0"/>
-          </a:p>
-        </p:txBody>
-      </p:sp>
-      <p:sp>
-        <p:nvSpPr>
-          <p:cNvPr id="63" name="Entity PHIM"/>
-          <p:cNvSpPr/>
-          <p:nvPr/>
-        </p:nvSpPr>
-        <p:spPr>
-          <a:xfrm>
-            <a:off x="937260" y="2491740"/>
-            <a:ext cx="1600200" cy="502920"/>
-          </a:xfrm>
-          <a:prstGeom prst="rect">
-            <a:avLst/>
-          </a:prstGeom>
-          <a:solidFill>
-            <a:schemeClr val="tx1"/>
-          </a:solidFill>
-          <a:ln w="19050">
-            <a:solidFill>
-              <a:schemeClr val="tx1"/>
-            </a:solidFill>
-          </a:ln>
-        </p:spPr>
-        <p:txBody>
-          <a:bodyPr wrap="square" lIns="0" tIns="0" rIns="0" bIns="0" rtlCol="0" anchor="ctr"/>
-          <a:lstStyle/>
-          <a:p>
-            <a:pPr algn="ctr" indent="0" marL="0">
-              <a:buNone/>
-            </a:pPr>
-            <a:r>
-              <a:rPr lang="en-US" sz="1300" b="1" dirty="0">
-                <a:solidFill>
-                  <a:schemeClr val="bg1"/>
-                </a:solidFill>
-              </a:rPr>
-              <a:t>PHIM</a:t>
-            </a:r>
-            <a:endParaRPr lang="en-US" sz="1300" dirty="0"/>
-          </a:p>
-        </p:txBody>
-      </p:sp>
-      <p:sp>
-        <p:nvSpPr>
-          <p:cNvPr id="64" name="Entity PHONGCHIEU"/>
-          <p:cNvSpPr/>
-          <p:nvPr/>
-        </p:nvSpPr>
-        <p:spPr>
-          <a:xfrm>
-            <a:off x="9624060" y="2491740"/>
-            <a:ext cx="1600200" cy="502920"/>
-          </a:xfrm>
-          <a:prstGeom prst="rect">
-            <a:avLst/>
-          </a:prstGeom>
-          <a:solidFill>
-            <a:schemeClr val="tx1"/>
-          </a:solidFill>
-          <a:ln w="19050">
-            <a:solidFill>
-              <a:schemeClr val="tx1"/>
-            </a:solidFill>
-          </a:ln>
-        </p:spPr>
-        <p:txBody>
-          <a:bodyPr wrap="square" lIns="0" tIns="0" rIns="0" bIns="0" rtlCol="0" anchor="ctr"/>
-          <a:lstStyle/>
-          <a:p>
-            <a:pPr algn="ctr" indent="0" marL="0">
-              <a:buNone/>
-            </a:pPr>
-            <a:r>
-              <a:rPr lang="en-US" sz="1300" b="1" dirty="0">
-                <a:solidFill>
-                  <a:schemeClr val="bg1"/>
-                </a:solidFill>
-              </a:rPr>
-              <a:t>PHONGCHIEU</a:t>
-            </a:r>
-            <a:endParaRPr lang="en-US" sz="1300" dirty="0"/>
-          </a:p>
-        </p:txBody>
-      </p:sp>
-      <p:sp>
-        <p:nvSpPr>
-          <p:cNvPr id="65" name="Entity SUATCHIEU"/>
-          <p:cNvSpPr/>
-          <p:nvPr/>
-        </p:nvSpPr>
-        <p:spPr>
-          <a:xfrm>
-            <a:off x="5298948" y="2491740"/>
-            <a:ext cx="1600200" cy="502920"/>
-          </a:xfrm>
-          <a:prstGeom prst="rect">
-            <a:avLst/>
-          </a:prstGeom>
-          <a:solidFill>
-            <a:schemeClr val="accent1"/>
-          </a:solidFill>
-          <a:ln w="19050">
-            <a:solidFill>
-              <a:schemeClr val="tx1"/>
-            </a:solidFill>
-          </a:ln>
-        </p:spPr>
-        <p:txBody>
-          <a:bodyPr wrap="square" lIns="0" tIns="0" rIns="0" bIns="0" rtlCol="0" anchor="ctr"/>
-          <a:lstStyle/>
-          <a:p>
-            <a:pPr algn="ctr" indent="0" marL="0">
-              <a:buNone/>
-            </a:pPr>
-            <a:r>
-              <a:rPr lang="en-US" sz="1300" b="1" dirty="0">
-                <a:solidFill>
-                  <a:schemeClr val="tx1"/>
-                </a:solidFill>
-              </a:rPr>
-              <a:t>SUATCHIEU</a:t>
-            </a:r>
-            <a:endParaRPr lang="en-US" sz="1300" dirty="0"/>
-          </a:p>
-        </p:txBody>
-      </p:sp>
-      <p:sp>
-        <p:nvSpPr>
-          <p:cNvPr id="66" name="Entity KHACHHANG"/>
-          <p:cNvSpPr/>
-          <p:nvPr/>
-        </p:nvSpPr>
-        <p:spPr>
-          <a:xfrm>
-            <a:off x="937260" y="4960620"/>
-            <a:ext cx="1600200" cy="502920"/>
-          </a:xfrm>
-          <a:prstGeom prst="rect">
-            <a:avLst/>
-          </a:prstGeom>
-          <a:solidFill>
-            <a:schemeClr val="tx1"/>
-          </a:solidFill>
-          <a:ln w="19050">
-            <a:solidFill>
-              <a:schemeClr val="tx1"/>
-            </a:solidFill>
-          </a:ln>
-        </p:spPr>
-        <p:txBody>
-          <a:bodyPr wrap="square" lIns="0" tIns="0" rIns="0" bIns="0" rtlCol="0" anchor="ctr"/>
-          <a:lstStyle/>
-          <a:p>
-            <a:pPr algn="ctr" indent="0" marL="0">
-              <a:buNone/>
-            </a:pPr>
-            <a:r>
-              <a:rPr lang="en-US" sz="1300" b="1" dirty="0">
-                <a:solidFill>
-                  <a:schemeClr val="bg1"/>
-                </a:solidFill>
-              </a:rPr>
-              <a:t>KHACHHANG</a:t>
-            </a:r>
-            <a:endParaRPr lang="en-US" sz="1300" dirty="0"/>
-          </a:p>
-        </p:txBody>
-      </p:sp>
-      <p:sp>
-        <p:nvSpPr>
-          <p:cNvPr id="67" name="Entity outer VE"/>
-          <p:cNvSpPr/>
-          <p:nvPr/>
-        </p:nvSpPr>
-        <p:spPr>
-          <a:xfrm>
-            <a:off x="5298948" y="4960620"/>
-            <a:ext cx="1600200" cy="502920"/>
-          </a:xfrm>
-          <a:prstGeom prst="rect">
-            <a:avLst/>
-          </a:prstGeom>
-          <a:solidFill>
-            <a:schemeClr val="bg1"/>
-          </a:solidFill>
-          <a:ln w="19050">
-            <a:solidFill>
-              <a:schemeClr val="tx1"/>
-            </a:solidFill>
-            <a:prstDash val="solid"/>
-          </a:ln>
-        </p:spPr>
-      </p:sp>
-      <p:sp>
-        <p:nvSpPr>
-          <p:cNvPr id="68" name="Entity VE"/>
-          <p:cNvSpPr/>
-          <p:nvPr/>
-        </p:nvSpPr>
-        <p:spPr>
-          <a:xfrm>
-            <a:off x="5362956" y="5024628"/>
-            <a:ext cx="1472184" cy="374904"/>
-          </a:xfrm>
-          <a:prstGeom prst="rect">
-            <a:avLst/>
-          </a:prstGeom>
-          <a:solidFill>
-            <a:schemeClr val="bg2"/>
-          </a:solidFill>
-          <a:ln w="19050">
-            <a:solidFill>
-              <a:schemeClr val="tx1"/>
-            </a:solidFill>
-          </a:ln>
-        </p:spPr>
-        <p:txBody>
-          <a:bodyPr wrap="square" lIns="0" tIns="0" rIns="0" bIns="0" rtlCol="0" anchor="ctr"/>
-          <a:lstStyle/>
-          <a:p>
-            <a:pPr algn="ctr" indent="0" marL="0">
-              <a:buNone/>
-            </a:pPr>
-            <a:r>
-              <a:rPr lang="en-US" sz="1300" b="1" dirty="0">
-                <a:solidFill>
-                  <a:schemeClr val="tx1"/>
-                </a:solidFill>
-              </a:rPr>
-              <a:t>VE</a:t>
-            </a:r>
-            <a:endParaRPr lang="en-US" sz="1300" dirty="0"/>
-          </a:p>
-        </p:txBody>
-      </p:sp>
-      <p:sp>
-        <p:nvSpPr>
-          <p:cNvPr id="69" name="Legend card"/>
-          <p:cNvSpPr/>
-          <p:nvPr/>
-        </p:nvSpPr>
-        <p:spPr>
-          <a:xfrm>
-            <a:off x="8549640" y="4343400"/>
-            <a:ext cx="3182112" cy="2011680"/>
-          </a:xfrm>
-          <a:prstGeom prst="roundRect">
-            <a:avLst>
-              <a:gd name="adj" fmla="val 4545"/>
-            </a:avLst>
-          </a:prstGeom>
-          <a:solidFill>
-            <a:schemeClr val="bg2"/>
-          </a:solidFill>
-          <a:ln w="12700">
-            <a:solidFill>
-              <a:schemeClr val="bg2"/>
-            </a:solidFill>
-            <a:prstDash val="solid"/>
-          </a:ln>
-        </p:spPr>
-      </p:sp>
-      <p:sp>
-        <p:nvSpPr>
-          <p:cNvPr id="70" name="Legend title"/>
-          <p:cNvSpPr txBox="1"/>
-          <p:nvPr/>
-        </p:nvSpPr>
-        <p:spPr>
-          <a:xfrm>
-            <a:off x="8732520" y="4416552"/>
-            <a:ext cx="1828800" cy="256032"/>
-          </a:xfrm>
-          <a:prstGeom prst="rect">
-            <a:avLst/>
-          </a:prstGeom>
-          <a:noFill/>
-          <a:ln/>
-        </p:spPr>
-        <p:txBody>
-          <a:bodyPr wrap="square" lIns="0" tIns="0" rIns="0" bIns="0" rtlCol="0" anchor="t"/>
-          <a:lstStyle/>
-          <a:p>
-            <a:pPr indent="0" marL="0">
-              <a:buNone/>
-            </a:pPr>
-            <a:r>
-              <a:rPr lang="en-US" sz="1200" b="1" dirty="0">
-                <a:solidFill>
-                  <a:schemeClr val="tx1"/>
-                </a:solidFill>
-              </a:rPr>
-              <a:t>Chú thích</a:t>
-            </a:r>
-            <a:endParaRPr lang="en-US" sz="1200" dirty="0"/>
-          </a:p>
-        </p:txBody>
-      </p:sp>
-      <p:sp>
-        <p:nvSpPr>
-          <p:cNvPr id="71" name="Shape 69"/>
-          <p:cNvSpPr/>
-          <p:nvPr/>
-        </p:nvSpPr>
-        <p:spPr>
-          <a:xfrm>
-            <a:off x="8732520" y="4663440"/>
-            <a:ext cx="457200" cy="182880"/>
-          </a:xfrm>
-          <a:prstGeom prst="rect">
-            <a:avLst/>
-          </a:prstGeom>
-          <a:solidFill>
-            <a:schemeClr val="tx1"/>
-          </a:solidFill>
-          <a:ln w="12700">
-            <a:solidFill>
-              <a:schemeClr val="tx1"/>
-            </a:solidFill>
-            <a:prstDash val="solid"/>
-          </a:ln>
-        </p:spPr>
-      </p:sp>
-      <p:sp>
-        <p:nvSpPr>
-          <p:cNvPr id="72" name="Legend 0"/>
-          <p:cNvSpPr txBox="1"/>
-          <p:nvPr/>
-        </p:nvSpPr>
-        <p:spPr>
-          <a:xfrm>
-            <a:off x="9326880" y="4645152"/>
-            <a:ext cx="2313432" cy="219456"/>
-          </a:xfrm>
-          <a:prstGeom prst="rect">
-            <a:avLst/>
-          </a:prstGeom>
-          <a:noFill/>
-          <a:ln/>
-        </p:spPr>
-        <p:txBody>
-          <a:bodyPr wrap="square" lIns="0" tIns="0" rIns="0" bIns="0" rtlCol="0" anchor="ctr"/>
-          <a:lstStyle/>
-          <a:p>
-            <a:pPr indent="0" marL="0">
-              <a:buNone/>
-            </a:pPr>
-            <a:r>
-              <a:rPr lang="en-US" sz="1050" dirty="0">
-                <a:solidFill>
-                  <a:schemeClr val="tx1"/>
-                </a:solidFill>
-              </a:rPr>
-              <a:t>Thực thể</a:t>
-            </a:r>
-            <a:endParaRPr lang="en-US" sz="1050" dirty="0"/>
-          </a:p>
-        </p:txBody>
-      </p:sp>
-      <p:sp>
-        <p:nvSpPr>
-          <p:cNvPr id="73" name="Shape 71"/>
-          <p:cNvSpPr/>
-          <p:nvPr/>
-        </p:nvSpPr>
-        <p:spPr>
-          <a:xfrm>
-            <a:off x="8732520" y="4892040"/>
-            <a:ext cx="457200" cy="182880"/>
-          </a:xfrm>
-          <a:prstGeom prst="rect">
-            <a:avLst/>
-          </a:prstGeom>
-          <a:solidFill>
-            <a:schemeClr val="bg2"/>
-          </a:solidFill>
-          <a:ln w="12700">
-            <a:solidFill>
-              <a:schemeClr val="tx1"/>
-            </a:solidFill>
-            <a:prstDash val="solid"/>
-          </a:ln>
-        </p:spPr>
-      </p:sp>
-      <p:sp>
-        <p:nvSpPr>
-          <p:cNvPr id="74" name="Shape 72"/>
-          <p:cNvSpPr/>
-          <p:nvPr/>
-        </p:nvSpPr>
-        <p:spPr>
-          <a:xfrm>
-            <a:off x="8787384" y="4928616"/>
-            <a:ext cx="347472" cy="109728"/>
-          </a:xfrm>
-          <a:prstGeom prst="rect">
-            <a:avLst/>
-          </a:prstGeom>
-          <a:solidFill>
-            <a:schemeClr val="bg2"/>
-          </a:solidFill>
-          <a:ln w="12700">
-            <a:solidFill>
-              <a:schemeClr val="tx1"/>
-            </a:solidFill>
-            <a:prstDash val="solid"/>
-          </a:ln>
-        </p:spPr>
-      </p:sp>
-      <p:sp>
-        <p:nvSpPr>
-          <p:cNvPr id="75" name="Legend 1"/>
-          <p:cNvSpPr txBox="1"/>
-          <p:nvPr/>
-        </p:nvSpPr>
-        <p:spPr>
-          <a:xfrm>
-            <a:off x="9326880" y="4873752"/>
-            <a:ext cx="2313432" cy="219456"/>
-          </a:xfrm>
-          <a:prstGeom prst="rect">
-            <a:avLst/>
-          </a:prstGeom>
-          <a:noFill/>
-          <a:ln/>
-        </p:spPr>
-        <p:txBody>
-          <a:bodyPr wrap="square" lIns="0" tIns="0" rIns="0" bIns="0" rtlCol="0" anchor="ctr"/>
-          <a:lstStyle/>
-          <a:p>
-            <a:pPr indent="0" marL="0">
-              <a:buNone/>
-            </a:pPr>
-            <a:r>
-              <a:rPr lang="en-US" sz="1050" dirty="0">
-                <a:solidFill>
-                  <a:schemeClr val="tx1"/>
-                </a:solidFill>
-              </a:rPr>
-              <a:t>Thực thể yếu (VE)</a:t>
-            </a:r>
-            <a:endParaRPr lang="en-US" sz="1050" dirty="0"/>
-          </a:p>
-        </p:txBody>
-      </p:sp>
-      <p:sp>
-        <p:nvSpPr>
-          <p:cNvPr id="76" name="Shape 74"/>
-          <p:cNvSpPr/>
-          <p:nvPr/>
-        </p:nvSpPr>
-        <p:spPr>
-          <a:xfrm>
-            <a:off x="8732520" y="5120640"/>
-            <a:ext cx="457200" cy="182880"/>
-          </a:xfrm>
-          <a:prstGeom prst="rect">
-            <a:avLst/>
-          </a:prstGeom>
-          <a:solidFill>
-            <a:schemeClr val="accent1"/>
-          </a:solidFill>
-          <a:ln w="12700">
-            <a:solidFill>
-              <a:schemeClr val="tx1"/>
-            </a:solidFill>
-            <a:prstDash val="solid"/>
-          </a:ln>
-        </p:spPr>
-      </p:sp>
-      <p:sp>
-        <p:nvSpPr>
-          <p:cNvPr id="77" name="Legend 2"/>
-          <p:cNvSpPr txBox="1"/>
-          <p:nvPr/>
-        </p:nvSpPr>
-        <p:spPr>
-          <a:xfrm>
-            <a:off x="9326880" y="5102352"/>
-            <a:ext cx="2313432" cy="219456"/>
-          </a:xfrm>
-          <a:prstGeom prst="rect">
-            <a:avLst/>
-          </a:prstGeom>
-          <a:noFill/>
-          <a:ln/>
-        </p:spPr>
-        <p:txBody>
-          <a:bodyPr wrap="square" lIns="0" tIns="0" rIns="0" bIns="0" rtlCol="0" anchor="ctr"/>
-          <a:lstStyle/>
-          <a:p>
-            <a:pPr indent="0" marL="0">
-              <a:buNone/>
-            </a:pPr>
-            <a:r>
-              <a:rPr lang="en-US" sz="1050" dirty="0">
-                <a:solidFill>
-                  <a:schemeClr val="tx1"/>
-                </a:solidFill>
-              </a:rPr>
-              <a:t>Thực thể kết hợp (quan hệ N – N)</a:t>
-            </a:r>
-            <a:endParaRPr lang="en-US" sz="1050" dirty="0"/>
-          </a:p>
-        </p:txBody>
-      </p:sp>
-      <p:sp>
-        <p:nvSpPr>
-          <p:cNvPr id="78" name="Shape 76"/>
-          <p:cNvSpPr/>
-          <p:nvPr/>
-        </p:nvSpPr>
-        <p:spPr>
-          <a:xfrm>
-            <a:off x="8732520" y="5349240"/>
-            <a:ext cx="457200" cy="182880"/>
-          </a:xfrm>
-          <a:prstGeom prst="diamond">
-            <a:avLst/>
-          </a:prstGeom>
-          <a:solidFill>
-            <a:schemeClr val="bg2"/>
-          </a:solidFill>
-          <a:ln w="12700">
-            <a:solidFill>
-              <a:schemeClr val="tx1"/>
-            </a:solidFill>
-            <a:prstDash val="solid"/>
-          </a:ln>
-        </p:spPr>
-      </p:sp>
-      <p:sp>
-        <p:nvSpPr>
-          <p:cNvPr id="79" name="Legend 3"/>
-          <p:cNvSpPr txBox="1"/>
-          <p:nvPr/>
-        </p:nvSpPr>
-        <p:spPr>
-          <a:xfrm>
-            <a:off x="9326880" y="5330952"/>
-            <a:ext cx="2313432" cy="219456"/>
-          </a:xfrm>
-          <a:prstGeom prst="rect">
-            <a:avLst/>
-          </a:prstGeom>
-          <a:noFill/>
-          <a:ln/>
-        </p:spPr>
-        <p:txBody>
-          <a:bodyPr wrap="square" lIns="0" tIns="0" rIns="0" bIns="0" rtlCol="0" anchor="ctr"/>
-          <a:lstStyle/>
-          <a:p>
-            <a:pPr indent="0" marL="0">
-              <a:buNone/>
-            </a:pPr>
-            <a:r>
-              <a:rPr lang="en-US" sz="1050" dirty="0">
-                <a:solidFill>
-                  <a:schemeClr val="tx1"/>
-                </a:solidFill>
-              </a:rPr>
-              <a:t>Quan hệ</a:t>
-            </a:r>
-            <a:endParaRPr lang="en-US" sz="1050" dirty="0"/>
-          </a:p>
-        </p:txBody>
-      </p:sp>
-      <p:sp>
-        <p:nvSpPr>
-          <p:cNvPr id="80" name="Shape 78"/>
-          <p:cNvSpPr/>
-          <p:nvPr/>
-        </p:nvSpPr>
-        <p:spPr>
-          <a:xfrm>
-            <a:off x="8732520" y="5577840"/>
-            <a:ext cx="457200" cy="182880"/>
-          </a:xfrm>
-          <a:prstGeom prst="diamond">
-            <a:avLst/>
-          </a:prstGeom>
-          <a:solidFill>
-            <a:schemeClr val="bg2"/>
-          </a:solidFill>
-          <a:ln w="12700">
-            <a:solidFill>
-              <a:schemeClr val="tx1"/>
-            </a:solidFill>
-            <a:prstDash val="solid"/>
-          </a:ln>
-        </p:spPr>
-      </p:sp>
-      <p:sp>
-        <p:nvSpPr>
-          <p:cNvPr id="81" name="Shape 79"/>
-          <p:cNvSpPr/>
-          <p:nvPr/>
-        </p:nvSpPr>
-        <p:spPr>
-          <a:xfrm>
-            <a:off x="8787384" y="5614416"/>
-            <a:ext cx="347472" cy="109728"/>
-          </a:xfrm>
-          <a:prstGeom prst="diamond">
-            <a:avLst/>
-          </a:prstGeom>
-          <a:solidFill>
-            <a:schemeClr val="bg2"/>
-          </a:solidFill>
-          <a:ln w="12700">
-            <a:solidFill>
-              <a:schemeClr val="tx1"/>
-            </a:solidFill>
-            <a:prstDash val="solid"/>
-          </a:ln>
-        </p:spPr>
-      </p:sp>
-      <p:sp>
-        <p:nvSpPr>
-          <p:cNvPr id="82" name="Legend 4"/>
-          <p:cNvSpPr txBox="1"/>
-          <p:nvPr/>
-        </p:nvSpPr>
-        <p:spPr>
-          <a:xfrm>
-            <a:off x="9326880" y="5559552"/>
-            <a:ext cx="2313432" cy="219456"/>
-          </a:xfrm>
-          <a:prstGeom prst="rect">
-            <a:avLst/>
-          </a:prstGeom>
-          <a:noFill/>
-          <a:ln/>
-        </p:spPr>
-        <p:txBody>
-          <a:bodyPr wrap="square" lIns="0" tIns="0" rIns="0" bIns="0" rtlCol="0" anchor="ctr"/>
-          <a:lstStyle/>
-          <a:p>
-            <a:pPr indent="0" marL="0">
-              <a:buNone/>
-            </a:pPr>
-            <a:r>
-              <a:rPr lang="en-US" sz="1050" dirty="0">
-                <a:solidFill>
-                  <a:schemeClr val="tx1"/>
-                </a:solidFill>
-              </a:rPr>
-              <a:t>Quan hệ xác định của thực thể yếu</a:t>
-            </a:r>
-            <a:endParaRPr lang="en-US" sz="1050" dirty="0"/>
-          </a:p>
-        </p:txBody>
-      </p:sp>
-      <p:sp>
-        <p:nvSpPr>
-          <p:cNvPr id="83" name="Legend PK sample"/>
-          <p:cNvSpPr txBox="1"/>
-          <p:nvPr/>
-        </p:nvSpPr>
-        <p:spPr>
-          <a:xfrm>
-            <a:off x="8732520" y="5788152"/>
-            <a:ext cx="548640" cy="219456"/>
-          </a:xfrm>
-          <a:prstGeom prst="rect">
-            <a:avLst/>
-          </a:prstGeom>
-          <a:noFill/>
-          <a:ln/>
-        </p:spPr>
-        <p:txBody>
-          <a:bodyPr wrap="square" lIns="0" tIns="0" rIns="0" bIns="0" rtlCol="0" anchor="t"/>
-          <a:lstStyle/>
-          <a:p>
-            <a:pPr indent="0" marL="0">
-              <a:buNone/>
-            </a:pPr>
-            <a:r>
-              <a:rPr lang="en-US" sz="1050" b="1" u="sng" dirty="0">
-                <a:solidFill>
-                  <a:schemeClr val="tx1"/>
-                </a:solidFill>
-              </a:rPr>
-              <a:t>MaXX</a:t>
-            </a:r>
-            <a:endParaRPr lang="en-US" sz="1050" dirty="0"/>
-          </a:p>
-        </p:txBody>
-      </p:sp>
-      <p:sp>
-        <p:nvSpPr>
-          <p:cNvPr id="84" name="Legend 5"/>
-          <p:cNvSpPr txBox="1"/>
-          <p:nvPr/>
-        </p:nvSpPr>
-        <p:spPr>
-          <a:xfrm>
-            <a:off x="9326880" y="5788152"/>
-            <a:ext cx="2313432" cy="219456"/>
-          </a:xfrm>
-          <a:prstGeom prst="rect">
-            <a:avLst/>
-          </a:prstGeom>
-          <a:noFill/>
-          <a:ln/>
-        </p:spPr>
-        <p:txBody>
-          <a:bodyPr wrap="square" lIns="0" tIns="0" rIns="0" bIns="0" rtlCol="0" anchor="ctr"/>
-          <a:lstStyle/>
-          <a:p>
-            <a:pPr indent="0" marL="0">
-              <a:buNone/>
-            </a:pPr>
-            <a:r>
-              <a:rPr lang="en-US" sz="1050" dirty="0">
-                <a:solidFill>
-                  <a:schemeClr val="tx1"/>
-                </a:solidFill>
-              </a:rPr>
-              <a:t>Khóa chính (gạch chân liền)</a:t>
-            </a:r>
-            <a:endParaRPr lang="en-US" sz="1050" dirty="0"/>
-          </a:p>
-        </p:txBody>
-      </p:sp>
-      <p:sp>
-        <p:nvSpPr>
-          <p:cNvPr id="85" name="Legend partial sample"/>
-          <p:cNvSpPr txBox="1"/>
-          <p:nvPr/>
-        </p:nvSpPr>
-        <p:spPr>
-          <a:xfrm>
-            <a:off x="8732520" y="6016752"/>
-            <a:ext cx="548640" cy="219456"/>
-          </a:xfrm>
-          <a:prstGeom prst="rect">
-            <a:avLst/>
-          </a:prstGeom>
-          <a:noFill/>
-          <a:ln/>
-        </p:spPr>
-        <p:txBody>
-          <a:bodyPr wrap="square" lIns="0" tIns="0" rIns="0" bIns="0" rtlCol="0" anchor="t"/>
-          <a:lstStyle/>
-          <a:p>
-            <a:pPr indent="0" marL="0">
-              <a:buNone/>
-            </a:pPr>
-            <a:r>
-              <a:rPr lang="en-US" sz="1050" b="1" u="dash" dirty="0">
-                <a:solidFill>
-                  <a:schemeClr val="tx1"/>
-                </a:solidFill>
-              </a:rPr>
-              <a:t>SoGhe</a:t>
-            </a:r>
-            <a:endParaRPr lang="en-US" sz="1050" dirty="0"/>
-          </a:p>
-        </p:txBody>
-      </p:sp>
-      <p:sp>
-        <p:nvSpPr>
-          <p:cNvPr id="86" name="Legend 6"/>
-          <p:cNvSpPr txBox="1"/>
-          <p:nvPr/>
-        </p:nvSpPr>
-        <p:spPr>
-          <a:xfrm>
-            <a:off x="9326880" y="6016752"/>
-            <a:ext cx="2313432" cy="219456"/>
-          </a:xfrm>
-          <a:prstGeom prst="rect">
-            <a:avLst/>
-          </a:prstGeom>
-          <a:noFill/>
-          <a:ln/>
-        </p:spPr>
-        <p:txBody>
-          <a:bodyPr wrap="square" lIns="0" tIns="0" rIns="0" bIns="0" rtlCol="0" anchor="ctr"/>
-          <a:lstStyle/>
-          <a:p>
-            <a:pPr indent="0" marL="0">
-              <a:buNone/>
-            </a:pPr>
-            <a:r>
-              <a:rPr lang="en-US" sz="1050" dirty="0">
-                <a:solidFill>
-                  <a:schemeClr val="tx1"/>
-                </a:solidFill>
-              </a:rPr>
-              <a:t>Khóa bộ phận (gạch chân đứt)</a:t>
-            </a:r>
-            <a:endParaRPr lang="en-US" sz="1050" dirty="0"/>
-          </a:p>
-        </p:txBody>
-      </p:sp>
+      </p:pic>
       <p:sp>
         <p:nvSpPr>
           <p:cNvPr id="25" name="Slide Number Placeholder 0"/>

--- a/hqtcsdl-giuaky/quan_ly_rap_phim.pptx
+++ b/hqtcsdl-giuaky/quan_ly_rap_phim.pptx
@@ -114,26 +114,26 @@
   <p:extLst>
     <p:ext uri="{521415D9-36F7-43E2-AB2F-B90AF26B5E84}">
       <p14:sectionLst xmlns:p14="http://schemas.microsoft.com/office/powerpoint/2010/main">
-        <p14:section name="Mở đầu" id="{d009a2b2-ff51-004a-a875-ce4fe05414dc}">
+        <p14:section name="Mở đầu" id="{bcb32a6f-fce4-3857-db82-a3742f08a6e0}">
           <p14:sldIdLst>
             <p14:sldId id="256"/>
             <p14:sldId id="257"/>
           </p14:sldIdLst>
         </p14:section>
-        <p14:section name="Phân tích và thiết kế" id="{05cdb93d-f563-93b8-aea9-80de5d22f3f0}">
+        <p14:section name="Phân tích và thiết kế" id="{2cf43e74-eafb-98fc-c682-2162363dd4d3}">
           <p14:sldIdLst>
             <p14:sldId id="258"/>
             <p14:sldId id="259"/>
             <p14:sldId id="260"/>
           </p14:sldIdLst>
         </p14:section>
-        <p14:section name="Cài đặt" id="{53cc9ad9-e562-2af1-baea-08d112efde0a}">
+        <p14:section name="Cài đặt" id="{64277668-b7dd-8275-ae88-130fc8a8fb54}">
           <p14:sldIdLst>
             <p14:sldId id="261"/>
             <p14:sldId id="262"/>
           </p14:sldIdLst>
         </p14:section>
-        <p14:section name="Kết thúc" id="{015d0677-7837-df97-7e53-7c914259c4bc}">
+        <p14:section name="Kết thúc" id="{44258281-696e-c5b8-09a9-22a2c614d59d}">
           <p14:sldIdLst>
             <p14:sldId id="263"/>
           </p14:sldIdLst>
@@ -806,7 +806,7 @@
           <a:p>
             <a:r>
               <a:rPr lang="en-US" dirty="0"/>
-              <a:t>Slide 4 - Mô hình ER theo ký hiệu Chen: hình chữ nhật là thực thể, hình elip là thuộc tính, hình thoi là quan hệ, 1 và N là bản số. Có 4 thực thể mạnh (PHIM, PHONGCHIEU, SUATCHIEU, KHACHHANG) và 1 thực thể yếu VE. VE không có mã riêng: mỗi vé được xác định bởi suất chiếu và số ghế. Thực thể chủ của VE là SUATCHIEU, quan hệ xác định là 'bán' (hình thoi viền đôi), SoGhe là khóa bộ phận (gạch chân đứt), VE tham gia toàn phần (đường đôi) vì vé nào cũng phải thuộc một suất chiếu. Các quan hệ: PHIM 1-N SUATCHIEU (chiếu), PHONGCHIEU 1-N SUATCHIEU (tại), SUATCHIEU 1-N VE (bán), KHACHHANG 1-N VE (đặt). KHACHHANG và SUATCHIEU có quan hệ N-N thể hiện qua VE; PHIM và PHONGCHIEU N-N qua thực thể kết hợp SUATCHIEU.</a:t>
+              <a:t>Slide 4 - Mô hình ER theo ký hiệu Chen: hình chữ nhật là thực thể, hình elip là thuộc tính, hình thoi là quan hệ, 1 và N là bản số. Có 4 thực thể mạnh (PHIM, PHONGCHIEU, SUATCHIEU, KHACHHANG) và 1 thực thể yếu VE. VE không có mã riêng: mỗi vé được xác định bởi suất chiếu và số ghế. Thực thể chủ của VE là SUATCHIEU, quan hệ xác định là 'bán' (hình thoi viền đôi), SoGhe là khóa bộ phận (gạch chân đứt), VE tham gia toàn phần (đường đôi) vì vé nào cũng phải thuộc một suất chiếu. Trình bày các quan hệ theo số trên hình: (1) PHIM 1-N SUATCHIEU (chiếu), (2) PHONGCHIEU 1-N SUATCHIEU (tại), (3) SUATCHIEU 1-N VE (bán), (4) KHACHHANG 1-N VE (đặt). KHACHHANG và SUATCHIEU có quan hệ N-N thể hiện qua VE; PHIM và PHONGCHIEU N-N qua SUATCHIEU.</a:t>
             </a:r>
             <a:endParaRPr lang="en-US" dirty="0"/>
           </a:p>

--- a/hqtcsdl-giuaky/quan_ly_rap_phim.pptx
+++ b/hqtcsdl-giuaky/quan_ly_rap_phim.pptx
@@ -114,26 +114,26 @@
   <p:extLst>
     <p:ext uri="{521415D9-36F7-43E2-AB2F-B90AF26B5E84}">
       <p14:sectionLst xmlns:p14="http://schemas.microsoft.com/office/powerpoint/2010/main">
-        <p14:section name="Mở đầu" id="{bcb32a6f-fce4-3857-db82-a3742f08a6e0}">
+        <p14:section name="Mở đầu" id="{83004f3e-3a8b-91a5-b0ce-2ddb5f57b545}">
           <p14:sldIdLst>
             <p14:sldId id="256"/>
             <p14:sldId id="257"/>
           </p14:sldIdLst>
         </p14:section>
-        <p14:section name="Phân tích và thiết kế" id="{2cf43e74-eafb-98fc-c682-2162363dd4d3}">
+        <p14:section name="Phân tích và thiết kế" id="{b1061146-f5c0-0cc0-c571-3c4e206cbb19}">
           <p14:sldIdLst>
             <p14:sldId id="258"/>
             <p14:sldId id="259"/>
             <p14:sldId id="260"/>
           </p14:sldIdLst>
         </p14:section>
-        <p14:section name="Cài đặt" id="{64277668-b7dd-8275-ae88-130fc8a8fb54}">
+        <p14:section name="Cài đặt" id="{44545b59-2f64-629d-9ab3-4269029313ff}">
           <p14:sldIdLst>
             <p14:sldId id="261"/>
             <p14:sldId id="262"/>
           </p14:sldIdLst>
         </p14:section>
-        <p14:section name="Kết thúc" id="{44258281-696e-c5b8-09a9-22a2c614d59d}">
+        <p14:section name="Kết thúc" id="{56e19ad4-13c1-df98-a6db-89486136746a}">
           <p14:sldIdLst>
             <p14:sldId id="263"/>
           </p14:sldIdLst>

--- a/hqtcsdl-giuaky/quan_ly_rap_phim.pptx
+++ b/hqtcsdl-giuaky/quan_ly_rap_phim.pptx
@@ -114,26 +114,26 @@
   <p:extLst>
     <p:ext uri="{521415D9-36F7-43E2-AB2F-B90AF26B5E84}">
       <p14:sectionLst xmlns:p14="http://schemas.microsoft.com/office/powerpoint/2010/main">
-        <p14:section name="Mở đầu" id="{83004f3e-3a8b-91a5-b0ce-2ddb5f57b545}">
+        <p14:section name="Mở đầu" id="{89bee116-5104-a5c1-bae2-b6b912b03376}">
           <p14:sldIdLst>
             <p14:sldId id="256"/>
             <p14:sldId id="257"/>
           </p14:sldIdLst>
         </p14:section>
-        <p14:section name="Phân tích và thiết kế" id="{b1061146-f5c0-0cc0-c571-3c4e206cbb19}">
+        <p14:section name="Phân tích và thiết kế" id="{5df0cf1b-be1e-01ed-0918-0fb75e5e99ac}">
           <p14:sldIdLst>
             <p14:sldId id="258"/>
             <p14:sldId id="259"/>
             <p14:sldId id="260"/>
           </p14:sldIdLst>
         </p14:section>
-        <p14:section name="Cài đặt" id="{44545b59-2f64-629d-9ab3-4269029313ff}">
+        <p14:section name="Cài đặt" id="{1dbfd1a6-3332-44f4-59a4-091f7fb8fc3d}">
           <p14:sldIdLst>
             <p14:sldId id="261"/>
             <p14:sldId id="262"/>
           </p14:sldIdLst>
         </p14:section>
-        <p14:section name="Kết thúc" id="{56e19ad4-13c1-df98-a6db-89486136746a}">
+        <p14:section name="Kết thúc" id="{cfa8948a-724d-acd4-a494-2c8498f3f4bd}">
           <p14:sldIdLst>
             <p14:sldId id="263"/>
           </p14:sldIdLst>
@@ -806,7 +806,7 @@
           <a:p>
             <a:r>
               <a:rPr lang="en-US" dirty="0"/>
-              <a:t>Slide 4 - Mô hình ER theo ký hiệu Chen: hình chữ nhật là thực thể, hình elip là thuộc tính, hình thoi là quan hệ, 1 và N là bản số. Có 4 thực thể mạnh (PHIM, PHONGCHIEU, SUATCHIEU, KHACHHANG) và 1 thực thể yếu VE. VE không có mã riêng: mỗi vé được xác định bởi suất chiếu và số ghế. Thực thể chủ của VE là SUATCHIEU, quan hệ xác định là 'bán' (hình thoi viền đôi), SoGhe là khóa bộ phận (gạch chân đứt), VE tham gia toàn phần (đường đôi) vì vé nào cũng phải thuộc một suất chiếu. Trình bày các quan hệ theo số trên hình: (1) PHIM 1-N SUATCHIEU (chiếu), (2) PHONGCHIEU 1-N SUATCHIEU (tại), (3) SUATCHIEU 1-N VE (bán), (4) KHACHHANG 1-N VE (đặt). KHACHHANG và SUATCHIEU có quan hệ N-N thể hiện qua VE; PHIM và PHONGCHIEU N-N qua SUATCHIEU.</a:t>
+              <a:t>Slide 4 - Mô hình ER theo ký hiệu Chen: hình chữ nhật là thực thể, hình elip là thuộc tính, hình thoi là quan hệ, 1 và N là bản số. Có 4 thực thể mạnh (PHIM, PHONGCHIEU, SUATCHIEU, KHACHHANG) và 1 thực thể yếu VE. VE không có mã riêng: mỗi vé được xác định bởi suất chiếu và số ghế. Thực thể chủ của VE là SUATCHIEU, quan hệ xác định là 'bán' (hình thoi viền đôi), SoGhe là khóa bộ phận (gạch chân đứt), VE tham gia toàn phần (đường đôi) vì vé nào cũng phải thuộc một suất chiếu. Các quan hệ (tóm tắt ở khung góc phải): PHIM 1-N SUATCHIEU (chiếu), PHONGCHIEU 1-N SUATCHIEU (tại), SUATCHIEU 1-N VE (bán), KHACHHANG 1-N VE (đặt). KHACHHANG và SUATCHIEU có quan hệ N-N thể hiện qua VE; PHIM và PHONGCHIEU N-N qua SUATCHIEU.</a:t>
             </a:r>
             <a:endParaRPr lang="en-US" dirty="0"/>
           </a:p>

--- a/hqtcsdl-giuaky/quan_ly_rap_phim.pptx
+++ b/hqtcsdl-giuaky/quan_ly_rap_phim.pptx
@@ -114,26 +114,26 @@
   <p:extLst>
     <p:ext uri="{521415D9-36F7-43E2-AB2F-B90AF26B5E84}">
       <p14:sectionLst xmlns:p14="http://schemas.microsoft.com/office/powerpoint/2010/main">
-        <p14:section name="Mở đầu" id="{89bee116-5104-a5c1-bae2-b6b912b03376}">
+        <p14:section name="Mở đầu" id="{0b862bfd-0258-616f-5621-57966c24c479}">
           <p14:sldIdLst>
             <p14:sldId id="256"/>
             <p14:sldId id="257"/>
           </p14:sldIdLst>
         </p14:section>
-        <p14:section name="Phân tích và thiết kế" id="{5df0cf1b-be1e-01ed-0918-0fb75e5e99ac}">
+        <p14:section name="Phân tích và thiết kế" id="{b73e8141-a0ff-e58f-aa48-c5a8fdc29a97}">
           <p14:sldIdLst>
             <p14:sldId id="258"/>
             <p14:sldId id="259"/>
             <p14:sldId id="260"/>
           </p14:sldIdLst>
         </p14:section>
-        <p14:section name="Cài đặt" id="{1dbfd1a6-3332-44f4-59a4-091f7fb8fc3d}">
+        <p14:section name="Cài đặt" id="{b5c3db89-19d7-7267-9be7-17b75662da2e}">
           <p14:sldIdLst>
             <p14:sldId id="261"/>
             <p14:sldId id="262"/>
           </p14:sldIdLst>
         </p14:section>
-        <p14:section name="Kết thúc" id="{cfa8948a-724d-acd4-a494-2c8498f3f4bd}">
+        <p14:section name="Kết thúc" id="{ffd14517-057c-fec8-2293-a6a7fbe8e19a}">
           <p14:sldIdLst>
             <p14:sldId id="263"/>
           </p14:sldIdLst>
